--- a/architecture/Project Presentation v1.pptx
+++ b/architecture/Project Presentation v1.pptx
@@ -29,6 +29,12 @@
     <p:sldId id="273" r:id="rId22"/>
     <p:sldId id="274" r:id="rId23"/>
     <p:sldId id="275" r:id="rId24"/>
+    <p:sldId id="276" r:id="rId25"/>
+    <p:sldId id="277" r:id="rId26"/>
+    <p:sldId id="278" r:id="rId27"/>
+    <p:sldId id="279" r:id="rId28"/>
+    <p:sldId id="280" r:id="rId29"/>
+    <p:sldId id="281" r:id="rId30"/>
   </p:sldIdLst>
   <p:sldSz cx="10080625" cy="5670550"/>
   <p:notesSz cx="7559675" cy="10691813"/>
@@ -385,7 +391,7 @@
             <a:pPr indent="0" algn="r">
               <a:buNone/>
             </a:pPr>
-            <a:fld id="{59B74293-46AB-42A7-89C0-7BCFF3AA9803}" type="slidenum">
+            <a:fld id="{57A44F48-40D4-4EAB-9925-86C216A4D4C3}" type="slidenum">
               <a:rPr b="0" lang="en-AU" sz="1400" strike="noStrike" u="none">
                 <a:solidFill>
                   <a:srgbClr val="000000"/>
@@ -413,7 +419,7 @@
 </p:notesMaster>
 </file>
 
-<file path=ppt/notesSlides/notesSlide12.xml><?xml version="1.0" encoding="utf-8"?>
+<file path=ppt/notesSlides/notesSlide10.xml><?xml version="1.0" encoding="utf-8"?>
 <p:notes xmlns:a="http://schemas.openxmlformats.org/drawingml/2006/main" xmlns:p="http://schemas.openxmlformats.org/presentationml/2006/main" xmlns:r="http://schemas.openxmlformats.org/officeDocument/2006/relationships" xmlns:p14="http://schemas.microsoft.com/office/powerpoint/2010/main" xmlns:p15="http://schemas.microsoft.com/office/powerpoint/2012/main" xmlns:mc="http://schemas.openxmlformats.org/markup-compatibility/2006">
   <p:cSld>
     <p:spTree>
@@ -432,7 +438,7 @@
       </p:grpSpPr>
       <p:sp>
         <p:nvSpPr>
-          <p:cNvPr id="91" name="PlaceHolder 1"/>
+          <p:cNvPr id="102" name="PlaceHolder 1"/>
           <p:cNvSpPr>
             <a:spLocks noGrp="1"/>
           </p:cNvSpPr>
@@ -442,8 +448,8 @@
         </p:nvSpPr>
         <p:spPr>
           <a:xfrm>
-            <a:off x="216000" y="812520"/>
-            <a:ext cx="7126560" cy="4008240"/>
+            <a:off x="216360" y="812520"/>
+            <a:ext cx="7125120" cy="4007160"/>
           </a:xfrm>
           <a:prstGeom prst="rect">
             <a:avLst/>
@@ -455,7 +461,7 @@
       </p:sp>
       <p:sp>
         <p:nvSpPr>
-          <p:cNvPr id="92" name="PlaceHolder 2"/>
+          <p:cNvPr id="103" name="PlaceHolder 2"/>
           <p:cNvSpPr>
             <a:spLocks noGrp="1"/>
           </p:cNvSpPr>
@@ -466,7 +472,7 @@
         <p:spPr>
           <a:xfrm>
             <a:off x="756000" y="5078520"/>
-            <a:ext cx="6046920" cy="4810320"/>
+            <a:ext cx="6045840" cy="4809240"/>
           </a:xfrm>
           <a:prstGeom prst="rect">
             <a:avLst/>
@@ -499,7 +505,7 @@
                 <a:uFillTx/>
                 <a:latin typeface="Arial"/>
               </a:rPr>
-              <a:t>Operator extracts private data from unstructured documents</a:t>
+              <a:t>Our example application stores RAG database separately from Cloud LLM.</a:t>
             </a:r>
             <a:endParaRPr b="0" lang="en-AU" sz="2000" strike="noStrike" u="none">
               <a:solidFill>
@@ -548,7 +554,7 @@
                 <a:uFillTx/>
                 <a:latin typeface="Arial"/>
               </a:rPr>
-              <a:t>Operator monitors quality of data</a:t>
+              <a:t>This allows full control of private data.</a:t>
             </a:r>
             <a:endParaRPr b="0" lang="en-AU" sz="2000" strike="noStrike" u="none">
               <a:solidFill>
@@ -597,7 +603,7 @@
                 <a:uFillTx/>
                 <a:latin typeface="Arial"/>
               </a:rPr>
-              <a:t>Operator is a privileged role with access to all the data.</a:t>
+              <a:t>We can use the apps with Web interface</a:t>
             </a:r>
             <a:endParaRPr b="0" lang="en-AU" sz="2000" strike="noStrike" u="none">
               <a:solidFill>
@@ -618,6 +624,36 @@
                 <a:tab algn="l" pos="0"/>
               </a:tabLst>
             </a:pPr>
+            <a:endParaRPr b="0" lang="en-AU" sz="2000" strike="noStrike" u="none">
+              <a:solidFill>
+                <a:srgbClr val="000000"/>
+              </a:solidFill>
+              <a:effectLst/>
+              <a:uFillTx/>
+              <a:latin typeface="Arial"/>
+            </a:endParaRPr>
+          </a:p>
+          <a:p>
+            <a:pPr indent="0">
+              <a:lnSpc>
+                <a:spcPct val="100000"/>
+              </a:lnSpc>
+              <a:buNone/>
+              <a:tabLst>
+                <a:tab algn="l" pos="0"/>
+              </a:tabLst>
+            </a:pPr>
+            <a:r>
+              <a:rPr b="0" lang="en-AU" sz="2000" strike="noStrike" u="none">
+                <a:solidFill>
+                  <a:srgbClr val="000000"/>
+                </a:solidFill>
+                <a:effectLst/>
+                <a:uFillTx/>
+                <a:latin typeface="Arial"/>
+              </a:rPr>
+              <a:t>Or we can run apps as service scripts</a:t>
+            </a:r>
             <a:endParaRPr b="0" lang="en-AU" sz="2000" strike="noStrike" u="none">
               <a:solidFill>
                 <a:srgbClr val="000000"/>
@@ -653,7 +689,7 @@
       </p:grpSpPr>
       <p:sp>
         <p:nvSpPr>
-          <p:cNvPr id="93" name="PlaceHolder 1"/>
+          <p:cNvPr id="104" name="PlaceHolder 1"/>
           <p:cNvSpPr>
             <a:spLocks noGrp="1"/>
           </p:cNvSpPr>
@@ -664,7 +700,7 @@
         <p:spPr>
           <a:xfrm>
             <a:off x="216000" y="812520"/>
-            <a:ext cx="7126560" cy="4008240"/>
+            <a:ext cx="7126920" cy="4008960"/>
           </a:xfrm>
           <a:prstGeom prst="rect">
             <a:avLst/>
@@ -676,7 +712,7 @@
       </p:sp>
       <p:sp>
         <p:nvSpPr>
-          <p:cNvPr id="94" name="PlaceHolder 2"/>
+          <p:cNvPr id="105" name="PlaceHolder 2"/>
           <p:cNvSpPr>
             <a:spLocks noGrp="1"/>
           </p:cNvSpPr>
@@ -687,7 +723,7 @@
         <p:spPr>
           <a:xfrm>
             <a:off x="756000" y="5078520"/>
-            <a:ext cx="6046920" cy="4810320"/>
+            <a:ext cx="6047640" cy="4811040"/>
           </a:xfrm>
           <a:prstGeom prst="rect">
             <a:avLst/>
@@ -703,13 +739,13 @@
           </a:bodyPr>
           <a:p>
             <a:pPr indent="0">
-              <a:lnSpc>
-                <a:spcPct val="100000"/>
-              </a:lnSpc>
-              <a:buNone/>
-              <a:tabLst>
-                <a:tab algn="l" pos="0"/>
-              </a:tabLst>
+              <a:spcBef>
+                <a:spcPts val="1191"/>
+              </a:spcBef>
+              <a:spcAft>
+                <a:spcPts val="992"/>
+              </a:spcAft>
+              <a:buNone/>
             </a:pPr>
             <a:r>
               <a:rPr b="0" lang="en-AU" sz="2000" strike="noStrike" u="none">
@@ -719,8 +755,9 @@
                 <a:effectLst/>
                 <a:uFillTx/>
                 <a:latin typeface="Arial"/>
-              </a:rPr>
-              <a:t>Dual use Indexer app executed as command line script</a:t>
+                <a:ea typeface="Microsoft YaHei"/>
+              </a:rPr>
+              <a:t>Default memory configuration of MS-S1 Max is a 64 GB for OS and 64GB of shared memory for OS, GPU, NPU.</a:t>
             </a:r>
             <a:endParaRPr b="0" lang="en-AU" sz="2000" strike="noStrike" u="none">
               <a:solidFill>
@@ -733,14 +770,37 @@
           </a:p>
           <a:p>
             <a:pPr indent="0">
-              <a:lnSpc>
-                <a:spcPct val="100000"/>
-              </a:lnSpc>
-              <a:buNone/>
-              <a:tabLst>
-                <a:tab algn="l" pos="0"/>
-              </a:tabLst>
-            </a:pPr>
+              <a:spcBef>
+                <a:spcPts val="1191"/>
+              </a:spcBef>
+              <a:spcAft>
+                <a:spcPts val="992"/>
+              </a:spcAft>
+              <a:buNone/>
+            </a:pPr>
+            <a:r>
+              <a:rPr b="0" lang="en-AU" sz="2000" strike="noStrike" u="none">
+                <a:solidFill>
+                  <a:srgbClr val="000000"/>
+                </a:solidFill>
+                <a:effectLst/>
+                <a:uFillTx/>
+                <a:latin typeface="Arial"/>
+                <a:ea typeface="Microsoft YaHei"/>
+              </a:rPr>
+              <a:t>AMD Variable Graphics Memory (VGM) is a preallocated continuous block of physical </a:t>
+            </a:r>
+            <a:r>
+              <a:rPr b="0" lang="en-AU" sz="2000" strike="noStrike" u="none">
+                <a:solidFill>
+                  <a:srgbClr val="000000"/>
+                </a:solidFill>
+                <a:effectLst/>
+                <a:uFillTx/>
+                <a:latin typeface="Arial"/>
+              </a:rPr>
+              <a:t>memory.</a:t>
+            </a:r>
             <a:endParaRPr b="0" lang="en-AU" sz="2000" strike="noStrike" u="none">
               <a:solidFill>
                 <a:srgbClr val="000000"/>
@@ -752,13 +812,13 @@
           </a:p>
           <a:p>
             <a:pPr indent="0">
-              <a:lnSpc>
-                <a:spcPct val="100000"/>
-              </a:lnSpc>
-              <a:buNone/>
-              <a:tabLst>
-                <a:tab algn="l" pos="0"/>
-              </a:tabLst>
+              <a:spcBef>
+                <a:spcPts val="1191"/>
+              </a:spcBef>
+              <a:spcAft>
+                <a:spcPts val="992"/>
+              </a:spcAft>
+              <a:buNone/>
             </a:pPr>
             <a:r>
               <a:rPr b="0" lang="en-AU" sz="2000" strike="noStrike" u="none">
@@ -769,7 +829,7 @@
                 <a:uFillTx/>
                 <a:latin typeface="Arial"/>
               </a:rPr>
-              <a:t>Calls to Cloud deployed Gemini LLM consume tokens</a:t>
+              <a:t>Enabling VGM improves MLPerf score 2-3% compared with default configuration.</a:t>
             </a:r>
             <a:endParaRPr b="0" lang="en-AU" sz="2000" strike="noStrike" u="none">
               <a:solidFill>
@@ -782,14 +842,25 @@
           </a:p>
           <a:p>
             <a:pPr indent="0">
-              <a:lnSpc>
-                <a:spcPct val="100000"/>
-              </a:lnSpc>
-              <a:buNone/>
-              <a:tabLst>
-                <a:tab algn="l" pos="0"/>
-              </a:tabLst>
-            </a:pPr>
+              <a:spcBef>
+                <a:spcPts val="1191"/>
+              </a:spcBef>
+              <a:spcAft>
+                <a:spcPts val="992"/>
+              </a:spcAft>
+              <a:buNone/>
+            </a:pPr>
+            <a:r>
+              <a:rPr b="0" lang="en-AU" sz="2000" strike="noStrike" u="none">
+                <a:solidFill>
+                  <a:srgbClr val="000000"/>
+                </a:solidFill>
+                <a:effectLst/>
+                <a:uFillTx/>
+                <a:latin typeface="Arial"/>
+              </a:rPr>
+              <a:t>Total potential memory for GPU is 112 GB (96 + 16).</a:t>
+            </a:r>
             <a:endParaRPr b="0" lang="en-AU" sz="2000" strike="noStrike" u="none">
               <a:solidFill>
                 <a:srgbClr val="000000"/>
@@ -801,25 +872,14 @@
           </a:p>
           <a:p>
             <a:pPr indent="0">
-              <a:lnSpc>
-                <a:spcPct val="100000"/>
-              </a:lnSpc>
-              <a:buNone/>
-              <a:tabLst>
-                <a:tab algn="l" pos="0"/>
-              </a:tabLst>
-            </a:pPr>
-            <a:r>
-              <a:rPr b="0" lang="en-AU" sz="2000" strike="noStrike" u="none">
-                <a:solidFill>
-                  <a:srgbClr val="000000"/>
-                </a:solidFill>
-                <a:effectLst/>
-                <a:uFillTx/>
-                <a:latin typeface="Arial"/>
-              </a:rPr>
-              <a:t>Call to local RAG database do not consume tokens</a:t>
-            </a:r>
+              <a:spcBef>
+                <a:spcPts val="1191"/>
+              </a:spcBef>
+              <a:spcAft>
+                <a:spcPts val="992"/>
+              </a:spcAft>
+              <a:buNone/>
+            </a:pPr>
             <a:endParaRPr b="0" lang="en-AU" sz="2000" strike="noStrike" u="none">
               <a:solidFill>
                 <a:srgbClr val="000000"/>
@@ -831,32 +891,13 @@
           </a:p>
           <a:p>
             <a:pPr indent="0">
-              <a:lnSpc>
-                <a:spcPct val="100000"/>
-              </a:lnSpc>
-              <a:buNone/>
-              <a:tabLst>
-                <a:tab algn="l" pos="0"/>
-              </a:tabLst>
-            </a:pPr>
-            <a:endParaRPr b="0" lang="en-AU" sz="2000" strike="noStrike" u="none">
-              <a:solidFill>
-                <a:srgbClr val="000000"/>
-              </a:solidFill>
-              <a:effectLst/>
-              <a:uFillTx/>
-              <a:latin typeface="Arial"/>
-            </a:endParaRPr>
-          </a:p>
-          <a:p>
-            <a:pPr indent="0">
-              <a:lnSpc>
-                <a:spcPct val="100000"/>
-              </a:lnSpc>
-              <a:buNone/>
-              <a:tabLst>
-                <a:tab algn="l" pos="0"/>
-              </a:tabLst>
+              <a:spcBef>
+                <a:spcPts val="1191"/>
+              </a:spcBef>
+              <a:spcAft>
+                <a:spcPts val="992"/>
+              </a:spcAft>
+              <a:buNone/>
             </a:pPr>
             <a:endParaRPr b="0" lang="en-AU" sz="2000" strike="noStrike" u="none">
               <a:solidFill>
@@ -893,7 +934,7 @@
       </p:grpSpPr>
       <p:sp>
         <p:nvSpPr>
-          <p:cNvPr id="95" name="PlaceHolder 1"/>
+          <p:cNvPr id="106" name="PlaceHolder 1"/>
           <p:cNvSpPr>
             <a:spLocks noGrp="1"/>
           </p:cNvSpPr>
@@ -903,8 +944,8 @@
         </p:nvSpPr>
         <p:spPr>
           <a:xfrm>
-            <a:off x="216360" y="812520"/>
-            <a:ext cx="7126200" cy="4008240"/>
+            <a:off x="216000" y="812520"/>
+            <a:ext cx="7126920" cy="4008960"/>
           </a:xfrm>
           <a:prstGeom prst="rect">
             <a:avLst/>
@@ -916,7 +957,7 @@
       </p:sp>
       <p:sp>
         <p:nvSpPr>
-          <p:cNvPr id="96" name="PlaceHolder 2"/>
+          <p:cNvPr id="107" name="PlaceHolder 2"/>
           <p:cNvSpPr>
             <a:spLocks noGrp="1"/>
           </p:cNvSpPr>
@@ -927,7 +968,7 @@
         <p:spPr>
           <a:xfrm>
             <a:off x="756000" y="5078520"/>
-            <a:ext cx="6046920" cy="4810320"/>
+            <a:ext cx="6047640" cy="4811040"/>
           </a:xfrm>
           <a:prstGeom prst="rect">
             <a:avLst/>
@@ -943,13 +984,13 @@
           </a:bodyPr>
           <a:p>
             <a:pPr indent="0">
-              <a:lnSpc>
-                <a:spcPct val="100000"/>
-              </a:lnSpc>
-              <a:buNone/>
-              <a:tabLst>
-                <a:tab algn="l" pos="0"/>
-              </a:tabLst>
+              <a:spcBef>
+                <a:spcPts val="1191"/>
+              </a:spcBef>
+              <a:spcAft>
+                <a:spcPts val="992"/>
+              </a:spcAft>
+              <a:buNone/>
             </a:pPr>
             <a:r>
               <a:rPr b="0" lang="en-AU" sz="2000" strike="noStrike" u="none">
@@ -959,8 +1000,9 @@
                 <a:effectLst/>
                 <a:uFillTx/>
                 <a:latin typeface="Arial"/>
-              </a:rPr>
-              <a:t>Hybrid architecture allows flexibility</a:t>
+                <a:ea typeface="Microsoft YaHei"/>
+              </a:rPr>
+              <a:t>Baseline for MLPerf performance comparison.</a:t>
             </a:r>
             <a:endParaRPr b="0" lang="en-AU" sz="2000" strike="noStrike" u="none">
               <a:solidFill>
@@ -973,14 +1015,26 @@
           </a:p>
           <a:p>
             <a:pPr indent="0">
-              <a:lnSpc>
-                <a:spcPct val="100000"/>
-              </a:lnSpc>
-              <a:buNone/>
-              <a:tabLst>
-                <a:tab algn="l" pos="0"/>
-              </a:tabLst>
-            </a:pPr>
+              <a:spcBef>
+                <a:spcPts val="1191"/>
+              </a:spcBef>
+              <a:spcAft>
+                <a:spcPts val="992"/>
+              </a:spcAft>
+              <a:buNone/>
+            </a:pPr>
+            <a:r>
+              <a:rPr b="0" lang="en-AU" sz="2000" strike="noStrike" u="none">
+                <a:solidFill>
+                  <a:srgbClr val="000000"/>
+                </a:solidFill>
+                <a:effectLst/>
+                <a:uFillTx/>
+                <a:latin typeface="Arial"/>
+                <a:ea typeface="Microsoft YaHei"/>
+              </a:rPr>
+              <a:t>This workstation was released in 2018.</a:t>
+            </a:r>
             <a:endParaRPr b="0" lang="en-AU" sz="2000" strike="noStrike" u="none">
               <a:solidFill>
                 <a:srgbClr val="000000"/>
@@ -992,13 +1046,13 @@
           </a:p>
           <a:p>
             <a:pPr indent="0">
-              <a:lnSpc>
-                <a:spcPct val="100000"/>
-              </a:lnSpc>
-              <a:buNone/>
-              <a:tabLst>
-                <a:tab algn="l" pos="0"/>
-              </a:tabLst>
+              <a:spcBef>
+                <a:spcPts val="1191"/>
+              </a:spcBef>
+              <a:spcAft>
+                <a:spcPts val="992"/>
+              </a:spcAft>
+              <a:buNone/>
             </a:pPr>
             <a:r>
               <a:rPr b="0" lang="en-AU" sz="2000" strike="noStrike" u="none">
@@ -1008,8 +1062,9 @@
                 <a:effectLst/>
                 <a:uFillTx/>
                 <a:latin typeface="Arial"/>
-              </a:rPr>
-              <a:t>Where the database is stored</a:t>
+                <a:ea typeface="Microsoft YaHei"/>
+              </a:rPr>
+              <a:t>Note that the current Dell Precision 7680 costs AUD 4700 which is comparable in price to Minisforum MS-S1 Max (AUD 4300)</a:t>
             </a:r>
             <a:endParaRPr b="0" lang="en-AU" sz="2000" strike="noStrike" u="none">
               <a:solidFill>
@@ -1022,14 +1077,26 @@
           </a:p>
           <a:p>
             <a:pPr indent="0">
-              <a:lnSpc>
-                <a:spcPct val="100000"/>
-              </a:lnSpc>
-              <a:buNone/>
-              <a:tabLst>
-                <a:tab algn="l" pos="0"/>
-              </a:tabLst>
-            </a:pPr>
+              <a:spcBef>
+                <a:spcPts val="1191"/>
+              </a:spcBef>
+              <a:spcAft>
+                <a:spcPts val="992"/>
+              </a:spcAft>
+              <a:buNone/>
+            </a:pPr>
+            <a:r>
+              <a:rPr b="0" lang="en-AU" sz="2000" strike="noStrike" u="none">
+                <a:solidFill>
+                  <a:srgbClr val="000000"/>
+                </a:solidFill>
+                <a:effectLst/>
+                <a:uFillTx/>
+                <a:latin typeface="Arial"/>
+                <a:ea typeface="Microsoft YaHei"/>
+              </a:rPr>
+              <a:t>Memory is shared between CPU and GPU via NVidia  driver.</a:t>
+            </a:r>
             <a:endParaRPr b="0" lang="en-AU" sz="2000" strike="noStrike" u="none">
               <a:solidFill>
                 <a:srgbClr val="000000"/>
@@ -1041,13 +1108,100 @@
           </a:p>
           <a:p>
             <a:pPr indent="0">
-              <a:lnSpc>
-                <a:spcPct val="100000"/>
-              </a:lnSpc>
-              <a:buNone/>
-              <a:tabLst>
-                <a:tab algn="l" pos="0"/>
-              </a:tabLst>
+              <a:spcBef>
+                <a:spcPts val="1191"/>
+              </a:spcBef>
+              <a:spcAft>
+                <a:spcPts val="992"/>
+              </a:spcAft>
+              <a:buNone/>
+            </a:pPr>
+            <a:endParaRPr b="0" lang="en-AU" sz="2000" strike="noStrike" u="none">
+              <a:solidFill>
+                <a:srgbClr val="000000"/>
+              </a:solidFill>
+              <a:effectLst/>
+              <a:uFillTx/>
+              <a:latin typeface="Arial"/>
+            </a:endParaRPr>
+          </a:p>
+        </p:txBody>
+      </p:sp>
+    </p:spTree>
+  </p:cSld>
+</p:notes>
+</file>
+
+<file path=ppt/notesSlides/notesSlide15.xml><?xml version="1.0" encoding="utf-8"?>
+<p:notes xmlns:a="http://schemas.openxmlformats.org/drawingml/2006/main" xmlns:p="http://schemas.openxmlformats.org/presentationml/2006/main" xmlns:r="http://schemas.openxmlformats.org/officeDocument/2006/relationships" xmlns:p14="http://schemas.microsoft.com/office/powerpoint/2010/main" xmlns:p15="http://schemas.microsoft.com/office/powerpoint/2012/main" xmlns:mc="http://schemas.openxmlformats.org/markup-compatibility/2006">
+  <p:cSld>
+    <p:spTree>
+      <p:nvGrpSpPr>
+        <p:cNvPr id="1" name=""/>
+        <p:cNvGrpSpPr/>
+        <p:nvPr/>
+      </p:nvGrpSpPr>
+      <p:grpSpPr>
+        <a:xfrm>
+          <a:off x="0" y="0"/>
+          <a:ext cx="0" cy="0"/>
+          <a:chOff x="0" y="0"/>
+          <a:chExt cx="0" cy="0"/>
+        </a:xfrm>
+      </p:grpSpPr>
+      <p:sp>
+        <p:nvSpPr>
+          <p:cNvPr id="108" name="PlaceHolder 1"/>
+          <p:cNvSpPr>
+            <a:spLocks noGrp="1"/>
+          </p:cNvSpPr>
+          <p:nvPr>
+            <p:ph type="sldImg"/>
+          </p:nvPr>
+        </p:nvSpPr>
+        <p:spPr>
+          <a:xfrm>
+            <a:off x="216000" y="812520"/>
+            <a:ext cx="7126920" cy="4008960"/>
+          </a:xfrm>
+          <a:prstGeom prst="rect">
+            <a:avLst/>
+          </a:prstGeom>
+          <a:ln w="0">
+            <a:noFill/>
+          </a:ln>
+        </p:spPr>
+      </p:sp>
+      <p:sp>
+        <p:nvSpPr>
+          <p:cNvPr id="109" name="PlaceHolder 2"/>
+          <p:cNvSpPr>
+            <a:spLocks noGrp="1"/>
+          </p:cNvSpPr>
+          <p:nvPr>
+            <p:ph type="body"/>
+          </p:nvPr>
+        </p:nvSpPr>
+        <p:spPr>
+          <a:xfrm>
+            <a:off x="756000" y="5078520"/>
+            <a:ext cx="6047640" cy="4811040"/>
+          </a:xfrm>
+          <a:prstGeom prst="rect">
+            <a:avLst/>
+          </a:prstGeom>
+          <a:noFill/>
+          <a:ln w="0">
+            <a:noFill/>
+          </a:ln>
+        </p:spPr>
+        <p:txBody>
+          <a:bodyPr lIns="0" rIns="0" tIns="0" bIns="0" anchor="t">
+            <a:noAutofit/>
+          </a:bodyPr>
+          <a:p>
+            <a:pPr indent="0">
+              <a:buNone/>
             </a:pPr>
             <a:r>
               <a:rPr b="0" lang="en-AU" sz="2000" strike="noStrike" u="none">
@@ -1058,7 +1212,7 @@
                 <a:uFillTx/>
                 <a:latin typeface="Arial"/>
               </a:rPr>
-              <a:t>Where the application itself is deployed</a:t>
+              <a:t>MLPerf is a self-contained benchmark.</a:t>
             </a:r>
             <a:endParaRPr b="0" lang="en-AU" sz="2000" strike="noStrike" u="none">
               <a:solidFill>
@@ -1071,13 +1225,7 @@
           </a:p>
           <a:p>
             <a:pPr indent="0">
-              <a:lnSpc>
-                <a:spcPct val="100000"/>
-              </a:lnSpc>
-              <a:buNone/>
-              <a:tabLst>
-                <a:tab algn="l" pos="0"/>
-              </a:tabLst>
+              <a:buNone/>
             </a:pPr>
             <a:endParaRPr b="0" lang="en-AU" sz="2000" strike="noStrike" u="none">
               <a:solidFill>
@@ -1090,13 +1238,7 @@
           </a:p>
           <a:p>
             <a:pPr indent="0">
-              <a:lnSpc>
-                <a:spcPct val="100000"/>
-              </a:lnSpc>
-              <a:buNone/>
-              <a:tabLst>
-                <a:tab algn="l" pos="0"/>
-              </a:tabLst>
+              <a:buNone/>
             </a:pPr>
             <a:r>
               <a:rPr b="0" lang="en-AU" sz="2000" strike="noStrike" u="none">
@@ -1107,7 +1249,7 @@
                 <a:uFillTx/>
                 <a:latin typeface="Arial"/>
               </a:rPr>
-              <a:t>What LLM host service is used</a:t>
+              <a:t>MLPerf uses small LLMs to allow better coverage across platforms.</a:t>
             </a:r>
             <a:endParaRPr b="0" lang="en-AU" sz="2000" strike="noStrike" u="none">
               <a:solidFill>
@@ -1120,13 +1262,7 @@
           </a:p>
           <a:p>
             <a:pPr indent="0">
-              <a:lnSpc>
-                <a:spcPct val="100000"/>
-              </a:lnSpc>
-              <a:buNone/>
-              <a:tabLst>
-                <a:tab algn="l" pos="0"/>
-              </a:tabLst>
+              <a:buNone/>
             </a:pPr>
             <a:endParaRPr b="0" lang="en-AU" sz="2000" strike="noStrike" u="none">
               <a:solidFill>
@@ -1139,13 +1275,7 @@
           </a:p>
           <a:p>
             <a:pPr indent="0">
-              <a:lnSpc>
-                <a:spcPct val="100000"/>
-              </a:lnSpc>
-              <a:buNone/>
-              <a:tabLst>
-                <a:tab algn="l" pos="0"/>
-              </a:tabLst>
+              <a:buNone/>
             </a:pPr>
             <a:r>
               <a:rPr b="0" lang="en-AU" sz="2000" strike="noStrike" u="none">
@@ -1156,7 +1286,7 @@
                 <a:uFillTx/>
                 <a:latin typeface="Arial"/>
               </a:rPr>
-              <a:t>All of these components can be configured to minimise operational expenses</a:t>
+              <a:t>MLPerf results are indicative of platform performance.</a:t>
             </a:r>
             <a:endParaRPr b="0" lang="en-AU" sz="2000" strike="noStrike" u="none">
               <a:solidFill>
@@ -1169,13 +1299,7 @@
           </a:p>
           <a:p>
             <a:pPr indent="0">
-              <a:lnSpc>
-                <a:spcPct val="100000"/>
-              </a:lnSpc>
-              <a:buNone/>
-              <a:tabLst>
-                <a:tab algn="l" pos="0"/>
-              </a:tabLst>
+              <a:buNone/>
             </a:pPr>
             <a:endParaRPr b="0" lang="en-AU" sz="2000" strike="noStrike" u="none">
               <a:solidFill>
@@ -1188,13 +1312,31 @@
           </a:p>
           <a:p>
             <a:pPr indent="0">
-              <a:lnSpc>
-                <a:spcPct val="100000"/>
-              </a:lnSpc>
-              <a:buNone/>
-              <a:tabLst>
-                <a:tab algn="l" pos="0"/>
-              </a:tabLst>
+              <a:buNone/>
+            </a:pPr>
+            <a:r>
+              <a:rPr b="0" lang="en-AU" sz="2000" strike="noStrike" u="none">
+                <a:solidFill>
+                  <a:srgbClr val="000000"/>
+                </a:solidFill>
+                <a:effectLst/>
+                <a:uFillTx/>
+                <a:latin typeface="Arial"/>
+              </a:rPr>
+              <a:t>Business-specific workloads may have different results.</a:t>
+            </a:r>
+            <a:endParaRPr b="0" lang="en-AU" sz="2000" strike="noStrike" u="none">
+              <a:solidFill>
+                <a:srgbClr val="000000"/>
+              </a:solidFill>
+              <a:effectLst/>
+              <a:uFillTx/>
+              <a:latin typeface="Arial"/>
+            </a:endParaRPr>
+          </a:p>
+          <a:p>
+            <a:pPr indent="0">
+              <a:buNone/>
             </a:pPr>
             <a:endParaRPr b="0" lang="en-AU" sz="2000" strike="noStrike" u="none">
               <a:solidFill>
@@ -1231,7 +1373,7 @@
       </p:grpSpPr>
       <p:sp>
         <p:nvSpPr>
-          <p:cNvPr id="97" name="PlaceHolder 1"/>
+          <p:cNvPr id="110" name="PlaceHolder 1"/>
           <p:cNvSpPr>
             <a:spLocks noGrp="1"/>
           </p:cNvSpPr>
@@ -1242,7 +1384,7 @@
         <p:spPr>
           <a:xfrm>
             <a:off x="216000" y="812520"/>
-            <a:ext cx="7126560" cy="4008240"/>
+            <a:ext cx="7126920" cy="4008960"/>
           </a:xfrm>
           <a:prstGeom prst="rect">
             <a:avLst/>
@@ -1254,7 +1396,7 @@
       </p:sp>
       <p:sp>
         <p:nvSpPr>
-          <p:cNvPr id="98" name="PlaceHolder 2"/>
+          <p:cNvPr id="111" name="PlaceHolder 2"/>
           <p:cNvSpPr>
             <a:spLocks noGrp="1"/>
           </p:cNvSpPr>
@@ -1265,7 +1407,7 @@
         <p:spPr>
           <a:xfrm>
             <a:off x="756000" y="5078520"/>
-            <a:ext cx="6046920" cy="4810320"/>
+            <a:ext cx="6047640" cy="4811040"/>
           </a:xfrm>
           <a:prstGeom prst="rect">
             <a:avLst/>
@@ -1281,13 +1423,7 @@
           </a:bodyPr>
           <a:p>
             <a:pPr indent="0">
-              <a:lnSpc>
-                <a:spcPct val="100000"/>
-              </a:lnSpc>
-              <a:buNone/>
-              <a:tabLst>
-                <a:tab algn="l" pos="0"/>
-              </a:tabLst>
+              <a:buNone/>
             </a:pPr>
             <a:r>
               <a:rPr b="0" lang="en-AU" sz="2000" strike="noStrike" u="none">
@@ -1298,7 +1434,7 @@
                 <a:uFillTx/>
                 <a:latin typeface="Arial"/>
               </a:rPr>
-              <a:t>Query application uses RAG database and cloud deployed LLM</a:t>
+              <a:t>Llama 3.1 8B results show significant improvement.</a:t>
             </a:r>
             <a:endParaRPr b="0" lang="en-AU" sz="2000" strike="noStrike" u="none">
               <a:solidFill>
@@ -1311,13 +1447,7 @@
           </a:p>
           <a:p>
             <a:pPr indent="0">
-              <a:lnSpc>
-                <a:spcPct val="100000"/>
-              </a:lnSpc>
-              <a:buNone/>
-              <a:tabLst>
-                <a:tab algn="l" pos="0"/>
-              </a:tabLst>
+              <a:buNone/>
             </a:pPr>
             <a:endParaRPr b="0" lang="en-AU" sz="2000" strike="noStrike" u="none">
               <a:solidFill>
@@ -1330,13 +1460,7 @@
           </a:p>
           <a:p>
             <a:pPr indent="0">
-              <a:lnSpc>
-                <a:spcPct val="100000"/>
-              </a:lnSpc>
-              <a:buNone/>
-              <a:tabLst>
-                <a:tab algn="l" pos="0"/>
-              </a:tabLst>
+              <a:buNone/>
             </a:pPr>
             <a:r>
               <a:rPr b="0" lang="en-AU" sz="2000" strike="noStrike" u="none">
@@ -1347,471 +1471,8 @@
                 <a:uFillTx/>
                 <a:latin typeface="Arial"/>
               </a:rPr>
-              <a:t>Cloud access via REST API specific to the LLM provider</a:t>
-            </a:r>
-            <a:endParaRPr b="0" lang="en-AU" sz="2000" strike="noStrike" u="none">
-              <a:solidFill>
-                <a:srgbClr val="000000"/>
-              </a:solidFill>
-              <a:effectLst/>
-              <a:uFillTx/>
-              <a:latin typeface="Arial"/>
-            </a:endParaRPr>
-          </a:p>
-          <a:p>
-            <a:pPr indent="0">
-              <a:lnSpc>
-                <a:spcPct val="100000"/>
-              </a:lnSpc>
-              <a:buNone/>
-              <a:tabLst>
-                <a:tab algn="l" pos="0"/>
-              </a:tabLst>
-            </a:pPr>
-            <a:endParaRPr b="0" lang="en-AU" sz="2000" strike="noStrike" u="none">
-              <a:solidFill>
-                <a:srgbClr val="000000"/>
-              </a:solidFill>
-              <a:effectLst/>
-              <a:uFillTx/>
-              <a:latin typeface="Arial"/>
-            </a:endParaRPr>
-          </a:p>
-          <a:p>
-            <a:pPr indent="0">
-              <a:lnSpc>
-                <a:spcPct val="100000"/>
-              </a:lnSpc>
-              <a:buNone/>
-              <a:tabLst>
-                <a:tab algn="l" pos="0"/>
-              </a:tabLst>
-            </a:pPr>
-            <a:r>
-              <a:rPr b="0" lang="en-AU" sz="2000" strike="noStrike" u="none">
-                <a:solidFill>
-                  <a:srgbClr val="000000"/>
-                </a:solidFill>
-                <a:effectLst/>
-                <a:uFillTx/>
-                <a:latin typeface="Arial"/>
-              </a:rPr>
-              <a:t>Answer is generated in two steps</a:t>
-            </a:r>
-            <a:endParaRPr b="0" lang="en-AU" sz="2000" strike="noStrike" u="none">
-              <a:solidFill>
-                <a:srgbClr val="000000"/>
-              </a:solidFill>
-              <a:effectLst/>
-              <a:uFillTx/>
-              <a:latin typeface="Arial"/>
-            </a:endParaRPr>
-          </a:p>
-          <a:p>
-            <a:pPr indent="0">
-              <a:lnSpc>
-                <a:spcPct val="100000"/>
-              </a:lnSpc>
-              <a:buNone/>
-              <a:tabLst>
-                <a:tab algn="l" pos="0"/>
-              </a:tabLst>
-            </a:pPr>
-            <a:endParaRPr b="0" lang="en-AU" sz="2000" strike="noStrike" u="none">
-              <a:solidFill>
-                <a:srgbClr val="000000"/>
-              </a:solidFill>
-              <a:effectLst/>
-              <a:uFillTx/>
-              <a:latin typeface="Arial"/>
-            </a:endParaRPr>
-          </a:p>
-          <a:p>
-            <a:pPr indent="0">
-              <a:lnSpc>
-                <a:spcPct val="100000"/>
-              </a:lnSpc>
-              <a:buNone/>
-              <a:tabLst>
-                <a:tab algn="l" pos="0"/>
-              </a:tabLst>
-            </a:pPr>
-            <a:r>
-              <a:rPr b="0" lang="en-AU" sz="2000" strike="noStrike" u="none">
-                <a:solidFill>
-                  <a:srgbClr val="000000"/>
-                </a:solidFill>
-                <a:effectLst/>
-                <a:uFillTx/>
-                <a:latin typeface="Arial"/>
-              </a:rPr>
-              <a:t>1. RAG database query to select private data set</a:t>
-            </a:r>
-            <a:endParaRPr b="0" lang="en-AU" sz="2000" strike="noStrike" u="none">
-              <a:solidFill>
-                <a:srgbClr val="000000"/>
-              </a:solidFill>
-              <a:effectLst/>
-              <a:uFillTx/>
-              <a:latin typeface="Arial"/>
-            </a:endParaRPr>
-          </a:p>
-          <a:p>
-            <a:pPr indent="0">
-              <a:lnSpc>
-                <a:spcPct val="100000"/>
-              </a:lnSpc>
-              <a:buNone/>
-              <a:tabLst>
-                <a:tab algn="l" pos="0"/>
-              </a:tabLst>
-            </a:pPr>
-            <a:endParaRPr b="0" lang="en-AU" sz="2000" strike="noStrike" u="none">
-              <a:solidFill>
-                <a:srgbClr val="000000"/>
-              </a:solidFill>
-              <a:effectLst/>
-              <a:uFillTx/>
-              <a:latin typeface="Arial"/>
-            </a:endParaRPr>
-          </a:p>
-          <a:p>
-            <a:pPr indent="0">
-              <a:lnSpc>
-                <a:spcPct val="100000"/>
-              </a:lnSpc>
-              <a:buNone/>
-              <a:tabLst>
-                <a:tab algn="l" pos="0"/>
-              </a:tabLst>
-            </a:pPr>
-            <a:r>
-              <a:rPr b="0" lang="en-AU" sz="2000" strike="noStrike" u="none">
-                <a:solidFill>
-                  <a:srgbClr val="000000"/>
-                </a:solidFill>
-                <a:effectLst/>
-                <a:uFillTx/>
-                <a:latin typeface="Arial"/>
-              </a:rPr>
-              <a:t>2. Combine initial query with RAG data in the final LLM query.</a:t>
-            </a:r>
-            <a:endParaRPr b="0" lang="en-AU" sz="2000" strike="noStrike" u="none">
-              <a:solidFill>
-                <a:srgbClr val="000000"/>
-              </a:solidFill>
-              <a:effectLst/>
-              <a:uFillTx/>
-              <a:latin typeface="Arial"/>
-            </a:endParaRPr>
-          </a:p>
-          <a:p>
-            <a:pPr indent="0">
-              <a:lnSpc>
-                <a:spcPct val="100000"/>
-              </a:lnSpc>
-              <a:buNone/>
-              <a:tabLst>
-                <a:tab algn="l" pos="0"/>
-              </a:tabLst>
-            </a:pPr>
-            <a:endParaRPr b="0" lang="en-AU" sz="2000" strike="noStrike" u="none">
-              <a:solidFill>
-                <a:srgbClr val="000000"/>
-              </a:solidFill>
-              <a:effectLst/>
-              <a:uFillTx/>
-              <a:latin typeface="Arial"/>
-            </a:endParaRPr>
-          </a:p>
-          <a:p>
-            <a:pPr indent="0">
-              <a:lnSpc>
-                <a:spcPct val="100000"/>
-              </a:lnSpc>
-              <a:buNone/>
-              <a:tabLst>
-                <a:tab algn="l" pos="0"/>
-              </a:tabLst>
-            </a:pPr>
-            <a:endParaRPr b="0" lang="en-AU" sz="2000" strike="noStrike" u="none">
-              <a:solidFill>
-                <a:srgbClr val="000000"/>
-              </a:solidFill>
-              <a:effectLst/>
-              <a:uFillTx/>
-              <a:latin typeface="Arial"/>
-            </a:endParaRPr>
-          </a:p>
-          <a:p>
-            <a:pPr indent="0">
-              <a:lnSpc>
-                <a:spcPct val="100000"/>
-              </a:lnSpc>
-              <a:buNone/>
-              <a:tabLst>
-                <a:tab algn="l" pos="0"/>
-              </a:tabLst>
-            </a:pPr>
-            <a:endParaRPr b="0" lang="en-AU" sz="2000" strike="noStrike" u="none">
-              <a:solidFill>
-                <a:srgbClr val="000000"/>
-              </a:solidFill>
-              <a:effectLst/>
-              <a:uFillTx/>
-              <a:latin typeface="Arial"/>
-            </a:endParaRPr>
-          </a:p>
-        </p:txBody>
-      </p:sp>
-    </p:spTree>
-  </p:cSld>
-</p:notes>
-</file>
-
-<file path=ppt/notesSlides/notesSlide17.xml><?xml version="1.0" encoding="utf-8"?>
-<p:notes xmlns:a="http://schemas.openxmlformats.org/drawingml/2006/main" xmlns:p="http://schemas.openxmlformats.org/presentationml/2006/main" xmlns:r="http://schemas.openxmlformats.org/officeDocument/2006/relationships" xmlns:p14="http://schemas.microsoft.com/office/powerpoint/2010/main" xmlns:p15="http://schemas.microsoft.com/office/powerpoint/2012/main" xmlns:mc="http://schemas.openxmlformats.org/markup-compatibility/2006">
-  <p:cSld>
-    <p:spTree>
-      <p:nvGrpSpPr>
-        <p:cNvPr id="1" name=""/>
-        <p:cNvGrpSpPr/>
-        <p:nvPr/>
-      </p:nvGrpSpPr>
-      <p:grpSpPr>
-        <a:xfrm>
-          <a:off x="0" y="0"/>
-          <a:ext cx="0" cy="0"/>
-          <a:chOff x="0" y="0"/>
-          <a:chExt cx="0" cy="0"/>
-        </a:xfrm>
-      </p:grpSpPr>
-      <p:sp>
-        <p:nvSpPr>
-          <p:cNvPr id="99" name="PlaceHolder 1"/>
-          <p:cNvSpPr>
-            <a:spLocks noGrp="1"/>
-          </p:cNvSpPr>
-          <p:nvPr>
-            <p:ph type="sldImg"/>
-          </p:nvPr>
-        </p:nvSpPr>
-        <p:spPr>
-          <a:xfrm>
-            <a:off x="216000" y="812520"/>
-            <a:ext cx="7126560" cy="4008240"/>
-          </a:xfrm>
-          <a:prstGeom prst="rect">
-            <a:avLst/>
-          </a:prstGeom>
-          <a:ln w="0">
-            <a:noFill/>
-          </a:ln>
-        </p:spPr>
-      </p:sp>
-      <p:sp>
-        <p:nvSpPr>
-          <p:cNvPr id="100" name="PlaceHolder 2"/>
-          <p:cNvSpPr>
-            <a:spLocks noGrp="1"/>
-          </p:cNvSpPr>
-          <p:nvPr>
-            <p:ph type="body"/>
-          </p:nvPr>
-        </p:nvSpPr>
-        <p:spPr>
-          <a:xfrm>
-            <a:off x="756000" y="5078520"/>
-            <a:ext cx="6046920" cy="4810320"/>
-          </a:xfrm>
-          <a:prstGeom prst="rect">
-            <a:avLst/>
-          </a:prstGeom>
-          <a:noFill/>
-          <a:ln w="0">
-            <a:noFill/>
-          </a:ln>
-        </p:spPr>
-        <p:txBody>
-          <a:bodyPr lIns="0" rIns="0" tIns="0" bIns="0" anchor="t">
-            <a:noAutofit/>
-          </a:bodyPr>
-          <a:p>
-            <a:pPr indent="0">
-              <a:lnSpc>
-                <a:spcPct val="100000"/>
-              </a:lnSpc>
-              <a:buNone/>
-              <a:tabLst>
-                <a:tab algn="l" pos="0"/>
-              </a:tabLst>
-            </a:pPr>
-            <a:r>
-              <a:rPr b="0" lang="en-AU" sz="2000" strike="noStrike" u="none">
-                <a:solidFill>
-                  <a:srgbClr val="000000"/>
-                </a:solidFill>
-                <a:effectLst/>
-                <a:uFillTx/>
-                <a:latin typeface="Arial"/>
-              </a:rPr>
-              <a:t>Original query is XSS</a:t>
-            </a:r>
-            <a:endParaRPr b="0" lang="en-AU" sz="2000" strike="noStrike" u="none">
-              <a:solidFill>
-                <a:srgbClr val="000000"/>
-              </a:solidFill>
-              <a:effectLst/>
-              <a:uFillTx/>
-              <a:latin typeface="Arial"/>
-            </a:endParaRPr>
-          </a:p>
-          <a:p>
-            <a:pPr indent="0">
-              <a:lnSpc>
-                <a:spcPct val="100000"/>
-              </a:lnSpc>
-              <a:buNone/>
-              <a:tabLst>
-                <a:tab algn="l" pos="0"/>
-              </a:tabLst>
-            </a:pPr>
-            <a:endParaRPr b="0" lang="en-AU" sz="2000" strike="noStrike" u="none">
-              <a:solidFill>
-                <a:srgbClr val="000000"/>
-              </a:solidFill>
-              <a:effectLst/>
-              <a:uFillTx/>
-              <a:latin typeface="Arial"/>
-            </a:endParaRPr>
-          </a:p>
-          <a:p>
-            <a:pPr indent="0">
-              <a:lnSpc>
-                <a:spcPct val="100000"/>
-              </a:lnSpc>
-              <a:buNone/>
-              <a:tabLst>
-                <a:tab algn="l" pos="0"/>
-              </a:tabLst>
-            </a:pPr>
-            <a:r>
-              <a:rPr b="0" lang="en-AU" sz="2000" strike="noStrike" u="none">
-                <a:solidFill>
-                  <a:srgbClr val="000000"/>
-                </a:solidFill>
-                <a:effectLst/>
-                <a:uFillTx/>
-                <a:latin typeface="Arial"/>
-              </a:rPr>
-              <a:t>RAG database is queried for list of synonyms </a:t>
-            </a:r>
-            <a:endParaRPr b="0" lang="en-AU" sz="2000" strike="noStrike" u="none">
-              <a:solidFill>
-                <a:srgbClr val="000000"/>
-              </a:solidFill>
-              <a:effectLst/>
-              <a:uFillTx/>
-              <a:latin typeface="Arial"/>
-            </a:endParaRPr>
-          </a:p>
-          <a:p>
-            <a:pPr indent="0">
-              <a:lnSpc>
-                <a:spcPct val="100000"/>
-              </a:lnSpc>
-              <a:buNone/>
-              <a:tabLst>
-                <a:tab algn="l" pos="0"/>
-              </a:tabLst>
-            </a:pPr>
-            <a:endParaRPr b="0" lang="en-AU" sz="2000" strike="noStrike" u="none">
-              <a:solidFill>
-                <a:srgbClr val="000000"/>
-              </a:solidFill>
-              <a:effectLst/>
-              <a:uFillTx/>
-              <a:latin typeface="Arial"/>
-            </a:endParaRPr>
-          </a:p>
-          <a:p>
-            <a:pPr indent="0">
-              <a:lnSpc>
-                <a:spcPct val="100000"/>
-              </a:lnSpc>
-              <a:buNone/>
-              <a:tabLst>
-                <a:tab algn="l" pos="0"/>
-              </a:tabLst>
-            </a:pPr>
-            <a:r>
-              <a:rPr b="0" lang="en-AU" sz="2000" strike="noStrike" u="none">
-                <a:solidFill>
-                  <a:srgbClr val="000000"/>
-                </a:solidFill>
-                <a:effectLst/>
-                <a:uFillTx/>
-                <a:latin typeface="Arial"/>
-              </a:rPr>
-              <a:t>Returns from RAG queries create context for the final call to general LLM</a:t>
-            </a:r>
-            <a:endParaRPr b="0" lang="en-AU" sz="2000" strike="noStrike" u="none">
-              <a:solidFill>
-                <a:srgbClr val="000000"/>
-              </a:solidFill>
-              <a:effectLst/>
-              <a:uFillTx/>
-              <a:latin typeface="Arial"/>
-            </a:endParaRPr>
-          </a:p>
-          <a:p>
-            <a:pPr indent="0">
-              <a:lnSpc>
-                <a:spcPct val="100000"/>
-              </a:lnSpc>
-              <a:buNone/>
-              <a:tabLst>
-                <a:tab algn="l" pos="0"/>
-              </a:tabLst>
-            </a:pPr>
-            <a:endParaRPr b="0" lang="en-AU" sz="2000" strike="noStrike" u="none">
-              <a:solidFill>
-                <a:srgbClr val="000000"/>
-              </a:solidFill>
-              <a:effectLst/>
-              <a:uFillTx/>
-              <a:latin typeface="Arial"/>
-            </a:endParaRPr>
-          </a:p>
-          <a:p>
-            <a:pPr indent="0">
-              <a:lnSpc>
-                <a:spcPct val="100000"/>
-              </a:lnSpc>
-              <a:buNone/>
-              <a:tabLst>
-                <a:tab algn="l" pos="0"/>
-              </a:tabLst>
-            </a:pPr>
-            <a:endParaRPr b="0" lang="en-AU" sz="2000" strike="noStrike" u="none">
-              <a:solidFill>
-                <a:srgbClr val="000000"/>
-              </a:solidFill>
-              <a:effectLst/>
-              <a:uFillTx/>
-              <a:latin typeface="Arial"/>
-            </a:endParaRPr>
-          </a:p>
-          <a:p>
-            <a:pPr indent="0">
-              <a:lnSpc>
-                <a:spcPct val="100000"/>
-              </a:lnSpc>
-              <a:buNone/>
-              <a:tabLst>
-                <a:tab algn="l" pos="0"/>
-              </a:tabLst>
-            </a:pPr>
+              <a:t>Phi 3.5 Mini results show improvement in start up.</a:t>
+            </a:r>
             <a:endParaRPr b="0" lang="en-AU" sz="2000" strike="noStrike" u="none">
               <a:solidFill>
                 <a:srgbClr val="000000"/>
@@ -1847,7 +1508,7 @@
       </p:grpSpPr>
       <p:sp>
         <p:nvSpPr>
-          <p:cNvPr id="101" name="PlaceHolder 1"/>
+          <p:cNvPr id="112" name="PlaceHolder 1"/>
           <p:cNvSpPr>
             <a:spLocks noGrp="1"/>
           </p:cNvSpPr>
@@ -1858,7 +1519,7 @@
         <p:spPr>
           <a:xfrm>
             <a:off x="216000" y="812520"/>
-            <a:ext cx="7126560" cy="4008240"/>
+            <a:ext cx="7125480" cy="4007160"/>
           </a:xfrm>
           <a:prstGeom prst="rect">
             <a:avLst/>
@@ -1870,7 +1531,7 @@
       </p:sp>
       <p:sp>
         <p:nvSpPr>
-          <p:cNvPr id="102" name="PlaceHolder 2"/>
+          <p:cNvPr id="113" name="PlaceHolder 2"/>
           <p:cNvSpPr>
             <a:spLocks noGrp="1"/>
           </p:cNvSpPr>
@@ -1881,7 +1542,7 @@
         <p:spPr>
           <a:xfrm>
             <a:off x="756000" y="5078520"/>
-            <a:ext cx="6046920" cy="4810320"/>
+            <a:ext cx="6045840" cy="4809240"/>
           </a:xfrm>
           <a:prstGeom prst="rect">
             <a:avLst/>
@@ -1914,7 +1575,7 @@
                 <a:uFillTx/>
                 <a:latin typeface="Arial"/>
               </a:rPr>
-              <a:t>Final query to general LLM asks about PCI DSS</a:t>
+              <a:t>Operator extracts private data from unstructured documents</a:t>
             </a:r>
             <a:endParaRPr b="0" lang="en-AU" sz="2000" strike="noStrike" u="none">
               <a:solidFill>
@@ -1963,7 +1624,7 @@
                 <a:uFillTx/>
                 <a:latin typeface="Arial"/>
               </a:rPr>
-              <a:t>RAG query result is incorporated as a structured input</a:t>
+              <a:t>Operator monitors quality of data</a:t>
             </a:r>
             <a:endParaRPr b="0" lang="en-AU" sz="2000" strike="noStrike" u="none">
               <a:solidFill>
@@ -2003,6 +1664,17 @@
                 <a:tab algn="l" pos="0"/>
               </a:tabLst>
             </a:pPr>
+            <a:r>
+              <a:rPr b="0" lang="en-AU" sz="2000" strike="noStrike" u="none">
+                <a:solidFill>
+                  <a:srgbClr val="000000"/>
+                </a:solidFill>
+                <a:effectLst/>
+                <a:uFillTx/>
+                <a:latin typeface="Arial"/>
+              </a:rPr>
+              <a:t>Operator is a privileged role with access to all the data.</a:t>
+            </a:r>
             <a:endParaRPr b="0" lang="en-AU" sz="2000" strike="noStrike" u="none">
               <a:solidFill>
                 <a:srgbClr val="000000"/>
@@ -2057,7 +1729,7 @@
       </p:grpSpPr>
       <p:sp>
         <p:nvSpPr>
-          <p:cNvPr id="103" name="PlaceHolder 1"/>
+          <p:cNvPr id="114" name="PlaceHolder 1"/>
           <p:cNvSpPr>
             <a:spLocks noGrp="1"/>
           </p:cNvSpPr>
@@ -2068,7 +1740,7 @@
         <p:spPr>
           <a:xfrm>
             <a:off x="216000" y="812520"/>
-            <a:ext cx="7126560" cy="4008240"/>
+            <a:ext cx="7125480" cy="4007160"/>
           </a:xfrm>
           <a:prstGeom prst="rect">
             <a:avLst/>
@@ -2080,7 +1752,7 @@
       </p:sp>
       <p:sp>
         <p:nvSpPr>
-          <p:cNvPr id="104" name="PlaceHolder 2"/>
+          <p:cNvPr id="115" name="PlaceHolder 2"/>
           <p:cNvSpPr>
             <a:spLocks noGrp="1"/>
           </p:cNvSpPr>
@@ -2091,7 +1763,7 @@
         <p:spPr>
           <a:xfrm>
             <a:off x="756000" y="5078520"/>
-            <a:ext cx="6046920" cy="4810320"/>
+            <a:ext cx="6045840" cy="4809240"/>
           </a:xfrm>
           <a:prstGeom prst="rect">
             <a:avLst/>
@@ -2124,7 +1796,7 @@
                 <a:uFillTx/>
                 <a:latin typeface="Arial"/>
               </a:rPr>
-              <a:t>The reply from general LLM incorporates:</a:t>
+              <a:t>Dual use Indexer app executed as command line script</a:t>
             </a:r>
             <a:endParaRPr b="0" lang="en-AU" sz="2000" strike="noStrike" u="none">
               <a:solidFill>
@@ -2173,7 +1845,7 @@
                 <a:uFillTx/>
                 <a:latin typeface="Arial"/>
               </a:rPr>
-              <a:t>- private data</a:t>
+              <a:t>Calls to Cloud deployed Gemini LLM consume tokens</a:t>
             </a:r>
             <a:endParaRPr b="0" lang="en-AU" sz="2000" strike="noStrike" u="none">
               <a:solidFill>
@@ -2222,84 +1894,8 @@
                 <a:uFillTx/>
                 <a:latin typeface="Arial"/>
               </a:rPr>
-              <a:t>- public data in the form of PCI DSS</a:t>
-            </a:r>
-            <a:endParaRPr b="0" lang="en-AU" sz="2000" strike="noStrike" u="none">
-              <a:solidFill>
-                <a:srgbClr val="000000"/>
-              </a:solidFill>
-              <a:effectLst/>
-              <a:uFillTx/>
-              <a:latin typeface="Arial"/>
-            </a:endParaRPr>
-          </a:p>
-          <a:p>
-            <a:pPr indent="0">
-              <a:lnSpc>
-                <a:spcPct val="100000"/>
-              </a:lnSpc>
-              <a:buNone/>
-              <a:tabLst>
-                <a:tab algn="l" pos="0"/>
-              </a:tabLst>
-            </a:pPr>
-            <a:endParaRPr b="0" lang="en-AU" sz="2000" strike="noStrike" u="none">
-              <a:solidFill>
-                <a:srgbClr val="000000"/>
-              </a:solidFill>
-              <a:effectLst/>
-              <a:uFillTx/>
-              <a:latin typeface="Arial"/>
-            </a:endParaRPr>
-          </a:p>
-          <a:p>
-            <a:pPr indent="0">
-              <a:lnSpc>
-                <a:spcPct val="100000"/>
-              </a:lnSpc>
-              <a:buNone/>
-              <a:tabLst>
-                <a:tab algn="l" pos="0"/>
-              </a:tabLst>
-            </a:pPr>
-            <a:endParaRPr b="0" lang="en-AU" sz="2000" strike="noStrike" u="none">
-              <a:solidFill>
-                <a:srgbClr val="000000"/>
-              </a:solidFill>
-              <a:effectLst/>
-              <a:uFillTx/>
-              <a:latin typeface="Arial"/>
-            </a:endParaRPr>
-          </a:p>
-          <a:p>
-            <a:pPr indent="0">
-              <a:lnSpc>
-                <a:spcPct val="100000"/>
-              </a:lnSpc>
-              <a:buNone/>
-              <a:tabLst>
-                <a:tab algn="l" pos="0"/>
-              </a:tabLst>
-            </a:pPr>
-            <a:endParaRPr b="0" lang="en-AU" sz="2000" strike="noStrike" u="none">
-              <a:solidFill>
-                <a:srgbClr val="000000"/>
-              </a:solidFill>
-              <a:effectLst/>
-              <a:uFillTx/>
-              <a:latin typeface="Arial"/>
-            </a:endParaRPr>
-          </a:p>
-          <a:p>
-            <a:pPr indent="0">
-              <a:lnSpc>
-                <a:spcPct val="100000"/>
-              </a:lnSpc>
-              <a:buNone/>
-              <a:tabLst>
-                <a:tab algn="l" pos="0"/>
-              </a:tabLst>
-            </a:pPr>
+              <a:t>Call to local RAG database do not consume tokens</a:t>
+            </a:r>
             <a:endParaRPr b="0" lang="en-AU" sz="2000" strike="noStrike" u="none">
               <a:solidFill>
                 <a:srgbClr val="000000"/>
@@ -2373,7 +1969,7 @@
       </p:grpSpPr>
       <p:sp>
         <p:nvSpPr>
-          <p:cNvPr id="75" name="PlaceHolder 1"/>
+          <p:cNvPr id="86" name="PlaceHolder 1"/>
           <p:cNvSpPr>
             <a:spLocks noGrp="1"/>
           </p:cNvSpPr>
@@ -2384,7 +1980,7 @@
         <p:spPr>
           <a:xfrm>
             <a:off x="216000" y="812520"/>
-            <a:ext cx="7126560" cy="4008240"/>
+            <a:ext cx="7125480" cy="4007160"/>
           </a:xfrm>
           <a:prstGeom prst="rect">
             <a:avLst/>
@@ -2396,7 +1992,7 @@
       </p:sp>
       <p:sp>
         <p:nvSpPr>
-          <p:cNvPr id="76" name="PlaceHolder 2"/>
+          <p:cNvPr id="87" name="PlaceHolder 2"/>
           <p:cNvSpPr>
             <a:spLocks noGrp="1"/>
           </p:cNvSpPr>
@@ -2407,7 +2003,7 @@
         <p:spPr>
           <a:xfrm>
             <a:off x="756000" y="5078520"/>
-            <a:ext cx="6046920" cy="4810320"/>
+            <a:ext cx="6045840" cy="4809240"/>
           </a:xfrm>
           <a:prstGeom prst="rect">
             <a:avLst/>
@@ -2673,7 +2269,7 @@
       </p:grpSpPr>
       <p:sp>
         <p:nvSpPr>
-          <p:cNvPr id="105" name="PlaceHolder 1"/>
+          <p:cNvPr id="116" name="PlaceHolder 1"/>
           <p:cNvSpPr>
             <a:spLocks noGrp="1"/>
           </p:cNvSpPr>
@@ -2683,8 +2279,8 @@
         </p:nvSpPr>
         <p:spPr>
           <a:xfrm>
-            <a:off x="216000" y="812520"/>
-            <a:ext cx="7126560" cy="4008240"/>
+            <a:off x="216360" y="812520"/>
+            <a:ext cx="7125120" cy="4007160"/>
           </a:xfrm>
           <a:prstGeom prst="rect">
             <a:avLst/>
@@ -2696,7 +2292,7 @@
       </p:sp>
       <p:sp>
         <p:nvSpPr>
-          <p:cNvPr id="106" name="PlaceHolder 2"/>
+          <p:cNvPr id="117" name="PlaceHolder 2"/>
           <p:cNvSpPr>
             <a:spLocks noGrp="1"/>
           </p:cNvSpPr>
@@ -2707,7 +2303,1487 @@
         <p:spPr>
           <a:xfrm>
             <a:off x="756000" y="5078520"/>
-            <a:ext cx="6046920" cy="4810320"/>
+            <a:ext cx="6045840" cy="4809240"/>
+          </a:xfrm>
+          <a:prstGeom prst="rect">
+            <a:avLst/>
+          </a:prstGeom>
+          <a:noFill/>
+          <a:ln w="0">
+            <a:noFill/>
+          </a:ln>
+        </p:spPr>
+        <p:txBody>
+          <a:bodyPr lIns="0" rIns="0" tIns="0" bIns="0" anchor="t">
+            <a:noAutofit/>
+          </a:bodyPr>
+          <a:p>
+            <a:pPr indent="0">
+              <a:lnSpc>
+                <a:spcPct val="100000"/>
+              </a:lnSpc>
+              <a:buNone/>
+              <a:tabLst>
+                <a:tab algn="l" pos="0"/>
+              </a:tabLst>
+            </a:pPr>
+            <a:r>
+              <a:rPr b="0" lang="en-AU" sz="2000" strike="noStrike" u="none">
+                <a:solidFill>
+                  <a:srgbClr val="000000"/>
+                </a:solidFill>
+                <a:effectLst/>
+                <a:uFillTx/>
+                <a:latin typeface="Arial"/>
+              </a:rPr>
+              <a:t>Hybrid architecture allows flexibility</a:t>
+            </a:r>
+            <a:endParaRPr b="0" lang="en-AU" sz="2000" strike="noStrike" u="none">
+              <a:solidFill>
+                <a:srgbClr val="000000"/>
+              </a:solidFill>
+              <a:effectLst/>
+              <a:uFillTx/>
+              <a:latin typeface="Arial"/>
+            </a:endParaRPr>
+          </a:p>
+          <a:p>
+            <a:pPr indent="0">
+              <a:lnSpc>
+                <a:spcPct val="100000"/>
+              </a:lnSpc>
+              <a:buNone/>
+              <a:tabLst>
+                <a:tab algn="l" pos="0"/>
+              </a:tabLst>
+            </a:pPr>
+            <a:endParaRPr b="0" lang="en-AU" sz="2000" strike="noStrike" u="none">
+              <a:solidFill>
+                <a:srgbClr val="000000"/>
+              </a:solidFill>
+              <a:effectLst/>
+              <a:uFillTx/>
+              <a:latin typeface="Arial"/>
+            </a:endParaRPr>
+          </a:p>
+          <a:p>
+            <a:pPr indent="0">
+              <a:lnSpc>
+                <a:spcPct val="100000"/>
+              </a:lnSpc>
+              <a:buNone/>
+              <a:tabLst>
+                <a:tab algn="l" pos="0"/>
+              </a:tabLst>
+            </a:pPr>
+            <a:r>
+              <a:rPr b="0" lang="en-AU" sz="2000" strike="noStrike" u="none">
+                <a:solidFill>
+                  <a:srgbClr val="000000"/>
+                </a:solidFill>
+                <a:effectLst/>
+                <a:uFillTx/>
+                <a:latin typeface="Arial"/>
+              </a:rPr>
+              <a:t>Where the database is stored</a:t>
+            </a:r>
+            <a:endParaRPr b="0" lang="en-AU" sz="2000" strike="noStrike" u="none">
+              <a:solidFill>
+                <a:srgbClr val="000000"/>
+              </a:solidFill>
+              <a:effectLst/>
+              <a:uFillTx/>
+              <a:latin typeface="Arial"/>
+            </a:endParaRPr>
+          </a:p>
+          <a:p>
+            <a:pPr indent="0">
+              <a:lnSpc>
+                <a:spcPct val="100000"/>
+              </a:lnSpc>
+              <a:buNone/>
+              <a:tabLst>
+                <a:tab algn="l" pos="0"/>
+              </a:tabLst>
+            </a:pPr>
+            <a:endParaRPr b="0" lang="en-AU" sz="2000" strike="noStrike" u="none">
+              <a:solidFill>
+                <a:srgbClr val="000000"/>
+              </a:solidFill>
+              <a:effectLst/>
+              <a:uFillTx/>
+              <a:latin typeface="Arial"/>
+            </a:endParaRPr>
+          </a:p>
+          <a:p>
+            <a:pPr indent="0">
+              <a:lnSpc>
+                <a:spcPct val="100000"/>
+              </a:lnSpc>
+              <a:buNone/>
+              <a:tabLst>
+                <a:tab algn="l" pos="0"/>
+              </a:tabLst>
+            </a:pPr>
+            <a:r>
+              <a:rPr b="0" lang="en-AU" sz="2000" strike="noStrike" u="none">
+                <a:solidFill>
+                  <a:srgbClr val="000000"/>
+                </a:solidFill>
+                <a:effectLst/>
+                <a:uFillTx/>
+                <a:latin typeface="Arial"/>
+              </a:rPr>
+              <a:t>Where the application itself is deployed</a:t>
+            </a:r>
+            <a:endParaRPr b="0" lang="en-AU" sz="2000" strike="noStrike" u="none">
+              <a:solidFill>
+                <a:srgbClr val="000000"/>
+              </a:solidFill>
+              <a:effectLst/>
+              <a:uFillTx/>
+              <a:latin typeface="Arial"/>
+            </a:endParaRPr>
+          </a:p>
+          <a:p>
+            <a:pPr indent="0">
+              <a:lnSpc>
+                <a:spcPct val="100000"/>
+              </a:lnSpc>
+              <a:buNone/>
+              <a:tabLst>
+                <a:tab algn="l" pos="0"/>
+              </a:tabLst>
+            </a:pPr>
+            <a:endParaRPr b="0" lang="en-AU" sz="2000" strike="noStrike" u="none">
+              <a:solidFill>
+                <a:srgbClr val="000000"/>
+              </a:solidFill>
+              <a:effectLst/>
+              <a:uFillTx/>
+              <a:latin typeface="Arial"/>
+            </a:endParaRPr>
+          </a:p>
+          <a:p>
+            <a:pPr indent="0">
+              <a:lnSpc>
+                <a:spcPct val="100000"/>
+              </a:lnSpc>
+              <a:buNone/>
+              <a:tabLst>
+                <a:tab algn="l" pos="0"/>
+              </a:tabLst>
+            </a:pPr>
+            <a:r>
+              <a:rPr b="0" lang="en-AU" sz="2000" strike="noStrike" u="none">
+                <a:solidFill>
+                  <a:srgbClr val="000000"/>
+                </a:solidFill>
+                <a:effectLst/>
+                <a:uFillTx/>
+                <a:latin typeface="Arial"/>
+              </a:rPr>
+              <a:t>What LLM host service is used</a:t>
+            </a:r>
+            <a:endParaRPr b="0" lang="en-AU" sz="2000" strike="noStrike" u="none">
+              <a:solidFill>
+                <a:srgbClr val="000000"/>
+              </a:solidFill>
+              <a:effectLst/>
+              <a:uFillTx/>
+              <a:latin typeface="Arial"/>
+            </a:endParaRPr>
+          </a:p>
+          <a:p>
+            <a:pPr indent="0">
+              <a:lnSpc>
+                <a:spcPct val="100000"/>
+              </a:lnSpc>
+              <a:buNone/>
+              <a:tabLst>
+                <a:tab algn="l" pos="0"/>
+              </a:tabLst>
+            </a:pPr>
+            <a:endParaRPr b="0" lang="en-AU" sz="2000" strike="noStrike" u="none">
+              <a:solidFill>
+                <a:srgbClr val="000000"/>
+              </a:solidFill>
+              <a:effectLst/>
+              <a:uFillTx/>
+              <a:latin typeface="Arial"/>
+            </a:endParaRPr>
+          </a:p>
+          <a:p>
+            <a:pPr indent="0">
+              <a:lnSpc>
+                <a:spcPct val="100000"/>
+              </a:lnSpc>
+              <a:buNone/>
+              <a:tabLst>
+                <a:tab algn="l" pos="0"/>
+              </a:tabLst>
+            </a:pPr>
+            <a:r>
+              <a:rPr b="0" lang="en-AU" sz="2000" strike="noStrike" u="none">
+                <a:solidFill>
+                  <a:srgbClr val="000000"/>
+                </a:solidFill>
+                <a:effectLst/>
+                <a:uFillTx/>
+                <a:latin typeface="Arial"/>
+              </a:rPr>
+              <a:t>All of these components can be configured to minimise operational expenses</a:t>
+            </a:r>
+            <a:endParaRPr b="0" lang="en-AU" sz="2000" strike="noStrike" u="none">
+              <a:solidFill>
+                <a:srgbClr val="000000"/>
+              </a:solidFill>
+              <a:effectLst/>
+              <a:uFillTx/>
+              <a:latin typeface="Arial"/>
+            </a:endParaRPr>
+          </a:p>
+          <a:p>
+            <a:pPr indent="0">
+              <a:lnSpc>
+                <a:spcPct val="100000"/>
+              </a:lnSpc>
+              <a:buNone/>
+              <a:tabLst>
+                <a:tab algn="l" pos="0"/>
+              </a:tabLst>
+            </a:pPr>
+            <a:endParaRPr b="0" lang="en-AU" sz="2000" strike="noStrike" u="none">
+              <a:solidFill>
+                <a:srgbClr val="000000"/>
+              </a:solidFill>
+              <a:effectLst/>
+              <a:uFillTx/>
+              <a:latin typeface="Arial"/>
+            </a:endParaRPr>
+          </a:p>
+          <a:p>
+            <a:pPr indent="0">
+              <a:lnSpc>
+                <a:spcPct val="100000"/>
+              </a:lnSpc>
+              <a:buNone/>
+              <a:tabLst>
+                <a:tab algn="l" pos="0"/>
+              </a:tabLst>
+            </a:pPr>
+            <a:endParaRPr b="0" lang="en-AU" sz="2000" strike="noStrike" u="none">
+              <a:solidFill>
+                <a:srgbClr val="000000"/>
+              </a:solidFill>
+              <a:effectLst/>
+              <a:uFillTx/>
+              <a:latin typeface="Arial"/>
+            </a:endParaRPr>
+          </a:p>
+        </p:txBody>
+      </p:sp>
+    </p:spTree>
+  </p:cSld>
+</p:notes>
+</file>
+
+<file path=ppt/notesSlides/notesSlide22.xml><?xml version="1.0" encoding="utf-8"?>
+<p:notes xmlns:a="http://schemas.openxmlformats.org/drawingml/2006/main" xmlns:p="http://schemas.openxmlformats.org/presentationml/2006/main" xmlns:r="http://schemas.openxmlformats.org/officeDocument/2006/relationships" xmlns:p14="http://schemas.microsoft.com/office/powerpoint/2010/main" xmlns:p15="http://schemas.microsoft.com/office/powerpoint/2012/main" xmlns:mc="http://schemas.openxmlformats.org/markup-compatibility/2006">
+  <p:cSld>
+    <p:spTree>
+      <p:nvGrpSpPr>
+        <p:cNvPr id="1" name=""/>
+        <p:cNvGrpSpPr/>
+        <p:nvPr/>
+      </p:nvGrpSpPr>
+      <p:grpSpPr>
+        <a:xfrm>
+          <a:off x="0" y="0"/>
+          <a:ext cx="0" cy="0"/>
+          <a:chOff x="0" y="0"/>
+          <a:chExt cx="0" cy="0"/>
+        </a:xfrm>
+      </p:grpSpPr>
+      <p:sp>
+        <p:nvSpPr>
+          <p:cNvPr id="118" name="PlaceHolder 1"/>
+          <p:cNvSpPr>
+            <a:spLocks noGrp="1"/>
+          </p:cNvSpPr>
+          <p:nvPr>
+            <p:ph type="sldImg"/>
+          </p:nvPr>
+        </p:nvSpPr>
+        <p:spPr>
+          <a:xfrm>
+            <a:off x="216000" y="812520"/>
+            <a:ext cx="7125480" cy="4007160"/>
+          </a:xfrm>
+          <a:prstGeom prst="rect">
+            <a:avLst/>
+          </a:prstGeom>
+          <a:ln w="0">
+            <a:noFill/>
+          </a:ln>
+        </p:spPr>
+      </p:sp>
+      <p:sp>
+        <p:nvSpPr>
+          <p:cNvPr id="119" name="PlaceHolder 2"/>
+          <p:cNvSpPr>
+            <a:spLocks noGrp="1"/>
+          </p:cNvSpPr>
+          <p:nvPr>
+            <p:ph type="body"/>
+          </p:nvPr>
+        </p:nvSpPr>
+        <p:spPr>
+          <a:xfrm>
+            <a:off x="756000" y="5078520"/>
+            <a:ext cx="6045840" cy="4809240"/>
+          </a:xfrm>
+          <a:prstGeom prst="rect">
+            <a:avLst/>
+          </a:prstGeom>
+          <a:noFill/>
+          <a:ln w="0">
+            <a:noFill/>
+          </a:ln>
+        </p:spPr>
+        <p:txBody>
+          <a:bodyPr lIns="0" rIns="0" tIns="0" bIns="0" anchor="t">
+            <a:noAutofit/>
+          </a:bodyPr>
+          <a:p>
+            <a:pPr indent="0">
+              <a:lnSpc>
+                <a:spcPct val="100000"/>
+              </a:lnSpc>
+              <a:buNone/>
+              <a:tabLst>
+                <a:tab algn="l" pos="0"/>
+              </a:tabLst>
+            </a:pPr>
+            <a:r>
+              <a:rPr b="0" lang="en-AU" sz="2000" strike="noStrike" u="none">
+                <a:solidFill>
+                  <a:srgbClr val="000000"/>
+                </a:solidFill>
+                <a:effectLst/>
+                <a:uFillTx/>
+                <a:latin typeface="Arial"/>
+              </a:rPr>
+              <a:t>Query application uses RAG database and cloud deployed LLM</a:t>
+            </a:r>
+            <a:endParaRPr b="0" lang="en-AU" sz="2000" strike="noStrike" u="none">
+              <a:solidFill>
+                <a:srgbClr val="000000"/>
+              </a:solidFill>
+              <a:effectLst/>
+              <a:uFillTx/>
+              <a:latin typeface="Arial"/>
+            </a:endParaRPr>
+          </a:p>
+          <a:p>
+            <a:pPr indent="0">
+              <a:lnSpc>
+                <a:spcPct val="100000"/>
+              </a:lnSpc>
+              <a:buNone/>
+              <a:tabLst>
+                <a:tab algn="l" pos="0"/>
+              </a:tabLst>
+            </a:pPr>
+            <a:endParaRPr b="0" lang="en-AU" sz="2000" strike="noStrike" u="none">
+              <a:solidFill>
+                <a:srgbClr val="000000"/>
+              </a:solidFill>
+              <a:effectLst/>
+              <a:uFillTx/>
+              <a:latin typeface="Arial"/>
+            </a:endParaRPr>
+          </a:p>
+          <a:p>
+            <a:pPr indent="0">
+              <a:lnSpc>
+                <a:spcPct val="100000"/>
+              </a:lnSpc>
+              <a:buNone/>
+              <a:tabLst>
+                <a:tab algn="l" pos="0"/>
+              </a:tabLst>
+            </a:pPr>
+            <a:r>
+              <a:rPr b="0" lang="en-AU" sz="2000" strike="noStrike" u="none">
+                <a:solidFill>
+                  <a:srgbClr val="000000"/>
+                </a:solidFill>
+                <a:effectLst/>
+                <a:uFillTx/>
+                <a:latin typeface="Arial"/>
+              </a:rPr>
+              <a:t>Cloud access via REST API specific to the LLM provider</a:t>
+            </a:r>
+            <a:endParaRPr b="0" lang="en-AU" sz="2000" strike="noStrike" u="none">
+              <a:solidFill>
+                <a:srgbClr val="000000"/>
+              </a:solidFill>
+              <a:effectLst/>
+              <a:uFillTx/>
+              <a:latin typeface="Arial"/>
+            </a:endParaRPr>
+          </a:p>
+          <a:p>
+            <a:pPr indent="0">
+              <a:lnSpc>
+                <a:spcPct val="100000"/>
+              </a:lnSpc>
+              <a:buNone/>
+              <a:tabLst>
+                <a:tab algn="l" pos="0"/>
+              </a:tabLst>
+            </a:pPr>
+            <a:endParaRPr b="0" lang="en-AU" sz="2000" strike="noStrike" u="none">
+              <a:solidFill>
+                <a:srgbClr val="000000"/>
+              </a:solidFill>
+              <a:effectLst/>
+              <a:uFillTx/>
+              <a:latin typeface="Arial"/>
+            </a:endParaRPr>
+          </a:p>
+          <a:p>
+            <a:pPr indent="0">
+              <a:lnSpc>
+                <a:spcPct val="100000"/>
+              </a:lnSpc>
+              <a:buNone/>
+              <a:tabLst>
+                <a:tab algn="l" pos="0"/>
+              </a:tabLst>
+            </a:pPr>
+            <a:r>
+              <a:rPr b="0" lang="en-AU" sz="2000" strike="noStrike" u="none">
+                <a:solidFill>
+                  <a:srgbClr val="000000"/>
+                </a:solidFill>
+                <a:effectLst/>
+                <a:uFillTx/>
+                <a:latin typeface="Arial"/>
+              </a:rPr>
+              <a:t>Answer is generated in two steps</a:t>
+            </a:r>
+            <a:endParaRPr b="0" lang="en-AU" sz="2000" strike="noStrike" u="none">
+              <a:solidFill>
+                <a:srgbClr val="000000"/>
+              </a:solidFill>
+              <a:effectLst/>
+              <a:uFillTx/>
+              <a:latin typeface="Arial"/>
+            </a:endParaRPr>
+          </a:p>
+          <a:p>
+            <a:pPr indent="0">
+              <a:lnSpc>
+                <a:spcPct val="100000"/>
+              </a:lnSpc>
+              <a:buNone/>
+              <a:tabLst>
+                <a:tab algn="l" pos="0"/>
+              </a:tabLst>
+            </a:pPr>
+            <a:endParaRPr b="0" lang="en-AU" sz="2000" strike="noStrike" u="none">
+              <a:solidFill>
+                <a:srgbClr val="000000"/>
+              </a:solidFill>
+              <a:effectLst/>
+              <a:uFillTx/>
+              <a:latin typeface="Arial"/>
+            </a:endParaRPr>
+          </a:p>
+          <a:p>
+            <a:pPr indent="0">
+              <a:lnSpc>
+                <a:spcPct val="100000"/>
+              </a:lnSpc>
+              <a:buNone/>
+              <a:tabLst>
+                <a:tab algn="l" pos="0"/>
+              </a:tabLst>
+            </a:pPr>
+            <a:r>
+              <a:rPr b="0" lang="en-AU" sz="2000" strike="noStrike" u="none">
+                <a:solidFill>
+                  <a:srgbClr val="000000"/>
+                </a:solidFill>
+                <a:effectLst/>
+                <a:uFillTx/>
+                <a:latin typeface="Arial"/>
+              </a:rPr>
+              <a:t>1. RAG database query to select private data set</a:t>
+            </a:r>
+            <a:endParaRPr b="0" lang="en-AU" sz="2000" strike="noStrike" u="none">
+              <a:solidFill>
+                <a:srgbClr val="000000"/>
+              </a:solidFill>
+              <a:effectLst/>
+              <a:uFillTx/>
+              <a:latin typeface="Arial"/>
+            </a:endParaRPr>
+          </a:p>
+          <a:p>
+            <a:pPr indent="0">
+              <a:lnSpc>
+                <a:spcPct val="100000"/>
+              </a:lnSpc>
+              <a:buNone/>
+              <a:tabLst>
+                <a:tab algn="l" pos="0"/>
+              </a:tabLst>
+            </a:pPr>
+            <a:endParaRPr b="0" lang="en-AU" sz="2000" strike="noStrike" u="none">
+              <a:solidFill>
+                <a:srgbClr val="000000"/>
+              </a:solidFill>
+              <a:effectLst/>
+              <a:uFillTx/>
+              <a:latin typeface="Arial"/>
+            </a:endParaRPr>
+          </a:p>
+          <a:p>
+            <a:pPr indent="0">
+              <a:lnSpc>
+                <a:spcPct val="100000"/>
+              </a:lnSpc>
+              <a:buNone/>
+              <a:tabLst>
+                <a:tab algn="l" pos="0"/>
+              </a:tabLst>
+            </a:pPr>
+            <a:r>
+              <a:rPr b="0" lang="en-AU" sz="2000" strike="noStrike" u="none">
+                <a:solidFill>
+                  <a:srgbClr val="000000"/>
+                </a:solidFill>
+                <a:effectLst/>
+                <a:uFillTx/>
+                <a:latin typeface="Arial"/>
+              </a:rPr>
+              <a:t>2. Combine initial query with RAG data in the final LLM query.</a:t>
+            </a:r>
+            <a:endParaRPr b="0" lang="en-AU" sz="2000" strike="noStrike" u="none">
+              <a:solidFill>
+                <a:srgbClr val="000000"/>
+              </a:solidFill>
+              <a:effectLst/>
+              <a:uFillTx/>
+              <a:latin typeface="Arial"/>
+            </a:endParaRPr>
+          </a:p>
+          <a:p>
+            <a:pPr indent="0">
+              <a:lnSpc>
+                <a:spcPct val="100000"/>
+              </a:lnSpc>
+              <a:buNone/>
+              <a:tabLst>
+                <a:tab algn="l" pos="0"/>
+              </a:tabLst>
+            </a:pPr>
+            <a:endParaRPr b="0" lang="en-AU" sz="2000" strike="noStrike" u="none">
+              <a:solidFill>
+                <a:srgbClr val="000000"/>
+              </a:solidFill>
+              <a:effectLst/>
+              <a:uFillTx/>
+              <a:latin typeface="Arial"/>
+            </a:endParaRPr>
+          </a:p>
+          <a:p>
+            <a:pPr indent="0">
+              <a:lnSpc>
+                <a:spcPct val="100000"/>
+              </a:lnSpc>
+              <a:buNone/>
+              <a:tabLst>
+                <a:tab algn="l" pos="0"/>
+              </a:tabLst>
+            </a:pPr>
+            <a:endParaRPr b="0" lang="en-AU" sz="2000" strike="noStrike" u="none">
+              <a:solidFill>
+                <a:srgbClr val="000000"/>
+              </a:solidFill>
+              <a:effectLst/>
+              <a:uFillTx/>
+              <a:latin typeface="Arial"/>
+            </a:endParaRPr>
+          </a:p>
+          <a:p>
+            <a:pPr indent="0">
+              <a:lnSpc>
+                <a:spcPct val="100000"/>
+              </a:lnSpc>
+              <a:buNone/>
+              <a:tabLst>
+                <a:tab algn="l" pos="0"/>
+              </a:tabLst>
+            </a:pPr>
+            <a:endParaRPr b="0" lang="en-AU" sz="2000" strike="noStrike" u="none">
+              <a:solidFill>
+                <a:srgbClr val="000000"/>
+              </a:solidFill>
+              <a:effectLst/>
+              <a:uFillTx/>
+              <a:latin typeface="Arial"/>
+            </a:endParaRPr>
+          </a:p>
+        </p:txBody>
+      </p:sp>
+    </p:spTree>
+  </p:cSld>
+</p:notes>
+</file>
+
+<file path=ppt/notesSlides/notesSlide23.xml><?xml version="1.0" encoding="utf-8"?>
+<p:notes xmlns:a="http://schemas.openxmlformats.org/drawingml/2006/main" xmlns:p="http://schemas.openxmlformats.org/presentationml/2006/main" xmlns:r="http://schemas.openxmlformats.org/officeDocument/2006/relationships" xmlns:p14="http://schemas.microsoft.com/office/powerpoint/2010/main" xmlns:p15="http://schemas.microsoft.com/office/powerpoint/2012/main" xmlns:mc="http://schemas.openxmlformats.org/markup-compatibility/2006">
+  <p:cSld>
+    <p:spTree>
+      <p:nvGrpSpPr>
+        <p:cNvPr id="1" name=""/>
+        <p:cNvGrpSpPr/>
+        <p:nvPr/>
+      </p:nvGrpSpPr>
+      <p:grpSpPr>
+        <a:xfrm>
+          <a:off x="0" y="0"/>
+          <a:ext cx="0" cy="0"/>
+          <a:chOff x="0" y="0"/>
+          <a:chExt cx="0" cy="0"/>
+        </a:xfrm>
+      </p:grpSpPr>
+      <p:sp>
+        <p:nvSpPr>
+          <p:cNvPr id="120" name="PlaceHolder 1"/>
+          <p:cNvSpPr>
+            <a:spLocks noGrp="1"/>
+          </p:cNvSpPr>
+          <p:nvPr>
+            <p:ph type="sldImg"/>
+          </p:nvPr>
+        </p:nvSpPr>
+        <p:spPr>
+          <a:xfrm>
+            <a:off x="216000" y="812520"/>
+            <a:ext cx="7125480" cy="4007160"/>
+          </a:xfrm>
+          <a:prstGeom prst="rect">
+            <a:avLst/>
+          </a:prstGeom>
+          <a:ln w="0">
+            <a:noFill/>
+          </a:ln>
+        </p:spPr>
+      </p:sp>
+      <p:sp>
+        <p:nvSpPr>
+          <p:cNvPr id="121" name="PlaceHolder 2"/>
+          <p:cNvSpPr>
+            <a:spLocks noGrp="1"/>
+          </p:cNvSpPr>
+          <p:nvPr>
+            <p:ph type="body"/>
+          </p:nvPr>
+        </p:nvSpPr>
+        <p:spPr>
+          <a:xfrm>
+            <a:off x="756000" y="5078520"/>
+            <a:ext cx="6045840" cy="4809240"/>
+          </a:xfrm>
+          <a:prstGeom prst="rect">
+            <a:avLst/>
+          </a:prstGeom>
+          <a:noFill/>
+          <a:ln w="0">
+            <a:noFill/>
+          </a:ln>
+        </p:spPr>
+        <p:txBody>
+          <a:bodyPr lIns="0" rIns="0" tIns="0" bIns="0" anchor="t">
+            <a:noAutofit/>
+          </a:bodyPr>
+          <a:p>
+            <a:pPr indent="0">
+              <a:lnSpc>
+                <a:spcPct val="100000"/>
+              </a:lnSpc>
+              <a:buNone/>
+              <a:tabLst>
+                <a:tab algn="l" pos="0"/>
+              </a:tabLst>
+            </a:pPr>
+            <a:r>
+              <a:rPr b="0" lang="en-AU" sz="2000" strike="noStrike" u="none">
+                <a:solidFill>
+                  <a:srgbClr val="000000"/>
+                </a:solidFill>
+                <a:effectLst/>
+                <a:uFillTx/>
+                <a:latin typeface="Arial"/>
+              </a:rPr>
+              <a:t>Original query is XSS</a:t>
+            </a:r>
+            <a:endParaRPr b="0" lang="en-AU" sz="2000" strike="noStrike" u="none">
+              <a:solidFill>
+                <a:srgbClr val="000000"/>
+              </a:solidFill>
+              <a:effectLst/>
+              <a:uFillTx/>
+              <a:latin typeface="Arial"/>
+            </a:endParaRPr>
+          </a:p>
+          <a:p>
+            <a:pPr indent="0">
+              <a:lnSpc>
+                <a:spcPct val="100000"/>
+              </a:lnSpc>
+              <a:buNone/>
+              <a:tabLst>
+                <a:tab algn="l" pos="0"/>
+              </a:tabLst>
+            </a:pPr>
+            <a:endParaRPr b="0" lang="en-AU" sz="2000" strike="noStrike" u="none">
+              <a:solidFill>
+                <a:srgbClr val="000000"/>
+              </a:solidFill>
+              <a:effectLst/>
+              <a:uFillTx/>
+              <a:latin typeface="Arial"/>
+            </a:endParaRPr>
+          </a:p>
+          <a:p>
+            <a:pPr indent="0">
+              <a:lnSpc>
+                <a:spcPct val="100000"/>
+              </a:lnSpc>
+              <a:buNone/>
+              <a:tabLst>
+                <a:tab algn="l" pos="0"/>
+              </a:tabLst>
+            </a:pPr>
+            <a:r>
+              <a:rPr b="0" lang="en-AU" sz="2000" strike="noStrike" u="none">
+                <a:solidFill>
+                  <a:srgbClr val="000000"/>
+                </a:solidFill>
+                <a:effectLst/>
+                <a:uFillTx/>
+                <a:latin typeface="Arial"/>
+              </a:rPr>
+              <a:t>RAG database is queried for list of synonyms </a:t>
+            </a:r>
+            <a:endParaRPr b="0" lang="en-AU" sz="2000" strike="noStrike" u="none">
+              <a:solidFill>
+                <a:srgbClr val="000000"/>
+              </a:solidFill>
+              <a:effectLst/>
+              <a:uFillTx/>
+              <a:latin typeface="Arial"/>
+            </a:endParaRPr>
+          </a:p>
+          <a:p>
+            <a:pPr indent="0">
+              <a:lnSpc>
+                <a:spcPct val="100000"/>
+              </a:lnSpc>
+              <a:buNone/>
+              <a:tabLst>
+                <a:tab algn="l" pos="0"/>
+              </a:tabLst>
+            </a:pPr>
+            <a:endParaRPr b="0" lang="en-AU" sz="2000" strike="noStrike" u="none">
+              <a:solidFill>
+                <a:srgbClr val="000000"/>
+              </a:solidFill>
+              <a:effectLst/>
+              <a:uFillTx/>
+              <a:latin typeface="Arial"/>
+            </a:endParaRPr>
+          </a:p>
+          <a:p>
+            <a:pPr indent="0">
+              <a:lnSpc>
+                <a:spcPct val="100000"/>
+              </a:lnSpc>
+              <a:buNone/>
+              <a:tabLst>
+                <a:tab algn="l" pos="0"/>
+              </a:tabLst>
+            </a:pPr>
+            <a:r>
+              <a:rPr b="0" lang="en-AU" sz="2000" strike="noStrike" u="none">
+                <a:solidFill>
+                  <a:srgbClr val="000000"/>
+                </a:solidFill>
+                <a:effectLst/>
+                <a:uFillTx/>
+                <a:latin typeface="Arial"/>
+              </a:rPr>
+              <a:t>Returns from RAG queries create context for the final call to general LLM</a:t>
+            </a:r>
+            <a:endParaRPr b="0" lang="en-AU" sz="2000" strike="noStrike" u="none">
+              <a:solidFill>
+                <a:srgbClr val="000000"/>
+              </a:solidFill>
+              <a:effectLst/>
+              <a:uFillTx/>
+              <a:latin typeface="Arial"/>
+            </a:endParaRPr>
+          </a:p>
+          <a:p>
+            <a:pPr indent="0">
+              <a:lnSpc>
+                <a:spcPct val="100000"/>
+              </a:lnSpc>
+              <a:buNone/>
+              <a:tabLst>
+                <a:tab algn="l" pos="0"/>
+              </a:tabLst>
+            </a:pPr>
+            <a:endParaRPr b="0" lang="en-AU" sz="2000" strike="noStrike" u="none">
+              <a:solidFill>
+                <a:srgbClr val="000000"/>
+              </a:solidFill>
+              <a:effectLst/>
+              <a:uFillTx/>
+              <a:latin typeface="Arial"/>
+            </a:endParaRPr>
+          </a:p>
+          <a:p>
+            <a:pPr indent="0">
+              <a:lnSpc>
+                <a:spcPct val="100000"/>
+              </a:lnSpc>
+              <a:buNone/>
+              <a:tabLst>
+                <a:tab algn="l" pos="0"/>
+              </a:tabLst>
+            </a:pPr>
+            <a:endParaRPr b="0" lang="en-AU" sz="2000" strike="noStrike" u="none">
+              <a:solidFill>
+                <a:srgbClr val="000000"/>
+              </a:solidFill>
+              <a:effectLst/>
+              <a:uFillTx/>
+              <a:latin typeface="Arial"/>
+            </a:endParaRPr>
+          </a:p>
+          <a:p>
+            <a:pPr indent="0">
+              <a:lnSpc>
+                <a:spcPct val="100000"/>
+              </a:lnSpc>
+              <a:buNone/>
+              <a:tabLst>
+                <a:tab algn="l" pos="0"/>
+              </a:tabLst>
+            </a:pPr>
+            <a:endParaRPr b="0" lang="en-AU" sz="2000" strike="noStrike" u="none">
+              <a:solidFill>
+                <a:srgbClr val="000000"/>
+              </a:solidFill>
+              <a:effectLst/>
+              <a:uFillTx/>
+              <a:latin typeface="Arial"/>
+            </a:endParaRPr>
+          </a:p>
+        </p:txBody>
+      </p:sp>
+    </p:spTree>
+  </p:cSld>
+</p:notes>
+</file>
+
+<file path=ppt/notesSlides/notesSlide24.xml><?xml version="1.0" encoding="utf-8"?>
+<p:notes xmlns:a="http://schemas.openxmlformats.org/drawingml/2006/main" xmlns:p="http://schemas.openxmlformats.org/presentationml/2006/main" xmlns:r="http://schemas.openxmlformats.org/officeDocument/2006/relationships" xmlns:p14="http://schemas.microsoft.com/office/powerpoint/2010/main" xmlns:p15="http://schemas.microsoft.com/office/powerpoint/2012/main" xmlns:mc="http://schemas.openxmlformats.org/markup-compatibility/2006">
+  <p:cSld>
+    <p:spTree>
+      <p:nvGrpSpPr>
+        <p:cNvPr id="1" name=""/>
+        <p:cNvGrpSpPr/>
+        <p:nvPr/>
+      </p:nvGrpSpPr>
+      <p:grpSpPr>
+        <a:xfrm>
+          <a:off x="0" y="0"/>
+          <a:ext cx="0" cy="0"/>
+          <a:chOff x="0" y="0"/>
+          <a:chExt cx="0" cy="0"/>
+        </a:xfrm>
+      </p:grpSpPr>
+      <p:sp>
+        <p:nvSpPr>
+          <p:cNvPr id="122" name="PlaceHolder 1"/>
+          <p:cNvSpPr>
+            <a:spLocks noGrp="1"/>
+          </p:cNvSpPr>
+          <p:nvPr>
+            <p:ph type="sldImg"/>
+          </p:nvPr>
+        </p:nvSpPr>
+        <p:spPr>
+          <a:xfrm>
+            <a:off x="216000" y="812520"/>
+            <a:ext cx="7125480" cy="4007160"/>
+          </a:xfrm>
+          <a:prstGeom prst="rect">
+            <a:avLst/>
+          </a:prstGeom>
+          <a:ln w="0">
+            <a:noFill/>
+          </a:ln>
+        </p:spPr>
+      </p:sp>
+      <p:sp>
+        <p:nvSpPr>
+          <p:cNvPr id="123" name="PlaceHolder 2"/>
+          <p:cNvSpPr>
+            <a:spLocks noGrp="1"/>
+          </p:cNvSpPr>
+          <p:nvPr>
+            <p:ph type="body"/>
+          </p:nvPr>
+        </p:nvSpPr>
+        <p:spPr>
+          <a:xfrm>
+            <a:off x="756000" y="5078520"/>
+            <a:ext cx="6045840" cy="4809240"/>
+          </a:xfrm>
+          <a:prstGeom prst="rect">
+            <a:avLst/>
+          </a:prstGeom>
+          <a:noFill/>
+          <a:ln w="0">
+            <a:noFill/>
+          </a:ln>
+        </p:spPr>
+        <p:txBody>
+          <a:bodyPr lIns="0" rIns="0" tIns="0" bIns="0" anchor="t">
+            <a:noAutofit/>
+          </a:bodyPr>
+          <a:p>
+            <a:pPr indent="0">
+              <a:lnSpc>
+                <a:spcPct val="100000"/>
+              </a:lnSpc>
+              <a:buNone/>
+              <a:tabLst>
+                <a:tab algn="l" pos="0"/>
+              </a:tabLst>
+            </a:pPr>
+            <a:r>
+              <a:rPr b="0" lang="en-AU" sz="2000" strike="noStrike" u="none">
+                <a:solidFill>
+                  <a:srgbClr val="000000"/>
+                </a:solidFill>
+                <a:effectLst/>
+                <a:uFillTx/>
+                <a:latin typeface="Arial"/>
+              </a:rPr>
+              <a:t>Final query to general LLM asks about PCI DSS</a:t>
+            </a:r>
+            <a:endParaRPr b="0" lang="en-AU" sz="2000" strike="noStrike" u="none">
+              <a:solidFill>
+                <a:srgbClr val="000000"/>
+              </a:solidFill>
+              <a:effectLst/>
+              <a:uFillTx/>
+              <a:latin typeface="Arial"/>
+            </a:endParaRPr>
+          </a:p>
+          <a:p>
+            <a:pPr indent="0">
+              <a:lnSpc>
+                <a:spcPct val="100000"/>
+              </a:lnSpc>
+              <a:buNone/>
+              <a:tabLst>
+                <a:tab algn="l" pos="0"/>
+              </a:tabLst>
+            </a:pPr>
+            <a:endParaRPr b="0" lang="en-AU" sz="2000" strike="noStrike" u="none">
+              <a:solidFill>
+                <a:srgbClr val="000000"/>
+              </a:solidFill>
+              <a:effectLst/>
+              <a:uFillTx/>
+              <a:latin typeface="Arial"/>
+            </a:endParaRPr>
+          </a:p>
+          <a:p>
+            <a:pPr indent="0">
+              <a:lnSpc>
+                <a:spcPct val="100000"/>
+              </a:lnSpc>
+              <a:buNone/>
+              <a:tabLst>
+                <a:tab algn="l" pos="0"/>
+              </a:tabLst>
+            </a:pPr>
+            <a:r>
+              <a:rPr b="0" lang="en-AU" sz="2000" strike="noStrike" u="none">
+                <a:solidFill>
+                  <a:srgbClr val="000000"/>
+                </a:solidFill>
+                <a:effectLst/>
+                <a:uFillTx/>
+                <a:latin typeface="Arial"/>
+              </a:rPr>
+              <a:t>RAG query result is incorporated as a structured input</a:t>
+            </a:r>
+            <a:endParaRPr b="0" lang="en-AU" sz="2000" strike="noStrike" u="none">
+              <a:solidFill>
+                <a:srgbClr val="000000"/>
+              </a:solidFill>
+              <a:effectLst/>
+              <a:uFillTx/>
+              <a:latin typeface="Arial"/>
+            </a:endParaRPr>
+          </a:p>
+          <a:p>
+            <a:pPr indent="0">
+              <a:lnSpc>
+                <a:spcPct val="100000"/>
+              </a:lnSpc>
+              <a:buNone/>
+              <a:tabLst>
+                <a:tab algn="l" pos="0"/>
+              </a:tabLst>
+            </a:pPr>
+            <a:endParaRPr b="0" lang="en-AU" sz="2000" strike="noStrike" u="none">
+              <a:solidFill>
+                <a:srgbClr val="000000"/>
+              </a:solidFill>
+              <a:effectLst/>
+              <a:uFillTx/>
+              <a:latin typeface="Arial"/>
+            </a:endParaRPr>
+          </a:p>
+          <a:p>
+            <a:pPr indent="0">
+              <a:lnSpc>
+                <a:spcPct val="100000"/>
+              </a:lnSpc>
+              <a:buNone/>
+              <a:tabLst>
+                <a:tab algn="l" pos="0"/>
+              </a:tabLst>
+            </a:pPr>
+            <a:endParaRPr b="0" lang="en-AU" sz="2000" strike="noStrike" u="none">
+              <a:solidFill>
+                <a:srgbClr val="000000"/>
+              </a:solidFill>
+              <a:effectLst/>
+              <a:uFillTx/>
+              <a:latin typeface="Arial"/>
+            </a:endParaRPr>
+          </a:p>
+          <a:p>
+            <a:pPr indent="0">
+              <a:lnSpc>
+                <a:spcPct val="100000"/>
+              </a:lnSpc>
+              <a:buNone/>
+              <a:tabLst>
+                <a:tab algn="l" pos="0"/>
+              </a:tabLst>
+            </a:pPr>
+            <a:endParaRPr b="0" lang="en-AU" sz="2000" strike="noStrike" u="none">
+              <a:solidFill>
+                <a:srgbClr val="000000"/>
+              </a:solidFill>
+              <a:effectLst/>
+              <a:uFillTx/>
+              <a:latin typeface="Arial"/>
+            </a:endParaRPr>
+          </a:p>
+        </p:txBody>
+      </p:sp>
+    </p:spTree>
+  </p:cSld>
+</p:notes>
+</file>
+
+<file path=ppt/notesSlides/notesSlide25.xml><?xml version="1.0" encoding="utf-8"?>
+<p:notes xmlns:a="http://schemas.openxmlformats.org/drawingml/2006/main" xmlns:p="http://schemas.openxmlformats.org/presentationml/2006/main" xmlns:r="http://schemas.openxmlformats.org/officeDocument/2006/relationships" xmlns:p14="http://schemas.microsoft.com/office/powerpoint/2010/main" xmlns:p15="http://schemas.microsoft.com/office/powerpoint/2012/main" xmlns:mc="http://schemas.openxmlformats.org/markup-compatibility/2006">
+  <p:cSld>
+    <p:spTree>
+      <p:nvGrpSpPr>
+        <p:cNvPr id="1" name=""/>
+        <p:cNvGrpSpPr/>
+        <p:nvPr/>
+      </p:nvGrpSpPr>
+      <p:grpSpPr>
+        <a:xfrm>
+          <a:off x="0" y="0"/>
+          <a:ext cx="0" cy="0"/>
+          <a:chOff x="0" y="0"/>
+          <a:chExt cx="0" cy="0"/>
+        </a:xfrm>
+      </p:grpSpPr>
+      <p:sp>
+        <p:nvSpPr>
+          <p:cNvPr id="124" name="PlaceHolder 1"/>
+          <p:cNvSpPr>
+            <a:spLocks noGrp="1"/>
+          </p:cNvSpPr>
+          <p:nvPr>
+            <p:ph type="sldImg"/>
+          </p:nvPr>
+        </p:nvSpPr>
+        <p:spPr>
+          <a:xfrm>
+            <a:off x="216000" y="812520"/>
+            <a:ext cx="7125480" cy="4007160"/>
+          </a:xfrm>
+          <a:prstGeom prst="rect">
+            <a:avLst/>
+          </a:prstGeom>
+          <a:ln w="0">
+            <a:noFill/>
+          </a:ln>
+        </p:spPr>
+      </p:sp>
+      <p:sp>
+        <p:nvSpPr>
+          <p:cNvPr id="125" name="PlaceHolder 2"/>
+          <p:cNvSpPr>
+            <a:spLocks noGrp="1"/>
+          </p:cNvSpPr>
+          <p:nvPr>
+            <p:ph type="body"/>
+          </p:nvPr>
+        </p:nvSpPr>
+        <p:spPr>
+          <a:xfrm>
+            <a:off x="756000" y="5078520"/>
+            <a:ext cx="6045840" cy="4809240"/>
+          </a:xfrm>
+          <a:prstGeom prst="rect">
+            <a:avLst/>
+          </a:prstGeom>
+          <a:noFill/>
+          <a:ln w="0">
+            <a:noFill/>
+          </a:ln>
+        </p:spPr>
+        <p:txBody>
+          <a:bodyPr lIns="0" rIns="0" tIns="0" bIns="0" anchor="t">
+            <a:noAutofit/>
+          </a:bodyPr>
+          <a:p>
+            <a:pPr indent="0">
+              <a:lnSpc>
+                <a:spcPct val="100000"/>
+              </a:lnSpc>
+              <a:buNone/>
+              <a:tabLst>
+                <a:tab algn="l" pos="0"/>
+              </a:tabLst>
+            </a:pPr>
+            <a:r>
+              <a:rPr b="0" lang="en-AU" sz="2000" strike="noStrike" u="none">
+                <a:solidFill>
+                  <a:srgbClr val="000000"/>
+                </a:solidFill>
+                <a:effectLst/>
+                <a:uFillTx/>
+                <a:latin typeface="Arial"/>
+              </a:rPr>
+              <a:t>The reply from general LLM incorporates:</a:t>
+            </a:r>
+            <a:endParaRPr b="0" lang="en-AU" sz="2000" strike="noStrike" u="none">
+              <a:solidFill>
+                <a:srgbClr val="000000"/>
+              </a:solidFill>
+              <a:effectLst/>
+              <a:uFillTx/>
+              <a:latin typeface="Arial"/>
+            </a:endParaRPr>
+          </a:p>
+          <a:p>
+            <a:pPr indent="0">
+              <a:lnSpc>
+                <a:spcPct val="100000"/>
+              </a:lnSpc>
+              <a:buNone/>
+              <a:tabLst>
+                <a:tab algn="l" pos="0"/>
+              </a:tabLst>
+            </a:pPr>
+            <a:endParaRPr b="0" lang="en-AU" sz="2000" strike="noStrike" u="none">
+              <a:solidFill>
+                <a:srgbClr val="000000"/>
+              </a:solidFill>
+              <a:effectLst/>
+              <a:uFillTx/>
+              <a:latin typeface="Arial"/>
+            </a:endParaRPr>
+          </a:p>
+          <a:p>
+            <a:pPr indent="0">
+              <a:lnSpc>
+                <a:spcPct val="100000"/>
+              </a:lnSpc>
+              <a:buNone/>
+              <a:tabLst>
+                <a:tab algn="l" pos="0"/>
+              </a:tabLst>
+            </a:pPr>
+            <a:r>
+              <a:rPr b="0" lang="en-AU" sz="2000" strike="noStrike" u="none">
+                <a:solidFill>
+                  <a:srgbClr val="000000"/>
+                </a:solidFill>
+                <a:effectLst/>
+                <a:uFillTx/>
+                <a:latin typeface="Arial"/>
+              </a:rPr>
+              <a:t>- private data</a:t>
+            </a:r>
+            <a:endParaRPr b="0" lang="en-AU" sz="2000" strike="noStrike" u="none">
+              <a:solidFill>
+                <a:srgbClr val="000000"/>
+              </a:solidFill>
+              <a:effectLst/>
+              <a:uFillTx/>
+              <a:latin typeface="Arial"/>
+            </a:endParaRPr>
+          </a:p>
+          <a:p>
+            <a:pPr indent="0">
+              <a:lnSpc>
+                <a:spcPct val="100000"/>
+              </a:lnSpc>
+              <a:buNone/>
+              <a:tabLst>
+                <a:tab algn="l" pos="0"/>
+              </a:tabLst>
+            </a:pPr>
+            <a:endParaRPr b="0" lang="en-AU" sz="2000" strike="noStrike" u="none">
+              <a:solidFill>
+                <a:srgbClr val="000000"/>
+              </a:solidFill>
+              <a:effectLst/>
+              <a:uFillTx/>
+              <a:latin typeface="Arial"/>
+            </a:endParaRPr>
+          </a:p>
+          <a:p>
+            <a:pPr indent="0">
+              <a:lnSpc>
+                <a:spcPct val="100000"/>
+              </a:lnSpc>
+              <a:buNone/>
+              <a:tabLst>
+                <a:tab algn="l" pos="0"/>
+              </a:tabLst>
+            </a:pPr>
+            <a:r>
+              <a:rPr b="0" lang="en-AU" sz="2000" strike="noStrike" u="none">
+                <a:solidFill>
+                  <a:srgbClr val="000000"/>
+                </a:solidFill>
+                <a:effectLst/>
+                <a:uFillTx/>
+                <a:latin typeface="Arial"/>
+              </a:rPr>
+              <a:t>- public data in the form of PCI DSS</a:t>
+            </a:r>
+            <a:endParaRPr b="0" lang="en-AU" sz="2000" strike="noStrike" u="none">
+              <a:solidFill>
+                <a:srgbClr val="000000"/>
+              </a:solidFill>
+              <a:effectLst/>
+              <a:uFillTx/>
+              <a:latin typeface="Arial"/>
+            </a:endParaRPr>
+          </a:p>
+          <a:p>
+            <a:pPr indent="0">
+              <a:lnSpc>
+                <a:spcPct val="100000"/>
+              </a:lnSpc>
+              <a:buNone/>
+              <a:tabLst>
+                <a:tab algn="l" pos="0"/>
+              </a:tabLst>
+            </a:pPr>
+            <a:endParaRPr b="0" lang="en-AU" sz="2000" strike="noStrike" u="none">
+              <a:solidFill>
+                <a:srgbClr val="000000"/>
+              </a:solidFill>
+              <a:effectLst/>
+              <a:uFillTx/>
+              <a:latin typeface="Arial"/>
+            </a:endParaRPr>
+          </a:p>
+          <a:p>
+            <a:pPr indent="0">
+              <a:lnSpc>
+                <a:spcPct val="100000"/>
+              </a:lnSpc>
+              <a:buNone/>
+              <a:tabLst>
+                <a:tab algn="l" pos="0"/>
+              </a:tabLst>
+            </a:pPr>
+            <a:endParaRPr b="0" lang="en-AU" sz="2000" strike="noStrike" u="none">
+              <a:solidFill>
+                <a:srgbClr val="000000"/>
+              </a:solidFill>
+              <a:effectLst/>
+              <a:uFillTx/>
+              <a:latin typeface="Arial"/>
+            </a:endParaRPr>
+          </a:p>
+          <a:p>
+            <a:pPr indent="0">
+              <a:lnSpc>
+                <a:spcPct val="100000"/>
+              </a:lnSpc>
+              <a:buNone/>
+              <a:tabLst>
+                <a:tab algn="l" pos="0"/>
+              </a:tabLst>
+            </a:pPr>
+            <a:endParaRPr b="0" lang="en-AU" sz="2000" strike="noStrike" u="none">
+              <a:solidFill>
+                <a:srgbClr val="000000"/>
+              </a:solidFill>
+              <a:effectLst/>
+              <a:uFillTx/>
+              <a:latin typeface="Arial"/>
+            </a:endParaRPr>
+          </a:p>
+          <a:p>
+            <a:pPr indent="0">
+              <a:lnSpc>
+                <a:spcPct val="100000"/>
+              </a:lnSpc>
+              <a:buNone/>
+              <a:tabLst>
+                <a:tab algn="l" pos="0"/>
+              </a:tabLst>
+            </a:pPr>
+            <a:endParaRPr b="0" lang="en-AU" sz="2000" strike="noStrike" u="none">
+              <a:solidFill>
+                <a:srgbClr val="000000"/>
+              </a:solidFill>
+              <a:effectLst/>
+              <a:uFillTx/>
+              <a:latin typeface="Arial"/>
+            </a:endParaRPr>
+          </a:p>
+          <a:p>
+            <a:pPr indent="0">
+              <a:lnSpc>
+                <a:spcPct val="100000"/>
+              </a:lnSpc>
+              <a:buNone/>
+              <a:tabLst>
+                <a:tab algn="l" pos="0"/>
+              </a:tabLst>
+            </a:pPr>
+            <a:endParaRPr b="0" lang="en-AU" sz="2000" strike="noStrike" u="none">
+              <a:solidFill>
+                <a:srgbClr val="000000"/>
+              </a:solidFill>
+              <a:effectLst/>
+              <a:uFillTx/>
+              <a:latin typeface="Arial"/>
+            </a:endParaRPr>
+          </a:p>
+          <a:p>
+            <a:pPr indent="0">
+              <a:lnSpc>
+                <a:spcPct val="100000"/>
+              </a:lnSpc>
+              <a:buNone/>
+              <a:tabLst>
+                <a:tab algn="l" pos="0"/>
+              </a:tabLst>
+            </a:pPr>
+            <a:endParaRPr b="0" lang="en-AU" sz="2000" strike="noStrike" u="none">
+              <a:solidFill>
+                <a:srgbClr val="000000"/>
+              </a:solidFill>
+              <a:effectLst/>
+              <a:uFillTx/>
+              <a:latin typeface="Arial"/>
+            </a:endParaRPr>
+          </a:p>
+        </p:txBody>
+      </p:sp>
+    </p:spTree>
+  </p:cSld>
+</p:notes>
+</file>
+
+<file path=ppt/notesSlides/notesSlide26.xml><?xml version="1.0" encoding="utf-8"?>
+<p:notes xmlns:a="http://schemas.openxmlformats.org/drawingml/2006/main" xmlns:p="http://schemas.openxmlformats.org/presentationml/2006/main" xmlns:r="http://schemas.openxmlformats.org/officeDocument/2006/relationships" xmlns:p14="http://schemas.microsoft.com/office/powerpoint/2010/main" xmlns:p15="http://schemas.microsoft.com/office/powerpoint/2012/main" xmlns:mc="http://schemas.openxmlformats.org/markup-compatibility/2006">
+  <p:cSld>
+    <p:spTree>
+      <p:nvGrpSpPr>
+        <p:cNvPr id="1" name=""/>
+        <p:cNvGrpSpPr/>
+        <p:nvPr/>
+      </p:nvGrpSpPr>
+      <p:grpSpPr>
+        <a:xfrm>
+          <a:off x="0" y="0"/>
+          <a:ext cx="0" cy="0"/>
+          <a:chOff x="0" y="0"/>
+          <a:chExt cx="0" cy="0"/>
+        </a:xfrm>
+      </p:grpSpPr>
+      <p:sp>
+        <p:nvSpPr>
+          <p:cNvPr id="126" name="PlaceHolder 1"/>
+          <p:cNvSpPr>
+            <a:spLocks noGrp="1"/>
+          </p:cNvSpPr>
+          <p:nvPr>
+            <p:ph type="sldImg"/>
+          </p:nvPr>
+        </p:nvSpPr>
+        <p:spPr>
+          <a:xfrm>
+            <a:off x="216000" y="812520"/>
+            <a:ext cx="7125480" cy="4007160"/>
+          </a:xfrm>
+          <a:prstGeom prst="rect">
+            <a:avLst/>
+          </a:prstGeom>
+          <a:ln w="0">
+            <a:noFill/>
+          </a:ln>
+        </p:spPr>
+      </p:sp>
+      <p:sp>
+        <p:nvSpPr>
+          <p:cNvPr id="127" name="PlaceHolder 2"/>
+          <p:cNvSpPr>
+            <a:spLocks noGrp="1"/>
+          </p:cNvSpPr>
+          <p:nvPr>
+            <p:ph type="body"/>
+          </p:nvPr>
+        </p:nvSpPr>
+        <p:spPr>
+          <a:xfrm>
+            <a:off x="756000" y="5078520"/>
+            <a:ext cx="6045840" cy="4809240"/>
           </a:xfrm>
           <a:prstGeom prst="rect">
             <a:avLst/>
@@ -3068,7 +4144,7 @@
       </p:grpSpPr>
       <p:sp>
         <p:nvSpPr>
-          <p:cNvPr id="77" name="PlaceHolder 1"/>
+          <p:cNvPr id="88" name="PlaceHolder 1"/>
           <p:cNvSpPr>
             <a:spLocks noGrp="1"/>
           </p:cNvSpPr>
@@ -3079,7 +4155,7 @@
         <p:spPr>
           <a:xfrm>
             <a:off x="216000" y="812520"/>
-            <a:ext cx="7126560" cy="4008240"/>
+            <a:ext cx="7125480" cy="4007160"/>
           </a:xfrm>
           <a:prstGeom prst="rect">
             <a:avLst/>
@@ -3091,7 +4167,7 @@
       </p:sp>
       <p:sp>
         <p:nvSpPr>
-          <p:cNvPr id="78" name="PlaceHolder 2"/>
+          <p:cNvPr id="89" name="PlaceHolder 2"/>
           <p:cNvSpPr>
             <a:spLocks noGrp="1"/>
           </p:cNvSpPr>
@@ -3102,7 +4178,7 @@
         <p:spPr>
           <a:xfrm>
             <a:off x="756000" y="5078520"/>
-            <a:ext cx="6046920" cy="4810320"/>
+            <a:ext cx="6045840" cy="4809240"/>
           </a:xfrm>
           <a:prstGeom prst="rect">
             <a:avLst/>
@@ -3135,7 +4211,7 @@
                 <a:uFillTx/>
                 <a:latin typeface="Arial"/>
               </a:rPr>
-              <a:t>In the example application we combine private and public data. </a:t>
+              <a:t>Large Language Models allow to replace mundane text generation with automation. This can lead to reduction in labour expenses and increase in profitability.</a:t>
             </a:r>
             <a:endParaRPr b="0" lang="en-AU" sz="2000" strike="noStrike" u="none">
               <a:solidFill>
@@ -3184,7 +4260,7 @@
                 <a:uFillTx/>
                 <a:latin typeface="Arial"/>
               </a:rPr>
-              <a:t>Private data is collected from penetration test reports conducted on the enterprise network and applications. Results recorded in the reports are confidential to the organisation.</a:t>
+              <a:t>Incorporating LLMs require changes in business process.</a:t>
             </a:r>
             <a:endParaRPr b="0" lang="en-AU" sz="2000" strike="noStrike" u="none">
               <a:solidFill>
@@ -3233,7 +4309,105 @@
                 <a:uFillTx/>
                 <a:latin typeface="Arial"/>
               </a:rPr>
-              <a:t>Public data is the PCI DSS standard. This standard is a part of public domain. As a result, generally available LLMs are trained on this document.</a:t>
+              <a:t>Every company have access to LLMs trained on public data. Therefore, the knowledge of public data is not a competitive advantage. Only private data gives advantage.</a:t>
+            </a:r>
+            <a:endParaRPr b="0" lang="en-AU" sz="2000" strike="noStrike" u="none">
+              <a:solidFill>
+                <a:srgbClr val="000000"/>
+              </a:solidFill>
+              <a:effectLst/>
+              <a:uFillTx/>
+              <a:latin typeface="Arial"/>
+            </a:endParaRPr>
+          </a:p>
+          <a:p>
+            <a:pPr indent="0">
+              <a:lnSpc>
+                <a:spcPct val="100000"/>
+              </a:lnSpc>
+              <a:buNone/>
+              <a:tabLst>
+                <a:tab algn="l" pos="0"/>
+              </a:tabLst>
+            </a:pPr>
+            <a:endParaRPr b="0" lang="en-AU" sz="2000" strike="noStrike" u="none">
+              <a:solidFill>
+                <a:srgbClr val="000000"/>
+              </a:solidFill>
+              <a:effectLst/>
+              <a:uFillTx/>
+              <a:latin typeface="Arial"/>
+            </a:endParaRPr>
+          </a:p>
+          <a:p>
+            <a:pPr indent="0">
+              <a:lnSpc>
+                <a:spcPct val="100000"/>
+              </a:lnSpc>
+              <a:buNone/>
+              <a:tabLst>
+                <a:tab algn="l" pos="0"/>
+              </a:tabLst>
+            </a:pPr>
+            <a:r>
+              <a:rPr b="0" lang="en-AU" sz="2000" strike="noStrike" u="none">
+                <a:solidFill>
+                  <a:srgbClr val="000000"/>
+                </a:solidFill>
+                <a:effectLst/>
+                <a:uFillTx/>
+                <a:latin typeface="Arial"/>
+              </a:rPr>
+              <a:t>Investing in LLM workflows should focus on using private data. This gives biggest advantage.</a:t>
+            </a:r>
+            <a:endParaRPr b="0" lang="en-AU" sz="2000" strike="noStrike" u="none">
+              <a:solidFill>
+                <a:srgbClr val="000000"/>
+              </a:solidFill>
+              <a:effectLst/>
+              <a:uFillTx/>
+              <a:latin typeface="Arial"/>
+            </a:endParaRPr>
+          </a:p>
+          <a:p>
+            <a:pPr indent="0">
+              <a:lnSpc>
+                <a:spcPct val="100000"/>
+              </a:lnSpc>
+              <a:buNone/>
+              <a:tabLst>
+                <a:tab algn="l" pos="0"/>
+              </a:tabLst>
+            </a:pPr>
+            <a:endParaRPr b="0" lang="en-AU" sz="2000" strike="noStrike" u="none">
+              <a:solidFill>
+                <a:srgbClr val="000000"/>
+              </a:solidFill>
+              <a:effectLst/>
+              <a:uFillTx/>
+              <a:latin typeface="Arial"/>
+            </a:endParaRPr>
+          </a:p>
+          <a:p>
+            <a:pPr indent="0">
+              <a:lnSpc>
+                <a:spcPct val="100000"/>
+              </a:lnSpc>
+              <a:buNone/>
+              <a:tabLst>
+                <a:tab algn="l" pos="0"/>
+              </a:tabLst>
+            </a:pPr>
+            <a:r>
+              <a:rPr b="0" lang="en-AU" sz="2000" strike="noStrike" u="none">
+                <a:solidFill>
+                  <a:srgbClr val="000000"/>
+                </a:solidFill>
+                <a:effectLst/>
+                <a:uFillTx/>
+                <a:latin typeface="Arial"/>
+              </a:rPr>
+              <a:t>More context – what we try to automate. – context of security work</a:t>
             </a:r>
             <a:endParaRPr b="0" lang="en-AU" sz="2000" strike="noStrike" u="none">
               <a:solidFill>
@@ -3270,7 +4444,7 @@
       </p:grpSpPr>
       <p:sp>
         <p:nvSpPr>
-          <p:cNvPr id="79" name="PlaceHolder 1"/>
+          <p:cNvPr id="90" name="PlaceHolder 1"/>
           <p:cNvSpPr>
             <a:spLocks noGrp="1"/>
           </p:cNvSpPr>
@@ -3281,7 +4455,7 @@
         <p:spPr>
           <a:xfrm>
             <a:off x="216000" y="812520"/>
-            <a:ext cx="7126560" cy="4008240"/>
+            <a:ext cx="7125480" cy="4007160"/>
           </a:xfrm>
           <a:prstGeom prst="rect">
             <a:avLst/>
@@ -3293,7 +4467,7 @@
       </p:sp>
       <p:sp>
         <p:nvSpPr>
-          <p:cNvPr id="80" name="PlaceHolder 2"/>
+          <p:cNvPr id="91" name="PlaceHolder 2"/>
           <p:cNvSpPr>
             <a:spLocks noGrp="1"/>
           </p:cNvSpPr>
@@ -3304,7 +4478,7 @@
         <p:spPr>
           <a:xfrm>
             <a:off x="756000" y="5078520"/>
-            <a:ext cx="6046920" cy="4810320"/>
+            <a:ext cx="6045840" cy="4809240"/>
           </a:xfrm>
           <a:prstGeom prst="rect">
             <a:avLst/>
@@ -3337,7 +4511,7 @@
                 <a:uFillTx/>
                 <a:latin typeface="Arial"/>
               </a:rPr>
-              <a:t>When the company decides to use LLM in business, it should decide how to incorporate private data in the machine.</a:t>
+              <a:t>In the example application we combine private and public data. </a:t>
             </a:r>
             <a:endParaRPr b="0" lang="en-AU" sz="2000" strike="noStrike" u="none">
               <a:solidFill>
@@ -3386,7 +4560,56 @@
                 <a:uFillTx/>
                 <a:latin typeface="Arial"/>
               </a:rPr>
-              <a:t>We will briefly describe the methods to deliver private data in the machine.</a:t>
+              <a:t>Private data is collected from penetration test reports conducted on the enterprise network and applications. Results recorded in the reports are confidential to the organisation.</a:t>
+            </a:r>
+            <a:endParaRPr b="0" lang="en-AU" sz="2000" strike="noStrike" u="none">
+              <a:solidFill>
+                <a:srgbClr val="000000"/>
+              </a:solidFill>
+              <a:effectLst/>
+              <a:uFillTx/>
+              <a:latin typeface="Arial"/>
+            </a:endParaRPr>
+          </a:p>
+          <a:p>
+            <a:pPr indent="0">
+              <a:lnSpc>
+                <a:spcPct val="100000"/>
+              </a:lnSpc>
+              <a:buNone/>
+              <a:tabLst>
+                <a:tab algn="l" pos="0"/>
+              </a:tabLst>
+            </a:pPr>
+            <a:endParaRPr b="0" lang="en-AU" sz="2000" strike="noStrike" u="none">
+              <a:solidFill>
+                <a:srgbClr val="000000"/>
+              </a:solidFill>
+              <a:effectLst/>
+              <a:uFillTx/>
+              <a:latin typeface="Arial"/>
+            </a:endParaRPr>
+          </a:p>
+          <a:p>
+            <a:pPr indent="0">
+              <a:lnSpc>
+                <a:spcPct val="100000"/>
+              </a:lnSpc>
+              <a:buNone/>
+              <a:tabLst>
+                <a:tab algn="l" pos="0"/>
+              </a:tabLst>
+            </a:pPr>
+            <a:r>
+              <a:rPr b="0" lang="en-AU" sz="2000" strike="noStrike" u="none">
+                <a:solidFill>
+                  <a:srgbClr val="000000"/>
+                </a:solidFill>
+                <a:effectLst/>
+                <a:uFillTx/>
+                <a:latin typeface="Arial"/>
+              </a:rPr>
+              <a:t>Public data is the PCI DSS standard. This standard is a part of public domain. As a result, generally available LLMs are trained on this document.</a:t>
             </a:r>
             <a:endParaRPr b="0" lang="en-AU" sz="2000" strike="noStrike" u="none">
               <a:solidFill>
@@ -3423,7 +4646,7 @@
       </p:grpSpPr>
       <p:sp>
         <p:nvSpPr>
-          <p:cNvPr id="81" name="PlaceHolder 1"/>
+          <p:cNvPr id="92" name="PlaceHolder 1"/>
           <p:cNvSpPr>
             <a:spLocks noGrp="1"/>
           </p:cNvSpPr>
@@ -3433,8 +4656,8 @@
         </p:nvSpPr>
         <p:spPr>
           <a:xfrm>
-            <a:off x="216360" y="812520"/>
-            <a:ext cx="7126200" cy="4008240"/>
+            <a:off x="216000" y="812520"/>
+            <a:ext cx="7125480" cy="4007160"/>
           </a:xfrm>
           <a:prstGeom prst="rect">
             <a:avLst/>
@@ -3446,7 +4669,7 @@
       </p:sp>
       <p:sp>
         <p:nvSpPr>
-          <p:cNvPr id="82" name="PlaceHolder 2"/>
+          <p:cNvPr id="93" name="PlaceHolder 2"/>
           <p:cNvSpPr>
             <a:spLocks noGrp="1"/>
           </p:cNvSpPr>
@@ -3457,7 +4680,7 @@
         <p:spPr>
           <a:xfrm>
             <a:off x="756000" y="5078520"/>
-            <a:ext cx="6046920" cy="4810320"/>
+            <a:ext cx="6045840" cy="4809240"/>
           </a:xfrm>
           <a:prstGeom prst="rect">
             <a:avLst/>
@@ -3490,7 +4713,7 @@
                 <a:uFillTx/>
                 <a:latin typeface="Arial"/>
               </a:rPr>
-              <a:t>RAG keeps private data separate from the machine in the database.</a:t>
+              <a:t>When the company decides to use LLM in business, it should decide how to incorporate private data in the machine.</a:t>
             </a:r>
             <a:endParaRPr b="0" lang="en-AU" sz="2000" strike="noStrike" u="none">
               <a:solidFill>
@@ -3539,105 +4762,7 @@
                 <a:uFillTx/>
                 <a:latin typeface="Arial"/>
               </a:rPr>
-              <a:t>Such database has to be created and maintained by the organisation.</a:t>
-            </a:r>
-            <a:endParaRPr b="0" lang="en-AU" sz="2000" strike="noStrike" u="none">
-              <a:solidFill>
-                <a:srgbClr val="000000"/>
-              </a:solidFill>
-              <a:effectLst/>
-              <a:uFillTx/>
-              <a:latin typeface="Arial"/>
-            </a:endParaRPr>
-          </a:p>
-          <a:p>
-            <a:pPr indent="0">
-              <a:lnSpc>
-                <a:spcPct val="100000"/>
-              </a:lnSpc>
-              <a:buNone/>
-              <a:tabLst>
-                <a:tab algn="l" pos="0"/>
-              </a:tabLst>
-            </a:pPr>
-            <a:endParaRPr b="0" lang="en-AU" sz="2000" strike="noStrike" u="none">
-              <a:solidFill>
-                <a:srgbClr val="000000"/>
-              </a:solidFill>
-              <a:effectLst/>
-              <a:uFillTx/>
-              <a:latin typeface="Arial"/>
-            </a:endParaRPr>
-          </a:p>
-          <a:p>
-            <a:pPr indent="0">
-              <a:lnSpc>
-                <a:spcPct val="100000"/>
-              </a:lnSpc>
-              <a:buNone/>
-              <a:tabLst>
-                <a:tab algn="l" pos="0"/>
-              </a:tabLst>
-            </a:pPr>
-            <a:r>
-              <a:rPr b="0" lang="en-AU" sz="2000" strike="noStrike" u="none">
-                <a:solidFill>
-                  <a:srgbClr val="000000"/>
-                </a:solidFill>
-                <a:effectLst/>
-                <a:uFillTx/>
-                <a:latin typeface="Arial"/>
-              </a:rPr>
-              <a:t>Part of the example application called Indexer creates and maintains RAG database.</a:t>
-            </a:r>
-            <a:endParaRPr b="0" lang="en-AU" sz="2000" strike="noStrike" u="none">
-              <a:solidFill>
-                <a:srgbClr val="000000"/>
-              </a:solidFill>
-              <a:effectLst/>
-              <a:uFillTx/>
-              <a:latin typeface="Arial"/>
-            </a:endParaRPr>
-          </a:p>
-          <a:p>
-            <a:pPr indent="0">
-              <a:lnSpc>
-                <a:spcPct val="100000"/>
-              </a:lnSpc>
-              <a:buNone/>
-              <a:tabLst>
-                <a:tab algn="l" pos="0"/>
-              </a:tabLst>
-            </a:pPr>
-            <a:endParaRPr b="0" lang="en-AU" sz="2000" strike="noStrike" u="none">
-              <a:solidFill>
-                <a:srgbClr val="000000"/>
-              </a:solidFill>
-              <a:effectLst/>
-              <a:uFillTx/>
-              <a:latin typeface="Arial"/>
-            </a:endParaRPr>
-          </a:p>
-          <a:p>
-            <a:pPr indent="0">
-              <a:lnSpc>
-                <a:spcPct val="100000"/>
-              </a:lnSpc>
-              <a:buNone/>
-              <a:tabLst>
-                <a:tab algn="l" pos="0"/>
-              </a:tabLst>
-            </a:pPr>
-            <a:r>
-              <a:rPr b="0" lang="en-AU" sz="2000" strike="noStrike" u="none">
-                <a:solidFill>
-                  <a:srgbClr val="000000"/>
-                </a:solidFill>
-                <a:effectLst/>
-                <a:uFillTx/>
-                <a:latin typeface="Arial"/>
-              </a:rPr>
-              <a:t>Note that the steps required to created RAG solution can be reused in Tuning solution. </a:t>
+              <a:t>We will briefly describe the methods to deliver private data in the machine.</a:t>
             </a:r>
             <a:endParaRPr b="0" lang="en-AU" sz="2000" strike="noStrike" u="none">
               <a:solidFill>
@@ -3674,7 +4799,7 @@
       </p:grpSpPr>
       <p:sp>
         <p:nvSpPr>
-          <p:cNvPr id="83" name="PlaceHolder 1"/>
+          <p:cNvPr id="94" name="PlaceHolder 1"/>
           <p:cNvSpPr>
             <a:spLocks noGrp="1"/>
           </p:cNvSpPr>
@@ -3685,7 +4810,7 @@
         <p:spPr>
           <a:xfrm>
             <a:off x="216360" y="812520"/>
-            <a:ext cx="7126200" cy="4008240"/>
+            <a:ext cx="7125120" cy="4007160"/>
           </a:xfrm>
           <a:prstGeom prst="rect">
             <a:avLst/>
@@ -3697,7 +4822,7 @@
       </p:sp>
       <p:sp>
         <p:nvSpPr>
-          <p:cNvPr id="84" name="PlaceHolder 2"/>
+          <p:cNvPr id="95" name="PlaceHolder 2"/>
           <p:cNvSpPr>
             <a:spLocks noGrp="1"/>
           </p:cNvSpPr>
@@ -3708,7 +4833,7 @@
         <p:spPr>
           <a:xfrm>
             <a:off x="756000" y="5078520"/>
-            <a:ext cx="6046920" cy="4810320"/>
+            <a:ext cx="6045840" cy="4809240"/>
           </a:xfrm>
           <a:prstGeom prst="rect">
             <a:avLst/>
@@ -3741,7 +4866,7 @@
                 <a:uFillTx/>
                 <a:latin typeface="Arial"/>
               </a:rPr>
-              <a:t>Tuning process incorporates private data into LLM decision making. </a:t>
+              <a:t>RAG keeps private data separate from the machine in the database.</a:t>
             </a:r>
             <a:endParaRPr b="0" lang="en-AU" sz="2000" strike="noStrike" u="none">
               <a:solidFill>
@@ -3790,7 +4915,7 @@
                 <a:uFillTx/>
                 <a:latin typeface="Arial"/>
               </a:rPr>
-              <a:t>This method depends on the quality of data supplied.</a:t>
+              <a:t>Such database has to be created and maintained by the organisation.</a:t>
             </a:r>
             <a:endParaRPr b="0" lang="en-AU" sz="2000" strike="noStrike" u="none">
               <a:solidFill>
@@ -3839,7 +4964,56 @@
                 <a:uFillTx/>
                 <a:latin typeface="Arial"/>
               </a:rPr>
-              <a:t>Note that RAG solution can be used to verify quality of data before deployment of Tuning solution. </a:t>
+              <a:t>Part of the example application called Indexer creates and maintains RAG database.</a:t>
+            </a:r>
+            <a:endParaRPr b="0" lang="en-AU" sz="2000" strike="noStrike" u="none">
+              <a:solidFill>
+                <a:srgbClr val="000000"/>
+              </a:solidFill>
+              <a:effectLst/>
+              <a:uFillTx/>
+              <a:latin typeface="Arial"/>
+            </a:endParaRPr>
+          </a:p>
+          <a:p>
+            <a:pPr indent="0">
+              <a:lnSpc>
+                <a:spcPct val="100000"/>
+              </a:lnSpc>
+              <a:buNone/>
+              <a:tabLst>
+                <a:tab algn="l" pos="0"/>
+              </a:tabLst>
+            </a:pPr>
+            <a:endParaRPr b="0" lang="en-AU" sz="2000" strike="noStrike" u="none">
+              <a:solidFill>
+                <a:srgbClr val="000000"/>
+              </a:solidFill>
+              <a:effectLst/>
+              <a:uFillTx/>
+              <a:latin typeface="Arial"/>
+            </a:endParaRPr>
+          </a:p>
+          <a:p>
+            <a:pPr indent="0">
+              <a:lnSpc>
+                <a:spcPct val="100000"/>
+              </a:lnSpc>
+              <a:buNone/>
+              <a:tabLst>
+                <a:tab algn="l" pos="0"/>
+              </a:tabLst>
+            </a:pPr>
+            <a:r>
+              <a:rPr b="0" lang="en-AU" sz="2000" strike="noStrike" u="none">
+                <a:solidFill>
+                  <a:srgbClr val="000000"/>
+                </a:solidFill>
+                <a:effectLst/>
+                <a:uFillTx/>
+                <a:latin typeface="Arial"/>
+              </a:rPr>
+              <a:t>Note that the steps required to created RAG solution can be reused in Tuning solution. </a:t>
             </a:r>
             <a:endParaRPr b="0" lang="en-AU" sz="2000" strike="noStrike" u="none">
               <a:solidFill>
@@ -3876,7 +5050,7 @@
       </p:grpSpPr>
       <p:sp>
         <p:nvSpPr>
-          <p:cNvPr id="85" name="PlaceHolder 1"/>
+          <p:cNvPr id="96" name="PlaceHolder 1"/>
           <p:cNvSpPr>
             <a:spLocks noGrp="1"/>
           </p:cNvSpPr>
@@ -3887,7 +5061,7 @@
         <p:spPr>
           <a:xfrm>
             <a:off x="216360" y="812520"/>
-            <a:ext cx="7126200" cy="4008240"/>
+            <a:ext cx="7125120" cy="4007160"/>
           </a:xfrm>
           <a:prstGeom prst="rect">
             <a:avLst/>
@@ -3899,7 +5073,7 @@
       </p:sp>
       <p:sp>
         <p:nvSpPr>
-          <p:cNvPr id="86" name="PlaceHolder 2"/>
+          <p:cNvPr id="97" name="PlaceHolder 2"/>
           <p:cNvSpPr>
             <a:spLocks noGrp="1"/>
           </p:cNvSpPr>
@@ -3910,7 +5084,7 @@
         <p:spPr>
           <a:xfrm>
             <a:off x="756000" y="5078520"/>
-            <a:ext cx="6046920" cy="4810320"/>
+            <a:ext cx="6045840" cy="4809240"/>
           </a:xfrm>
           <a:prstGeom prst="rect">
             <a:avLst/>
@@ -3943,7 +5117,7 @@
                 <a:uFillTx/>
                 <a:latin typeface="Arial"/>
               </a:rPr>
-              <a:t>We believe that organisations entering ML can benefit from gradual introduction.</a:t>
+              <a:t>Tuning process incorporates private data into LLM decision making. </a:t>
             </a:r>
             <a:endParaRPr b="0" lang="en-AU" sz="2000" strike="noStrike" u="none">
               <a:solidFill>
@@ -3992,7 +5166,7 @@
                 <a:uFillTx/>
                 <a:latin typeface="Arial"/>
               </a:rPr>
-              <a:t>RAG allows to introduce ML at a cost lower that Tuning.</a:t>
+              <a:t>This method depends on the quality of data supplied.</a:t>
             </a:r>
             <a:endParaRPr b="0" lang="en-AU" sz="2000" strike="noStrike" u="none">
               <a:solidFill>
@@ -4013,6 +5187,36 @@
                 <a:tab algn="l" pos="0"/>
               </a:tabLst>
             </a:pPr>
+            <a:endParaRPr b="0" lang="en-AU" sz="2000" strike="noStrike" u="none">
+              <a:solidFill>
+                <a:srgbClr val="000000"/>
+              </a:solidFill>
+              <a:effectLst/>
+              <a:uFillTx/>
+              <a:latin typeface="Arial"/>
+            </a:endParaRPr>
+          </a:p>
+          <a:p>
+            <a:pPr indent="0">
+              <a:lnSpc>
+                <a:spcPct val="100000"/>
+              </a:lnSpc>
+              <a:buNone/>
+              <a:tabLst>
+                <a:tab algn="l" pos="0"/>
+              </a:tabLst>
+            </a:pPr>
+            <a:r>
+              <a:rPr b="0" lang="en-AU" sz="2000" strike="noStrike" u="none">
+                <a:solidFill>
+                  <a:srgbClr val="000000"/>
+                </a:solidFill>
+                <a:effectLst/>
+                <a:uFillTx/>
+                <a:latin typeface="Arial"/>
+              </a:rPr>
+              <a:t>Note that RAG solution can be used to verify quality of data before deployment of Tuning solution. </a:t>
+            </a:r>
             <a:endParaRPr b="0" lang="en-AU" sz="2000" strike="noStrike" u="none">
               <a:solidFill>
                 <a:srgbClr val="000000"/>
@@ -4048,7 +5252,7 @@
       </p:grpSpPr>
       <p:sp>
         <p:nvSpPr>
-          <p:cNvPr id="87" name="PlaceHolder 1"/>
+          <p:cNvPr id="98" name="PlaceHolder 1"/>
           <p:cNvSpPr>
             <a:spLocks noGrp="1"/>
           </p:cNvSpPr>
@@ -4059,7 +5263,7 @@
         <p:spPr>
           <a:xfrm>
             <a:off x="216360" y="812520"/>
-            <a:ext cx="7126200" cy="4008240"/>
+            <a:ext cx="7125120" cy="4007160"/>
           </a:xfrm>
           <a:prstGeom prst="rect">
             <a:avLst/>
@@ -4071,7 +5275,7 @@
       </p:sp>
       <p:sp>
         <p:nvSpPr>
-          <p:cNvPr id="88" name="PlaceHolder 2"/>
+          <p:cNvPr id="99" name="PlaceHolder 2"/>
           <p:cNvSpPr>
             <a:spLocks noGrp="1"/>
           </p:cNvSpPr>
@@ -4082,7 +5286,7 @@
         <p:spPr>
           <a:xfrm>
             <a:off x="756000" y="5078520"/>
-            <a:ext cx="6046920" cy="4810320"/>
+            <a:ext cx="6045840" cy="4809240"/>
           </a:xfrm>
           <a:prstGeom prst="rect">
             <a:avLst/>
@@ -4115,7 +5319,7 @@
                 <a:uFillTx/>
                 <a:latin typeface="Arial"/>
               </a:rPr>
-              <a:t>We use Pydantic development library to create our ML applications.</a:t>
+              <a:t>We believe that organisations entering ML can benefit from gradual introduction.</a:t>
             </a:r>
             <a:endParaRPr b="0" lang="en-AU" sz="2000" strike="noStrike" u="none">
               <a:solidFill>
@@ -4164,7 +5368,7 @@
                 <a:uFillTx/>
                 <a:latin typeface="Arial"/>
               </a:rPr>
-              <a:t>We believe that Pydantic provides the balance of features and portability across major ML platforms.</a:t>
+              <a:t>RAG allows to introduce ML at a cost lower that Tuning.</a:t>
             </a:r>
             <a:endParaRPr b="0" lang="en-AU" sz="2000" strike="noStrike" u="none">
               <a:solidFill>
@@ -4185,36 +5389,6 @@
                 <a:tab algn="l" pos="0"/>
               </a:tabLst>
             </a:pPr>
-            <a:endParaRPr b="0" lang="en-AU" sz="2000" strike="noStrike" u="none">
-              <a:solidFill>
-                <a:srgbClr val="000000"/>
-              </a:solidFill>
-              <a:effectLst/>
-              <a:uFillTx/>
-              <a:latin typeface="Arial"/>
-            </a:endParaRPr>
-          </a:p>
-          <a:p>
-            <a:pPr indent="0">
-              <a:lnSpc>
-                <a:spcPct val="100000"/>
-              </a:lnSpc>
-              <a:buNone/>
-              <a:tabLst>
-                <a:tab algn="l" pos="0"/>
-              </a:tabLst>
-            </a:pPr>
-            <a:r>
-              <a:rPr b="0" lang="en-AU" sz="2000" strike="noStrike" u="none">
-                <a:solidFill>
-                  <a:srgbClr val="000000"/>
-                </a:solidFill>
-                <a:effectLst/>
-                <a:uFillTx/>
-                <a:latin typeface="Arial"/>
-              </a:rPr>
-              <a:t>Investing in Pydantic Agent solution reduces the risk of obsolete technology.</a:t>
-            </a:r>
             <a:endParaRPr b="0" lang="en-AU" sz="2000" strike="noStrike" u="none">
               <a:solidFill>
                 <a:srgbClr val="000000"/>
@@ -4250,7 +5424,7 @@
       </p:grpSpPr>
       <p:sp>
         <p:nvSpPr>
-          <p:cNvPr id="89" name="PlaceHolder 1"/>
+          <p:cNvPr id="100" name="PlaceHolder 1"/>
           <p:cNvSpPr>
             <a:spLocks noGrp="1"/>
           </p:cNvSpPr>
@@ -4261,7 +5435,7 @@
         <p:spPr>
           <a:xfrm>
             <a:off x="216360" y="812520"/>
-            <a:ext cx="7126200" cy="4008240"/>
+            <a:ext cx="7125120" cy="4007160"/>
           </a:xfrm>
           <a:prstGeom prst="rect">
             <a:avLst/>
@@ -4273,7 +5447,7 @@
       </p:sp>
       <p:sp>
         <p:nvSpPr>
-          <p:cNvPr id="90" name="PlaceHolder 2"/>
+          <p:cNvPr id="101" name="PlaceHolder 2"/>
           <p:cNvSpPr>
             <a:spLocks noGrp="1"/>
           </p:cNvSpPr>
@@ -4284,7 +5458,7 @@
         <p:spPr>
           <a:xfrm>
             <a:off x="756000" y="5078520"/>
-            <a:ext cx="6046920" cy="4810320"/>
+            <a:ext cx="6045840" cy="4809240"/>
           </a:xfrm>
           <a:prstGeom prst="rect">
             <a:avLst/>
@@ -4317,7 +5491,7 @@
                 <a:uFillTx/>
                 <a:latin typeface="Arial"/>
               </a:rPr>
-              <a:t>Our example application stores RAG database separately from Cloud LLM.</a:t>
+              <a:t>We use Pydantic development library to create our ML applications.</a:t>
             </a:r>
             <a:endParaRPr b="0" lang="en-AU" sz="2000" strike="noStrike" u="none">
               <a:solidFill>
@@ -4366,7 +5540,7 @@
                 <a:uFillTx/>
                 <a:latin typeface="Arial"/>
               </a:rPr>
-              <a:t>This allows full control of private data.</a:t>
+              <a:t>We believe that Pydantic provides the balance of features and portability across major ML platforms.</a:t>
             </a:r>
             <a:endParaRPr b="0" lang="en-AU" sz="2000" strike="noStrike" u="none">
               <a:solidFill>
@@ -4415,56 +5589,7 @@
                 <a:uFillTx/>
                 <a:latin typeface="Arial"/>
               </a:rPr>
-              <a:t>We can use the apps with Web interface</a:t>
-            </a:r>
-            <a:endParaRPr b="0" lang="en-AU" sz="2000" strike="noStrike" u="none">
-              <a:solidFill>
-                <a:srgbClr val="000000"/>
-              </a:solidFill>
-              <a:effectLst/>
-              <a:uFillTx/>
-              <a:latin typeface="Arial"/>
-            </a:endParaRPr>
-          </a:p>
-          <a:p>
-            <a:pPr indent="0">
-              <a:lnSpc>
-                <a:spcPct val="100000"/>
-              </a:lnSpc>
-              <a:buNone/>
-              <a:tabLst>
-                <a:tab algn="l" pos="0"/>
-              </a:tabLst>
-            </a:pPr>
-            <a:endParaRPr b="0" lang="en-AU" sz="2000" strike="noStrike" u="none">
-              <a:solidFill>
-                <a:srgbClr val="000000"/>
-              </a:solidFill>
-              <a:effectLst/>
-              <a:uFillTx/>
-              <a:latin typeface="Arial"/>
-            </a:endParaRPr>
-          </a:p>
-          <a:p>
-            <a:pPr indent="0">
-              <a:lnSpc>
-                <a:spcPct val="100000"/>
-              </a:lnSpc>
-              <a:buNone/>
-              <a:tabLst>
-                <a:tab algn="l" pos="0"/>
-              </a:tabLst>
-            </a:pPr>
-            <a:r>
-              <a:rPr b="0" lang="en-AU" sz="2000" strike="noStrike" u="none">
-                <a:solidFill>
-                  <a:srgbClr val="000000"/>
-                </a:solidFill>
-                <a:effectLst/>
-                <a:uFillTx/>
-                <a:latin typeface="Arial"/>
-              </a:rPr>
-              <a:t>Or we can run apps as service scripts</a:t>
+              <a:t>Investing in Pydantic Agent solution reduces the risk of obsolete technology.</a:t>
             </a:r>
             <a:endParaRPr b="0" lang="en-AU" sz="2000" strike="noStrike" u="none">
               <a:solidFill>
@@ -4507,8 +5632,8 @@
         </p:nvSpPr>
         <p:spPr>
           <a:xfrm flipH="1" flipV="1">
-            <a:off x="-2880" y="4497120"/>
-            <a:ext cx="10077120" cy="1167120"/>
+            <a:off x="-4320" y="4495680"/>
+            <a:ext cx="10076040" cy="1166040"/>
           </a:xfrm>
           <a:prstGeom prst="flowChartDocument">
             <a:avLst/>
@@ -4900,7 +6025,7 @@
                 <a:srgbClr val="009bdd"/>
               </a:gs>
             </a:gsLst>
-            <a:lin ang="10800000"/>
+            <a:lin ang="0"/>
           </a:gradFill>
           <a:ln w="18000">
             <a:noFill/>
@@ -4952,7 +6077,7 @@
         <p:spPr>
           <a:xfrm>
             <a:off x="0" y="1620000"/>
-            <a:ext cx="8997120" cy="1077120"/>
+            <a:ext cx="8996040" cy="1076040"/>
           </a:xfrm>
           <a:prstGeom prst="rect">
             <a:avLst/>
@@ -5011,7 +6136,7 @@
         <p:spPr>
           <a:xfrm>
             <a:off x="360000" y="2880000"/>
-            <a:ext cx="9357120" cy="1617120"/>
+            <a:ext cx="9356040" cy="1616040"/>
           </a:xfrm>
           <a:prstGeom prst="rect">
             <a:avLst/>
@@ -5285,7 +6410,7 @@
         <p:spPr>
           <a:xfrm>
             <a:off x="360000" y="5220000"/>
-            <a:ext cx="2337120" cy="357120"/>
+            <a:ext cx="2336040" cy="356040"/>
           </a:xfrm>
           <a:prstGeom prst="rect">
             <a:avLst/>
@@ -5363,7 +6488,7 @@
         <p:spPr>
           <a:xfrm>
             <a:off x="3420000" y="5220000"/>
-            <a:ext cx="3237120" cy="357120"/>
+            <a:ext cx="3236040" cy="356040"/>
           </a:xfrm>
           <a:prstGeom prst="rect">
             <a:avLst/>
@@ -5441,7 +6566,7 @@
         <p:spPr>
           <a:xfrm>
             <a:off x="7380000" y="5220000"/>
-            <a:ext cx="2337120" cy="357120"/>
+            <a:ext cx="2336040" cy="356040"/>
           </a:xfrm>
           <a:prstGeom prst="rect">
             <a:avLst/>
@@ -5484,7 +6609,7 @@
                 <a:tab algn="l" pos="0"/>
               </a:tabLst>
             </a:pPr>
-            <a:fld id="{C16A1E7D-750A-4E93-8C2E-CFBFFBB57F5C}" type="slidenum">
+            <a:fld id="{AF8205CB-15E8-4185-9EDA-6F7629DDACAC}" type="slidenum">
               <a:rPr b="0" lang="en-AU" sz="1400" strike="noStrike" u="none">
                 <a:solidFill>
                   <a:srgbClr val="ffffff"/>
@@ -5536,8 +6661,8 @@
         </p:nvSpPr>
         <p:spPr>
           <a:xfrm flipH="1" flipV="1">
-            <a:off x="-2880" y="4497120"/>
-            <a:ext cx="10077120" cy="1167120"/>
+            <a:off x="-4320" y="4495680"/>
+            <a:ext cx="10076040" cy="1166040"/>
           </a:xfrm>
           <a:prstGeom prst="flowChartDocument">
             <a:avLst/>
@@ -5929,7 +7054,7 @@
                 <a:srgbClr val="009bdd"/>
               </a:gs>
             </a:gsLst>
-            <a:lin ang="10800000"/>
+            <a:lin ang="0"/>
           </a:gradFill>
           <a:ln w="18000">
             <a:noFill/>
@@ -5981,7 +7106,7 @@
         <p:spPr>
           <a:xfrm>
             <a:off x="0" y="1620000"/>
-            <a:ext cx="8997120" cy="1077120"/>
+            <a:ext cx="8996040" cy="1076040"/>
           </a:xfrm>
           <a:prstGeom prst="rect">
             <a:avLst/>
@@ -6040,7 +7165,7 @@
         <p:spPr>
           <a:xfrm>
             <a:off x="360000" y="2880000"/>
-            <a:ext cx="9357120" cy="1617120"/>
+            <a:ext cx="9356040" cy="1616040"/>
           </a:xfrm>
           <a:prstGeom prst="rect">
             <a:avLst/>
@@ -6314,7 +7439,7 @@
         <p:spPr>
           <a:xfrm>
             <a:off x="360000" y="5220000"/>
-            <a:ext cx="2337120" cy="357120"/>
+            <a:ext cx="2336040" cy="356040"/>
           </a:xfrm>
           <a:prstGeom prst="rect">
             <a:avLst/>
@@ -6392,7 +7517,7 @@
         <p:spPr>
           <a:xfrm>
             <a:off x="3420000" y="5220000"/>
-            <a:ext cx="3237120" cy="357120"/>
+            <a:ext cx="3236040" cy="356040"/>
           </a:xfrm>
           <a:prstGeom prst="rect">
             <a:avLst/>
@@ -6470,7 +7595,7 @@
         <p:spPr>
           <a:xfrm>
             <a:off x="7380000" y="5220000"/>
-            <a:ext cx="2337120" cy="357120"/>
+            <a:ext cx="2336040" cy="356040"/>
           </a:xfrm>
           <a:prstGeom prst="rect">
             <a:avLst/>
@@ -6513,7 +7638,7 @@
                 <a:tab algn="l" pos="0"/>
               </a:tabLst>
             </a:pPr>
-            <a:fld id="{506547B3-13E6-46A6-B5F6-5DD006169172}" type="slidenum">
+            <a:fld id="{D4B72774-262F-4301-A8E9-EA0689779F1D}" type="slidenum">
               <a:rPr b="0" lang="en-AU" sz="1400" strike="noStrike" u="none">
                 <a:solidFill>
                   <a:srgbClr val="ffffff"/>
@@ -6566,7 +7691,7 @@
         <p:spPr>
           <a:xfrm>
             <a:off x="0" y="0"/>
-            <a:ext cx="10073880" cy="717120"/>
+            <a:ext cx="10072800" cy="716040"/>
           </a:xfrm>
           <a:prstGeom prst="rect">
             <a:avLst/>
@@ -7006,7 +8131,7 @@
         <p:spPr>
           <a:xfrm>
             <a:off x="3240" y="5040000"/>
-            <a:ext cx="10073880" cy="628560"/>
+            <a:ext cx="10072800" cy="627480"/>
           </a:xfrm>
           <a:prstGeom prst="rect">
             <a:avLst/>
@@ -7450,7 +8575,7 @@
         <p:spPr>
           <a:xfrm>
             <a:off x="360000" y="180000"/>
-            <a:ext cx="9357120" cy="475200"/>
+            <a:ext cx="9356040" cy="474120"/>
           </a:xfrm>
           <a:prstGeom prst="rect">
             <a:avLst/>
@@ -7509,7 +8634,7 @@
         <p:spPr>
           <a:xfrm>
             <a:off x="360000" y="1080000"/>
-            <a:ext cx="9357120" cy="3597120"/>
+            <a:ext cx="9356040" cy="3596040"/>
           </a:xfrm>
           <a:prstGeom prst="rect">
             <a:avLst/>
@@ -7783,7 +8908,7 @@
         <p:spPr>
           <a:xfrm>
             <a:off x="360000" y="5220000"/>
-            <a:ext cx="2337120" cy="357120"/>
+            <a:ext cx="2336040" cy="356040"/>
           </a:xfrm>
           <a:prstGeom prst="rect">
             <a:avLst/>
@@ -7861,7 +8986,7 @@
         <p:spPr>
           <a:xfrm>
             <a:off x="3420000" y="5220000"/>
-            <a:ext cx="3237120" cy="357120"/>
+            <a:ext cx="3236040" cy="356040"/>
           </a:xfrm>
           <a:prstGeom prst="rect">
             <a:avLst/>
@@ -7939,7 +9064,7 @@
         <p:spPr>
           <a:xfrm>
             <a:off x="7380000" y="5220000"/>
-            <a:ext cx="2337120" cy="357120"/>
+            <a:ext cx="2336040" cy="356040"/>
           </a:xfrm>
           <a:prstGeom prst="rect">
             <a:avLst/>
@@ -7982,7 +9107,7 @@
                 <a:tab algn="l" pos="0"/>
               </a:tabLst>
             </a:pPr>
-            <a:fld id="{76401DF2-D80C-4D68-A3CB-8DE6776493FC}" type="slidenum">
+            <a:fld id="{B717CAE3-9CCB-4387-A851-FF353E2FF10F}" type="slidenum">
               <a:rPr b="0" lang="en-AU" sz="1400" strike="noStrike" u="none">
                 <a:solidFill>
                   <a:srgbClr val="ffffff"/>
@@ -8034,8 +9159,8 @@
         </p:nvSpPr>
         <p:spPr>
           <a:xfrm flipH="1" flipV="1">
-            <a:off x="-2160" y="4497840"/>
-            <a:ext cx="10077840" cy="1167840"/>
+            <a:off x="-3600" y="4496400"/>
+            <a:ext cx="10076760" cy="1166760"/>
           </a:xfrm>
           <a:prstGeom prst="flowChartDocument">
             <a:avLst/>
@@ -8427,7 +9552,7 @@
                 <a:srgbClr val="009bdd"/>
               </a:gs>
             </a:gsLst>
-            <a:lin ang="10800000"/>
+            <a:lin ang="0"/>
           </a:gradFill>
           <a:ln w="18000">
             <a:noFill/>
@@ -8479,7 +9604,7 @@
         <p:spPr>
           <a:xfrm>
             <a:off x="0" y="1620000"/>
-            <a:ext cx="8997840" cy="1077840"/>
+            <a:ext cx="8996760" cy="1076760"/>
           </a:xfrm>
           <a:prstGeom prst="rect">
             <a:avLst/>
@@ -8538,7 +9663,7 @@
         <p:spPr>
           <a:xfrm>
             <a:off x="360000" y="2880000"/>
-            <a:ext cx="9357840" cy="1617840"/>
+            <a:ext cx="9356760" cy="1616760"/>
           </a:xfrm>
           <a:prstGeom prst="rect">
             <a:avLst/>
@@ -8812,7 +9937,7 @@
         <p:spPr>
           <a:xfrm>
             <a:off x="360000" y="5220000"/>
-            <a:ext cx="2337840" cy="357840"/>
+            <a:ext cx="2336760" cy="356760"/>
           </a:xfrm>
           <a:prstGeom prst="rect">
             <a:avLst/>
@@ -8890,7 +10015,7 @@
         <p:spPr>
           <a:xfrm>
             <a:off x="3420000" y="5220000"/>
-            <a:ext cx="3237840" cy="357840"/>
+            <a:ext cx="3236760" cy="356760"/>
           </a:xfrm>
           <a:prstGeom prst="rect">
             <a:avLst/>
@@ -8968,7 +10093,7 @@
         <p:spPr>
           <a:xfrm>
             <a:off x="7380000" y="5220000"/>
-            <a:ext cx="2337840" cy="357840"/>
+            <a:ext cx="2336760" cy="356760"/>
           </a:xfrm>
           <a:prstGeom prst="rect">
             <a:avLst/>
@@ -9011,7 +10136,7 @@
                 <a:tab algn="l" pos="0"/>
               </a:tabLst>
             </a:pPr>
-            <a:fld id="{A80E30C3-87C0-4BA0-AD34-197364B21B1B}" type="slidenum">
+            <a:fld id="{BDFF3AAA-170F-4871-B7B8-454023987BE1}" type="slidenum">
               <a:rPr b="0" lang="en-AU" sz="1400" strike="noStrike" u="none">
                 <a:solidFill>
                   <a:srgbClr val="ffffff"/>
@@ -9064,7 +10189,7 @@
         <p:spPr>
           <a:xfrm>
             <a:off x="0" y="0"/>
-            <a:ext cx="10074600" cy="717840"/>
+            <a:ext cx="10073520" cy="716760"/>
           </a:xfrm>
           <a:prstGeom prst="rect">
             <a:avLst/>
@@ -9504,7 +10629,7 @@
         <p:spPr>
           <a:xfrm>
             <a:off x="3240" y="5040000"/>
-            <a:ext cx="10074600" cy="629280"/>
+            <a:ext cx="10073520" cy="628200"/>
           </a:xfrm>
           <a:prstGeom prst="rect">
             <a:avLst/>
@@ -9948,7 +11073,7 @@
         <p:spPr>
           <a:xfrm>
             <a:off x="360000" y="180000"/>
-            <a:ext cx="9357840" cy="475920"/>
+            <a:ext cx="9356760" cy="474840"/>
           </a:xfrm>
           <a:prstGeom prst="rect">
             <a:avLst/>
@@ -10007,7 +11132,7 @@
         <p:spPr>
           <a:xfrm>
             <a:off x="360000" y="1080000"/>
-            <a:ext cx="9357840" cy="3597840"/>
+            <a:ext cx="9356760" cy="3596760"/>
           </a:xfrm>
           <a:prstGeom prst="rect">
             <a:avLst/>
@@ -10281,7 +11406,7 @@
         <p:spPr>
           <a:xfrm>
             <a:off x="360000" y="5220000"/>
-            <a:ext cx="2337840" cy="357840"/>
+            <a:ext cx="2336760" cy="356760"/>
           </a:xfrm>
           <a:prstGeom prst="rect">
             <a:avLst/>
@@ -10359,7 +11484,7 @@
         <p:spPr>
           <a:xfrm>
             <a:off x="3420000" y="5220000"/>
-            <a:ext cx="3237840" cy="357840"/>
+            <a:ext cx="3236760" cy="356760"/>
           </a:xfrm>
           <a:prstGeom prst="rect">
             <a:avLst/>
@@ -10437,7 +11562,7 @@
         <p:spPr>
           <a:xfrm>
             <a:off x="7380000" y="5220000"/>
-            <a:ext cx="2337840" cy="357840"/>
+            <a:ext cx="2336760" cy="356760"/>
           </a:xfrm>
           <a:prstGeom prst="rect">
             <a:avLst/>
@@ -10480,7 +11605,7 @@
                 <a:tab algn="l" pos="0"/>
               </a:tabLst>
             </a:pPr>
-            <a:fld id="{3AFD00DB-6E48-431A-B231-A70635C0BD4D}" type="slidenum">
+            <a:fld id="{18B50DC8-C140-4EE6-B66B-421BD5E446AD}" type="slidenum">
               <a:rPr b="0" lang="en-AU" sz="1400" strike="noStrike" u="none">
                 <a:solidFill>
                   <a:srgbClr val="ffffff"/>
@@ -10591,8 +11716,8 @@
         </p:nvSpPr>
         <p:spPr>
           <a:xfrm>
-            <a:off x="0" y="1617120"/>
-            <a:ext cx="8997120" cy="1082880"/>
+            <a:off x="0" y="1616040"/>
+            <a:ext cx="8996040" cy="1083960"/>
           </a:xfrm>
           <a:prstGeom prst="rect">
             <a:avLst/>
@@ -10680,8 +11805,8 @@
         </p:nvSpPr>
         <p:spPr>
           <a:xfrm>
-            <a:off x="360000" y="165240"/>
-            <a:ext cx="9357120" cy="504720"/>
+            <a:off x="360000" y="164160"/>
+            <a:ext cx="9356040" cy="505800"/>
           </a:xfrm>
           <a:prstGeom prst="rect">
             <a:avLst/>
@@ -10714,7 +11839,7 @@
                 <a:uFillTx/>
                 <a:latin typeface="Arial"/>
               </a:rPr>
-              <a:t>Source Code</a:t>
+              <a:t>Architecture Summary</a:t>
             </a:r>
             <a:endParaRPr b="0" lang="en-AU" sz="3300" strike="noStrike" u="none">
               <a:solidFill>
@@ -10740,7 +11865,7 @@
         <p:spPr>
           <a:xfrm>
             <a:off x="360000" y="1080000"/>
-            <a:ext cx="9357120" cy="3597120"/>
+            <a:ext cx="9356040" cy="3596040"/>
           </a:xfrm>
           <a:prstGeom prst="rect">
             <a:avLst/>
@@ -10778,7 +11903,7 @@
                 <a:uFillTx/>
                 <a:latin typeface="Arial"/>
               </a:rPr>
-              <a:t>Public repository on GitHub</a:t>
+              <a:t>Example app is a hybrid architecture</a:t>
             </a:r>
             <a:endParaRPr b="0" lang="en-AU" sz="2800" strike="noStrike" u="none">
               <a:solidFill>
@@ -10795,11 +11920,8 @@
                 <a:spcPct val="100000"/>
               </a:lnSpc>
               <a:spcBef>
-                <a:spcPts val="1191"/>
+                <a:spcPts val="1134"/>
               </a:spcBef>
-              <a:spcAft>
-                <a:spcPts val="992"/>
-              </a:spcAft>
               <a:buClr>
                 <a:srgbClr val="000000"/>
               </a:buClr>
@@ -10810,14 +11932,13 @@
             <a:r>
               <a:rPr b="0" lang="en-AU" sz="2800" strike="noStrike" u="none">
                 <a:solidFill>
-                  <a:srgbClr val="0000ee"/>
-                </a:solidFill>
-                <a:effectLst/>
-                <a:uFillTx/>
-                <a:latin typeface="Arial"/>
-                <a:hlinkClick r:id="rId1"/>
-              </a:rPr>
-              <a:t>github.com/DarlowieTechnology/a_bridge_too_far</a:t>
+                  <a:srgbClr val="009bdd"/>
+                </a:solidFill>
+                <a:effectLst/>
+                <a:uFillTx/>
+                <a:latin typeface="Arial"/>
+              </a:rPr>
+              <a:t>Cloud-based LLM accessed via REST API</a:t>
             </a:r>
             <a:endParaRPr b="0" lang="en-AU" sz="2800" strike="noStrike" u="none">
               <a:solidFill>
@@ -10834,11 +11955,8 @@
                 <a:spcPct val="100000"/>
               </a:lnSpc>
               <a:spcBef>
-                <a:spcPts val="1191"/>
+                <a:spcPts val="1134"/>
               </a:spcBef>
-              <a:spcAft>
-                <a:spcPts val="992"/>
-              </a:spcAft>
               <a:buClr>
                 <a:srgbClr val="000000"/>
               </a:buClr>
@@ -10855,7 +11973,7 @@
                 <a:uFillTx/>
                 <a:latin typeface="Arial"/>
               </a:rPr>
-              <a:t>Python, Pydantic, Django, ChromaDB</a:t>
+              <a:t>Local vector database</a:t>
             </a:r>
             <a:endParaRPr b="0" lang="en-AU" sz="2800" strike="noStrike" u="none">
               <a:solidFill>
@@ -10872,11 +11990,8 @@
                 <a:spcPct val="100000"/>
               </a:lnSpc>
               <a:spcBef>
-                <a:spcPts val="1191"/>
+                <a:spcPts val="1134"/>
               </a:spcBef>
-              <a:spcAft>
-                <a:spcPts val="992"/>
-              </a:spcAft>
               <a:buClr>
                 <a:srgbClr val="000000"/>
               </a:buClr>
@@ -10893,7 +12008,7 @@
                 <a:uFillTx/>
                 <a:latin typeface="Arial"/>
               </a:rPr>
-              <a:t>3 web applications (generator, indexer, query)</a:t>
+              <a:t>Dual use web apps and command line scripts </a:t>
             </a:r>
             <a:endParaRPr b="0" lang="en-AU" sz="2800" strike="noStrike" u="none">
               <a:solidFill>
@@ -10917,7 +12032,7 @@
                 <a:tab algn="l" pos="0"/>
               </a:tabLst>
             </a:pPr>
-            <a:endParaRPr b="0" lang="en-AU" sz="2400" strike="noStrike" u="none">
+            <a:endParaRPr b="0" lang="en-AU" sz="2800" strike="noStrike" u="none">
               <a:solidFill>
                 <a:srgbClr val="000000"/>
               </a:solidFill>
@@ -10942,7 +12057,7 @@
         <p:txBody>
           <a:bodyPr/>
           <a:p>
-            <a:fld id="{5DD4256A-3CDF-45C0-9299-61A360EE7C25}" type="slidenum">
+            <a:fld id="{55D99AAE-7D94-428A-BAC2-3D7782F8310C}" type="slidenum">
               <a:t>10</a:t>
             </a:fld>
           </a:p>
@@ -10990,8 +12105,8 @@
         </p:nvSpPr>
         <p:spPr>
           <a:xfrm>
-            <a:off x="0" y="1617840"/>
-            <a:ext cx="8997840" cy="1082160"/>
+            <a:off x="360000" y="164160"/>
+            <a:ext cx="9356040" cy="505800"/>
           </a:xfrm>
           <a:prstGeom prst="rect">
             <a:avLst/>
@@ -11018,13 +12133,13 @@
             <a:r>
               <a:rPr b="0" lang="en-AU" sz="3300" strike="noStrike" u="none">
                 <a:solidFill>
-                  <a:srgbClr val="dd4100"/>
-                </a:solidFill>
-                <a:effectLst/>
-                <a:uFillTx/>
-                <a:latin typeface="Arial"/>
-              </a:rPr>
-              <a:t>Indexer Application</a:t>
+                  <a:srgbClr val="eeeeee"/>
+                </a:solidFill>
+                <a:effectLst/>
+                <a:uFillTx/>
+                <a:latin typeface="Arial"/>
+              </a:rPr>
+              <a:t>Source Code</a:t>
             </a:r>
             <a:endParaRPr b="0" lang="en-AU" sz="3300" strike="noStrike" u="none">
               <a:solidFill>
@@ -11034,6 +12149,227 @@
               <a:uFillTx/>
               <a:latin typeface="Arial"/>
             </a:endParaRPr>
+          </a:p>
+        </p:txBody>
+      </p:sp>
+      <p:sp>
+        <p:nvSpPr>
+          <p:cNvPr id="58" name="PlaceHolder 2"/>
+          <p:cNvSpPr>
+            <a:spLocks noGrp="1"/>
+          </p:cNvSpPr>
+          <p:nvPr>
+            <p:ph/>
+          </p:nvPr>
+        </p:nvSpPr>
+        <p:spPr>
+          <a:xfrm>
+            <a:off x="360000" y="1080000"/>
+            <a:ext cx="9356040" cy="3596040"/>
+          </a:xfrm>
+          <a:prstGeom prst="rect">
+            <a:avLst/>
+          </a:prstGeom>
+          <a:noFill/>
+          <a:ln w="0">
+            <a:noFill/>
+          </a:ln>
+        </p:spPr>
+        <p:txBody>
+          <a:bodyPr lIns="0" rIns="0" tIns="0" bIns="0" anchor="t">
+            <a:noAutofit/>
+          </a:bodyPr>
+          <a:p>
+            <a:pPr marL="432000" indent="-324000">
+              <a:lnSpc>
+                <a:spcPct val="100000"/>
+              </a:lnSpc>
+              <a:spcBef>
+                <a:spcPts val="1060"/>
+              </a:spcBef>
+              <a:buClr>
+                <a:srgbClr val="77caee"/>
+              </a:buClr>
+              <a:buSzPct val="45000"/>
+              <a:buFont typeface="Wingdings" charset="2"/>
+              <a:buChar char=""/>
+            </a:pPr>
+            <a:r>
+              <a:rPr b="0" lang="en-AU" sz="2800" strike="noStrike" u="none">
+                <a:solidFill>
+                  <a:srgbClr val="009bdd"/>
+                </a:solidFill>
+                <a:effectLst/>
+                <a:uFillTx/>
+                <a:latin typeface="Arial"/>
+              </a:rPr>
+              <a:t>Public repository on GitHub</a:t>
+            </a:r>
+            <a:endParaRPr b="0" lang="en-AU" sz="2800" strike="noStrike" u="none">
+              <a:solidFill>
+                <a:srgbClr val="000000"/>
+              </a:solidFill>
+              <a:effectLst/>
+              <a:uFillTx/>
+              <a:latin typeface="Arial"/>
+            </a:endParaRPr>
+          </a:p>
+          <a:p>
+            <a:pPr lvl="1" marL="864000" indent="-324000">
+              <a:lnSpc>
+                <a:spcPct val="100000"/>
+              </a:lnSpc>
+              <a:spcBef>
+                <a:spcPts val="1191"/>
+              </a:spcBef>
+              <a:spcAft>
+                <a:spcPts val="992"/>
+              </a:spcAft>
+              <a:buClr>
+                <a:srgbClr val="000000"/>
+              </a:buClr>
+              <a:buSzPct val="75000"/>
+              <a:buFont typeface="Symbol" charset="2"/>
+              <a:buChar char=""/>
+            </a:pPr>
+            <a:r>
+              <a:rPr b="0" lang="en-AU" sz="2800" strike="noStrike" u="none">
+                <a:solidFill>
+                  <a:srgbClr val="0000ee"/>
+                </a:solidFill>
+                <a:effectLst/>
+                <a:uFillTx/>
+                <a:latin typeface="Arial"/>
+                <a:hlinkClick r:id="rId1"/>
+              </a:rPr>
+              <a:t>github.com/DarlowieTechnology/a_bridge_too_far</a:t>
+            </a:r>
+            <a:endParaRPr b="0" lang="en-AU" sz="2800" strike="noStrike" u="none">
+              <a:solidFill>
+                <a:srgbClr val="000000"/>
+              </a:solidFill>
+              <a:effectLst/>
+              <a:uFillTx/>
+              <a:latin typeface="Arial"/>
+            </a:endParaRPr>
+          </a:p>
+          <a:p>
+            <a:pPr lvl="1" marL="864000" indent="-324000">
+              <a:lnSpc>
+                <a:spcPct val="100000"/>
+              </a:lnSpc>
+              <a:spcBef>
+                <a:spcPts val="1191"/>
+              </a:spcBef>
+              <a:spcAft>
+                <a:spcPts val="992"/>
+              </a:spcAft>
+              <a:buClr>
+                <a:srgbClr val="000000"/>
+              </a:buClr>
+              <a:buSzPct val="75000"/>
+              <a:buFont typeface="Symbol" charset="2"/>
+              <a:buChar char=""/>
+            </a:pPr>
+            <a:r>
+              <a:rPr b="0" lang="en-AU" sz="2800" strike="noStrike" u="none">
+                <a:solidFill>
+                  <a:srgbClr val="009bdd"/>
+                </a:solidFill>
+                <a:effectLst/>
+                <a:uFillTx/>
+                <a:latin typeface="Arial"/>
+              </a:rPr>
+              <a:t>Python, Pydantic, Django, ChromaDB</a:t>
+            </a:r>
+            <a:endParaRPr b="0" lang="en-AU" sz="2800" strike="noStrike" u="none">
+              <a:solidFill>
+                <a:srgbClr val="000000"/>
+              </a:solidFill>
+              <a:effectLst/>
+              <a:uFillTx/>
+              <a:latin typeface="Arial"/>
+            </a:endParaRPr>
+          </a:p>
+          <a:p>
+            <a:pPr lvl="1" marL="864000" indent="-324000">
+              <a:lnSpc>
+                <a:spcPct val="100000"/>
+              </a:lnSpc>
+              <a:spcBef>
+                <a:spcPts val="1191"/>
+              </a:spcBef>
+              <a:spcAft>
+                <a:spcPts val="992"/>
+              </a:spcAft>
+              <a:buClr>
+                <a:srgbClr val="000000"/>
+              </a:buClr>
+              <a:buSzPct val="75000"/>
+              <a:buFont typeface="Symbol" charset="2"/>
+              <a:buChar char=""/>
+            </a:pPr>
+            <a:r>
+              <a:rPr b="0" lang="en-AU" sz="2800" strike="noStrike" u="none">
+                <a:solidFill>
+                  <a:srgbClr val="009bdd"/>
+                </a:solidFill>
+                <a:effectLst/>
+                <a:uFillTx/>
+                <a:latin typeface="Arial"/>
+              </a:rPr>
+              <a:t>4 applications (generator, indexer, query, discovery)</a:t>
+            </a:r>
+            <a:endParaRPr b="0" lang="en-AU" sz="2800" strike="noStrike" u="none">
+              <a:solidFill>
+                <a:srgbClr val="000000"/>
+              </a:solidFill>
+              <a:effectLst/>
+              <a:uFillTx/>
+              <a:latin typeface="Arial"/>
+            </a:endParaRPr>
+          </a:p>
+          <a:p>
+            <a:pPr indent="0">
+              <a:lnSpc>
+                <a:spcPct val="100000"/>
+              </a:lnSpc>
+              <a:spcBef>
+                <a:spcPts val="1060"/>
+              </a:spcBef>
+              <a:buNone/>
+              <a:tabLst>
+                <a:tab algn="l" pos="0"/>
+              </a:tabLst>
+            </a:pPr>
+            <a:endParaRPr b="0" lang="en-AU" sz="2400" strike="noStrike" u="none">
+              <a:solidFill>
+                <a:srgbClr val="000000"/>
+              </a:solidFill>
+              <a:effectLst/>
+              <a:uFillTx/>
+              <a:latin typeface="Arial"/>
+            </a:endParaRPr>
+          </a:p>
+        </p:txBody>
+      </p:sp>
+      <p:sp>
+        <p:nvSpPr>
+          <p:cNvPr id="4" name="PlaceHolder 3"/>
+          <p:cNvSpPr>
+            <a:spLocks noGrp="1"/>
+          </p:cNvSpPr>
+          <p:nvPr>
+            <p:ph type="sldNum" idx="3"/>
+          </p:nvPr>
+        </p:nvSpPr>
+        <p:spPr/>
+        <p:txBody>
+          <a:bodyPr/>
+          <a:p>
+            <a:fld id="{4C754651-1902-4E52-931F-2B2F094785E1}" type="slidenum">
+              <a:t>11</a:t>
+            </a:fld>
           </a:p>
         </p:txBody>
       </p:sp>
@@ -11069,7 +12405,7 @@
       </p:grpSpPr>
       <p:sp>
         <p:nvSpPr>
-          <p:cNvPr id="58" name="PlaceHolder 1"/>
+          <p:cNvPr id="59" name="PlaceHolder 1"/>
           <p:cNvSpPr>
             <a:spLocks noGrp="1"/>
           </p:cNvSpPr>
@@ -11079,8 +12415,8 @@
         </p:nvSpPr>
         <p:spPr>
           <a:xfrm>
-            <a:off x="360000" y="165960"/>
-            <a:ext cx="9357840" cy="504000"/>
+            <a:off x="0" y="1616760"/>
+            <a:ext cx="8996760" cy="1083240"/>
           </a:xfrm>
           <a:prstGeom prst="rect">
             <a:avLst/>
@@ -11107,13 +12443,13 @@
             <a:r>
               <a:rPr b="0" lang="en-AU" sz="3300" strike="noStrike" u="none">
                 <a:solidFill>
-                  <a:srgbClr val="eeeeee"/>
-                </a:solidFill>
-                <a:effectLst/>
-                <a:uFillTx/>
-                <a:latin typeface="Arial"/>
-              </a:rPr>
-              <a:t>High-Level Indexer Service Design</a:t>
+                  <a:srgbClr val="dd4100"/>
+                </a:solidFill>
+                <a:effectLst/>
+                <a:uFillTx/>
+                <a:latin typeface="Arial"/>
+              </a:rPr>
+              <a:t>Hardware Platform</a:t>
             </a:r>
             <a:endParaRPr b="0" lang="en-AU" sz="3300" strike="noStrike" u="none">
               <a:solidFill>
@@ -11123,50 +12459,6 @@
               <a:uFillTx/>
               <a:latin typeface="Arial"/>
             </a:endParaRPr>
-          </a:p>
-        </p:txBody>
-      </p:sp>
-      <p:pic>
-        <p:nvPicPr>
-          <p:cNvPr id="59" name="" descr=""/>
-          <p:cNvPicPr/>
-          <p:nvPr/>
-        </p:nvPicPr>
-        <p:blipFill>
-          <a:blip r:embed="rId1"/>
-          <a:stretch/>
-        </p:blipFill>
-        <p:spPr>
-          <a:xfrm>
-            <a:off x="628200" y="973800"/>
-            <a:ext cx="8847360" cy="3731760"/>
-          </a:xfrm>
-          <a:prstGeom prst="rect">
-            <a:avLst/>
-          </a:prstGeom>
-          <a:noFill/>
-          <a:ln w="18000">
-            <a:noFill/>
-          </a:ln>
-        </p:spPr>
-      </p:pic>
-      <p:sp>
-        <p:nvSpPr>
-          <p:cNvPr id="3" name="PlaceHolder 2"/>
-          <p:cNvSpPr>
-            <a:spLocks noGrp="1"/>
-          </p:cNvSpPr>
-          <p:nvPr>
-            <p:ph type="sldNum" idx="12"/>
-          </p:nvPr>
-        </p:nvSpPr>
-        <p:spPr/>
-        <p:txBody>
-          <a:bodyPr/>
-          <a:p>
-            <a:fld id="{7F679138-B0A1-4D8E-9942-081778ECB28D}" type="slidenum">
-              <a:t>12</a:t>
-            </a:fld>
           </a:p>
         </p:txBody>
       </p:sp>
@@ -11212,8 +12504,8 @@
         </p:nvSpPr>
         <p:spPr>
           <a:xfrm>
-            <a:off x="360000" y="165960"/>
-            <a:ext cx="9357840" cy="504000"/>
+            <a:off x="360000" y="164160"/>
+            <a:ext cx="9356040" cy="505800"/>
           </a:xfrm>
           <a:prstGeom prst="rect">
             <a:avLst/>
@@ -11232,6 +12524,12 @@
               <a:lnSpc>
                 <a:spcPct val="100000"/>
               </a:lnSpc>
+              <a:spcBef>
+                <a:spcPts val="1191"/>
+              </a:spcBef>
+              <a:spcAft>
+                <a:spcPts val="992"/>
+              </a:spcAft>
               <a:buNone/>
               <a:tabLst>
                 <a:tab algn="l" pos="0"/>
@@ -11246,7 +12544,7 @@
                 <a:uFillTx/>
                 <a:latin typeface="Arial"/>
               </a:rPr>
-              <a:t>Indexer Output</a:t>
+              <a:t>MINISFORUM MS-S1 Max</a:t>
             </a:r>
             <a:endParaRPr b="0" lang="en-AU" sz="3300" strike="noStrike" u="none">
               <a:solidFill>
@@ -11259,20 +12557,20 @@
           </a:p>
         </p:txBody>
       </p:sp>
-      <p:pic>
-        <p:nvPicPr>
-          <p:cNvPr id="61" name="" descr=""/>
-          <p:cNvPicPr/>
-          <p:nvPr/>
-        </p:nvPicPr>
-        <p:blipFill>
-          <a:blip r:embed="rId1"/>
-          <a:stretch/>
-        </p:blipFill>
+      <p:sp>
+        <p:nvSpPr>
+          <p:cNvPr id="61" name="PlaceHolder 2"/>
+          <p:cNvSpPr>
+            <a:spLocks noGrp="1"/>
+          </p:cNvSpPr>
+          <p:nvPr>
+            <p:ph/>
+          </p:nvPr>
+        </p:nvSpPr>
         <p:spPr>
           <a:xfrm>
-            <a:off x="39600" y="871920"/>
-            <a:ext cx="10079640" cy="3954960"/>
+            <a:off x="360000" y="1080000"/>
+            <a:ext cx="9356040" cy="3596040"/>
           </a:xfrm>
           <a:prstGeom prst="rect">
             <a:avLst/>
@@ -11282,22 +12580,217 @@
             <a:noFill/>
           </a:ln>
         </p:spPr>
-      </p:pic>
+        <p:txBody>
+          <a:bodyPr lIns="0" rIns="0" tIns="0" bIns="0" anchor="t">
+            <a:noAutofit/>
+          </a:bodyPr>
+          <a:p>
+            <a:pPr marL="432000" indent="-324000">
+              <a:lnSpc>
+                <a:spcPct val="100000"/>
+              </a:lnSpc>
+              <a:spcBef>
+                <a:spcPts val="1191"/>
+              </a:spcBef>
+              <a:spcAft>
+                <a:spcPts val="992"/>
+              </a:spcAft>
+              <a:buClr>
+                <a:srgbClr val="77caee"/>
+              </a:buClr>
+              <a:buSzPct val="45000"/>
+              <a:buFont typeface="Wingdings" charset="2"/>
+              <a:buChar char=""/>
+            </a:pPr>
+            <a:r>
+              <a:rPr b="0" lang="en-AU" sz="2800" strike="noStrike" u="none">
+                <a:solidFill>
+                  <a:srgbClr val="009bdd"/>
+                </a:solidFill>
+                <a:effectLst/>
+                <a:uFillTx/>
+                <a:latin typeface="Arial"/>
+              </a:rPr>
+              <a:t>AMD Ryzen™ AI Max+ 395 Platform</a:t>
+            </a:r>
+            <a:endParaRPr b="0" lang="en-AU" sz="2800" strike="noStrike" u="none">
+              <a:solidFill>
+                <a:srgbClr val="000000"/>
+              </a:solidFill>
+              <a:effectLst/>
+              <a:uFillTx/>
+              <a:latin typeface="Arial"/>
+            </a:endParaRPr>
+          </a:p>
+          <a:p>
+            <a:pPr lvl="1" marL="864000" indent="-324000">
+              <a:lnSpc>
+                <a:spcPct val="100000"/>
+              </a:lnSpc>
+              <a:spcBef>
+                <a:spcPts val="1191"/>
+              </a:spcBef>
+              <a:spcAft>
+                <a:spcPts val="992"/>
+              </a:spcAft>
+              <a:buClr>
+                <a:srgbClr val="000000"/>
+              </a:buClr>
+              <a:buSzPct val="75000"/>
+              <a:buFont typeface="Symbol" charset="2"/>
+              <a:buChar char=""/>
+            </a:pPr>
+            <a:r>
+              <a:rPr b="0" lang="en-AU" sz="2800" strike="noStrike" u="none">
+                <a:solidFill>
+                  <a:srgbClr val="009bdd"/>
+                </a:solidFill>
+                <a:effectLst/>
+                <a:uFillTx/>
+                <a:latin typeface="Arial"/>
+              </a:rPr>
+              <a:t>CPU: Ryzen AI Max 300, 3.00 GHz,  16 / 32 cores</a:t>
+            </a:r>
+            <a:endParaRPr b="0" lang="en-AU" sz="2800" strike="noStrike" u="none">
+              <a:solidFill>
+                <a:srgbClr val="000000"/>
+              </a:solidFill>
+              <a:effectLst/>
+              <a:uFillTx/>
+              <a:latin typeface="Arial"/>
+            </a:endParaRPr>
+          </a:p>
+          <a:p>
+            <a:pPr lvl="1" marL="864000" indent="-324000">
+              <a:lnSpc>
+                <a:spcPct val="100000"/>
+              </a:lnSpc>
+              <a:spcBef>
+                <a:spcPts val="1191"/>
+              </a:spcBef>
+              <a:spcAft>
+                <a:spcPts val="992"/>
+              </a:spcAft>
+              <a:buClr>
+                <a:srgbClr val="000000"/>
+              </a:buClr>
+              <a:buSzPct val="75000"/>
+              <a:buFont typeface="Symbol" charset="2"/>
+              <a:buChar char=""/>
+            </a:pPr>
+            <a:r>
+              <a:rPr b="0" lang="en-AU" sz="2800" strike="noStrike" u="none">
+                <a:solidFill>
+                  <a:srgbClr val="009bdd"/>
+                </a:solidFill>
+                <a:effectLst/>
+                <a:uFillTx/>
+                <a:latin typeface="Arial"/>
+              </a:rPr>
+              <a:t>GPU: Radeon 8060S 2 GB, additional 96 GB RAM</a:t>
+            </a:r>
+            <a:endParaRPr b="0" lang="en-AU" sz="2800" strike="noStrike" u="none">
+              <a:solidFill>
+                <a:srgbClr val="000000"/>
+              </a:solidFill>
+              <a:effectLst/>
+              <a:uFillTx/>
+              <a:latin typeface="Arial"/>
+            </a:endParaRPr>
+          </a:p>
+          <a:p>
+            <a:pPr lvl="1" marL="864000" indent="-324000">
+              <a:lnSpc>
+                <a:spcPct val="100000"/>
+              </a:lnSpc>
+              <a:spcBef>
+                <a:spcPts val="1191"/>
+              </a:spcBef>
+              <a:spcAft>
+                <a:spcPts val="992"/>
+              </a:spcAft>
+              <a:buClr>
+                <a:srgbClr val="000000"/>
+              </a:buClr>
+              <a:buSzPct val="75000"/>
+              <a:buFont typeface="Symbol" charset="2"/>
+              <a:buChar char=""/>
+            </a:pPr>
+            <a:r>
+              <a:rPr b="0" lang="en-AU" sz="2800" strike="noStrike" u="none">
+                <a:solidFill>
+                  <a:srgbClr val="009bdd"/>
+                </a:solidFill>
+                <a:effectLst/>
+                <a:uFillTx/>
+                <a:latin typeface="Arial"/>
+              </a:rPr>
+              <a:t>16 GB OS RAM</a:t>
+            </a:r>
+            <a:endParaRPr b="0" lang="en-AU" sz="2800" strike="noStrike" u="none">
+              <a:solidFill>
+                <a:srgbClr val="000000"/>
+              </a:solidFill>
+              <a:effectLst/>
+              <a:uFillTx/>
+              <a:latin typeface="Arial"/>
+            </a:endParaRPr>
+          </a:p>
+          <a:p>
+            <a:pPr lvl="1" marL="864000" indent="-324000">
+              <a:lnSpc>
+                <a:spcPct val="100000"/>
+              </a:lnSpc>
+              <a:spcBef>
+                <a:spcPts val="1191"/>
+              </a:spcBef>
+              <a:spcAft>
+                <a:spcPts val="992"/>
+              </a:spcAft>
+              <a:buClr>
+                <a:srgbClr val="000000"/>
+              </a:buClr>
+              <a:buSzPct val="75000"/>
+              <a:buFont typeface="Symbol" charset="2"/>
+              <a:buChar char=""/>
+            </a:pPr>
+            <a:r>
+              <a:rPr b="0" lang="en-AU" sz="2800" strike="noStrike" u="none">
+                <a:solidFill>
+                  <a:srgbClr val="009bdd"/>
+                </a:solidFill>
+                <a:effectLst/>
+                <a:uFillTx/>
+                <a:latin typeface="Arial"/>
+              </a:rPr>
+              <a:t>16 GB Shared RAM (GPU and NPU)</a:t>
+            </a:r>
+            <a:endParaRPr b="0" lang="en-AU" sz="2800" strike="noStrike" u="none">
+              <a:solidFill>
+                <a:srgbClr val="000000"/>
+              </a:solidFill>
+              <a:effectLst/>
+              <a:uFillTx/>
+              <a:latin typeface="Arial"/>
+            </a:endParaRPr>
+          </a:p>
+        </p:txBody>
+      </p:sp>
       <p:sp>
         <p:nvSpPr>
-          <p:cNvPr id="3" name="PlaceHolder 2"/>
+          <p:cNvPr id="4" name="PlaceHolder 3"/>
           <p:cNvSpPr>
             <a:spLocks noGrp="1"/>
           </p:cNvSpPr>
           <p:nvPr>
-            <p:ph type="sldNum" idx="12"/>
+            <p:ph type="sldNum" idx="3"/>
           </p:nvPr>
         </p:nvSpPr>
         <p:spPr/>
         <p:txBody>
           <a:bodyPr/>
           <a:p>
-            <a:fld id="{8EBE608C-6E38-4EEE-8952-847FA79307C7}" type="slidenum">
+            <a:fld id="{9E5BEECE-7313-48B9-9AE3-1766D2ABA580}" type="slidenum">
               <a:t>13</a:t>
             </a:fld>
           </a:p>
@@ -11345,8 +12838,8 @@
         </p:nvSpPr>
         <p:spPr>
           <a:xfrm>
-            <a:off x="360000" y="165960"/>
-            <a:ext cx="9357840" cy="504360"/>
+            <a:off x="360000" y="164160"/>
+            <a:ext cx="9356040" cy="505800"/>
           </a:xfrm>
           <a:prstGeom prst="rect">
             <a:avLst/>
@@ -11365,6 +12858,12 @@
               <a:lnSpc>
                 <a:spcPct val="100000"/>
               </a:lnSpc>
+              <a:spcBef>
+                <a:spcPts val="1191"/>
+              </a:spcBef>
+              <a:spcAft>
+                <a:spcPts val="992"/>
+              </a:spcAft>
               <a:buNone/>
               <a:tabLst>
                 <a:tab algn="l" pos="0"/>
@@ -11379,7 +12878,7 @@
                 <a:uFillTx/>
                 <a:latin typeface="Arial"/>
               </a:rPr>
-              <a:t>Hybrid Architecture</a:t>
+              <a:t>Baseline: Dell Precision 7530</a:t>
             </a:r>
             <a:endParaRPr b="0" lang="en-AU" sz="3300" strike="noStrike" u="none">
               <a:solidFill>
@@ -11392,20 +12891,20 @@
           </a:p>
         </p:txBody>
       </p:sp>
-      <p:pic>
-        <p:nvPicPr>
-          <p:cNvPr id="63" name="" descr=""/>
-          <p:cNvPicPr/>
-          <p:nvPr/>
-        </p:nvPicPr>
-        <p:blipFill>
-          <a:blip r:embed="rId1"/>
-          <a:stretch/>
-        </p:blipFill>
+      <p:sp>
+        <p:nvSpPr>
+          <p:cNvPr id="63" name="PlaceHolder 2"/>
+          <p:cNvSpPr>
+            <a:spLocks noGrp="1"/>
+          </p:cNvSpPr>
+          <p:nvPr>
+            <p:ph/>
+          </p:nvPr>
+        </p:nvSpPr>
         <p:spPr>
           <a:xfrm>
-            <a:off x="1186920" y="1283400"/>
-            <a:ext cx="7695720" cy="3094560"/>
+            <a:off x="360000" y="1080000"/>
+            <a:ext cx="9356040" cy="3596040"/>
           </a:xfrm>
           <a:prstGeom prst="rect">
             <a:avLst/>
@@ -11415,22 +12914,217 @@
             <a:noFill/>
           </a:ln>
         </p:spPr>
-      </p:pic>
+        <p:txBody>
+          <a:bodyPr lIns="0" rIns="0" tIns="0" bIns="0" anchor="t">
+            <a:noAutofit/>
+          </a:bodyPr>
+          <a:p>
+            <a:pPr marL="432000" indent="-324000">
+              <a:lnSpc>
+                <a:spcPct val="100000"/>
+              </a:lnSpc>
+              <a:spcBef>
+                <a:spcPts val="1191"/>
+              </a:spcBef>
+              <a:spcAft>
+                <a:spcPts val="992"/>
+              </a:spcAft>
+              <a:buClr>
+                <a:srgbClr val="77caee"/>
+              </a:buClr>
+              <a:buSzPct val="45000"/>
+              <a:buFont typeface="Wingdings" charset="2"/>
+              <a:buChar char=""/>
+            </a:pPr>
+            <a:r>
+              <a:rPr b="0" lang="en-AU" sz="2800" strike="noStrike" u="none">
+                <a:solidFill>
+                  <a:srgbClr val="009bdd"/>
+                </a:solidFill>
+                <a:effectLst/>
+                <a:uFillTx/>
+                <a:latin typeface="Arial"/>
+              </a:rPr>
+              <a:t>General-purpose Intel-based workstation</a:t>
+            </a:r>
+            <a:endParaRPr b="0" lang="en-AU" sz="2800" strike="noStrike" u="none">
+              <a:solidFill>
+                <a:srgbClr val="000000"/>
+              </a:solidFill>
+              <a:effectLst/>
+              <a:uFillTx/>
+              <a:latin typeface="Arial"/>
+            </a:endParaRPr>
+          </a:p>
+          <a:p>
+            <a:pPr lvl="1" marL="864000" indent="-324000">
+              <a:lnSpc>
+                <a:spcPct val="100000"/>
+              </a:lnSpc>
+              <a:spcBef>
+                <a:spcPts val="1191"/>
+              </a:spcBef>
+              <a:spcAft>
+                <a:spcPts val="992"/>
+              </a:spcAft>
+              <a:buClr>
+                <a:srgbClr val="000000"/>
+              </a:buClr>
+              <a:buSzPct val="75000"/>
+              <a:buFont typeface="Symbol" charset="2"/>
+              <a:buChar char=""/>
+            </a:pPr>
+            <a:r>
+              <a:rPr b="0" lang="en-AU" sz="2800" strike="noStrike" u="none">
+                <a:solidFill>
+                  <a:srgbClr val="009bdd"/>
+                </a:solidFill>
+                <a:effectLst/>
+                <a:uFillTx/>
+                <a:latin typeface="Arial"/>
+              </a:rPr>
+              <a:t>CPU: Intel i7-9750H, 2.60 GHz, 6 / 12 cores </a:t>
+            </a:r>
+            <a:endParaRPr b="0" lang="en-AU" sz="2800" strike="noStrike" u="none">
+              <a:solidFill>
+                <a:srgbClr val="000000"/>
+              </a:solidFill>
+              <a:effectLst/>
+              <a:uFillTx/>
+              <a:latin typeface="Arial"/>
+            </a:endParaRPr>
+          </a:p>
+          <a:p>
+            <a:pPr lvl="1" marL="864000" indent="-324000">
+              <a:lnSpc>
+                <a:spcPct val="100000"/>
+              </a:lnSpc>
+              <a:spcBef>
+                <a:spcPts val="1191"/>
+              </a:spcBef>
+              <a:spcAft>
+                <a:spcPts val="992"/>
+              </a:spcAft>
+              <a:buClr>
+                <a:srgbClr val="000000"/>
+              </a:buClr>
+              <a:buSzPct val="75000"/>
+              <a:buFont typeface="Symbol" charset="2"/>
+              <a:buChar char=""/>
+            </a:pPr>
+            <a:r>
+              <a:rPr b="0" lang="en-AU" sz="2800" strike="noStrike" u="none">
+                <a:solidFill>
+                  <a:srgbClr val="009bdd"/>
+                </a:solidFill>
+                <a:effectLst/>
+                <a:uFillTx/>
+                <a:latin typeface="Arial"/>
+              </a:rPr>
+              <a:t>GPU: NVidia Quadro T1000 4 GB</a:t>
+            </a:r>
+            <a:endParaRPr b="0" lang="en-AU" sz="2800" strike="noStrike" u="none">
+              <a:solidFill>
+                <a:srgbClr val="000000"/>
+              </a:solidFill>
+              <a:effectLst/>
+              <a:uFillTx/>
+              <a:latin typeface="Arial"/>
+            </a:endParaRPr>
+          </a:p>
+          <a:p>
+            <a:pPr lvl="1" marL="864000" indent="-324000">
+              <a:lnSpc>
+                <a:spcPct val="100000"/>
+              </a:lnSpc>
+              <a:spcBef>
+                <a:spcPts val="1191"/>
+              </a:spcBef>
+              <a:spcAft>
+                <a:spcPts val="992"/>
+              </a:spcAft>
+              <a:buClr>
+                <a:srgbClr val="000000"/>
+              </a:buClr>
+              <a:buSzPct val="75000"/>
+              <a:buFont typeface="Symbol" charset="2"/>
+              <a:buChar char=""/>
+            </a:pPr>
+            <a:r>
+              <a:rPr b="0" lang="en-AU" sz="2800" strike="noStrike" u="none">
+                <a:solidFill>
+                  <a:srgbClr val="009bdd"/>
+                </a:solidFill>
+                <a:effectLst/>
+                <a:uFillTx/>
+                <a:latin typeface="Arial"/>
+              </a:rPr>
+              <a:t>64 GB RAM</a:t>
+            </a:r>
+            <a:endParaRPr b="0" lang="en-AU" sz="2800" strike="noStrike" u="none">
+              <a:solidFill>
+                <a:srgbClr val="000000"/>
+              </a:solidFill>
+              <a:effectLst/>
+              <a:uFillTx/>
+              <a:latin typeface="Arial"/>
+            </a:endParaRPr>
+          </a:p>
+          <a:p>
+            <a:pPr lvl="1" marL="864000" indent="-324000">
+              <a:lnSpc>
+                <a:spcPct val="100000"/>
+              </a:lnSpc>
+              <a:spcBef>
+                <a:spcPts val="1191"/>
+              </a:spcBef>
+              <a:spcAft>
+                <a:spcPts val="992"/>
+              </a:spcAft>
+              <a:buClr>
+                <a:srgbClr val="000000"/>
+              </a:buClr>
+              <a:buSzPct val="75000"/>
+              <a:buFont typeface="Symbol" charset="2"/>
+              <a:buChar char=""/>
+            </a:pPr>
+            <a:r>
+              <a:rPr b="0" lang="en-AU" sz="2800" strike="noStrike" u="none">
+                <a:solidFill>
+                  <a:srgbClr val="009bdd"/>
+                </a:solidFill>
+                <a:effectLst/>
+                <a:uFillTx/>
+                <a:latin typeface="Arial"/>
+              </a:rPr>
+              <a:t>35.9 GB Shared RAM (GPU)</a:t>
+            </a:r>
+            <a:endParaRPr b="0" lang="en-AU" sz="2800" strike="noStrike" u="none">
+              <a:solidFill>
+                <a:srgbClr val="000000"/>
+              </a:solidFill>
+              <a:effectLst/>
+              <a:uFillTx/>
+              <a:latin typeface="Arial"/>
+            </a:endParaRPr>
+          </a:p>
+        </p:txBody>
+      </p:sp>
       <p:sp>
         <p:nvSpPr>
-          <p:cNvPr id="3" name="PlaceHolder 2"/>
+          <p:cNvPr id="4" name="PlaceHolder 3"/>
           <p:cNvSpPr>
             <a:spLocks noGrp="1"/>
           </p:cNvSpPr>
           <p:nvPr>
-            <p:ph type="sldNum" idx="12"/>
+            <p:ph type="sldNum" idx="3"/>
           </p:nvPr>
         </p:nvSpPr>
         <p:spPr/>
         <p:txBody>
           <a:bodyPr/>
           <a:p>
-            <a:fld id="{35FAF888-21FA-46BA-AB32-6BB8653125BB}" type="slidenum">
+            <a:fld id="{CE48A67C-EA10-493A-AE44-FFE4C57E1DD7}" type="slidenum">
               <a:t>14</a:t>
             </a:fld>
           </a:p>
@@ -11478,8 +13172,8 @@
         </p:nvSpPr>
         <p:spPr>
           <a:xfrm>
-            <a:off x="0" y="1618200"/>
-            <a:ext cx="8998200" cy="1081800"/>
+            <a:off x="360000" y="164160"/>
+            <a:ext cx="9356040" cy="505800"/>
           </a:xfrm>
           <a:prstGeom prst="rect">
             <a:avLst/>
@@ -11498,6 +13192,12 @@
               <a:lnSpc>
                 <a:spcPct val="100000"/>
               </a:lnSpc>
+              <a:spcBef>
+                <a:spcPts val="1191"/>
+              </a:spcBef>
+              <a:spcAft>
+                <a:spcPts val="992"/>
+              </a:spcAft>
               <a:buNone/>
               <a:tabLst>
                 <a:tab algn="l" pos="0"/>
@@ -11506,13 +13206,13 @@
             <a:r>
               <a:rPr b="0" lang="en-AU" sz="3300" strike="noStrike" u="none">
                 <a:solidFill>
-                  <a:srgbClr val="dd4100"/>
-                </a:solidFill>
-                <a:effectLst/>
-                <a:uFillTx/>
-                <a:latin typeface="Arial"/>
-              </a:rPr>
-              <a:t>Query Application</a:t>
+                  <a:srgbClr val="eeeeee"/>
+                </a:solidFill>
+                <a:effectLst/>
+                <a:uFillTx/>
+                <a:latin typeface="Arial"/>
+              </a:rPr>
+              <a:t>Benchmarks</a:t>
             </a:r>
             <a:endParaRPr b="0" lang="en-AU" sz="3300" strike="noStrike" u="none">
               <a:solidFill>
@@ -11522,6 +13222,163 @@
               <a:uFillTx/>
               <a:latin typeface="Arial"/>
             </a:endParaRPr>
+          </a:p>
+        </p:txBody>
+      </p:sp>
+      <p:sp>
+        <p:nvSpPr>
+          <p:cNvPr id="65" name="PlaceHolder 2"/>
+          <p:cNvSpPr>
+            <a:spLocks noGrp="1"/>
+          </p:cNvSpPr>
+          <p:nvPr>
+            <p:ph/>
+          </p:nvPr>
+        </p:nvSpPr>
+        <p:spPr>
+          <a:xfrm>
+            <a:off x="360000" y="1080000"/>
+            <a:ext cx="9356040" cy="3596040"/>
+          </a:xfrm>
+          <a:prstGeom prst="rect">
+            <a:avLst/>
+          </a:prstGeom>
+          <a:noFill/>
+          <a:ln w="0">
+            <a:noFill/>
+          </a:ln>
+        </p:spPr>
+        <p:txBody>
+          <a:bodyPr lIns="0" rIns="0" tIns="0" bIns="0" anchor="t">
+            <a:noAutofit/>
+          </a:bodyPr>
+          <a:p>
+            <a:pPr marL="432000" indent="-324000">
+              <a:lnSpc>
+                <a:spcPct val="100000"/>
+              </a:lnSpc>
+              <a:spcBef>
+                <a:spcPts val="1191"/>
+              </a:spcBef>
+              <a:spcAft>
+                <a:spcPts val="992"/>
+              </a:spcAft>
+              <a:buClr>
+                <a:srgbClr val="77caee"/>
+              </a:buClr>
+              <a:buSzPct val="45000"/>
+              <a:buFont typeface="Wingdings" charset="2"/>
+              <a:buChar char=""/>
+            </a:pPr>
+            <a:r>
+              <a:rPr b="0" lang="en-AU" sz="2800" strike="noStrike" u="none">
+                <a:solidFill>
+                  <a:srgbClr val="009bdd"/>
+                </a:solidFill>
+                <a:effectLst/>
+                <a:uFillTx/>
+                <a:latin typeface="Arial"/>
+              </a:rPr>
+              <a:t>MLPerf Client v1.5 on Windows 11 Pro</a:t>
+            </a:r>
+            <a:endParaRPr b="0" lang="en-AU" sz="2800" strike="noStrike" u="none">
+              <a:solidFill>
+                <a:srgbClr val="000000"/>
+              </a:solidFill>
+              <a:effectLst/>
+              <a:uFillTx/>
+              <a:latin typeface="Arial"/>
+            </a:endParaRPr>
+          </a:p>
+          <a:p>
+            <a:pPr lvl="1" marL="864000" indent="-324000">
+              <a:lnSpc>
+                <a:spcPct val="100000"/>
+              </a:lnSpc>
+              <a:spcBef>
+                <a:spcPts val="1134"/>
+              </a:spcBef>
+              <a:buClr>
+                <a:srgbClr val="000000"/>
+              </a:buClr>
+              <a:buSzPct val="75000"/>
+              <a:buFont typeface="Symbol" charset="2"/>
+              <a:buChar char=""/>
+            </a:pPr>
+            <a:r>
+              <a:rPr b="0" lang="en-AU" sz="2800" strike="noStrike" u="none">
+                <a:solidFill>
+                  <a:srgbClr val="009bdd"/>
+                </a:solidFill>
+                <a:effectLst/>
+                <a:uFillTx/>
+                <a:latin typeface="Arial"/>
+              </a:rPr>
+              <a:t>Llama 3.1 8B Instruct</a:t>
+            </a:r>
+            <a:endParaRPr b="0" lang="en-AU" sz="2800" strike="noStrike" u="none">
+              <a:solidFill>
+                <a:srgbClr val="000000"/>
+              </a:solidFill>
+              <a:effectLst/>
+              <a:uFillTx/>
+              <a:latin typeface="Arial"/>
+            </a:endParaRPr>
+          </a:p>
+          <a:p>
+            <a:pPr lvl="1" marL="864000" indent="-324000">
+              <a:lnSpc>
+                <a:spcPct val="100000"/>
+              </a:lnSpc>
+              <a:spcBef>
+                <a:spcPts val="1134"/>
+              </a:spcBef>
+              <a:buClr>
+                <a:srgbClr val="000000"/>
+              </a:buClr>
+              <a:buSzPct val="75000"/>
+              <a:buFont typeface="Symbol" charset="2"/>
+              <a:buChar char=""/>
+            </a:pPr>
+            <a:r>
+              <a:rPr b="0" lang="en-AU" sz="2800" strike="noStrike" u="none">
+                <a:solidFill>
+                  <a:srgbClr val="009bdd"/>
+                </a:solidFill>
+                <a:effectLst/>
+                <a:uFillTx/>
+                <a:latin typeface="Arial"/>
+              </a:rPr>
+              <a:t>Phi 3.5 Mini Instruct</a:t>
+            </a:r>
+            <a:endParaRPr b="0" lang="en-AU" sz="2800" strike="noStrike" u="none">
+              <a:solidFill>
+                <a:srgbClr val="000000"/>
+              </a:solidFill>
+              <a:effectLst/>
+              <a:uFillTx/>
+              <a:latin typeface="Arial"/>
+            </a:endParaRPr>
+          </a:p>
+        </p:txBody>
+      </p:sp>
+      <p:sp>
+        <p:nvSpPr>
+          <p:cNvPr id="4" name="PlaceHolder 3"/>
+          <p:cNvSpPr>
+            <a:spLocks noGrp="1"/>
+          </p:cNvSpPr>
+          <p:nvPr>
+            <p:ph type="sldNum" idx="3"/>
+          </p:nvPr>
+        </p:nvSpPr>
+        <p:spPr/>
+        <p:txBody>
+          <a:bodyPr/>
+          <a:p>
+            <a:fld id="{D2BE8720-3C7F-4C37-AAE0-87E6ED476FAB}" type="slidenum">
+              <a:t>15</a:t>
+            </a:fld>
           </a:p>
         </p:txBody>
       </p:sp>
@@ -11557,7 +13414,7 @@
       </p:grpSpPr>
       <p:sp>
         <p:nvSpPr>
-          <p:cNvPr id="65" name="PlaceHolder 1"/>
+          <p:cNvPr id="66" name="PlaceHolder 1"/>
           <p:cNvSpPr>
             <a:spLocks noGrp="1"/>
           </p:cNvSpPr>
@@ -11567,8 +13424,8 @@
         </p:nvSpPr>
         <p:spPr>
           <a:xfrm>
-            <a:off x="360000" y="166320"/>
-            <a:ext cx="9358200" cy="504000"/>
+            <a:off x="360000" y="164160"/>
+            <a:ext cx="9356040" cy="505800"/>
           </a:xfrm>
           <a:prstGeom prst="rect">
             <a:avLst/>
@@ -11587,6 +13444,12 @@
               <a:lnSpc>
                 <a:spcPct val="100000"/>
               </a:lnSpc>
+              <a:spcBef>
+                <a:spcPts val="1191"/>
+              </a:spcBef>
+              <a:spcAft>
+                <a:spcPts val="992"/>
+              </a:spcAft>
               <a:buNone/>
               <a:tabLst>
                 <a:tab algn="l" pos="0"/>
@@ -11601,7 +13464,7 @@
                 <a:uFillTx/>
                 <a:latin typeface="Arial"/>
               </a:rPr>
-              <a:t>High-Level Query App Design</a:t>
+              <a:t>MLPerf Results</a:t>
             </a:r>
             <a:endParaRPr b="0" lang="en-AU" sz="3300" strike="noStrike" u="none">
               <a:solidFill>
@@ -11614,30 +13477,1168 @@
           </a:p>
         </p:txBody>
       </p:sp>
-      <p:pic>
-        <p:nvPicPr>
-          <p:cNvPr id="66" name="" descr=""/>
-          <p:cNvPicPr/>
+      <p:graphicFrame>
+        <p:nvGraphicFramePr>
+          <p:cNvPr id="67" name=""/>
+          <p:cNvGraphicFramePr/>
           <p:nvPr/>
-        </p:nvPicPr>
-        <p:blipFill>
-          <a:blip r:embed="rId1"/>
-          <a:stretch/>
-        </p:blipFill>
-        <p:spPr>
-          <a:xfrm>
-            <a:off x="1653480" y="1407240"/>
-            <a:ext cx="6762240" cy="2846880"/>
-          </a:xfrm>
-          <a:prstGeom prst="rect">
-            <a:avLst/>
-          </a:prstGeom>
-          <a:noFill/>
-          <a:ln w="0">
-            <a:noFill/>
-          </a:ln>
-        </p:spPr>
-      </p:pic>
+        </p:nvGraphicFramePr>
+        <p:xfrm>
+          <a:off x="382320" y="1374120"/>
+          <a:ext cx="9430920" cy="3775320"/>
+        </p:xfrm>
+        <a:graphic>
+          <a:graphicData uri="http://schemas.openxmlformats.org/drawingml/2006/table">
+            <a:tbl>
+              <a:tblPr/>
+              <a:tblGrid>
+                <a:gridCol w="3142800"/>
+                <a:gridCol w="2143440"/>
+                <a:gridCol w="4144680"/>
+              </a:tblGrid>
+              <a:tr h="628560">
+                <a:tc>
+                  <a:txBody>
+                    <a:bodyPr lIns="36000" rIns="36000" tIns="36000" bIns="36000" anchor="t">
+                      <a:noAutofit/>
+                    </a:bodyPr>
+                    <a:p>
+                      <a:r>
+                        <a:rPr b="0" lang="en-AU" sz="1800" strike="noStrike" u="none">
+                          <a:solidFill>
+                            <a:srgbClr val="000000"/>
+                          </a:solidFill>
+                          <a:effectLst/>
+                          <a:uFillTx/>
+                          <a:latin typeface="Arial"/>
+                        </a:rPr>
+                        <a:t>Benchmark</a:t>
+                      </a:r>
+                      <a:endParaRPr b="0" lang="en-AU" sz="1800" strike="noStrike" u="none">
+                        <a:solidFill>
+                          <a:srgbClr val="000000"/>
+                        </a:solidFill>
+                        <a:effectLst/>
+                        <a:uFillTx/>
+                        <a:latin typeface="Arial"/>
+                      </a:endParaRPr>
+                    </a:p>
+                  </a:txBody>
+                  <a:tcPr anchor="t" marL="36000" marR="36000">
+                    <a:lnL w="7200">
+                      <a:solidFill>
+                        <a:srgbClr val="000000"/>
+                      </a:solidFill>
+                      <a:prstDash val="solid"/>
+                    </a:lnL>
+                    <a:lnR w="7200">
+                      <a:solidFill>
+                        <a:srgbClr val="000000"/>
+                      </a:solidFill>
+                      <a:prstDash val="solid"/>
+                    </a:lnR>
+                    <a:lnT w="7200">
+                      <a:solidFill>
+                        <a:srgbClr val="000000"/>
+                      </a:solidFill>
+                      <a:prstDash val="solid"/>
+                    </a:lnT>
+                    <a:lnB w="7200">
+                      <a:solidFill>
+                        <a:srgbClr val="000000"/>
+                      </a:solidFill>
+                      <a:prstDash val="solid"/>
+                    </a:lnB>
+                    <a:noFill/>
+                  </a:tcPr>
+                </a:tc>
+                <a:tc>
+                  <a:txBody>
+                    <a:bodyPr lIns="36000" rIns="36000" tIns="36000" bIns="36000" anchor="t" anchorCtr="1">
+                      <a:noAutofit/>
+                    </a:bodyPr>
+                    <a:p>
+                      <a:pPr algn="ctr"/>
+                      <a:r>
+                        <a:rPr b="0" lang="en-AU" sz="1800" strike="noStrike" u="none">
+                          <a:solidFill>
+                            <a:srgbClr val="000000"/>
+                          </a:solidFill>
+                          <a:effectLst/>
+                          <a:uFillTx/>
+                          <a:latin typeface="Arial"/>
+                        </a:rPr>
+                        <a:t>Dell Precision 7530</a:t>
+                      </a:r>
+                      <a:endParaRPr b="0" lang="en-AU" sz="1800" strike="noStrike" u="none">
+                        <a:solidFill>
+                          <a:srgbClr val="000000"/>
+                        </a:solidFill>
+                        <a:effectLst/>
+                        <a:uFillTx/>
+                        <a:latin typeface="Arial"/>
+                      </a:endParaRPr>
+                    </a:p>
+                  </a:txBody>
+                  <a:tcPr anchor="t" marL="36000" marR="36000">
+                    <a:lnL w="7200">
+                      <a:solidFill>
+                        <a:srgbClr val="000000"/>
+                      </a:solidFill>
+                      <a:prstDash val="solid"/>
+                    </a:lnL>
+                    <a:lnR w="7200">
+                      <a:solidFill>
+                        <a:srgbClr val="000000"/>
+                      </a:solidFill>
+                      <a:prstDash val="solid"/>
+                    </a:lnR>
+                    <a:lnT w="7200">
+                      <a:solidFill>
+                        <a:srgbClr val="000000"/>
+                      </a:solidFill>
+                      <a:prstDash val="solid"/>
+                    </a:lnT>
+                    <a:lnB w="7200">
+                      <a:solidFill>
+                        <a:srgbClr val="000000"/>
+                      </a:solidFill>
+                      <a:prstDash val="solid"/>
+                    </a:lnB>
+                    <a:noFill/>
+                  </a:tcPr>
+                </a:tc>
+                <a:tc>
+                  <a:txBody>
+                    <a:bodyPr lIns="36000" rIns="36000" tIns="36000" bIns="36000" anchor="t" anchorCtr="1">
+                      <a:noAutofit/>
+                    </a:bodyPr>
+                    <a:p>
+                      <a:pPr algn="ctr"/>
+                      <a:r>
+                        <a:rPr b="0" lang="en-AU" sz="1800" strike="noStrike" u="none">
+                          <a:solidFill>
+                            <a:srgbClr val="000000"/>
+                          </a:solidFill>
+                          <a:effectLst/>
+                          <a:uFillTx/>
+                          <a:latin typeface="Arial"/>
+                        </a:rPr>
+                        <a:t>Minisforum MS-S1 Max</a:t>
+                      </a:r>
+                      <a:endParaRPr b="0" lang="en-AU" sz="1800" strike="noStrike" u="none">
+                        <a:solidFill>
+                          <a:srgbClr val="000000"/>
+                        </a:solidFill>
+                        <a:effectLst/>
+                        <a:uFillTx/>
+                        <a:latin typeface="Arial"/>
+                      </a:endParaRPr>
+                    </a:p>
+                  </a:txBody>
+                  <a:tcPr anchor="t" marL="36000" marR="36000">
+                    <a:lnL w="7200">
+                      <a:solidFill>
+                        <a:srgbClr val="000000"/>
+                      </a:solidFill>
+                      <a:prstDash val="solid"/>
+                    </a:lnL>
+                    <a:lnR w="7200">
+                      <a:solidFill>
+                        <a:srgbClr val="000000"/>
+                      </a:solidFill>
+                      <a:prstDash val="solid"/>
+                    </a:lnR>
+                    <a:lnT w="7200">
+                      <a:solidFill>
+                        <a:srgbClr val="000000"/>
+                      </a:solidFill>
+                      <a:prstDash val="solid"/>
+                    </a:lnT>
+                    <a:lnB w="7200">
+                      <a:solidFill>
+                        <a:srgbClr val="000000"/>
+                      </a:solidFill>
+                      <a:prstDash val="solid"/>
+                    </a:lnB>
+                    <a:noFill/>
+                  </a:tcPr>
+                </a:tc>
+              </a:tr>
+              <a:tr h="310320">
+                <a:tc>
+                  <a:txBody>
+                    <a:bodyPr lIns="36000" rIns="36000" tIns="36000" bIns="36000" anchor="t">
+                      <a:noAutofit/>
+                    </a:bodyPr>
+                    <a:p>
+                      <a:r>
+                        <a:rPr b="0" lang="en-AU" sz="1800" strike="noStrike" u="none">
+                          <a:solidFill>
+                            <a:srgbClr val="000000"/>
+                          </a:solidFill>
+                          <a:effectLst/>
+                          <a:uFillTx/>
+                          <a:latin typeface="Arial"/>
+                        </a:rPr>
+                        <a:t>Llama 3.1 8B Instruct</a:t>
+                      </a:r>
+                      <a:endParaRPr b="0" lang="en-AU" sz="1800" strike="noStrike" u="none">
+                        <a:solidFill>
+                          <a:srgbClr val="000000"/>
+                        </a:solidFill>
+                        <a:effectLst/>
+                        <a:uFillTx/>
+                        <a:latin typeface="Arial"/>
+                      </a:endParaRPr>
+                    </a:p>
+                  </a:txBody>
+                  <a:tcPr anchor="t" marL="36000" marR="36000">
+                    <a:lnL w="7200">
+                      <a:solidFill>
+                        <a:srgbClr val="000000"/>
+                      </a:solidFill>
+                      <a:prstDash val="solid"/>
+                    </a:lnL>
+                    <a:lnR w="7200">
+                      <a:solidFill>
+                        <a:srgbClr val="000000"/>
+                      </a:solidFill>
+                      <a:prstDash val="solid"/>
+                    </a:lnR>
+                    <a:lnT w="7200">
+                      <a:solidFill>
+                        <a:srgbClr val="000000"/>
+                      </a:solidFill>
+                      <a:prstDash val="solid"/>
+                    </a:lnT>
+                    <a:lnB w="7200">
+                      <a:solidFill>
+                        <a:srgbClr val="000000"/>
+                      </a:solidFill>
+                      <a:prstDash val="solid"/>
+                    </a:lnB>
+                    <a:noFill/>
+                  </a:tcPr>
+                </a:tc>
+                <a:tc>
+                  <a:txBody>
+                    <a:bodyPr lIns="36000" rIns="36000" tIns="36000" bIns="36000" anchor="t">
+                      <a:noAutofit/>
+                    </a:bodyPr>
+                    <a:p>
+                      <a:endParaRPr b="0" lang="en-AU" sz="1800" strike="noStrike" u="none">
+                        <a:solidFill>
+                          <a:srgbClr val="000000"/>
+                        </a:solidFill>
+                        <a:effectLst/>
+                        <a:uFillTx/>
+                        <a:latin typeface="Arial"/>
+                      </a:endParaRPr>
+                    </a:p>
+                  </a:txBody>
+                  <a:tcPr anchor="t" marL="36000" marR="36000">
+                    <a:lnL w="7200">
+                      <a:solidFill>
+                        <a:srgbClr val="000000"/>
+                      </a:solidFill>
+                      <a:prstDash val="solid"/>
+                    </a:lnL>
+                    <a:lnR w="7200">
+                      <a:solidFill>
+                        <a:srgbClr val="000000"/>
+                      </a:solidFill>
+                      <a:prstDash val="solid"/>
+                    </a:lnR>
+                    <a:lnT w="7200">
+                      <a:solidFill>
+                        <a:srgbClr val="000000"/>
+                      </a:solidFill>
+                      <a:prstDash val="solid"/>
+                    </a:lnT>
+                    <a:lnB w="7200">
+                      <a:solidFill>
+                        <a:srgbClr val="000000"/>
+                      </a:solidFill>
+                      <a:prstDash val="solid"/>
+                    </a:lnB>
+                    <a:noFill/>
+                  </a:tcPr>
+                </a:tc>
+                <a:tc>
+                  <a:txBody>
+                    <a:bodyPr lIns="36000" rIns="36000" tIns="36000" bIns="36000" anchor="t">
+                      <a:noAutofit/>
+                    </a:bodyPr>
+                    <a:p>
+                      <a:endParaRPr b="0" lang="en-AU" sz="1800" strike="noStrike" u="none">
+                        <a:solidFill>
+                          <a:srgbClr val="000000"/>
+                        </a:solidFill>
+                        <a:effectLst/>
+                        <a:uFillTx/>
+                        <a:latin typeface="Arial"/>
+                      </a:endParaRPr>
+                    </a:p>
+                  </a:txBody>
+                  <a:tcPr anchor="t" marL="36000" marR="36000">
+                    <a:lnL w="7200">
+                      <a:solidFill>
+                        <a:srgbClr val="000000"/>
+                      </a:solidFill>
+                      <a:prstDash val="solid"/>
+                    </a:lnL>
+                    <a:lnR w="7200">
+                      <a:solidFill>
+                        <a:srgbClr val="000000"/>
+                      </a:solidFill>
+                      <a:prstDash val="solid"/>
+                    </a:lnR>
+                    <a:lnT w="7200">
+                      <a:solidFill>
+                        <a:srgbClr val="000000"/>
+                      </a:solidFill>
+                      <a:prstDash val="solid"/>
+                    </a:lnT>
+                    <a:lnB w="7200">
+                      <a:solidFill>
+                        <a:srgbClr val="000000"/>
+                      </a:solidFill>
+                      <a:prstDash val="solid"/>
+                    </a:lnB>
+                    <a:noFill/>
+                  </a:tcPr>
+                </a:tc>
+              </a:tr>
+              <a:tr h="389880">
+                <a:tc>
+                  <a:txBody>
+                    <a:bodyPr lIns="36000" rIns="36000" tIns="36000" bIns="36000" anchor="t" anchorCtr="1">
+                      <a:noAutofit/>
+                    </a:bodyPr>
+                    <a:p>
+                      <a:pPr algn="r"/>
+                      <a:r>
+                        <a:rPr b="0" lang="en-AU" sz="1800" strike="noStrike" u="none">
+                          <a:solidFill>
+                            <a:srgbClr val="000000"/>
+                          </a:solidFill>
+                          <a:effectLst/>
+                          <a:uFillTx/>
+                          <a:latin typeface="Arial"/>
+                        </a:rPr>
+                        <a:t>Time to First Token</a:t>
+                      </a:r>
+                      <a:endParaRPr b="0" lang="en-AU" sz="1800" strike="noStrike" u="none">
+                        <a:solidFill>
+                          <a:srgbClr val="000000"/>
+                        </a:solidFill>
+                        <a:effectLst/>
+                        <a:uFillTx/>
+                        <a:latin typeface="Arial"/>
+                      </a:endParaRPr>
+                    </a:p>
+                  </a:txBody>
+                  <a:tcPr anchor="t" marL="36000" marR="36000">
+                    <a:lnL w="7200">
+                      <a:solidFill>
+                        <a:srgbClr val="000000"/>
+                      </a:solidFill>
+                      <a:prstDash val="solid"/>
+                    </a:lnL>
+                    <a:lnR w="7200">
+                      <a:solidFill>
+                        <a:srgbClr val="000000"/>
+                      </a:solidFill>
+                      <a:prstDash val="solid"/>
+                    </a:lnR>
+                    <a:lnT w="7200">
+                      <a:solidFill>
+                        <a:srgbClr val="000000"/>
+                      </a:solidFill>
+                      <a:prstDash val="solid"/>
+                    </a:lnT>
+                    <a:lnB w="7200">
+                      <a:solidFill>
+                        <a:srgbClr val="000000"/>
+                      </a:solidFill>
+                      <a:prstDash val="solid"/>
+                    </a:lnB>
+                    <a:noFill/>
+                  </a:tcPr>
+                </a:tc>
+                <a:tc>
+                  <a:txBody>
+                    <a:bodyPr lIns="36000" rIns="36000" tIns="36000" bIns="36000" anchor="t" anchorCtr="1">
+                      <a:noAutofit/>
+                    </a:bodyPr>
+                    <a:p>
+                      <a:pPr algn="ctr"/>
+                      <a:r>
+                        <a:rPr b="0" lang="en-AU" sz="1800" strike="noStrike" u="none">
+                          <a:solidFill>
+                            <a:srgbClr val="000000"/>
+                          </a:solidFill>
+                          <a:effectLst/>
+                          <a:uFillTx/>
+                          <a:latin typeface="Arial"/>
+                        </a:rPr>
+                        <a:t>38.99</a:t>
+                      </a:r>
+                      <a:endParaRPr b="0" lang="en-AU" sz="1800" strike="noStrike" u="none">
+                        <a:solidFill>
+                          <a:srgbClr val="000000"/>
+                        </a:solidFill>
+                        <a:effectLst/>
+                        <a:uFillTx/>
+                        <a:latin typeface="Arial"/>
+                      </a:endParaRPr>
+                    </a:p>
+                  </a:txBody>
+                  <a:tcPr anchor="t" marL="36000" marR="36000">
+                    <a:lnL w="7200">
+                      <a:solidFill>
+                        <a:srgbClr val="000000"/>
+                      </a:solidFill>
+                      <a:prstDash val="solid"/>
+                    </a:lnL>
+                    <a:lnR w="7200">
+                      <a:solidFill>
+                        <a:srgbClr val="000000"/>
+                      </a:solidFill>
+                      <a:prstDash val="solid"/>
+                    </a:lnR>
+                    <a:lnT w="7200">
+                      <a:solidFill>
+                        <a:srgbClr val="000000"/>
+                      </a:solidFill>
+                      <a:prstDash val="solid"/>
+                    </a:lnT>
+                    <a:lnB w="7200">
+                      <a:solidFill>
+                        <a:srgbClr val="000000"/>
+                      </a:solidFill>
+                      <a:prstDash val="solid"/>
+                    </a:lnB>
+                    <a:noFill/>
+                  </a:tcPr>
+                </a:tc>
+                <a:tc>
+                  <a:txBody>
+                    <a:bodyPr lIns="36000" rIns="36000" tIns="36000" bIns="36000" anchor="t" anchorCtr="1">
+                      <a:noAutofit/>
+                    </a:bodyPr>
+                    <a:p>
+                      <a:pPr algn="ctr"/>
+                      <a:r>
+                        <a:rPr b="0" lang="en-AU" sz="1800" strike="noStrike" u="none">
+                          <a:solidFill>
+                            <a:srgbClr val="000000"/>
+                          </a:solidFill>
+                          <a:effectLst/>
+                          <a:uFillTx/>
+                          <a:latin typeface="Arial"/>
+                        </a:rPr>
+                        <a:t>1.21 (3222% better)</a:t>
+                      </a:r>
+                      <a:endParaRPr b="0" lang="en-AU" sz="1800" strike="noStrike" u="none">
+                        <a:solidFill>
+                          <a:srgbClr val="000000"/>
+                        </a:solidFill>
+                        <a:effectLst/>
+                        <a:uFillTx/>
+                        <a:latin typeface="Arial"/>
+                      </a:endParaRPr>
+                    </a:p>
+                  </a:txBody>
+                  <a:tcPr anchor="t" marL="36000" marR="36000">
+                    <a:lnL w="7200">
+                      <a:solidFill>
+                        <a:srgbClr val="000000"/>
+                      </a:solidFill>
+                      <a:prstDash val="solid"/>
+                    </a:lnL>
+                    <a:lnR w="7200">
+                      <a:solidFill>
+                        <a:srgbClr val="000000"/>
+                      </a:solidFill>
+                      <a:prstDash val="solid"/>
+                    </a:lnR>
+                    <a:lnT w="7200">
+                      <a:solidFill>
+                        <a:srgbClr val="000000"/>
+                      </a:solidFill>
+                      <a:prstDash val="solid"/>
+                    </a:lnT>
+                    <a:lnB w="7200">
+                      <a:solidFill>
+                        <a:srgbClr val="000000"/>
+                      </a:solidFill>
+                      <a:prstDash val="solid"/>
+                    </a:lnB>
+                    <a:noFill/>
+                  </a:tcPr>
+                </a:tc>
+              </a:tr>
+              <a:tr h="373320">
+                <a:tc>
+                  <a:txBody>
+                    <a:bodyPr lIns="36000" rIns="36000" tIns="36000" bIns="36000" anchor="t" anchorCtr="1">
+                      <a:noAutofit/>
+                    </a:bodyPr>
+                    <a:p>
+                      <a:pPr algn="r"/>
+                      <a:r>
+                        <a:rPr b="0" lang="en-AU" sz="1800" strike="noStrike" u="none">
+                          <a:solidFill>
+                            <a:srgbClr val="000000"/>
+                          </a:solidFill>
+                          <a:effectLst/>
+                          <a:uFillTx/>
+                          <a:latin typeface="Arial"/>
+                        </a:rPr>
+                        <a:t>Tokens per Second</a:t>
+                      </a:r>
+                      <a:endParaRPr b="0" lang="en-AU" sz="1800" strike="noStrike" u="none">
+                        <a:solidFill>
+                          <a:srgbClr val="000000"/>
+                        </a:solidFill>
+                        <a:effectLst/>
+                        <a:uFillTx/>
+                        <a:latin typeface="Arial"/>
+                      </a:endParaRPr>
+                    </a:p>
+                  </a:txBody>
+                  <a:tcPr anchor="t" marL="36000" marR="36000">
+                    <a:lnL w="7200">
+                      <a:solidFill>
+                        <a:srgbClr val="000000"/>
+                      </a:solidFill>
+                      <a:prstDash val="solid"/>
+                    </a:lnL>
+                    <a:lnR w="7200">
+                      <a:solidFill>
+                        <a:srgbClr val="000000"/>
+                      </a:solidFill>
+                      <a:prstDash val="solid"/>
+                    </a:lnR>
+                    <a:lnT w="7200">
+                      <a:solidFill>
+                        <a:srgbClr val="000000"/>
+                      </a:solidFill>
+                      <a:prstDash val="solid"/>
+                    </a:lnT>
+                    <a:lnB w="7200">
+                      <a:solidFill>
+                        <a:srgbClr val="000000"/>
+                      </a:solidFill>
+                      <a:prstDash val="solid"/>
+                    </a:lnB>
+                    <a:noFill/>
+                  </a:tcPr>
+                </a:tc>
+                <a:tc>
+                  <a:txBody>
+                    <a:bodyPr lIns="36000" rIns="36000" tIns="36000" bIns="36000" anchor="t" anchorCtr="1">
+                      <a:noAutofit/>
+                    </a:bodyPr>
+                    <a:p>
+                      <a:pPr algn="ctr"/>
+                      <a:r>
+                        <a:rPr b="0" lang="en-AU" sz="1800" strike="noStrike" u="none">
+                          <a:solidFill>
+                            <a:srgbClr val="000000"/>
+                          </a:solidFill>
+                          <a:effectLst/>
+                          <a:uFillTx/>
+                          <a:latin typeface="Arial"/>
+                        </a:rPr>
+                        <a:t>3.4</a:t>
+                      </a:r>
+                      <a:endParaRPr b="0" lang="en-AU" sz="1800" strike="noStrike" u="none">
+                        <a:solidFill>
+                          <a:srgbClr val="000000"/>
+                        </a:solidFill>
+                        <a:effectLst/>
+                        <a:uFillTx/>
+                        <a:latin typeface="Arial"/>
+                      </a:endParaRPr>
+                    </a:p>
+                  </a:txBody>
+                  <a:tcPr anchor="t" marL="36000" marR="36000">
+                    <a:lnL w="7200">
+                      <a:solidFill>
+                        <a:srgbClr val="000000"/>
+                      </a:solidFill>
+                      <a:prstDash val="solid"/>
+                    </a:lnL>
+                    <a:lnR w="7200">
+                      <a:solidFill>
+                        <a:srgbClr val="000000"/>
+                      </a:solidFill>
+                      <a:prstDash val="solid"/>
+                    </a:lnR>
+                    <a:lnT w="7200">
+                      <a:solidFill>
+                        <a:srgbClr val="000000"/>
+                      </a:solidFill>
+                      <a:prstDash val="solid"/>
+                    </a:lnT>
+                    <a:lnB w="7200">
+                      <a:solidFill>
+                        <a:srgbClr val="000000"/>
+                      </a:solidFill>
+                      <a:prstDash val="solid"/>
+                    </a:lnB>
+                    <a:noFill/>
+                  </a:tcPr>
+                </a:tc>
+                <a:tc>
+                  <a:txBody>
+                    <a:bodyPr lIns="36000" rIns="36000" tIns="36000" bIns="36000" anchor="t" anchorCtr="1">
+                      <a:noAutofit/>
+                    </a:bodyPr>
+                    <a:p>
+                      <a:pPr algn="ctr"/>
+                      <a:r>
+                        <a:rPr b="0" lang="en-AU" sz="1800" strike="noStrike" u="none">
+                          <a:solidFill>
+                            <a:srgbClr val="000000"/>
+                          </a:solidFill>
+                          <a:effectLst/>
+                          <a:uFillTx/>
+                          <a:latin typeface="Arial"/>
+                        </a:rPr>
+                        <a:t>37.5 (1102% better)</a:t>
+                      </a:r>
+                      <a:endParaRPr b="0" lang="en-AU" sz="1800" strike="noStrike" u="none">
+                        <a:solidFill>
+                          <a:srgbClr val="000000"/>
+                        </a:solidFill>
+                        <a:effectLst/>
+                        <a:uFillTx/>
+                        <a:latin typeface="Arial"/>
+                      </a:endParaRPr>
+                    </a:p>
+                  </a:txBody>
+                  <a:tcPr anchor="t" marL="36000" marR="36000">
+                    <a:lnL w="7200">
+                      <a:solidFill>
+                        <a:srgbClr val="000000"/>
+                      </a:solidFill>
+                      <a:prstDash val="solid"/>
+                    </a:lnL>
+                    <a:lnR w="7200">
+                      <a:solidFill>
+                        <a:srgbClr val="000000"/>
+                      </a:solidFill>
+                      <a:prstDash val="solid"/>
+                    </a:lnR>
+                    <a:lnT w="7200">
+                      <a:solidFill>
+                        <a:srgbClr val="000000"/>
+                      </a:solidFill>
+                      <a:prstDash val="solid"/>
+                    </a:lnT>
+                    <a:lnB w="7200">
+                      <a:solidFill>
+                        <a:srgbClr val="000000"/>
+                      </a:solidFill>
+                      <a:prstDash val="solid"/>
+                    </a:lnB>
+                    <a:noFill/>
+                  </a:tcPr>
+                </a:tc>
+              </a:tr>
+              <a:tr h="373320">
+                <a:tc>
+                  <a:txBody>
+                    <a:bodyPr lIns="36000" rIns="36000" tIns="36000" bIns="36000" anchor="t">
+                      <a:noAutofit/>
+                    </a:bodyPr>
+                    <a:p>
+                      <a:r>
+                        <a:rPr b="0" lang="en-AU" sz="1800" strike="noStrike" u="none">
+                          <a:solidFill>
+                            <a:srgbClr val="000000"/>
+                          </a:solidFill>
+                          <a:effectLst/>
+                          <a:uFillTx/>
+                          <a:latin typeface="Arial"/>
+                        </a:rPr>
+                        <a:t>Phi 3.5 Mini Instruct</a:t>
+                      </a:r>
+                      <a:endParaRPr b="0" lang="en-AU" sz="1800" strike="noStrike" u="none">
+                        <a:solidFill>
+                          <a:srgbClr val="000000"/>
+                        </a:solidFill>
+                        <a:effectLst/>
+                        <a:uFillTx/>
+                        <a:latin typeface="Arial"/>
+                      </a:endParaRPr>
+                    </a:p>
+                  </a:txBody>
+                  <a:tcPr anchor="t" marL="36000" marR="36000">
+                    <a:lnL w="7200">
+                      <a:solidFill>
+                        <a:srgbClr val="000000"/>
+                      </a:solidFill>
+                      <a:prstDash val="solid"/>
+                    </a:lnL>
+                    <a:lnR w="7200">
+                      <a:solidFill>
+                        <a:srgbClr val="000000"/>
+                      </a:solidFill>
+                      <a:prstDash val="solid"/>
+                    </a:lnR>
+                    <a:lnT w="7200">
+                      <a:solidFill>
+                        <a:srgbClr val="000000"/>
+                      </a:solidFill>
+                      <a:prstDash val="solid"/>
+                    </a:lnT>
+                    <a:lnB w="7200">
+                      <a:solidFill>
+                        <a:srgbClr val="000000"/>
+                      </a:solidFill>
+                      <a:prstDash val="solid"/>
+                    </a:lnB>
+                    <a:noFill/>
+                  </a:tcPr>
+                </a:tc>
+                <a:tc>
+                  <a:txBody>
+                    <a:bodyPr lIns="36000" rIns="36000" tIns="36000" bIns="36000" anchor="t">
+                      <a:noAutofit/>
+                    </a:bodyPr>
+                    <a:p>
+                      <a:endParaRPr b="0" lang="en-AU" sz="1800" strike="noStrike" u="none">
+                        <a:solidFill>
+                          <a:srgbClr val="000000"/>
+                        </a:solidFill>
+                        <a:effectLst/>
+                        <a:uFillTx/>
+                        <a:latin typeface="Arial"/>
+                      </a:endParaRPr>
+                    </a:p>
+                  </a:txBody>
+                  <a:tcPr anchor="t" marL="36000" marR="36000">
+                    <a:lnL w="7200">
+                      <a:solidFill>
+                        <a:srgbClr val="000000"/>
+                      </a:solidFill>
+                      <a:prstDash val="solid"/>
+                    </a:lnL>
+                    <a:lnR w="7200">
+                      <a:solidFill>
+                        <a:srgbClr val="000000"/>
+                      </a:solidFill>
+                      <a:prstDash val="solid"/>
+                    </a:lnR>
+                    <a:lnT w="7200">
+                      <a:solidFill>
+                        <a:srgbClr val="000000"/>
+                      </a:solidFill>
+                      <a:prstDash val="solid"/>
+                    </a:lnT>
+                    <a:lnB w="7200">
+                      <a:solidFill>
+                        <a:srgbClr val="000000"/>
+                      </a:solidFill>
+                      <a:prstDash val="solid"/>
+                    </a:lnB>
+                    <a:noFill/>
+                  </a:tcPr>
+                </a:tc>
+                <a:tc>
+                  <a:txBody>
+                    <a:bodyPr lIns="36000" rIns="36000" tIns="36000" bIns="36000" anchor="t">
+                      <a:noAutofit/>
+                    </a:bodyPr>
+                    <a:p>
+                      <a:endParaRPr b="0" lang="en-AU" sz="1800" strike="noStrike" u="none">
+                        <a:solidFill>
+                          <a:srgbClr val="000000"/>
+                        </a:solidFill>
+                        <a:effectLst/>
+                        <a:uFillTx/>
+                        <a:latin typeface="Arial"/>
+                      </a:endParaRPr>
+                    </a:p>
+                  </a:txBody>
+                  <a:tcPr anchor="t" marL="36000" marR="36000">
+                    <a:lnL w="7200">
+                      <a:solidFill>
+                        <a:srgbClr val="000000"/>
+                      </a:solidFill>
+                      <a:prstDash val="solid"/>
+                    </a:lnL>
+                    <a:lnR w="7200">
+                      <a:solidFill>
+                        <a:srgbClr val="000000"/>
+                      </a:solidFill>
+                      <a:prstDash val="solid"/>
+                    </a:lnR>
+                    <a:lnT w="7200">
+                      <a:solidFill>
+                        <a:srgbClr val="000000"/>
+                      </a:solidFill>
+                      <a:prstDash val="solid"/>
+                    </a:lnT>
+                    <a:lnB w="7200">
+                      <a:solidFill>
+                        <a:srgbClr val="000000"/>
+                      </a:solidFill>
+                      <a:prstDash val="solid"/>
+                    </a:lnB>
+                    <a:noFill/>
+                  </a:tcPr>
+                </a:tc>
+              </a:tr>
+              <a:tr h="349920">
+                <a:tc>
+                  <a:txBody>
+                    <a:bodyPr lIns="36000" rIns="36000" tIns="36000" bIns="36000" anchor="t">
+                      <a:noAutofit/>
+                    </a:bodyPr>
+                    <a:p>
+                      <a:pPr algn="r"/>
+                      <a:r>
+                        <a:rPr b="0" lang="en-AU" sz="1800" strike="noStrike" u="none">
+                          <a:solidFill>
+                            <a:srgbClr val="000000"/>
+                          </a:solidFill>
+                          <a:effectLst/>
+                          <a:uFillTx/>
+                          <a:latin typeface="Arial"/>
+                        </a:rPr>
+                        <a:t>Time to First Token</a:t>
+                      </a:r>
+                      <a:endParaRPr b="0" lang="en-AU" sz="1800" strike="noStrike" u="none">
+                        <a:solidFill>
+                          <a:srgbClr val="000000"/>
+                        </a:solidFill>
+                        <a:effectLst/>
+                        <a:uFillTx/>
+                        <a:latin typeface="Arial"/>
+                      </a:endParaRPr>
+                    </a:p>
+                  </a:txBody>
+                  <a:tcPr anchor="t" marL="36000" marR="36000">
+                    <a:lnL w="7200">
+                      <a:solidFill>
+                        <a:srgbClr val="000000"/>
+                      </a:solidFill>
+                      <a:prstDash val="solid"/>
+                    </a:lnL>
+                    <a:lnR w="7200">
+                      <a:solidFill>
+                        <a:srgbClr val="000000"/>
+                      </a:solidFill>
+                      <a:prstDash val="solid"/>
+                    </a:lnR>
+                    <a:lnT w="7200">
+                      <a:solidFill>
+                        <a:srgbClr val="000000"/>
+                      </a:solidFill>
+                      <a:prstDash val="solid"/>
+                    </a:lnT>
+                    <a:lnB w="7200">
+                      <a:solidFill>
+                        <a:srgbClr val="000000"/>
+                      </a:solidFill>
+                      <a:prstDash val="solid"/>
+                    </a:lnB>
+                    <a:noFill/>
+                  </a:tcPr>
+                </a:tc>
+                <a:tc>
+                  <a:txBody>
+                    <a:bodyPr lIns="36000" rIns="36000" tIns="36000" bIns="36000" anchor="t" anchorCtr="1">
+                      <a:noAutofit/>
+                    </a:bodyPr>
+                    <a:p>
+                      <a:pPr algn="ctr"/>
+                      <a:r>
+                        <a:rPr b="0" lang="en-AU" sz="1800" strike="noStrike" u="none">
+                          <a:solidFill>
+                            <a:srgbClr val="000000"/>
+                          </a:solidFill>
+                          <a:effectLst/>
+                          <a:uFillTx/>
+                          <a:latin typeface="Arial"/>
+                        </a:rPr>
+                        <a:t>19.02</a:t>
+                      </a:r>
+                      <a:endParaRPr b="0" lang="en-AU" sz="1800" strike="noStrike" u="none">
+                        <a:solidFill>
+                          <a:srgbClr val="000000"/>
+                        </a:solidFill>
+                        <a:effectLst/>
+                        <a:uFillTx/>
+                        <a:latin typeface="Arial"/>
+                      </a:endParaRPr>
+                    </a:p>
+                  </a:txBody>
+                  <a:tcPr anchor="t" marL="36000" marR="36000">
+                    <a:lnL w="7200">
+                      <a:solidFill>
+                        <a:srgbClr val="000000"/>
+                      </a:solidFill>
+                      <a:prstDash val="solid"/>
+                    </a:lnL>
+                    <a:lnR w="7200">
+                      <a:solidFill>
+                        <a:srgbClr val="000000"/>
+                      </a:solidFill>
+                      <a:prstDash val="solid"/>
+                    </a:lnR>
+                    <a:lnT w="7200">
+                      <a:solidFill>
+                        <a:srgbClr val="000000"/>
+                      </a:solidFill>
+                      <a:prstDash val="solid"/>
+                    </a:lnT>
+                    <a:lnB w="7200">
+                      <a:solidFill>
+                        <a:srgbClr val="000000"/>
+                      </a:solidFill>
+                      <a:prstDash val="solid"/>
+                    </a:lnB>
+                    <a:noFill/>
+                  </a:tcPr>
+                </a:tc>
+                <a:tc>
+                  <a:txBody>
+                    <a:bodyPr lIns="36000" rIns="36000" tIns="36000" bIns="36000" anchor="t" anchorCtr="1">
+                      <a:noAutofit/>
+                    </a:bodyPr>
+                    <a:p>
+                      <a:pPr algn="ctr"/>
+                      <a:r>
+                        <a:rPr b="0" lang="en-AU" sz="1800" strike="noStrike" u="none">
+                          <a:solidFill>
+                            <a:srgbClr val="000000"/>
+                          </a:solidFill>
+                          <a:effectLst/>
+                          <a:uFillTx/>
+                          <a:latin typeface="Arial"/>
+                        </a:rPr>
+                        <a:t>2.09 (910% better)</a:t>
+                      </a:r>
+                      <a:endParaRPr b="0" lang="en-AU" sz="1800" strike="noStrike" u="none">
+                        <a:solidFill>
+                          <a:srgbClr val="000000"/>
+                        </a:solidFill>
+                        <a:effectLst/>
+                        <a:uFillTx/>
+                        <a:latin typeface="Arial"/>
+                      </a:endParaRPr>
+                    </a:p>
+                  </a:txBody>
+                  <a:tcPr anchor="t" marL="36000" marR="36000">
+                    <a:lnL w="7200">
+                      <a:solidFill>
+                        <a:srgbClr val="000000"/>
+                      </a:solidFill>
+                      <a:prstDash val="solid"/>
+                    </a:lnL>
+                    <a:lnR w="7200">
+                      <a:solidFill>
+                        <a:srgbClr val="000000"/>
+                      </a:solidFill>
+                      <a:prstDash val="solid"/>
+                    </a:lnR>
+                    <a:lnT w="7200">
+                      <a:solidFill>
+                        <a:srgbClr val="000000"/>
+                      </a:solidFill>
+                      <a:prstDash val="solid"/>
+                    </a:lnT>
+                    <a:lnB w="7200">
+                      <a:solidFill>
+                        <a:srgbClr val="000000"/>
+                      </a:solidFill>
+                      <a:prstDash val="solid"/>
+                    </a:lnB>
+                    <a:noFill/>
+                  </a:tcPr>
+                </a:tc>
+              </a:tr>
+              <a:tr h="411840">
+                <a:tc>
+                  <a:txBody>
+                    <a:bodyPr lIns="36000" rIns="36000" tIns="36000" bIns="36000" anchor="t">
+                      <a:noAutofit/>
+                    </a:bodyPr>
+                    <a:p>
+                      <a:pPr algn="r"/>
+                      <a:r>
+                        <a:rPr b="0" lang="en-AU" sz="1800" strike="noStrike" u="none">
+                          <a:solidFill>
+                            <a:srgbClr val="000000"/>
+                          </a:solidFill>
+                          <a:effectLst/>
+                          <a:uFillTx/>
+                          <a:latin typeface="Arial"/>
+                        </a:rPr>
+                        <a:t>Tokens per Second</a:t>
+                      </a:r>
+                      <a:endParaRPr b="0" lang="en-AU" sz="1800" strike="noStrike" u="none">
+                        <a:solidFill>
+                          <a:srgbClr val="000000"/>
+                        </a:solidFill>
+                        <a:effectLst/>
+                        <a:uFillTx/>
+                        <a:latin typeface="Arial"/>
+                      </a:endParaRPr>
+                    </a:p>
+                  </a:txBody>
+                  <a:tcPr anchor="t" marL="36000" marR="36000">
+                    <a:lnL w="7200">
+                      <a:solidFill>
+                        <a:srgbClr val="000000"/>
+                      </a:solidFill>
+                      <a:prstDash val="solid"/>
+                    </a:lnL>
+                    <a:lnR w="7200">
+                      <a:solidFill>
+                        <a:srgbClr val="000000"/>
+                      </a:solidFill>
+                      <a:prstDash val="solid"/>
+                    </a:lnR>
+                    <a:lnT w="7200">
+                      <a:solidFill>
+                        <a:srgbClr val="000000"/>
+                      </a:solidFill>
+                      <a:prstDash val="solid"/>
+                    </a:lnT>
+                    <a:lnB w="7200">
+                      <a:solidFill>
+                        <a:srgbClr val="000000"/>
+                      </a:solidFill>
+                      <a:prstDash val="solid"/>
+                    </a:lnB>
+                    <a:noFill/>
+                  </a:tcPr>
+                </a:tc>
+                <a:tc>
+                  <a:txBody>
+                    <a:bodyPr lIns="36000" rIns="36000" tIns="36000" bIns="36000" anchor="t" anchorCtr="1">
+                      <a:noAutofit/>
+                    </a:bodyPr>
+                    <a:p>
+                      <a:pPr algn="ctr"/>
+                      <a:r>
+                        <a:rPr b="0" lang="en-AU" sz="1800" strike="noStrike" u="none">
+                          <a:solidFill>
+                            <a:srgbClr val="000000"/>
+                          </a:solidFill>
+                          <a:effectLst/>
+                          <a:uFillTx/>
+                          <a:latin typeface="Arial"/>
+                        </a:rPr>
+                        <a:t>25</a:t>
+                      </a:r>
+                      <a:endParaRPr b="0" lang="en-AU" sz="1800" strike="noStrike" u="none">
+                        <a:solidFill>
+                          <a:srgbClr val="000000"/>
+                        </a:solidFill>
+                        <a:effectLst/>
+                        <a:uFillTx/>
+                        <a:latin typeface="Arial"/>
+                      </a:endParaRPr>
+                    </a:p>
+                  </a:txBody>
+                  <a:tcPr anchor="t" marL="36000" marR="36000">
+                    <a:lnL w="7200">
+                      <a:solidFill>
+                        <a:srgbClr val="000000"/>
+                      </a:solidFill>
+                      <a:prstDash val="solid"/>
+                    </a:lnL>
+                    <a:lnR w="7200">
+                      <a:solidFill>
+                        <a:srgbClr val="000000"/>
+                      </a:solidFill>
+                      <a:prstDash val="solid"/>
+                    </a:lnR>
+                    <a:lnT w="7200">
+                      <a:solidFill>
+                        <a:srgbClr val="000000"/>
+                      </a:solidFill>
+                      <a:prstDash val="solid"/>
+                    </a:lnT>
+                    <a:lnB w="7200">
+                      <a:solidFill>
+                        <a:srgbClr val="000000"/>
+                      </a:solidFill>
+                      <a:prstDash val="solid"/>
+                    </a:lnB>
+                    <a:noFill/>
+                  </a:tcPr>
+                </a:tc>
+                <a:tc>
+                  <a:txBody>
+                    <a:bodyPr lIns="36000" rIns="36000" tIns="36000" bIns="36000" anchor="t" anchorCtr="1">
+                      <a:noAutofit/>
+                    </a:bodyPr>
+                    <a:p>
+                      <a:pPr algn="ctr"/>
+                      <a:r>
+                        <a:rPr b="0" lang="en-AU" sz="1800" strike="noStrike" u="none">
+                          <a:solidFill>
+                            <a:srgbClr val="000000"/>
+                          </a:solidFill>
+                          <a:effectLst/>
+                          <a:uFillTx/>
+                          <a:latin typeface="Arial"/>
+                        </a:rPr>
+                        <a:t>25.4 (2% worse)</a:t>
+                      </a:r>
+                      <a:endParaRPr b="0" lang="en-AU" sz="1800" strike="noStrike" u="none">
+                        <a:solidFill>
+                          <a:srgbClr val="000000"/>
+                        </a:solidFill>
+                        <a:effectLst/>
+                        <a:uFillTx/>
+                        <a:latin typeface="Arial"/>
+                      </a:endParaRPr>
+                    </a:p>
+                  </a:txBody>
+                  <a:tcPr anchor="t" marL="36000" marR="36000">
+                    <a:lnL w="7200">
+                      <a:solidFill>
+                        <a:srgbClr val="000000"/>
+                      </a:solidFill>
+                      <a:prstDash val="solid"/>
+                    </a:lnL>
+                    <a:lnR w="7200">
+                      <a:solidFill>
+                        <a:srgbClr val="000000"/>
+                      </a:solidFill>
+                      <a:prstDash val="solid"/>
+                    </a:lnR>
+                    <a:lnT w="7200">
+                      <a:solidFill>
+                        <a:srgbClr val="000000"/>
+                      </a:solidFill>
+                      <a:prstDash val="solid"/>
+                    </a:lnT>
+                    <a:lnB w="7200">
+                      <a:solidFill>
+                        <a:srgbClr val="000000"/>
+                      </a:solidFill>
+                      <a:prstDash val="solid"/>
+                    </a:lnB>
+                    <a:noFill/>
+                  </a:tcPr>
+                </a:tc>
+              </a:tr>
+            </a:tbl>
+          </a:graphicData>
+        </a:graphic>
+      </p:graphicFrame>
       <p:sp>
         <p:nvSpPr>
           <p:cNvPr id="3" name="PlaceHolder 2"/>
@@ -11645,14 +14646,14 @@
             <a:spLocks noGrp="1"/>
           </p:cNvSpPr>
           <p:nvPr>
-            <p:ph type="sldNum" idx="12"/>
+            <p:ph type="sldNum" idx="3"/>
           </p:nvPr>
         </p:nvSpPr>
         <p:spPr/>
         <p:txBody>
           <a:bodyPr/>
           <a:p>
-            <a:fld id="{EF322DB7-C2DD-43F3-82FC-DA309858F5C8}" type="slidenum">
+            <a:fld id="{AEAE75CE-30C6-4235-AFFF-66CCBB79EC80}" type="slidenum">
               <a:t>16</a:t>
             </a:fld>
           </a:p>
@@ -11690,7 +14691,7 @@
       </p:grpSpPr>
       <p:sp>
         <p:nvSpPr>
-          <p:cNvPr id="67" name="PlaceHolder 1"/>
+          <p:cNvPr id="68" name="PlaceHolder 1"/>
           <p:cNvSpPr>
             <a:spLocks noGrp="1"/>
           </p:cNvSpPr>
@@ -11700,8 +14701,8 @@
         </p:nvSpPr>
         <p:spPr>
           <a:xfrm>
-            <a:off x="360000" y="166320"/>
-            <a:ext cx="9358200" cy="504000"/>
+            <a:off x="0" y="1616760"/>
+            <a:ext cx="8996760" cy="1083240"/>
           </a:xfrm>
           <a:prstGeom prst="rect">
             <a:avLst/>
@@ -11728,13 +14729,13 @@
             <a:r>
               <a:rPr b="0" lang="en-AU" sz="3300" strike="noStrike" u="none">
                 <a:solidFill>
-                  <a:srgbClr val="eeeeee"/>
-                </a:solidFill>
-                <a:effectLst/>
-                <a:uFillTx/>
-                <a:latin typeface="Arial"/>
-              </a:rPr>
-              <a:t>Query RAG Query</a:t>
+                  <a:srgbClr val="dd4100"/>
+                </a:solidFill>
+                <a:effectLst/>
+                <a:uFillTx/>
+                <a:latin typeface="Arial"/>
+              </a:rPr>
+              <a:t>Indexer Application</a:t>
             </a:r>
             <a:endParaRPr b="0" lang="en-AU" sz="3300" strike="noStrike" u="none">
               <a:solidFill>
@@ -11744,50 +14745,6 @@
               <a:uFillTx/>
               <a:latin typeface="Arial"/>
             </a:endParaRPr>
-          </a:p>
-        </p:txBody>
-      </p:sp>
-      <p:pic>
-        <p:nvPicPr>
-          <p:cNvPr id="68" name="" descr=""/>
-          <p:cNvPicPr/>
-          <p:nvPr/>
-        </p:nvPicPr>
-        <p:blipFill>
-          <a:blip r:embed="rId1"/>
-          <a:stretch/>
-        </p:blipFill>
-        <p:spPr>
-          <a:xfrm>
-            <a:off x="39600" y="1434600"/>
-            <a:ext cx="10079640" cy="4527360"/>
-          </a:xfrm>
-          <a:prstGeom prst="rect">
-            <a:avLst/>
-          </a:prstGeom>
-          <a:noFill/>
-          <a:ln w="0">
-            <a:noFill/>
-          </a:ln>
-        </p:spPr>
-      </p:pic>
-      <p:sp>
-        <p:nvSpPr>
-          <p:cNvPr id="3" name="PlaceHolder 2"/>
-          <p:cNvSpPr>
-            <a:spLocks noGrp="1"/>
-          </p:cNvSpPr>
-          <p:nvPr>
-            <p:ph type="sldNum" idx="12"/>
-          </p:nvPr>
-        </p:nvSpPr>
-        <p:spPr/>
-        <p:txBody>
-          <a:bodyPr/>
-          <a:p>
-            <a:fld id="{AAD89DC6-AECF-4A5E-97BC-44B5DD93D858}" type="slidenum">
-              <a:t>17</a:t>
-            </a:fld>
           </a:p>
         </p:txBody>
       </p:sp>
@@ -11833,8 +14790,8 @@
         </p:nvSpPr>
         <p:spPr>
           <a:xfrm>
-            <a:off x="360000" y="166320"/>
-            <a:ext cx="9358200" cy="504000"/>
+            <a:off x="360000" y="164880"/>
+            <a:ext cx="9356760" cy="505080"/>
           </a:xfrm>
           <a:prstGeom prst="rect">
             <a:avLst/>
@@ -11867,7 +14824,7 @@
                 <a:uFillTx/>
                 <a:latin typeface="Arial"/>
               </a:rPr>
-              <a:t>Query Final Query</a:t>
+              <a:t>High-Level Indexer Service Design</a:t>
             </a:r>
             <a:endParaRPr b="0" lang="en-AU" sz="3300" strike="noStrike" u="none">
               <a:solidFill>
@@ -11892,14 +14849,14 @@
         </p:blipFill>
         <p:spPr>
           <a:xfrm>
-            <a:off x="39600" y="1571760"/>
-            <a:ext cx="10079640" cy="2554920"/>
+            <a:off x="628200" y="973800"/>
+            <a:ext cx="8846280" cy="3730680"/>
           </a:xfrm>
           <a:prstGeom prst="rect">
             <a:avLst/>
           </a:prstGeom>
           <a:noFill/>
-          <a:ln w="0">
+          <a:ln w="18000">
             <a:noFill/>
           </a:ln>
         </p:spPr>
@@ -11918,7 +14875,7 @@
         <p:txBody>
           <a:bodyPr/>
           <a:p>
-            <a:fld id="{16AEC8B7-8C41-40A6-A55A-60EF7096C3B4}" type="slidenum">
+            <a:fld id="{47F6F6EC-D331-4CBF-92F0-E89063CB27A2}" type="slidenum">
               <a:t>18</a:t>
             </a:fld>
           </a:p>
@@ -11966,8 +14923,8 @@
         </p:nvSpPr>
         <p:spPr>
           <a:xfrm>
-            <a:off x="360000" y="166320"/>
-            <a:ext cx="9358200" cy="504000"/>
+            <a:off x="360000" y="164880"/>
+            <a:ext cx="9356760" cy="505080"/>
           </a:xfrm>
           <a:prstGeom prst="rect">
             <a:avLst/>
@@ -12000,7 +14957,7 @@
                 <a:uFillTx/>
                 <a:latin typeface="Arial"/>
               </a:rPr>
-              <a:t>Query Final Query</a:t>
+              <a:t>Indexer Output</a:t>
             </a:r>
             <a:endParaRPr b="0" lang="en-AU" sz="3300" strike="noStrike" u="none">
               <a:solidFill>
@@ -12025,8 +14982,8 @@
         </p:blipFill>
         <p:spPr>
           <a:xfrm>
-            <a:off x="39600" y="1403640"/>
-            <a:ext cx="10079640" cy="3745800"/>
+            <a:off x="39600" y="871920"/>
+            <a:ext cx="10078560" cy="3953880"/>
           </a:xfrm>
           <a:prstGeom prst="rect">
             <a:avLst/>
@@ -12051,7 +15008,7 @@
         <p:txBody>
           <a:bodyPr/>
           <a:p>
-            <a:fld id="{408AD97C-400D-468E-912A-8C5CB23D3F74}" type="slidenum">
+            <a:fld id="{260D5E5B-B830-4901-8033-E760A5E5AFAE}" type="slidenum">
               <a:t>19</a:t>
             </a:fld>
           </a:p>
@@ -12099,8 +15056,8 @@
         </p:nvSpPr>
         <p:spPr>
           <a:xfrm>
-            <a:off x="360000" y="165240"/>
-            <a:ext cx="9357120" cy="504720"/>
+            <a:off x="360000" y="164160"/>
+            <a:ext cx="9356040" cy="505800"/>
           </a:xfrm>
           <a:prstGeom prst="rect">
             <a:avLst/>
@@ -12159,7 +15116,7 @@
         <p:spPr>
           <a:xfrm>
             <a:off x="360000" y="1080000"/>
-            <a:ext cx="9357120" cy="3597120"/>
+            <a:ext cx="9356040" cy="3596040"/>
           </a:xfrm>
           <a:prstGeom prst="rect">
             <a:avLst/>
@@ -12330,7 +15287,7 @@
         <p:txBody>
           <a:bodyPr/>
           <a:p>
-            <a:fld id="{F6CDE720-1098-4811-AC6E-CEA3BAE2F23D}" type="slidenum">
+            <a:fld id="{07A48D72-DDE5-456E-B561-BB58351EE372}" type="slidenum">
               <a:t>2</a:t>
             </a:fld>
           </a:p>
@@ -12378,8 +15335,8 @@
         </p:nvSpPr>
         <p:spPr>
           <a:xfrm>
-            <a:off x="360000" y="166320"/>
-            <a:ext cx="9358200" cy="504000"/>
+            <a:off x="360000" y="164880"/>
+            <a:ext cx="9356760" cy="505440"/>
           </a:xfrm>
           <a:prstGeom prst="rect">
             <a:avLst/>
@@ -12412,7 +15369,7 @@
                 <a:uFillTx/>
                 <a:latin typeface="Arial"/>
               </a:rPr>
-              <a:t>Query Semantic Search</a:t>
+              <a:t>Hybrid Architecture</a:t>
             </a:r>
             <a:endParaRPr b="0" lang="en-AU" sz="3300" strike="noStrike" u="none">
               <a:solidFill>
@@ -12425,16 +15382,94 @@
           </a:p>
         </p:txBody>
       </p:sp>
+      <p:pic>
+        <p:nvPicPr>
+          <p:cNvPr id="74" name="" descr=""/>
+          <p:cNvPicPr/>
+          <p:nvPr/>
+        </p:nvPicPr>
+        <p:blipFill>
+          <a:blip r:embed="rId1"/>
+          <a:stretch/>
+        </p:blipFill>
+        <p:spPr>
+          <a:xfrm>
+            <a:off x="1186920" y="1283400"/>
+            <a:ext cx="7694640" cy="3093480"/>
+          </a:xfrm>
+          <a:prstGeom prst="rect">
+            <a:avLst/>
+          </a:prstGeom>
+          <a:noFill/>
+          <a:ln w="0">
+            <a:noFill/>
+          </a:ln>
+        </p:spPr>
+      </p:pic>
       <p:sp>
         <p:nvSpPr>
-          <p:cNvPr id="74" name=""/>
-          <p:cNvSpPr txBox="1"/>
-          <p:nvPr/>
+          <p:cNvPr id="3" name="PlaceHolder 2"/>
+          <p:cNvSpPr>
+            <a:spLocks noGrp="1"/>
+          </p:cNvSpPr>
+          <p:nvPr>
+            <p:ph type="sldNum" idx="12"/>
+          </p:nvPr>
+        </p:nvSpPr>
+        <p:spPr/>
+        <p:txBody>
+          <a:bodyPr/>
+          <a:p>
+            <a:fld id="{4DAFC614-2F2A-48B9-97C1-4642DCC34EEF}" type="slidenum">
+              <a:t>20</a:t>
+            </a:fld>
+          </a:p>
+        </p:txBody>
+      </p:sp>
+    </p:spTree>
+  </p:cSld>
+  <mc:AlternateContent>
+    <mc:Choice Requires="p14">
+      <p:transition spd="slow" p14:dur="2000"/>
+    </mc:Choice>
+    <mc:Fallback>
+      <p:transition spd="slow"/>
+    </mc:Fallback>
+  </mc:AlternateContent>
+</p:sld>
+</file>
+
+<file path=ppt/slides/slide21.xml><?xml version="1.0" encoding="utf-8"?>
+<p:sld xmlns:a="http://schemas.openxmlformats.org/drawingml/2006/main" xmlns:p="http://schemas.openxmlformats.org/presentationml/2006/main" xmlns:r="http://schemas.openxmlformats.org/officeDocument/2006/relationships" xmlns:p14="http://schemas.microsoft.com/office/powerpoint/2010/main" xmlns:p15="http://schemas.microsoft.com/office/powerpoint/2012/main" xmlns:mc="http://schemas.openxmlformats.org/markup-compatibility/2006">
+  <p:cSld>
+    <p:spTree>
+      <p:nvGrpSpPr>
+        <p:cNvPr id="1" name=""/>
+        <p:cNvGrpSpPr/>
+        <p:nvPr/>
+      </p:nvGrpSpPr>
+      <p:grpSpPr>
+        <a:xfrm>
+          <a:off x="0" y="0"/>
+          <a:ext cx="0" cy="0"/>
+          <a:chOff x="0" y="0"/>
+          <a:chExt cx="0" cy="0"/>
+        </a:xfrm>
+      </p:grpSpPr>
+      <p:sp>
+        <p:nvSpPr>
+          <p:cNvPr id="75" name="PlaceHolder 1"/>
+          <p:cNvSpPr>
+            <a:spLocks noGrp="1"/>
+          </p:cNvSpPr>
+          <p:nvPr>
+            <p:ph type="title"/>
+          </p:nvPr>
         </p:nvSpPr>
         <p:spPr>
           <a:xfrm>
-            <a:off x="315720" y="878040"/>
-            <a:ext cx="9529920" cy="3887640"/>
+            <a:off x="0" y="1617120"/>
+            <a:ext cx="8997120" cy="1082880"/>
           </a:xfrm>
           <a:prstGeom prst="rect">
             <a:avLst/>
@@ -12445,11 +15480,696 @@
           </a:ln>
         </p:spPr>
         <p:txBody>
+          <a:bodyPr lIns="0" rIns="0" tIns="0" bIns="0" anchor="ctr">
+            <a:spAutoFit/>
+          </a:bodyPr>
+          <a:p>
+            <a:pPr indent="0" algn="ctr">
+              <a:lnSpc>
+                <a:spcPct val="100000"/>
+              </a:lnSpc>
+              <a:buNone/>
+              <a:tabLst>
+                <a:tab algn="l" pos="0"/>
+              </a:tabLst>
+            </a:pPr>
+            <a:r>
+              <a:rPr b="0" lang="en-AU" sz="3300" strike="noStrike" u="none">
+                <a:solidFill>
+                  <a:srgbClr val="dd4100"/>
+                </a:solidFill>
+                <a:effectLst/>
+                <a:uFillTx/>
+                <a:latin typeface="Arial"/>
+              </a:rPr>
+              <a:t>Query Application</a:t>
+            </a:r>
+            <a:endParaRPr b="0" lang="en-AU" sz="3300" strike="noStrike" u="none">
+              <a:solidFill>
+                <a:srgbClr val="000000"/>
+              </a:solidFill>
+              <a:effectLst/>
+              <a:uFillTx/>
+              <a:latin typeface="Arial"/>
+            </a:endParaRPr>
+          </a:p>
+        </p:txBody>
+      </p:sp>
+    </p:spTree>
+  </p:cSld>
+  <mc:AlternateContent>
+    <mc:Choice Requires="p14">
+      <p:transition spd="slow" p14:dur="2000"/>
+    </mc:Choice>
+    <mc:Fallback>
+      <p:transition spd="slow"/>
+    </mc:Fallback>
+  </mc:AlternateContent>
+</p:sld>
+</file>
+
+<file path=ppt/slides/slide22.xml><?xml version="1.0" encoding="utf-8"?>
+<p:sld xmlns:a="http://schemas.openxmlformats.org/drawingml/2006/main" xmlns:p="http://schemas.openxmlformats.org/presentationml/2006/main" xmlns:r="http://schemas.openxmlformats.org/officeDocument/2006/relationships" xmlns:p14="http://schemas.microsoft.com/office/powerpoint/2010/main" xmlns:p15="http://schemas.microsoft.com/office/powerpoint/2012/main" xmlns:mc="http://schemas.openxmlformats.org/markup-compatibility/2006">
+  <p:cSld>
+    <p:spTree>
+      <p:nvGrpSpPr>
+        <p:cNvPr id="1" name=""/>
+        <p:cNvGrpSpPr/>
+        <p:nvPr/>
+      </p:nvGrpSpPr>
+      <p:grpSpPr>
+        <a:xfrm>
+          <a:off x="0" y="0"/>
+          <a:ext cx="0" cy="0"/>
+          <a:chOff x="0" y="0"/>
+          <a:chExt cx="0" cy="0"/>
+        </a:xfrm>
+      </p:grpSpPr>
+      <p:sp>
+        <p:nvSpPr>
+          <p:cNvPr id="76" name="PlaceHolder 1"/>
+          <p:cNvSpPr>
+            <a:spLocks noGrp="1"/>
+          </p:cNvSpPr>
+          <p:nvPr>
+            <p:ph type="title"/>
+          </p:nvPr>
+        </p:nvSpPr>
+        <p:spPr>
+          <a:xfrm>
+            <a:off x="360000" y="165240"/>
+            <a:ext cx="9357120" cy="505080"/>
+          </a:xfrm>
+          <a:prstGeom prst="rect">
+            <a:avLst/>
+          </a:prstGeom>
+          <a:noFill/>
+          <a:ln w="0">
+            <a:noFill/>
+          </a:ln>
+        </p:spPr>
+        <p:txBody>
+          <a:bodyPr lIns="0" rIns="0" tIns="0" bIns="0" anchor="ctr">
+            <a:spAutoFit/>
+          </a:bodyPr>
+          <a:p>
+            <a:pPr indent="0" algn="ctr">
+              <a:lnSpc>
+                <a:spcPct val="100000"/>
+              </a:lnSpc>
+              <a:buNone/>
+              <a:tabLst>
+                <a:tab algn="l" pos="0"/>
+              </a:tabLst>
+            </a:pPr>
+            <a:r>
+              <a:rPr b="0" lang="en-AU" sz="3300" strike="noStrike" u="none">
+                <a:solidFill>
+                  <a:srgbClr val="eeeeee"/>
+                </a:solidFill>
+                <a:effectLst/>
+                <a:uFillTx/>
+                <a:latin typeface="Arial"/>
+              </a:rPr>
+              <a:t>High-Level Query App Design</a:t>
+            </a:r>
+            <a:endParaRPr b="0" lang="en-AU" sz="3300" strike="noStrike" u="none">
+              <a:solidFill>
+                <a:srgbClr val="000000"/>
+              </a:solidFill>
+              <a:effectLst/>
+              <a:uFillTx/>
+              <a:latin typeface="Arial"/>
+            </a:endParaRPr>
+          </a:p>
+        </p:txBody>
+      </p:sp>
+      <p:pic>
+        <p:nvPicPr>
+          <p:cNvPr id="77" name="" descr=""/>
+          <p:cNvPicPr/>
+          <p:nvPr/>
+        </p:nvPicPr>
+        <p:blipFill>
+          <a:blip r:embed="rId1"/>
+          <a:stretch/>
+        </p:blipFill>
+        <p:spPr>
+          <a:xfrm>
+            <a:off x="1653480" y="1407240"/>
+            <a:ext cx="6761160" cy="2845800"/>
+          </a:xfrm>
+          <a:prstGeom prst="rect">
+            <a:avLst/>
+          </a:prstGeom>
+          <a:noFill/>
+          <a:ln w="0">
+            <a:noFill/>
+          </a:ln>
+        </p:spPr>
+      </p:pic>
+      <p:sp>
+        <p:nvSpPr>
+          <p:cNvPr id="3" name="PlaceHolder 2"/>
+          <p:cNvSpPr>
+            <a:spLocks noGrp="1"/>
+          </p:cNvSpPr>
+          <p:nvPr>
+            <p:ph type="sldNum" idx="12"/>
+          </p:nvPr>
+        </p:nvSpPr>
+        <p:spPr/>
+        <p:txBody>
+          <a:bodyPr/>
+          <a:p>
+            <a:fld id="{3EB72BA3-1822-495F-B639-1CD62E313271}" type="slidenum">
+              <a:t>22</a:t>
+            </a:fld>
+          </a:p>
+        </p:txBody>
+      </p:sp>
+    </p:spTree>
+  </p:cSld>
+  <mc:AlternateContent>
+    <mc:Choice Requires="p14">
+      <p:transition spd="slow" p14:dur="2000"/>
+    </mc:Choice>
+    <mc:Fallback>
+      <p:transition spd="slow"/>
+    </mc:Fallback>
+  </mc:AlternateContent>
+</p:sld>
+</file>
+
+<file path=ppt/slides/slide23.xml><?xml version="1.0" encoding="utf-8"?>
+<p:sld xmlns:a="http://schemas.openxmlformats.org/drawingml/2006/main" xmlns:p="http://schemas.openxmlformats.org/presentationml/2006/main" xmlns:r="http://schemas.openxmlformats.org/officeDocument/2006/relationships" xmlns:p14="http://schemas.microsoft.com/office/powerpoint/2010/main" xmlns:p15="http://schemas.microsoft.com/office/powerpoint/2012/main" xmlns:mc="http://schemas.openxmlformats.org/markup-compatibility/2006">
+  <p:cSld>
+    <p:spTree>
+      <p:nvGrpSpPr>
+        <p:cNvPr id="1" name=""/>
+        <p:cNvGrpSpPr/>
+        <p:nvPr/>
+      </p:nvGrpSpPr>
+      <p:grpSpPr>
+        <a:xfrm>
+          <a:off x="0" y="0"/>
+          <a:ext cx="0" cy="0"/>
+          <a:chOff x="0" y="0"/>
+          <a:chExt cx="0" cy="0"/>
+        </a:xfrm>
+      </p:grpSpPr>
+      <p:sp>
+        <p:nvSpPr>
+          <p:cNvPr id="78" name="PlaceHolder 1"/>
+          <p:cNvSpPr>
+            <a:spLocks noGrp="1"/>
+          </p:cNvSpPr>
+          <p:nvPr>
+            <p:ph type="title"/>
+          </p:nvPr>
+        </p:nvSpPr>
+        <p:spPr>
+          <a:xfrm>
+            <a:off x="360000" y="165240"/>
+            <a:ext cx="9357120" cy="505080"/>
+          </a:xfrm>
+          <a:prstGeom prst="rect">
+            <a:avLst/>
+          </a:prstGeom>
+          <a:noFill/>
+          <a:ln w="0">
+            <a:noFill/>
+          </a:ln>
+        </p:spPr>
+        <p:txBody>
+          <a:bodyPr lIns="0" rIns="0" tIns="0" bIns="0" anchor="ctr">
+            <a:spAutoFit/>
+          </a:bodyPr>
+          <a:p>
+            <a:pPr indent="0" algn="ctr">
+              <a:lnSpc>
+                <a:spcPct val="100000"/>
+              </a:lnSpc>
+              <a:buNone/>
+              <a:tabLst>
+                <a:tab algn="l" pos="0"/>
+              </a:tabLst>
+            </a:pPr>
+            <a:r>
+              <a:rPr b="0" lang="en-AU" sz="3300" strike="noStrike" u="none">
+                <a:solidFill>
+                  <a:srgbClr val="eeeeee"/>
+                </a:solidFill>
+                <a:effectLst/>
+                <a:uFillTx/>
+                <a:latin typeface="Arial"/>
+              </a:rPr>
+              <a:t>Query RAG Query</a:t>
+            </a:r>
+            <a:endParaRPr b="0" lang="en-AU" sz="3300" strike="noStrike" u="none">
+              <a:solidFill>
+                <a:srgbClr val="000000"/>
+              </a:solidFill>
+              <a:effectLst/>
+              <a:uFillTx/>
+              <a:latin typeface="Arial"/>
+            </a:endParaRPr>
+          </a:p>
+        </p:txBody>
+      </p:sp>
+      <p:pic>
+        <p:nvPicPr>
+          <p:cNvPr id="79" name="" descr=""/>
+          <p:cNvPicPr/>
+          <p:nvPr/>
+        </p:nvPicPr>
+        <p:blipFill>
+          <a:blip r:embed="rId1"/>
+          <a:stretch/>
+        </p:blipFill>
+        <p:spPr>
+          <a:xfrm>
+            <a:off x="39600" y="1434600"/>
+            <a:ext cx="10078560" cy="4526280"/>
+          </a:xfrm>
+          <a:prstGeom prst="rect">
+            <a:avLst/>
+          </a:prstGeom>
+          <a:noFill/>
+          <a:ln w="0">
+            <a:noFill/>
+          </a:ln>
+        </p:spPr>
+      </p:pic>
+      <p:sp>
+        <p:nvSpPr>
+          <p:cNvPr id="3" name="PlaceHolder 2"/>
+          <p:cNvSpPr>
+            <a:spLocks noGrp="1"/>
+          </p:cNvSpPr>
+          <p:nvPr>
+            <p:ph type="sldNum" idx="12"/>
+          </p:nvPr>
+        </p:nvSpPr>
+        <p:spPr/>
+        <p:txBody>
+          <a:bodyPr/>
+          <a:p>
+            <a:fld id="{2BF28C7C-B0C6-4CD4-AC4D-66485381FEA8}" type="slidenum">
+              <a:t>23</a:t>
+            </a:fld>
+          </a:p>
+        </p:txBody>
+      </p:sp>
+    </p:spTree>
+  </p:cSld>
+  <mc:AlternateContent>
+    <mc:Choice Requires="p14">
+      <p:transition spd="slow" p14:dur="2000"/>
+    </mc:Choice>
+    <mc:Fallback>
+      <p:transition spd="slow"/>
+    </mc:Fallback>
+  </mc:AlternateContent>
+</p:sld>
+</file>
+
+<file path=ppt/slides/slide24.xml><?xml version="1.0" encoding="utf-8"?>
+<p:sld xmlns:a="http://schemas.openxmlformats.org/drawingml/2006/main" xmlns:p="http://schemas.openxmlformats.org/presentationml/2006/main" xmlns:r="http://schemas.openxmlformats.org/officeDocument/2006/relationships" xmlns:p14="http://schemas.microsoft.com/office/powerpoint/2010/main" xmlns:p15="http://schemas.microsoft.com/office/powerpoint/2012/main" xmlns:mc="http://schemas.openxmlformats.org/markup-compatibility/2006">
+  <p:cSld>
+    <p:spTree>
+      <p:nvGrpSpPr>
+        <p:cNvPr id="1" name=""/>
+        <p:cNvGrpSpPr/>
+        <p:nvPr/>
+      </p:nvGrpSpPr>
+      <p:grpSpPr>
+        <a:xfrm>
+          <a:off x="0" y="0"/>
+          <a:ext cx="0" cy="0"/>
+          <a:chOff x="0" y="0"/>
+          <a:chExt cx="0" cy="0"/>
+        </a:xfrm>
+      </p:grpSpPr>
+      <p:sp>
+        <p:nvSpPr>
+          <p:cNvPr id="80" name="PlaceHolder 1"/>
+          <p:cNvSpPr>
+            <a:spLocks noGrp="1"/>
+          </p:cNvSpPr>
+          <p:nvPr>
+            <p:ph type="title"/>
+          </p:nvPr>
+        </p:nvSpPr>
+        <p:spPr>
+          <a:xfrm>
+            <a:off x="360000" y="165240"/>
+            <a:ext cx="9357120" cy="505080"/>
+          </a:xfrm>
+          <a:prstGeom prst="rect">
+            <a:avLst/>
+          </a:prstGeom>
+          <a:noFill/>
+          <a:ln w="0">
+            <a:noFill/>
+          </a:ln>
+        </p:spPr>
+        <p:txBody>
+          <a:bodyPr lIns="0" rIns="0" tIns="0" bIns="0" anchor="ctr">
+            <a:spAutoFit/>
+          </a:bodyPr>
+          <a:p>
+            <a:pPr indent="0" algn="ctr">
+              <a:lnSpc>
+                <a:spcPct val="100000"/>
+              </a:lnSpc>
+              <a:buNone/>
+              <a:tabLst>
+                <a:tab algn="l" pos="0"/>
+              </a:tabLst>
+            </a:pPr>
+            <a:r>
+              <a:rPr b="0" lang="en-AU" sz="3300" strike="noStrike" u="none">
+                <a:solidFill>
+                  <a:srgbClr val="eeeeee"/>
+                </a:solidFill>
+                <a:effectLst/>
+                <a:uFillTx/>
+                <a:latin typeface="Arial"/>
+              </a:rPr>
+              <a:t>Query Final Query</a:t>
+            </a:r>
+            <a:endParaRPr b="0" lang="en-AU" sz="3300" strike="noStrike" u="none">
+              <a:solidFill>
+                <a:srgbClr val="000000"/>
+              </a:solidFill>
+              <a:effectLst/>
+              <a:uFillTx/>
+              <a:latin typeface="Arial"/>
+            </a:endParaRPr>
+          </a:p>
+        </p:txBody>
+      </p:sp>
+      <p:pic>
+        <p:nvPicPr>
+          <p:cNvPr id="81" name="" descr=""/>
+          <p:cNvPicPr/>
+          <p:nvPr/>
+        </p:nvPicPr>
+        <p:blipFill>
+          <a:blip r:embed="rId1"/>
+          <a:stretch/>
+        </p:blipFill>
+        <p:spPr>
+          <a:xfrm>
+            <a:off x="39600" y="1571760"/>
+            <a:ext cx="10078560" cy="2553840"/>
+          </a:xfrm>
+          <a:prstGeom prst="rect">
+            <a:avLst/>
+          </a:prstGeom>
+          <a:noFill/>
+          <a:ln w="0">
+            <a:noFill/>
+          </a:ln>
+        </p:spPr>
+      </p:pic>
+      <p:sp>
+        <p:nvSpPr>
+          <p:cNvPr id="3" name="PlaceHolder 2"/>
+          <p:cNvSpPr>
+            <a:spLocks noGrp="1"/>
+          </p:cNvSpPr>
+          <p:nvPr>
+            <p:ph type="sldNum" idx="12"/>
+          </p:nvPr>
+        </p:nvSpPr>
+        <p:spPr/>
+        <p:txBody>
+          <a:bodyPr/>
+          <a:p>
+            <a:fld id="{3171DFA6-1D12-47A5-A697-EE877434773F}" type="slidenum">
+              <a:t>24</a:t>
+            </a:fld>
+          </a:p>
+        </p:txBody>
+      </p:sp>
+    </p:spTree>
+  </p:cSld>
+  <mc:AlternateContent>
+    <mc:Choice Requires="p14">
+      <p:transition spd="slow" p14:dur="2000"/>
+    </mc:Choice>
+    <mc:Fallback>
+      <p:transition spd="slow"/>
+    </mc:Fallback>
+  </mc:AlternateContent>
+</p:sld>
+</file>
+
+<file path=ppt/slides/slide25.xml><?xml version="1.0" encoding="utf-8"?>
+<p:sld xmlns:a="http://schemas.openxmlformats.org/drawingml/2006/main" xmlns:p="http://schemas.openxmlformats.org/presentationml/2006/main" xmlns:r="http://schemas.openxmlformats.org/officeDocument/2006/relationships" xmlns:p14="http://schemas.microsoft.com/office/powerpoint/2010/main" xmlns:p15="http://schemas.microsoft.com/office/powerpoint/2012/main" xmlns:mc="http://schemas.openxmlformats.org/markup-compatibility/2006">
+  <p:cSld>
+    <p:spTree>
+      <p:nvGrpSpPr>
+        <p:cNvPr id="1" name=""/>
+        <p:cNvGrpSpPr/>
+        <p:nvPr/>
+      </p:nvGrpSpPr>
+      <p:grpSpPr>
+        <a:xfrm>
+          <a:off x="0" y="0"/>
+          <a:ext cx="0" cy="0"/>
+          <a:chOff x="0" y="0"/>
+          <a:chExt cx="0" cy="0"/>
+        </a:xfrm>
+      </p:grpSpPr>
+      <p:sp>
+        <p:nvSpPr>
+          <p:cNvPr id="82" name="PlaceHolder 1"/>
+          <p:cNvSpPr>
+            <a:spLocks noGrp="1"/>
+          </p:cNvSpPr>
+          <p:nvPr>
+            <p:ph type="title"/>
+          </p:nvPr>
+        </p:nvSpPr>
+        <p:spPr>
+          <a:xfrm>
+            <a:off x="360000" y="165240"/>
+            <a:ext cx="9357120" cy="505080"/>
+          </a:xfrm>
+          <a:prstGeom prst="rect">
+            <a:avLst/>
+          </a:prstGeom>
+          <a:noFill/>
+          <a:ln w="0">
+            <a:noFill/>
+          </a:ln>
+        </p:spPr>
+        <p:txBody>
+          <a:bodyPr lIns="0" rIns="0" tIns="0" bIns="0" anchor="ctr">
+            <a:spAutoFit/>
+          </a:bodyPr>
+          <a:p>
+            <a:pPr indent="0" algn="ctr">
+              <a:lnSpc>
+                <a:spcPct val="100000"/>
+              </a:lnSpc>
+              <a:buNone/>
+              <a:tabLst>
+                <a:tab algn="l" pos="0"/>
+              </a:tabLst>
+            </a:pPr>
+            <a:r>
+              <a:rPr b="0" lang="en-AU" sz="3300" strike="noStrike" u="none">
+                <a:solidFill>
+                  <a:srgbClr val="eeeeee"/>
+                </a:solidFill>
+                <a:effectLst/>
+                <a:uFillTx/>
+                <a:latin typeface="Arial"/>
+              </a:rPr>
+              <a:t>Query Final Query</a:t>
+            </a:r>
+            <a:endParaRPr b="0" lang="en-AU" sz="3300" strike="noStrike" u="none">
+              <a:solidFill>
+                <a:srgbClr val="000000"/>
+              </a:solidFill>
+              <a:effectLst/>
+              <a:uFillTx/>
+              <a:latin typeface="Arial"/>
+            </a:endParaRPr>
+          </a:p>
+        </p:txBody>
+      </p:sp>
+      <p:pic>
+        <p:nvPicPr>
+          <p:cNvPr id="83" name="" descr=""/>
+          <p:cNvPicPr/>
+          <p:nvPr/>
+        </p:nvPicPr>
+        <p:blipFill>
+          <a:blip r:embed="rId1"/>
+          <a:stretch/>
+        </p:blipFill>
+        <p:spPr>
+          <a:xfrm>
+            <a:off x="39600" y="1403640"/>
+            <a:ext cx="10078560" cy="3744720"/>
+          </a:xfrm>
+          <a:prstGeom prst="rect">
+            <a:avLst/>
+          </a:prstGeom>
+          <a:noFill/>
+          <a:ln w="0">
+            <a:noFill/>
+          </a:ln>
+        </p:spPr>
+      </p:pic>
+      <p:sp>
+        <p:nvSpPr>
+          <p:cNvPr id="3" name="PlaceHolder 2"/>
+          <p:cNvSpPr>
+            <a:spLocks noGrp="1"/>
+          </p:cNvSpPr>
+          <p:nvPr>
+            <p:ph type="sldNum" idx="12"/>
+          </p:nvPr>
+        </p:nvSpPr>
+        <p:spPr/>
+        <p:txBody>
+          <a:bodyPr/>
+          <a:p>
+            <a:fld id="{4E296D5C-3112-49A8-B180-AE231D50E102}" type="slidenum">
+              <a:t>25</a:t>
+            </a:fld>
+          </a:p>
+        </p:txBody>
+      </p:sp>
+    </p:spTree>
+  </p:cSld>
+  <mc:AlternateContent>
+    <mc:Choice Requires="p14">
+      <p:transition spd="slow" p14:dur="2000"/>
+    </mc:Choice>
+    <mc:Fallback>
+      <p:transition spd="slow"/>
+    </mc:Fallback>
+  </mc:AlternateContent>
+</p:sld>
+</file>
+
+<file path=ppt/slides/slide26.xml><?xml version="1.0" encoding="utf-8"?>
+<p:sld xmlns:a="http://schemas.openxmlformats.org/drawingml/2006/main" xmlns:p="http://schemas.openxmlformats.org/presentationml/2006/main" xmlns:r="http://schemas.openxmlformats.org/officeDocument/2006/relationships" xmlns:p14="http://schemas.microsoft.com/office/powerpoint/2010/main" xmlns:p15="http://schemas.microsoft.com/office/powerpoint/2012/main" xmlns:mc="http://schemas.openxmlformats.org/markup-compatibility/2006">
+  <p:cSld>
+    <p:spTree>
+      <p:nvGrpSpPr>
+        <p:cNvPr id="1" name=""/>
+        <p:cNvGrpSpPr/>
+        <p:nvPr/>
+      </p:nvGrpSpPr>
+      <p:grpSpPr>
+        <a:xfrm>
+          <a:off x="0" y="0"/>
+          <a:ext cx="0" cy="0"/>
+          <a:chOff x="0" y="0"/>
+          <a:chExt cx="0" cy="0"/>
+        </a:xfrm>
+      </p:grpSpPr>
+      <p:sp>
+        <p:nvSpPr>
+          <p:cNvPr id="84" name="PlaceHolder 1"/>
+          <p:cNvSpPr>
+            <a:spLocks noGrp="1"/>
+          </p:cNvSpPr>
+          <p:nvPr>
+            <p:ph type="title"/>
+          </p:nvPr>
+        </p:nvSpPr>
+        <p:spPr>
+          <a:xfrm>
+            <a:off x="360000" y="165240"/>
+            <a:ext cx="9357120" cy="505080"/>
+          </a:xfrm>
+          <a:prstGeom prst="rect">
+            <a:avLst/>
+          </a:prstGeom>
+          <a:noFill/>
+          <a:ln w="0">
+            <a:noFill/>
+          </a:ln>
+        </p:spPr>
+        <p:txBody>
+          <a:bodyPr lIns="0" rIns="0" tIns="0" bIns="0" anchor="ctr">
+            <a:spAutoFit/>
+          </a:bodyPr>
+          <a:p>
+            <a:pPr indent="0" algn="ctr">
+              <a:lnSpc>
+                <a:spcPct val="100000"/>
+              </a:lnSpc>
+              <a:buNone/>
+              <a:tabLst>
+                <a:tab algn="l" pos="0"/>
+              </a:tabLst>
+            </a:pPr>
+            <a:r>
+              <a:rPr b="0" lang="en-AU" sz="3300" strike="noStrike" u="none">
+                <a:solidFill>
+                  <a:srgbClr val="eeeeee"/>
+                </a:solidFill>
+                <a:effectLst/>
+                <a:uFillTx/>
+                <a:latin typeface="Arial"/>
+              </a:rPr>
+              <a:t>Query Semantic Search</a:t>
+            </a:r>
+            <a:endParaRPr b="0" lang="en-AU" sz="3300" strike="noStrike" u="none">
+              <a:solidFill>
+                <a:srgbClr val="000000"/>
+              </a:solidFill>
+              <a:effectLst/>
+              <a:uFillTx/>
+              <a:latin typeface="Arial"/>
+            </a:endParaRPr>
+          </a:p>
+        </p:txBody>
+      </p:sp>
+      <p:sp>
+        <p:nvSpPr>
+          <p:cNvPr id="85" name=""/>
+          <p:cNvSpPr/>
+          <p:nvPr/>
+        </p:nvSpPr>
+        <p:spPr>
+          <a:xfrm>
+            <a:off x="315720" y="878040"/>
+            <a:ext cx="9528840" cy="3886560"/>
+          </a:xfrm>
+          <a:prstGeom prst="rect">
+            <a:avLst/>
+          </a:prstGeom>
+          <a:noFill/>
+          <a:ln w="0">
+            <a:noFill/>
+          </a:ln>
+        </p:spPr>
+        <p:style>
+          <a:lnRef idx="0"/>
+          <a:fillRef idx="0"/>
+          <a:effectRef idx="0"/>
+          <a:fontRef idx="minor"/>
+        </p:style>
+        <p:txBody>
           <a:bodyPr lIns="90000" rIns="90000" tIns="45000" bIns="45000" anchor="t">
             <a:spAutoFit/>
           </a:bodyPr>
           <a:p>
             <a:pPr marL="216000" indent="-216000">
+              <a:lnSpc>
+                <a:spcPct val="100000"/>
+              </a:lnSpc>
               <a:buClr>
                 <a:srgbClr val="000000"/>
               </a:buClr>
@@ -12465,6 +16185,7 @@
                 <a:effectLst/>
                 <a:uFillTx/>
                 <a:latin typeface="Arial"/>
+                <a:ea typeface="DejaVu Sans"/>
               </a:rPr>
               <a:t>Query “</a:t>
             </a:r>
@@ -12476,6 +16197,7 @@
                 <a:effectLst/>
                 <a:uFillTx/>
                 <a:latin typeface="Arial"/>
+                <a:ea typeface="DejaVu Sans"/>
               </a:rPr>
               <a:t>XSS issues</a:t>
             </a:r>
@@ -12487,6 +16209,7 @@
                 <a:effectLst/>
                 <a:uFillTx/>
                 <a:latin typeface="Arial"/>
+                <a:ea typeface="DejaVu Sans"/>
               </a:rPr>
               <a:t>”</a:t>
             </a:r>
@@ -12501,6 +16224,9 @@
           </a:p>
           <a:p>
             <a:pPr marL="216000" indent="-216000">
+              <a:lnSpc>
+                <a:spcPct val="100000"/>
+              </a:lnSpc>
               <a:buClr>
                 <a:srgbClr val="000000"/>
               </a:buClr>
@@ -12516,6 +16242,7 @@
                 <a:effectLst/>
                 <a:uFillTx/>
                 <a:latin typeface="Arial"/>
+                <a:ea typeface="DejaVu Sans"/>
               </a:rPr>
               <a:t> </a:t>
             </a:r>
@@ -12530,6 +16257,9 @@
           </a:p>
           <a:p>
             <a:pPr marL="216000" indent="-216000">
+              <a:lnSpc>
+                <a:spcPct val="100000"/>
+              </a:lnSpc>
               <a:buClr>
                 <a:srgbClr val="000000"/>
               </a:buClr>
@@ -12545,6 +16275,7 @@
                 <a:effectLst/>
                 <a:uFillTx/>
                 <a:latin typeface="Arial"/>
+                <a:ea typeface="DejaVu Sans"/>
               </a:rPr>
               <a:t>Semantic search returns:</a:t>
             </a:r>
@@ -12559,6 +16290,9 @@
           </a:p>
           <a:p>
             <a:pPr marL="216000" indent="-216000">
+              <a:lnSpc>
+                <a:spcPct val="100000"/>
+              </a:lnSpc>
               <a:buClr>
                 <a:srgbClr val="000000"/>
               </a:buClr>
@@ -12574,6 +16308,7 @@
                 <a:effectLst/>
                 <a:uFillTx/>
                 <a:latin typeface="Arial"/>
+                <a:ea typeface="DejaVu Sans"/>
               </a:rPr>
               <a:t> </a:t>
             </a:r>
@@ -12588,6 +16323,9 @@
           </a:p>
           <a:p>
             <a:pPr marL="216000" indent="-216000">
+              <a:lnSpc>
+                <a:spcPct val="100000"/>
+              </a:lnSpc>
               <a:spcBef>
                 <a:spcPts val="1191"/>
               </a:spcBef>
@@ -12609,6 +16347,7 @@
                 <a:effectLst/>
                 <a:uFillTx/>
                 <a:latin typeface="Arial"/>
+                <a:ea typeface="DejaVu Sans"/>
               </a:rPr>
               <a:t>The installed version of Jenkins server was affected by a number of security vulnerabilities. Known vulnerabilities included CSRF and </a:t>
             </a:r>
@@ -12623,6 +16362,7 @@
                 </a:highlight>
                 <a:uFillTx/>
                 <a:latin typeface="Arial"/>
+                <a:ea typeface="DejaVu Sans"/>
               </a:rPr>
               <a:t>XSS</a:t>
             </a:r>
@@ -12634,6 +16374,7 @@
                 <a:effectLst/>
                 <a:uFillTx/>
                 <a:latin typeface="Arial"/>
+                <a:ea typeface="DejaVu Sans"/>
               </a:rPr>
               <a:t> weaknesses.</a:t>
             </a:r>
@@ -12645,6 +16386,7 @@
                 <a:effectLst/>
                 <a:uFillTx/>
                 <a:latin typeface="Arial"/>
+                <a:ea typeface="DejaVu Sans"/>
               </a:rPr>
               <a:t> </a:t>
             </a:r>
@@ -12656,6 +16398,7 @@
                 <a:effectLst/>
                 <a:uFillTx/>
                 <a:latin typeface="Arial"/>
+                <a:ea typeface="DejaVu Sans"/>
               </a:rPr>
               <a:t> </a:t>
             </a:r>
@@ -12684,8 +16427,8 @@
         <p:txBody>
           <a:bodyPr/>
           <a:p>
-            <a:fld id="{1AE7CB1E-46C4-40B3-8F34-F97FCE25D822}" type="slidenum">
-              <a:t>20</a:t>
+            <a:fld id="{9CEBF235-4AD3-4CDA-B485-AA0361EC1CF1}" type="slidenum">
+              <a:t>26</a:t>
             </a:fld>
           </a:p>
         </p:txBody>
@@ -12732,8 +16475,8 @@
         </p:nvSpPr>
         <p:spPr>
           <a:xfrm>
-            <a:off x="360000" y="165240"/>
-            <a:ext cx="9357120" cy="504720"/>
+            <a:off x="360000" y="164160"/>
+            <a:ext cx="9356040" cy="505800"/>
           </a:xfrm>
           <a:prstGeom prst="rect">
             <a:avLst/>
@@ -12766,7 +16509,7 @@
                 <a:uFillTx/>
                 <a:latin typeface="Arial"/>
               </a:rPr>
-              <a:t>Example Case</a:t>
+              <a:t>Relevant Quote</a:t>
             </a:r>
             <a:endParaRPr b="0" lang="en-AU" sz="3300" strike="noStrike" u="none">
               <a:solidFill>
@@ -12779,20 +16522,20 @@
           </a:p>
         </p:txBody>
       </p:sp>
-      <p:sp>
-        <p:nvSpPr>
-          <p:cNvPr id="42" name="PlaceHolder 2"/>
-          <p:cNvSpPr>
-            <a:spLocks noGrp="1"/>
-          </p:cNvSpPr>
-          <p:nvPr>
-            <p:ph/>
-          </p:nvPr>
-        </p:nvSpPr>
+      <p:pic>
+        <p:nvPicPr>
+          <p:cNvPr id="42" name="" descr=""/>
+          <p:cNvPicPr/>
+          <p:nvPr/>
+        </p:nvPicPr>
+        <p:blipFill>
+          <a:blip r:embed="rId1"/>
+          <a:stretch/>
+        </p:blipFill>
         <p:spPr>
           <a:xfrm>
-            <a:off x="360000" y="1080000"/>
-            <a:ext cx="9357120" cy="3597120"/>
+            <a:off x="2311920" y="995400"/>
+            <a:ext cx="5466960" cy="3695040"/>
           </a:xfrm>
           <a:prstGeom prst="rect">
             <a:avLst/>
@@ -12802,122 +16545,10 @@
             <a:noFill/>
           </a:ln>
         </p:spPr>
-        <p:txBody>
-          <a:bodyPr lIns="0" rIns="0" tIns="0" bIns="0" anchor="t">
-            <a:noAutofit/>
-          </a:bodyPr>
-          <a:p>
-            <a:pPr marL="432000" indent="-324000">
-              <a:lnSpc>
-                <a:spcPct val="100000"/>
-              </a:lnSpc>
-              <a:spcBef>
-                <a:spcPts val="1060"/>
-              </a:spcBef>
-              <a:buClr>
-                <a:srgbClr val="77caee"/>
-              </a:buClr>
-              <a:buSzPct val="45000"/>
-              <a:buFont typeface="Wingdings" charset="2"/>
-              <a:buChar char=""/>
-            </a:pPr>
-            <a:r>
-              <a:rPr b="0" lang="en-AU" sz="2800" strike="noStrike" u="none">
-                <a:solidFill>
-                  <a:srgbClr val="009bdd"/>
-                </a:solidFill>
-                <a:effectLst/>
-                <a:uFillTx/>
-                <a:latin typeface="Arial"/>
-              </a:rPr>
-              <a:t>Proof of Concept use private and public data.</a:t>
-            </a:r>
-            <a:endParaRPr b="0" lang="en-AU" sz="2800" strike="noStrike" u="none">
-              <a:solidFill>
-                <a:srgbClr val="000000"/>
-              </a:solidFill>
-              <a:effectLst/>
-              <a:uFillTx/>
-              <a:latin typeface="Arial"/>
-            </a:endParaRPr>
-          </a:p>
-          <a:p>
-            <a:pPr lvl="1" marL="864000" indent="-324000">
-              <a:lnSpc>
-                <a:spcPct val="100000"/>
-              </a:lnSpc>
-              <a:spcBef>
-                <a:spcPts val="1134"/>
-              </a:spcBef>
-              <a:buClr>
-                <a:srgbClr val="000000"/>
-              </a:buClr>
-              <a:buSzPct val="75000"/>
-              <a:buFont typeface="Symbol" charset="2"/>
-              <a:buChar char=""/>
-            </a:pPr>
-            <a:r>
-              <a:rPr b="0" lang="en-AU" sz="2800" strike="noStrike" u="none">
-                <a:solidFill>
-                  <a:srgbClr val="009bdd"/>
-                </a:solidFill>
-                <a:effectLst/>
-                <a:uFillTx/>
-                <a:latin typeface="Arial"/>
-                <a:ea typeface="Microsoft YaHei"/>
-              </a:rPr>
-              <a:t>Private data – reports of penetration tests</a:t>
-            </a:r>
-            <a:endParaRPr b="0" lang="en-AU" sz="2800" strike="noStrike" u="none">
-              <a:solidFill>
-                <a:srgbClr val="000000"/>
-              </a:solidFill>
-              <a:effectLst/>
-              <a:uFillTx/>
-              <a:latin typeface="Arial"/>
-            </a:endParaRPr>
-          </a:p>
-          <a:p>
-            <a:pPr lvl="1" marL="864000" indent="-324000">
-              <a:lnSpc>
-                <a:spcPct val="100000"/>
-              </a:lnSpc>
-              <a:spcBef>
-                <a:spcPts val="1134"/>
-              </a:spcBef>
-              <a:buClr>
-                <a:srgbClr val="000000"/>
-              </a:buClr>
-              <a:buSzPct val="75000"/>
-              <a:buFont typeface="Symbol" charset="2"/>
-              <a:buChar char=""/>
-            </a:pPr>
-            <a:r>
-              <a:rPr b="0" lang="en-AU" sz="2800" strike="noStrike" u="none">
-                <a:solidFill>
-                  <a:srgbClr val="009bdd"/>
-                </a:solidFill>
-                <a:effectLst/>
-                <a:uFillTx/>
-                <a:latin typeface="Arial"/>
-                <a:ea typeface="Microsoft YaHei"/>
-              </a:rPr>
-              <a:t>Public data – PCI DSS Cyber Security Framework</a:t>
-            </a:r>
-            <a:endParaRPr b="0" lang="en-AU" sz="2800" strike="noStrike" u="none">
-              <a:solidFill>
-                <a:srgbClr val="000000"/>
-              </a:solidFill>
-              <a:effectLst/>
-              <a:uFillTx/>
-              <a:latin typeface="Arial"/>
-            </a:endParaRPr>
-          </a:p>
-        </p:txBody>
-      </p:sp>
+      </p:pic>
       <p:sp>
         <p:nvSpPr>
-          <p:cNvPr id="4" name="PlaceHolder 3"/>
+          <p:cNvPr id="3" name="PlaceHolder 2"/>
           <p:cNvSpPr>
             <a:spLocks noGrp="1"/>
           </p:cNvSpPr>
@@ -12929,7 +16560,7 @@
         <p:txBody>
           <a:bodyPr/>
           <a:p>
-            <a:fld id="{C250274B-131E-4446-AEAB-57262E329DD9}" type="slidenum">
+            <a:fld id="{E4B304CC-1F85-4992-AE5B-5DD1FA616E44}" type="slidenum">
               <a:t>3</a:t>
             </a:fld>
           </a:p>
@@ -12977,8 +16608,8 @@
         </p:nvSpPr>
         <p:spPr>
           <a:xfrm>
-            <a:off x="360000" y="165240"/>
-            <a:ext cx="9357120" cy="504720"/>
+            <a:off x="360000" y="164160"/>
+            <a:ext cx="9356040" cy="505800"/>
           </a:xfrm>
           <a:prstGeom prst="rect">
             <a:avLst/>
@@ -13011,7 +16642,7 @@
                 <a:uFillTx/>
                 <a:latin typeface="Arial"/>
               </a:rPr>
-              <a:t>Technologies of Machine Learning</a:t>
+              <a:t>Example Case</a:t>
             </a:r>
             <a:endParaRPr b="0" lang="en-AU" sz="3300" strike="noStrike" u="none">
               <a:solidFill>
@@ -13037,7 +16668,7 @@
         <p:spPr>
           <a:xfrm>
             <a:off x="360000" y="1080000"/>
-            <a:ext cx="9357120" cy="3597120"/>
+            <a:ext cx="9356040" cy="3596040"/>
           </a:xfrm>
           <a:prstGeom prst="rect">
             <a:avLst/>
@@ -13075,42 +16706,7 @@
                 <a:uFillTx/>
                 <a:latin typeface="Arial"/>
               </a:rPr>
-              <a:t>Machine learning in enterprise settings should focus on private data.</a:t>
-            </a:r>
-            <a:endParaRPr b="0" lang="en-AU" sz="2800" strike="noStrike" u="none">
-              <a:solidFill>
-                <a:srgbClr val="000000"/>
-              </a:solidFill>
-              <a:effectLst/>
-              <a:uFillTx/>
-              <a:latin typeface="Arial"/>
-            </a:endParaRPr>
-          </a:p>
-          <a:p>
-            <a:pPr marL="432000" indent="-324000">
-              <a:lnSpc>
-                <a:spcPct val="100000"/>
-              </a:lnSpc>
-              <a:spcBef>
-                <a:spcPts val="1060"/>
-              </a:spcBef>
-              <a:buClr>
-                <a:srgbClr val="77caee"/>
-              </a:buClr>
-              <a:buSzPct val="45000"/>
-              <a:buFont typeface="Wingdings" charset="2"/>
-              <a:buChar char=""/>
-            </a:pPr>
-            <a:r>
-              <a:rPr b="0" lang="en-AU" sz="2800" strike="noStrike" u="none">
-                <a:solidFill>
-                  <a:srgbClr val="009bdd"/>
-                </a:solidFill>
-                <a:effectLst/>
-                <a:uFillTx/>
-                <a:latin typeface="Arial"/>
-              </a:rPr>
-              <a:t>There are two major ways to implement ML:</a:t>
+              <a:t>Proof of Concept use private and public data.</a:t>
             </a:r>
             <a:endParaRPr b="0" lang="en-AU" sz="2800" strike="noStrike" u="none">
               <a:solidFill>
@@ -13146,7 +16742,7 @@
                 <a:latin typeface="Arial"/>
                 <a:ea typeface="Microsoft YaHei"/>
               </a:rPr>
-              <a:t>RAG</a:t>
+              <a:t>Private data – collection of documents</a:t>
             </a:r>
             <a:endParaRPr b="0" lang="en-AU" sz="2800" strike="noStrike" u="none">
               <a:solidFill>
@@ -13182,7 +16778,7 @@
                 <a:latin typeface="Arial"/>
                 <a:ea typeface="Microsoft YaHei"/>
               </a:rPr>
-              <a:t>LLM Tuning</a:t>
+              <a:t>Public data – general data used for training LLM</a:t>
             </a:r>
             <a:endParaRPr b="0" lang="en-AU" sz="2800" strike="noStrike" u="none">
               <a:solidFill>
@@ -13209,7 +16805,7 @@
         <p:txBody>
           <a:bodyPr/>
           <a:p>
-            <a:fld id="{BB19FB97-0456-45D0-BF20-F24DB36DA58F}" type="slidenum">
+            <a:fld id="{E220E319-3E4C-4F4B-9A23-80C189C4A92E}" type="slidenum">
               <a:t>4</a:t>
             </a:fld>
           </a:p>
@@ -13257,8 +16853,8 @@
         </p:nvSpPr>
         <p:spPr>
           <a:xfrm>
-            <a:off x="360000" y="165240"/>
-            <a:ext cx="9357120" cy="504720"/>
+            <a:off x="360000" y="164160"/>
+            <a:ext cx="9356040" cy="505800"/>
           </a:xfrm>
           <a:prstGeom prst="rect">
             <a:avLst/>
@@ -13291,7 +16887,7 @@
                 <a:uFillTx/>
                 <a:latin typeface="Arial"/>
               </a:rPr>
-              <a:t>Retrieval-Augmented Generation</a:t>
+              <a:t>Technologies of Machine Learning</a:t>
             </a:r>
             <a:endParaRPr b="0" lang="en-AU" sz="3300" strike="noStrike" u="none">
               <a:solidFill>
@@ -13317,7 +16913,7 @@
         <p:spPr>
           <a:xfrm>
             <a:off x="360000" y="1080000"/>
-            <a:ext cx="9357120" cy="3597120"/>
+            <a:ext cx="9356040" cy="3596040"/>
           </a:xfrm>
           <a:prstGeom prst="rect">
             <a:avLst/>
@@ -13347,7 +16943,7 @@
               <a:buChar char=""/>
             </a:pPr>
             <a:r>
-              <a:rPr b="0" lang="en-AU" sz="2400" strike="noStrike" u="none">
+              <a:rPr b="0" lang="en-AU" sz="2800" strike="noStrike" u="none">
                 <a:solidFill>
                   <a:srgbClr val="009bdd"/>
                 </a:solidFill>
@@ -13355,129 +16951,24 @@
                 <a:uFillTx/>
                 <a:latin typeface="Arial"/>
               </a:rPr>
-              <a:t>RAG advantages</a:t>
-            </a:r>
-            <a:endParaRPr b="0" lang="en-AU" sz="2400" strike="noStrike" u="none">
-              <a:solidFill>
-                <a:srgbClr val="000000"/>
-              </a:solidFill>
-              <a:effectLst/>
-              <a:uFillTx/>
-              <a:latin typeface="Arial"/>
-            </a:endParaRPr>
-          </a:p>
-          <a:p>
-            <a:pPr lvl="1" marL="864000" indent="-324000">
+              <a:t>Machine learning in enterprise settings should focus on private data.</a:t>
+            </a:r>
+            <a:endParaRPr b="0" lang="en-AU" sz="2800" strike="noStrike" u="none">
+              <a:solidFill>
+                <a:srgbClr val="000000"/>
+              </a:solidFill>
+              <a:effectLst/>
+              <a:uFillTx/>
+              <a:latin typeface="Arial"/>
+            </a:endParaRPr>
+          </a:p>
+          <a:p>
+            <a:pPr marL="432000" indent="-324000">
               <a:lnSpc>
                 <a:spcPct val="100000"/>
               </a:lnSpc>
               <a:spcBef>
-                <a:spcPts val="1134"/>
-              </a:spcBef>
-              <a:buClr>
-                <a:srgbClr val="000000"/>
-              </a:buClr>
-              <a:buSzPct val="75000"/>
-              <a:buFont typeface="Symbol" charset="2"/>
-              <a:buChar char=""/>
-            </a:pPr>
-            <a:r>
-              <a:rPr b="0" lang="en-AU" sz="2400" strike="noStrike" u="none">
-                <a:solidFill>
-                  <a:srgbClr val="009bdd"/>
-                </a:solidFill>
-                <a:effectLst/>
-                <a:uFillTx/>
-                <a:latin typeface="Arial"/>
-              </a:rPr>
-              <a:t>Data manipulation portable between LLM providers. </a:t>
-            </a:r>
-            <a:endParaRPr b="0" lang="en-AU" sz="2400" strike="noStrike" u="none">
-              <a:solidFill>
-                <a:srgbClr val="000000"/>
-              </a:solidFill>
-              <a:effectLst/>
-              <a:uFillTx/>
-              <a:latin typeface="Arial"/>
-            </a:endParaRPr>
-          </a:p>
-          <a:p>
-            <a:pPr lvl="1" marL="864000" indent="-324000">
-              <a:lnSpc>
-                <a:spcPct val="100000"/>
-              </a:lnSpc>
-              <a:spcBef>
-                <a:spcPts val="1134"/>
-              </a:spcBef>
-              <a:buClr>
-                <a:srgbClr val="000000"/>
-              </a:buClr>
-              <a:buSzPct val="75000"/>
-              <a:buFont typeface="Symbol" charset="2"/>
-              <a:buChar char=""/>
-            </a:pPr>
-            <a:r>
-              <a:rPr b="0" lang="en-AU" sz="2400" strike="noStrike" u="none">
-                <a:solidFill>
-                  <a:srgbClr val="009bdd"/>
-                </a:solidFill>
-                <a:effectLst/>
-                <a:uFillTx/>
-                <a:latin typeface="Arial"/>
-              </a:rPr>
-              <a:t>Initial step for LLM tuning</a:t>
-            </a:r>
-            <a:endParaRPr b="0" lang="en-AU" sz="2400" strike="noStrike" u="none">
-              <a:solidFill>
-                <a:srgbClr val="000000"/>
-              </a:solidFill>
-              <a:effectLst/>
-              <a:uFillTx/>
-              <a:latin typeface="Arial"/>
-            </a:endParaRPr>
-          </a:p>
-          <a:p>
-            <a:pPr lvl="1" marL="864000" indent="-324000">
-              <a:lnSpc>
-                <a:spcPct val="100000"/>
-              </a:lnSpc>
-              <a:spcBef>
-                <a:spcPts val="1134"/>
-              </a:spcBef>
-              <a:buClr>
-                <a:srgbClr val="000000"/>
-              </a:buClr>
-              <a:buSzPct val="75000"/>
-              <a:buFont typeface="Symbol" charset="2"/>
-              <a:buChar char=""/>
-            </a:pPr>
-            <a:r>
-              <a:rPr b="0" lang="en-AU" sz="2400" strike="noStrike" u="none">
-                <a:solidFill>
-                  <a:srgbClr val="009bdd"/>
-                </a:solidFill>
-                <a:effectLst/>
-                <a:uFillTx/>
-                <a:latin typeface="Arial"/>
-              </a:rPr>
-              <a:t>Conversion of documents to structured data</a:t>
-            </a:r>
-            <a:endParaRPr b="0" lang="en-AU" sz="2400" strike="noStrike" u="none">
-              <a:solidFill>
-                <a:srgbClr val="000000"/>
-              </a:solidFill>
-              <a:effectLst/>
-              <a:uFillTx/>
-              <a:latin typeface="Arial"/>
-            </a:endParaRPr>
-          </a:p>
-          <a:p>
-            <a:pPr marL="432000" indent="-324000">
-              <a:lnSpc>
-                <a:spcPct val="100000"/>
-              </a:lnSpc>
-              <a:spcBef>
-                <a:spcPts val="1417"/>
+                <a:spcPts val="1060"/>
               </a:spcBef>
               <a:buClr>
                 <a:srgbClr val="77caee"/>
@@ -13487,7 +16978,7 @@
               <a:buChar char=""/>
             </a:pPr>
             <a:r>
-              <a:rPr b="0" lang="en-AU" sz="2400" strike="noStrike" u="none">
+              <a:rPr b="0" lang="en-AU" sz="2800" strike="noStrike" u="none">
                 <a:solidFill>
                   <a:srgbClr val="009bdd"/>
                 </a:solidFill>
@@ -13495,9 +16986,9 @@
                 <a:uFillTx/>
                 <a:latin typeface="Arial"/>
               </a:rPr>
-              <a:t>RAG disadvantages</a:t>
-            </a:r>
-            <a:endParaRPr b="0" lang="en-AU" sz="2400" strike="noStrike" u="none">
+              <a:t>There are two major ways to implement ML:</a:t>
+            </a:r>
+            <a:endParaRPr b="0" lang="en-AU" sz="2800" strike="noStrike" u="none">
               <a:solidFill>
                 <a:srgbClr val="000000"/>
               </a:solidFill>
@@ -13522,17 +17013,18 @@
               <a:buChar char=""/>
             </a:pPr>
             <a:r>
-              <a:rPr b="0" lang="en-AU" sz="2400" strike="noStrike" u="none">
+              <a:rPr b="0" lang="en-AU" sz="2800" strike="noStrike" u="none">
                 <a:solidFill>
                   <a:srgbClr val="009bdd"/>
                 </a:solidFill>
                 <a:effectLst/>
                 <a:uFillTx/>
                 <a:latin typeface="Arial"/>
-              </a:rPr>
-              <a:t>Low performance</a:t>
-            </a:r>
-            <a:endParaRPr b="0" lang="en-AU" sz="2400" strike="noStrike" u="none">
+                <a:ea typeface="Microsoft YaHei"/>
+              </a:rPr>
+              <a:t>RAG</a:t>
+            </a:r>
+            <a:endParaRPr b="0" lang="en-AU" sz="2800" strike="noStrike" u="none">
               <a:solidFill>
                 <a:srgbClr val="000000"/>
               </a:solidFill>
@@ -13557,17 +17049,18 @@
               <a:buChar char=""/>
             </a:pPr>
             <a:r>
-              <a:rPr b="0" lang="en-AU" sz="2400" strike="noStrike" u="none">
+              <a:rPr b="0" lang="en-AU" sz="2800" strike="noStrike" u="none">
                 <a:solidFill>
                   <a:srgbClr val="009bdd"/>
                 </a:solidFill>
                 <a:effectLst/>
                 <a:uFillTx/>
                 <a:latin typeface="Arial"/>
-              </a:rPr>
-              <a:t>Low precision</a:t>
-            </a:r>
-            <a:endParaRPr b="0" lang="en-AU" sz="2400" strike="noStrike" u="none">
+                <a:ea typeface="Microsoft YaHei"/>
+              </a:rPr>
+              <a:t>LLM Tuning</a:t>
+            </a:r>
+            <a:endParaRPr b="0" lang="en-AU" sz="2800" strike="noStrike" u="none">
               <a:solidFill>
                 <a:srgbClr val="000000"/>
               </a:solidFill>
@@ -13592,7 +17085,7 @@
         <p:txBody>
           <a:bodyPr/>
           <a:p>
-            <a:fld id="{72A1F916-4B22-48D4-8155-D86E68A788E8}" type="slidenum">
+            <a:fld id="{D9E24F55-6ECC-47BB-9007-A9DA34C06749}" type="slidenum">
               <a:t>5</a:t>
             </a:fld>
           </a:p>
@@ -13640,8 +17133,8 @@
         </p:nvSpPr>
         <p:spPr>
           <a:xfrm>
-            <a:off x="360000" y="165240"/>
-            <a:ext cx="9357120" cy="504720"/>
+            <a:off x="360000" y="164160"/>
+            <a:ext cx="9356040" cy="505800"/>
           </a:xfrm>
           <a:prstGeom prst="rect">
             <a:avLst/>
@@ -13674,7 +17167,7 @@
                 <a:uFillTx/>
                 <a:latin typeface="Arial"/>
               </a:rPr>
-              <a:t>LLM Tuning</a:t>
+              <a:t>Retrieval-Augmented Generation</a:t>
             </a:r>
             <a:endParaRPr b="0" lang="en-AU" sz="3300" strike="noStrike" u="none">
               <a:solidFill>
@@ -13700,7 +17193,7 @@
         <p:spPr>
           <a:xfrm>
             <a:off x="360000" y="1080000"/>
-            <a:ext cx="9357120" cy="3597120"/>
+            <a:ext cx="9356040" cy="3596040"/>
           </a:xfrm>
           <a:prstGeom prst="rect">
             <a:avLst/>
@@ -13738,7 +17231,7 @@
                 <a:uFillTx/>
                 <a:latin typeface="Arial"/>
               </a:rPr>
-              <a:t>Tuning advantages</a:t>
+              <a:t>RAG advantages</a:t>
             </a:r>
             <a:endParaRPr b="0" lang="en-AU" sz="2400" strike="noStrike" u="none">
               <a:solidFill>
@@ -13773,7 +17266,7 @@
                 <a:uFillTx/>
                 <a:latin typeface="Arial"/>
               </a:rPr>
-              <a:t>High performance </a:t>
+              <a:t>Data manipulation portable between LLM providers. </a:t>
             </a:r>
             <a:endParaRPr b="0" lang="en-AU" sz="2400" strike="noStrike" u="none">
               <a:solidFill>
@@ -13808,7 +17301,42 @@
                 <a:uFillTx/>
                 <a:latin typeface="Arial"/>
               </a:rPr>
-              <a:t>High precision</a:t>
+              <a:t>Initial step for LLM tuning</a:t>
+            </a:r>
+            <a:endParaRPr b="0" lang="en-AU" sz="2400" strike="noStrike" u="none">
+              <a:solidFill>
+                <a:srgbClr val="000000"/>
+              </a:solidFill>
+              <a:effectLst/>
+              <a:uFillTx/>
+              <a:latin typeface="Arial"/>
+            </a:endParaRPr>
+          </a:p>
+          <a:p>
+            <a:pPr lvl="1" marL="864000" indent="-324000">
+              <a:lnSpc>
+                <a:spcPct val="100000"/>
+              </a:lnSpc>
+              <a:spcBef>
+                <a:spcPts val="1134"/>
+              </a:spcBef>
+              <a:buClr>
+                <a:srgbClr val="000000"/>
+              </a:buClr>
+              <a:buSzPct val="75000"/>
+              <a:buFont typeface="Symbol" charset="2"/>
+              <a:buChar char=""/>
+            </a:pPr>
+            <a:r>
+              <a:rPr b="0" lang="en-AU" sz="2400" strike="noStrike" u="none">
+                <a:solidFill>
+                  <a:srgbClr val="009bdd"/>
+                </a:solidFill>
+                <a:effectLst/>
+                <a:uFillTx/>
+                <a:latin typeface="Arial"/>
+              </a:rPr>
+              <a:t>Conversion of documents to structured data</a:t>
             </a:r>
             <a:endParaRPr b="0" lang="en-AU" sz="2400" strike="noStrike" u="none">
               <a:solidFill>
@@ -13843,7 +17371,7 @@
                 <a:uFillTx/>
                 <a:latin typeface="Arial"/>
               </a:rPr>
-              <a:t>Tuning disadvantages</a:t>
+              <a:t>RAG disadvantages</a:t>
             </a:r>
             <a:endParaRPr b="0" lang="en-AU" sz="2400" strike="noStrike" u="none">
               <a:solidFill>
@@ -13878,7 +17406,7 @@
                 <a:uFillTx/>
                 <a:latin typeface="Arial"/>
               </a:rPr>
-              <a:t>Tuning expense</a:t>
+              <a:t>Low performance</a:t>
             </a:r>
             <a:endParaRPr b="0" lang="en-AU" sz="2400" strike="noStrike" u="none">
               <a:solidFill>
@@ -13913,7 +17441,7 @@
                 <a:uFillTx/>
                 <a:latin typeface="Arial"/>
               </a:rPr>
-              <a:t>Periodic re-tuning required</a:t>
+              <a:t>Low precision</a:t>
             </a:r>
             <a:endParaRPr b="0" lang="en-AU" sz="2400" strike="noStrike" u="none">
               <a:solidFill>
@@ -13940,7 +17468,7 @@
         <p:txBody>
           <a:bodyPr/>
           <a:p>
-            <a:fld id="{B0E046A5-F5E7-49C8-8342-4DDA3F276DAB}" type="slidenum">
+            <a:fld id="{BD8B4739-8831-4B0D-8C9C-A21413DBC08D}" type="slidenum">
               <a:t>6</a:t>
             </a:fld>
           </a:p>
@@ -13988,8 +17516,8 @@
         </p:nvSpPr>
         <p:spPr>
           <a:xfrm>
-            <a:off x="360000" y="165240"/>
-            <a:ext cx="9357120" cy="504720"/>
+            <a:off x="360000" y="164160"/>
+            <a:ext cx="9356040" cy="505800"/>
           </a:xfrm>
           <a:prstGeom prst="rect">
             <a:avLst/>
@@ -14022,7 +17550,7 @@
                 <a:uFillTx/>
                 <a:latin typeface="Arial"/>
               </a:rPr>
-              <a:t>Summary: RAG as an Entry Point</a:t>
+              <a:t>LLM Tuning</a:t>
             </a:r>
             <a:endParaRPr b="0" lang="en-AU" sz="3300" strike="noStrike" u="none">
               <a:solidFill>
@@ -14048,7 +17576,7 @@
         <p:spPr>
           <a:xfrm>
             <a:off x="360000" y="1080000"/>
-            <a:ext cx="9357120" cy="3597120"/>
+            <a:ext cx="9356040" cy="3596040"/>
           </a:xfrm>
           <a:prstGeom prst="rect">
             <a:avLst/>
@@ -14078,7 +17606,7 @@
               <a:buChar char=""/>
             </a:pPr>
             <a:r>
-              <a:rPr b="0" lang="en-AU" sz="2800" strike="noStrike" u="none">
+              <a:rPr b="0" lang="en-AU" sz="2400" strike="noStrike" u="none">
                 <a:solidFill>
                   <a:srgbClr val="009bdd"/>
                 </a:solidFill>
@@ -14086,9 +17614,9 @@
                 <a:uFillTx/>
                 <a:latin typeface="Arial"/>
               </a:rPr>
-              <a:t>RAG solution as an entry to LLM workflows</a:t>
-            </a:r>
-            <a:endParaRPr b="0" lang="en-AU" sz="2800" strike="noStrike" u="none">
+              <a:t>Tuning advantages</a:t>
+            </a:r>
+            <a:endParaRPr b="0" lang="en-AU" sz="2400" strike="noStrike" u="none">
               <a:solidFill>
                 <a:srgbClr val="000000"/>
               </a:solidFill>
@@ -14113,7 +17641,7 @@
               <a:buChar char=""/>
             </a:pPr>
             <a:r>
-              <a:rPr b="0" lang="en-AU" sz="2800" strike="noStrike" u="none">
+              <a:rPr b="0" lang="en-AU" sz="2400" strike="noStrike" u="none">
                 <a:solidFill>
                   <a:srgbClr val="009bdd"/>
                 </a:solidFill>
@@ -14121,9 +17649,9 @@
                 <a:uFillTx/>
                 <a:latin typeface="Arial"/>
               </a:rPr>
-              <a:t>RAG allows to convert unstructured data to structured</a:t>
-            </a:r>
-            <a:endParaRPr b="0" lang="en-AU" sz="2800" strike="noStrike" u="none">
+              <a:t>High performance </a:t>
+            </a:r>
+            <a:endParaRPr b="0" lang="en-AU" sz="2400" strike="noStrike" u="none">
               <a:solidFill>
                 <a:srgbClr val="000000"/>
               </a:solidFill>
@@ -14148,7 +17676,7 @@
               <a:buChar char=""/>
             </a:pPr>
             <a:r>
-              <a:rPr b="0" lang="en-AU" sz="2800" strike="noStrike" u="none">
+              <a:rPr b="0" lang="en-AU" sz="2400" strike="noStrike" u="none">
                 <a:solidFill>
                   <a:srgbClr val="009bdd"/>
                 </a:solidFill>
@@ -14156,9 +17684,44 @@
                 <a:uFillTx/>
                 <a:latin typeface="Arial"/>
               </a:rPr>
-              <a:t>RAG allows to implement effective authorisation mechanism</a:t>
-            </a:r>
-            <a:endParaRPr b="0" lang="en-AU" sz="2800" strike="noStrike" u="none">
+              <a:t>High precision</a:t>
+            </a:r>
+            <a:endParaRPr b="0" lang="en-AU" sz="2400" strike="noStrike" u="none">
+              <a:solidFill>
+                <a:srgbClr val="000000"/>
+              </a:solidFill>
+              <a:effectLst/>
+              <a:uFillTx/>
+              <a:latin typeface="Arial"/>
+            </a:endParaRPr>
+          </a:p>
+          <a:p>
+            <a:pPr marL="432000" indent="-324000">
+              <a:lnSpc>
+                <a:spcPct val="100000"/>
+              </a:lnSpc>
+              <a:spcBef>
+                <a:spcPts val="1417"/>
+              </a:spcBef>
+              <a:buClr>
+                <a:srgbClr val="77caee"/>
+              </a:buClr>
+              <a:buSzPct val="45000"/>
+              <a:buFont typeface="Wingdings" charset="2"/>
+              <a:buChar char=""/>
+            </a:pPr>
+            <a:r>
+              <a:rPr b="0" lang="en-AU" sz="2400" strike="noStrike" u="none">
+                <a:solidFill>
+                  <a:srgbClr val="009bdd"/>
+                </a:solidFill>
+                <a:effectLst/>
+                <a:uFillTx/>
+                <a:latin typeface="Arial"/>
+              </a:rPr>
+              <a:t>Tuning disadvantages</a:t>
+            </a:r>
+            <a:endParaRPr b="0" lang="en-AU" sz="2400" strike="noStrike" u="none">
               <a:solidFill>
                 <a:srgbClr val="000000"/>
               </a:solidFill>
@@ -14183,7 +17746,7 @@
               <a:buChar char=""/>
             </a:pPr>
             <a:r>
-              <a:rPr b="0" lang="en-AU" sz="2800" strike="noStrike" u="none">
+              <a:rPr b="0" lang="en-AU" sz="2400" strike="noStrike" u="none">
                 <a:solidFill>
                   <a:srgbClr val="009bdd"/>
                 </a:solidFill>
@@ -14191,52 +17754,43 @@
                 <a:uFillTx/>
                 <a:latin typeface="Arial"/>
               </a:rPr>
-              <a:t>RAG allows to verify quality of data</a:t>
-            </a:r>
-            <a:endParaRPr b="0" lang="en-AU" sz="2800" strike="noStrike" u="none">
-              <a:solidFill>
-                <a:srgbClr val="000000"/>
-              </a:solidFill>
-              <a:effectLst/>
-              <a:uFillTx/>
-              <a:latin typeface="Arial"/>
-            </a:endParaRPr>
-          </a:p>
-          <a:p>
-            <a:pPr indent="0">
+              <a:t>Tuning expense</a:t>
+            </a:r>
+            <a:endParaRPr b="0" lang="en-AU" sz="2400" strike="noStrike" u="none">
+              <a:solidFill>
+                <a:srgbClr val="000000"/>
+              </a:solidFill>
+              <a:effectLst/>
+              <a:uFillTx/>
+              <a:latin typeface="Arial"/>
+            </a:endParaRPr>
+          </a:p>
+          <a:p>
+            <a:pPr lvl="1" marL="864000" indent="-324000">
               <a:lnSpc>
                 <a:spcPct val="100000"/>
               </a:lnSpc>
               <a:spcBef>
-                <a:spcPts val="1060"/>
+                <a:spcPts val="1134"/>
               </a:spcBef>
-              <a:buNone/>
-              <a:tabLst>
-                <a:tab algn="l" pos="0"/>
-              </a:tabLst>
-            </a:pPr>
-            <a:endParaRPr b="0" lang="en-AU" sz="2800" strike="noStrike" u="none">
-              <a:solidFill>
-                <a:srgbClr val="000000"/>
-              </a:solidFill>
-              <a:effectLst/>
-              <a:uFillTx/>
-              <a:latin typeface="Arial"/>
-            </a:endParaRPr>
-          </a:p>
-          <a:p>
-            <a:pPr indent="0">
-              <a:lnSpc>
-                <a:spcPct val="100000"/>
-              </a:lnSpc>
-              <a:spcBef>
-                <a:spcPts val="1060"/>
-              </a:spcBef>
-              <a:buNone/>
-              <a:tabLst>
-                <a:tab algn="l" pos="0"/>
-              </a:tabLst>
-            </a:pPr>
+              <a:buClr>
+                <a:srgbClr val="000000"/>
+              </a:buClr>
+              <a:buSzPct val="75000"/>
+              <a:buFont typeface="Symbol" charset="2"/>
+              <a:buChar char=""/>
+            </a:pPr>
+            <a:r>
+              <a:rPr b="0" lang="en-AU" sz="2400" strike="noStrike" u="none">
+                <a:solidFill>
+                  <a:srgbClr val="009bdd"/>
+                </a:solidFill>
+                <a:effectLst/>
+                <a:uFillTx/>
+                <a:latin typeface="Arial"/>
+              </a:rPr>
+              <a:t>Periodic re-tuning required</a:t>
+            </a:r>
             <a:endParaRPr b="0" lang="en-AU" sz="2400" strike="noStrike" u="none">
               <a:solidFill>
                 <a:srgbClr val="000000"/>
@@ -14262,7 +17816,7 @@
         <p:txBody>
           <a:bodyPr/>
           <a:p>
-            <a:fld id="{6261A672-F732-4395-B363-2F8E370AA5AF}" type="slidenum">
+            <a:fld id="{6B017B18-4F9B-4AF9-AA1E-75E52C5D44EF}" type="slidenum">
               <a:t>7</a:t>
             </a:fld>
           </a:p>
@@ -14310,8 +17864,8 @@
         </p:nvSpPr>
         <p:spPr>
           <a:xfrm>
-            <a:off x="360000" y="165240"/>
-            <a:ext cx="9357120" cy="504720"/>
+            <a:off x="360000" y="164160"/>
+            <a:ext cx="9356040" cy="505800"/>
           </a:xfrm>
           <a:prstGeom prst="rect">
             <a:avLst/>
@@ -14344,7 +17898,7 @@
                 <a:uFillTx/>
                 <a:latin typeface="Arial"/>
               </a:rPr>
-              <a:t>Pydantic Agent</a:t>
+              <a:t>Summary: RAG as an Entry Point</a:t>
             </a:r>
             <a:endParaRPr b="0" lang="en-AU" sz="3300" strike="noStrike" u="none">
               <a:solidFill>
@@ -14370,7 +17924,7 @@
         <p:spPr>
           <a:xfrm>
             <a:off x="360000" y="1080000"/>
-            <a:ext cx="9357120" cy="3597120"/>
+            <a:ext cx="9356040" cy="3596040"/>
           </a:xfrm>
           <a:prstGeom prst="rect">
             <a:avLst/>
@@ -14408,7 +17962,7 @@
                 <a:uFillTx/>
                 <a:latin typeface="Arial"/>
               </a:rPr>
-              <a:t>Best of Agentic AI</a:t>
+              <a:t>RAG solution as an entry to LLM workflows</a:t>
             </a:r>
             <a:endParaRPr b="0" lang="en-AU" sz="2800" strike="noStrike" u="none">
               <a:solidFill>
@@ -14443,7 +17997,7 @@
                 <a:uFillTx/>
                 <a:latin typeface="Arial"/>
               </a:rPr>
-              <a:t>Portable across all major LLM providers</a:t>
+              <a:t>RAG allows to convert unstructured data to structured</a:t>
             </a:r>
             <a:endParaRPr b="0" lang="en-AU" sz="2800" strike="noStrike" u="none">
               <a:solidFill>
@@ -14478,7 +18032,7 @@
                 <a:uFillTx/>
                 <a:latin typeface="Arial"/>
               </a:rPr>
-              <a:t>Types based on JSON schema</a:t>
+              <a:t>RAG allows to implement effective authorisation mechanism</a:t>
             </a:r>
             <a:endParaRPr b="0" lang="en-AU" sz="2800" strike="noStrike" u="none">
               <a:solidFill>
@@ -14513,42 +18067,7 @@
                 <a:uFillTx/>
                 <a:latin typeface="Arial"/>
               </a:rPr>
-              <a:t>Wraps iterative LLM calls</a:t>
-            </a:r>
-            <a:endParaRPr b="0" lang="en-AU" sz="2800" strike="noStrike" u="none">
-              <a:solidFill>
-                <a:srgbClr val="000000"/>
-              </a:solidFill>
-              <a:effectLst/>
-              <a:uFillTx/>
-              <a:latin typeface="Arial"/>
-            </a:endParaRPr>
-          </a:p>
-          <a:p>
-            <a:pPr lvl="1" marL="864000" indent="-324000">
-              <a:lnSpc>
-                <a:spcPct val="100000"/>
-              </a:lnSpc>
-              <a:spcBef>
-                <a:spcPts val="1134"/>
-              </a:spcBef>
-              <a:buClr>
-                <a:srgbClr val="000000"/>
-              </a:buClr>
-              <a:buSzPct val="75000"/>
-              <a:buFont typeface="Symbol" charset="2"/>
-              <a:buChar char=""/>
-            </a:pPr>
-            <a:r>
-              <a:rPr b="0" lang="en-AU" sz="2800" strike="noStrike" u="none">
-                <a:solidFill>
-                  <a:srgbClr val="009bdd"/>
-                </a:solidFill>
-                <a:effectLst/>
-                <a:uFillTx/>
-                <a:latin typeface="Arial"/>
-              </a:rPr>
-              <a:t>Serves as the foundation of many LLM SDKs</a:t>
+              <a:t>RAG allows to verify quality of data</a:t>
             </a:r>
             <a:endParaRPr b="0" lang="en-AU" sz="2800" strike="noStrike" u="none">
               <a:solidFill>
@@ -14619,7 +18138,7 @@
         <p:txBody>
           <a:bodyPr/>
           <a:p>
-            <a:fld id="{E1982FE6-F4E6-4067-B71B-DDF40B987442}" type="slidenum">
+            <a:fld id="{66AF641B-E81C-4FFE-AE8B-37D7DD61B0A8}" type="slidenum">
               <a:t>8</a:t>
             </a:fld>
           </a:p>
@@ -14667,8 +18186,8 @@
         </p:nvSpPr>
         <p:spPr>
           <a:xfrm>
-            <a:off x="360000" y="165240"/>
-            <a:ext cx="9357120" cy="504720"/>
+            <a:off x="360000" y="164160"/>
+            <a:ext cx="9356040" cy="505800"/>
           </a:xfrm>
           <a:prstGeom prst="rect">
             <a:avLst/>
@@ -14701,7 +18220,7 @@
                 <a:uFillTx/>
                 <a:latin typeface="Arial"/>
               </a:rPr>
-              <a:t>Architecture Summary</a:t>
+              <a:t>Pydantic Agent</a:t>
             </a:r>
             <a:endParaRPr b="0" lang="en-AU" sz="3300" strike="noStrike" u="none">
               <a:solidFill>
@@ -14727,7 +18246,7 @@
         <p:spPr>
           <a:xfrm>
             <a:off x="360000" y="1080000"/>
-            <a:ext cx="9357120" cy="3597120"/>
+            <a:ext cx="9356040" cy="3596040"/>
           </a:xfrm>
           <a:prstGeom prst="rect">
             <a:avLst/>
@@ -14765,7 +18284,7 @@
                 <a:uFillTx/>
                 <a:latin typeface="Arial"/>
               </a:rPr>
-              <a:t>Example app is a hybrid architecture</a:t>
+              <a:t>Best of Agentic AI</a:t>
             </a:r>
             <a:endParaRPr b="0" lang="en-AU" sz="2800" strike="noStrike" u="none">
               <a:solidFill>
@@ -14800,7 +18319,7 @@
                 <a:uFillTx/>
                 <a:latin typeface="Arial"/>
               </a:rPr>
-              <a:t>Cloud-based LLM accessed via REST API</a:t>
+              <a:t>Portable across all major LLM providers</a:t>
             </a:r>
             <a:endParaRPr b="0" lang="en-AU" sz="2800" strike="noStrike" u="none">
               <a:solidFill>
@@ -14835,7 +18354,7 @@
                 <a:uFillTx/>
                 <a:latin typeface="Arial"/>
               </a:rPr>
-              <a:t>Local vector database</a:t>
+              <a:t>Types based on JSON schema</a:t>
             </a:r>
             <a:endParaRPr b="0" lang="en-AU" sz="2800" strike="noStrike" u="none">
               <a:solidFill>
@@ -14870,7 +18389,42 @@
                 <a:uFillTx/>
                 <a:latin typeface="Arial"/>
               </a:rPr>
-              <a:t>Dual use web apps and command line scripts </a:t>
+              <a:t>Wraps iterative LLM calls</a:t>
+            </a:r>
+            <a:endParaRPr b="0" lang="en-AU" sz="2800" strike="noStrike" u="none">
+              <a:solidFill>
+                <a:srgbClr val="000000"/>
+              </a:solidFill>
+              <a:effectLst/>
+              <a:uFillTx/>
+              <a:latin typeface="Arial"/>
+            </a:endParaRPr>
+          </a:p>
+          <a:p>
+            <a:pPr lvl="1" marL="864000" indent="-324000">
+              <a:lnSpc>
+                <a:spcPct val="100000"/>
+              </a:lnSpc>
+              <a:spcBef>
+                <a:spcPts val="1134"/>
+              </a:spcBef>
+              <a:buClr>
+                <a:srgbClr val="000000"/>
+              </a:buClr>
+              <a:buSzPct val="75000"/>
+              <a:buFont typeface="Symbol" charset="2"/>
+              <a:buChar char=""/>
+            </a:pPr>
+            <a:r>
+              <a:rPr b="0" lang="en-AU" sz="2800" strike="noStrike" u="none">
+                <a:solidFill>
+                  <a:srgbClr val="009bdd"/>
+                </a:solidFill>
+                <a:effectLst/>
+                <a:uFillTx/>
+                <a:latin typeface="Arial"/>
+              </a:rPr>
+              <a:t>Serves as the foundation of many LLM SDKs</a:t>
             </a:r>
             <a:endParaRPr b="0" lang="en-AU" sz="2800" strike="noStrike" u="none">
               <a:solidFill>
@@ -14895,6 +18449,28 @@
               </a:tabLst>
             </a:pPr>
             <a:endParaRPr b="0" lang="en-AU" sz="2800" strike="noStrike" u="none">
+              <a:solidFill>
+                <a:srgbClr val="000000"/>
+              </a:solidFill>
+              <a:effectLst/>
+              <a:uFillTx/>
+              <a:latin typeface="Arial"/>
+            </a:endParaRPr>
+          </a:p>
+          <a:p>
+            <a:pPr indent="0">
+              <a:lnSpc>
+                <a:spcPct val="100000"/>
+              </a:lnSpc>
+              <a:spcBef>
+                <a:spcPts val="1060"/>
+              </a:spcBef>
+              <a:buNone/>
+              <a:tabLst>
+                <a:tab algn="l" pos="0"/>
+              </a:tabLst>
+            </a:pPr>
+            <a:endParaRPr b="0" lang="en-AU" sz="2400" strike="noStrike" u="none">
               <a:solidFill>
                 <a:srgbClr val="000000"/>
               </a:solidFill>
@@ -14919,7 +18495,7 @@
         <p:txBody>
           <a:bodyPr/>
           <a:p>
-            <a:fld id="{4560748D-DD3C-420F-8D8E-030CE50F1DE9}" type="slidenum">
+            <a:fld id="{4F63AB18-3AA1-4FEA-8A09-A4D36A257DE7}" type="slidenum">
               <a:t>9</a:t>
             </a:fld>
           </a:p>

--- a/architecture/Project Presentation v1.pptx
+++ b/architecture/Project Presentation v1.pptx
@@ -395,7 +395,7 @@
             <a:pPr indent="0" algn="r">
               <a:buNone/>
             </a:pPr>
-            <a:fld id="{C4610FBB-4024-4889-BB1D-63042E03A704}" type="slidenum">
+            <a:fld id="{1CA4270F-5878-4619-B90F-55897B9D01E2}" type="slidenum">
               <a:rPr lang="en-AU" sz="1400" b="0" u="none" strike="noStrike">
                 <a:solidFill>
                   <a:srgbClr val="000000"/>
@@ -453,7 +453,7 @@
         <p:spPr>
           <a:xfrm>
             <a:off x="216360" y="812520"/>
-            <a:ext cx="7123680" cy="4005720"/>
+            <a:ext cx="7123320" cy="4005360"/>
           </a:xfrm>
           <a:prstGeom prst="rect">
             <a:avLst/>
@@ -476,7 +476,7 @@
         <p:spPr>
           <a:xfrm>
             <a:off x="756000" y="5078520"/>
-            <a:ext cx="6044400" cy="4807800"/>
+            <a:ext cx="6044040" cy="4807440"/>
           </a:xfrm>
           <a:prstGeom prst="rect">
             <a:avLst/>
@@ -704,7 +704,7 @@
         <p:spPr>
           <a:xfrm>
             <a:off x="216000" y="812520"/>
-            <a:ext cx="7125480" cy="4007520"/>
+            <a:ext cx="7125120" cy="4007160"/>
           </a:xfrm>
           <a:prstGeom prst="rect">
             <a:avLst/>
@@ -727,7 +727,7 @@
         <p:spPr>
           <a:xfrm>
             <a:off x="756000" y="5078520"/>
-            <a:ext cx="6046200" cy="4809600"/>
+            <a:ext cx="6045840" cy="4809240"/>
           </a:xfrm>
           <a:prstGeom prst="rect">
             <a:avLst/>
@@ -951,7 +951,7 @@
         <p:spPr>
           <a:xfrm>
             <a:off x="216000" y="812520"/>
-            <a:ext cx="7125480" cy="4007520"/>
+            <a:ext cx="7125120" cy="4007160"/>
           </a:xfrm>
           <a:prstGeom prst="rect">
             <a:avLst/>
@@ -974,7 +974,7 @@
         <p:spPr>
           <a:xfrm>
             <a:off x="756000" y="5078520"/>
-            <a:ext cx="6046200" cy="4809600"/>
+            <a:ext cx="6045840" cy="4809240"/>
           </a:xfrm>
           <a:prstGeom prst="rect">
             <a:avLst/>
@@ -1198,7 +1198,7 @@
         <p:spPr>
           <a:xfrm>
             <a:off x="216000" y="812520"/>
-            <a:ext cx="7125480" cy="4007520"/>
+            <a:ext cx="7125120" cy="4007160"/>
           </a:xfrm>
           <a:prstGeom prst="rect">
             <a:avLst/>
@@ -1221,7 +1221,7 @@
         <p:spPr>
           <a:xfrm>
             <a:off x="756000" y="5078520"/>
-            <a:ext cx="6046200" cy="4809600"/>
+            <a:ext cx="6045840" cy="4809240"/>
           </a:xfrm>
           <a:prstGeom prst="rect">
             <a:avLst/>
@@ -1468,7 +1468,7 @@
         <p:spPr>
           <a:xfrm>
             <a:off x="216000" y="812520"/>
-            <a:ext cx="7125480" cy="4007520"/>
+            <a:ext cx="7125120" cy="4007160"/>
           </a:xfrm>
           <a:prstGeom prst="rect">
             <a:avLst/>
@@ -1491,7 +1491,7 @@
         <p:spPr>
           <a:xfrm>
             <a:off x="756000" y="5078520"/>
-            <a:ext cx="6046200" cy="4809600"/>
+            <a:ext cx="6045840" cy="4809240"/>
           </a:xfrm>
           <a:prstGeom prst="rect">
             <a:avLst/>
@@ -1621,7 +1621,7 @@
         <p:spPr>
           <a:xfrm>
             <a:off x="216000" y="812520"/>
-            <a:ext cx="7125480" cy="4007520"/>
+            <a:ext cx="7125120" cy="4007160"/>
           </a:xfrm>
           <a:prstGeom prst="rect">
             <a:avLst/>
@@ -1644,7 +1644,7 @@
         <p:spPr>
           <a:xfrm>
             <a:off x="756000" y="5078520"/>
-            <a:ext cx="6046200" cy="4809600"/>
+            <a:ext cx="6045840" cy="4809240"/>
           </a:xfrm>
           <a:prstGeom prst="rect">
             <a:avLst/>
@@ -1951,7 +1951,7 @@
         <p:spPr>
           <a:xfrm>
             <a:off x="216000" y="812520"/>
-            <a:ext cx="7124040" cy="4005720"/>
+            <a:ext cx="7123680" cy="4005360"/>
           </a:xfrm>
           <a:prstGeom prst="rect">
             <a:avLst/>
@@ -1974,7 +1974,7 @@
         <p:spPr>
           <a:xfrm>
             <a:off x="756000" y="5078520"/>
-            <a:ext cx="6044400" cy="4807800"/>
+            <a:ext cx="6044040" cy="4807440"/>
           </a:xfrm>
           <a:prstGeom prst="rect">
             <a:avLst/>
@@ -2251,7 +2251,7 @@
         <p:spPr>
           <a:xfrm>
             <a:off x="216000" y="812520"/>
-            <a:ext cx="7125480" cy="4007520"/>
+            <a:ext cx="7125120" cy="4007160"/>
           </a:xfrm>
           <a:prstGeom prst="rect">
             <a:avLst/>
@@ -2274,7 +2274,7 @@
         <p:spPr>
           <a:xfrm>
             <a:off x="756000" y="5078520"/>
-            <a:ext cx="6046200" cy="4809600"/>
+            <a:ext cx="6045840" cy="4809240"/>
           </a:xfrm>
           <a:prstGeom prst="rect">
             <a:avLst/>
@@ -2357,7 +2357,7 @@
                 <a:latin typeface="Arial"/>
                 <a:ea typeface="Microsoft YaHei"/>
               </a:rPr>
-              <a:t>Gemini model was hosted in Google cloud</a:t>
+              <a:t>Cloud hosting provided by Ollama Cloud and Google Cloud</a:t>
             </a:r>
             <a:endParaRPr lang="en-AU" sz="2000" b="0" u="none" strike="noStrike">
               <a:solidFill>
@@ -2407,57 +2407,7 @@
                 <a:latin typeface="Arial"/>
                 <a:ea typeface="Microsoft YaHei"/>
               </a:rPr>
-              <a:t>Gpt-oss models outperformed Llama 3.3</a:t>
-            </a:r>
-            <a:endParaRPr lang="en-AU" sz="2000" b="0" u="none" strike="noStrike">
-              <a:solidFill>
-                <a:srgbClr val="000000"/>
-              </a:solidFill>
-              <a:effectLst/>
-              <a:uFillTx/>
-              <a:latin typeface="Arial"/>
-            </a:endParaRPr>
-          </a:p>
-          <a:p>
-            <a:pPr indent="0">
-              <a:lnSpc>
-                <a:spcPct val="100000"/>
-              </a:lnSpc>
-              <a:buNone/>
-              <a:tabLst>
-                <a:tab algn="l" pos="0"/>
-              </a:tabLst>
-            </a:pPr>
-            <a:endParaRPr lang="en-AU" sz="2000" b="0" u="none" strike="noStrike">
-              <a:solidFill>
-                <a:srgbClr val="000000"/>
-              </a:solidFill>
-              <a:effectLst/>
-              <a:uFillTx/>
-              <a:latin typeface="Arial"/>
-            </a:endParaRPr>
-          </a:p>
-          <a:p>
-            <a:pPr indent="0">
-              <a:lnSpc>
-                <a:spcPct val="100000"/>
-              </a:lnSpc>
-              <a:buNone/>
-              <a:tabLst>
-                <a:tab algn="l" pos="0"/>
-              </a:tabLst>
-            </a:pPr>
-            <a:r>
-              <a:rPr lang="en-AU" sz="2000" b="0" u="none" strike="noStrike">
-                <a:solidFill>
-                  <a:srgbClr val="000000"/>
-                </a:solidFill>
-                <a:effectLst/>
-                <a:uFillTx/>
-                <a:latin typeface="Arial"/>
-                <a:ea typeface="Microsoft YaHei"/>
-              </a:rPr>
-              <a:t>Google cloud outperformed local host</a:t>
+              <a:t>Cloud models outperformed local host</a:t>
             </a:r>
             <a:endParaRPr lang="en-AU" sz="2000" b="0" u="none" strike="noStrike">
               <a:solidFill>
@@ -2729,7 +2679,7 @@
         <p:spPr>
           <a:xfrm>
             <a:off x="216000" y="812520"/>
-            <a:ext cx="7124040" cy="4005720"/>
+            <a:ext cx="7123680" cy="4005360"/>
           </a:xfrm>
           <a:prstGeom prst="rect">
             <a:avLst/>
@@ -2752,7 +2702,7 @@
         <p:spPr>
           <a:xfrm>
             <a:off x="756000" y="5078520"/>
-            <a:ext cx="6044400" cy="4807800"/>
+            <a:ext cx="6044040" cy="4807440"/>
           </a:xfrm>
           <a:prstGeom prst="rect">
             <a:avLst/>
@@ -2950,7 +2900,7 @@
         <p:spPr>
           <a:xfrm>
             <a:off x="216000" y="812520"/>
-            <a:ext cx="7124040" cy="4005720"/>
+            <a:ext cx="7123680" cy="4005360"/>
           </a:xfrm>
           <a:prstGeom prst="rect">
             <a:avLst/>
@@ -2973,7 +2923,7 @@
         <p:spPr>
           <a:xfrm>
             <a:off x="756000" y="5078520"/>
-            <a:ext cx="6044400" cy="4807800"/>
+            <a:ext cx="6044040" cy="4807440"/>
           </a:xfrm>
           <a:prstGeom prst="rect">
             <a:avLst/>
@@ -3190,7 +3140,7 @@
         <p:spPr>
           <a:xfrm>
             <a:off x="216360" y="812520"/>
-            <a:ext cx="7123680" cy="4005720"/>
+            <a:ext cx="7123320" cy="4005360"/>
           </a:xfrm>
           <a:prstGeom prst="rect">
             <a:avLst/>
@@ -3213,7 +3163,7 @@
         <p:spPr>
           <a:xfrm>
             <a:off x="756000" y="5078520"/>
-            <a:ext cx="6044400" cy="4807800"/>
+            <a:ext cx="6044040" cy="4807440"/>
           </a:xfrm>
           <a:prstGeom prst="rect">
             <a:avLst/>
@@ -3528,7 +3478,7 @@
         <p:spPr>
           <a:xfrm>
             <a:off x="216000" y="812520"/>
-            <a:ext cx="7124040" cy="4005720"/>
+            <a:ext cx="7123680" cy="4005360"/>
           </a:xfrm>
           <a:prstGeom prst="rect">
             <a:avLst/>
@@ -3551,7 +3501,7 @@
         <p:spPr>
           <a:xfrm>
             <a:off x="756000" y="5078520"/>
-            <a:ext cx="6044400" cy="4807800"/>
+            <a:ext cx="6044040" cy="4807440"/>
           </a:xfrm>
           <a:prstGeom prst="rect">
             <a:avLst/>
@@ -3885,7 +3835,7 @@
         <p:spPr>
           <a:xfrm>
             <a:off x="216000" y="812520"/>
-            <a:ext cx="7124040" cy="4005720"/>
+            <a:ext cx="7123680" cy="4005360"/>
           </a:xfrm>
           <a:prstGeom prst="rect">
             <a:avLst/>
@@ -3908,7 +3858,7 @@
         <p:spPr>
           <a:xfrm>
             <a:off x="756000" y="5078520"/>
-            <a:ext cx="6044400" cy="4807800"/>
+            <a:ext cx="6044040" cy="4807440"/>
           </a:xfrm>
           <a:prstGeom prst="rect">
             <a:avLst/>
@@ -4144,7 +4094,7 @@
         <p:spPr>
           <a:xfrm>
             <a:off x="216000" y="812520"/>
-            <a:ext cx="7124040" cy="4005720"/>
+            <a:ext cx="7123680" cy="4005360"/>
           </a:xfrm>
           <a:prstGeom prst="rect">
             <a:avLst/>
@@ -4167,7 +4117,7 @@
         <p:spPr>
           <a:xfrm>
             <a:off x="756000" y="5078520"/>
-            <a:ext cx="6044400" cy="4807800"/>
+            <a:ext cx="6044040" cy="4807440"/>
           </a:xfrm>
           <a:prstGeom prst="rect">
             <a:avLst/>
@@ -4354,7 +4304,7 @@
         <p:spPr>
           <a:xfrm>
             <a:off x="216000" y="812520"/>
-            <a:ext cx="7124040" cy="4005720"/>
+            <a:ext cx="7123680" cy="4005360"/>
           </a:xfrm>
           <a:prstGeom prst="rect">
             <a:avLst/>
@@ -4377,7 +4327,7 @@
         <p:spPr>
           <a:xfrm>
             <a:off x="756000" y="5078520"/>
-            <a:ext cx="6044400" cy="4807800"/>
+            <a:ext cx="6044040" cy="4807440"/>
           </a:xfrm>
           <a:prstGeom prst="rect">
             <a:avLst/>
@@ -4670,7 +4620,7 @@
         <p:spPr>
           <a:xfrm>
             <a:off x="216000" y="812520"/>
-            <a:ext cx="7124040" cy="4005720"/>
+            <a:ext cx="7123680" cy="4005360"/>
           </a:xfrm>
           <a:prstGeom prst="rect">
             <a:avLst/>
@@ -4693,7 +4643,7 @@
         <p:spPr>
           <a:xfrm>
             <a:off x="756000" y="5078520"/>
-            <a:ext cx="6044400" cy="4807800"/>
+            <a:ext cx="6044040" cy="4807440"/>
           </a:xfrm>
           <a:prstGeom prst="rect">
             <a:avLst/>
@@ -4970,7 +4920,7 @@
         <p:spPr>
           <a:xfrm>
             <a:off x="216000" y="812520"/>
-            <a:ext cx="7124040" cy="4005720"/>
+            <a:ext cx="7123680" cy="4005360"/>
           </a:xfrm>
           <a:prstGeom prst="rect">
             <a:avLst/>
@@ -4993,7 +4943,7 @@
         <p:spPr>
           <a:xfrm>
             <a:off x="756000" y="5078520"/>
-            <a:ext cx="6044400" cy="4807800"/>
+            <a:ext cx="6044040" cy="4807440"/>
           </a:xfrm>
           <a:prstGeom prst="rect">
             <a:avLst/>
@@ -5365,7 +5315,7 @@
         <p:spPr>
           <a:xfrm>
             <a:off x="216000" y="812520"/>
-            <a:ext cx="7124040" cy="4005720"/>
+            <a:ext cx="7123680" cy="4005360"/>
           </a:xfrm>
           <a:prstGeom prst="rect">
             <a:avLst/>
@@ -5388,7 +5338,7 @@
         <p:spPr>
           <a:xfrm>
             <a:off x="756000" y="5078520"/>
-            <a:ext cx="6044400" cy="4807800"/>
+            <a:ext cx="6044040" cy="4807440"/>
           </a:xfrm>
           <a:prstGeom prst="rect">
             <a:avLst/>
@@ -5567,7 +5517,7 @@
         <p:spPr>
           <a:xfrm>
             <a:off x="216000" y="812520"/>
-            <a:ext cx="7124040" cy="4005720"/>
+            <a:ext cx="7123680" cy="4005360"/>
           </a:xfrm>
           <a:prstGeom prst="rect">
             <a:avLst/>
@@ -5590,7 +5540,7 @@
         <p:spPr>
           <a:xfrm>
             <a:off x="756000" y="5078520"/>
-            <a:ext cx="6044400" cy="4807800"/>
+            <a:ext cx="6044040" cy="4807440"/>
           </a:xfrm>
           <a:prstGeom prst="rect">
             <a:avLst/>
@@ -5720,7 +5670,7 @@
         <p:spPr>
           <a:xfrm>
             <a:off x="216360" y="812520"/>
-            <a:ext cx="7123680" cy="4005720"/>
+            <a:ext cx="7123320" cy="4005360"/>
           </a:xfrm>
           <a:prstGeom prst="rect">
             <a:avLst/>
@@ -5743,7 +5693,7 @@
         <p:spPr>
           <a:xfrm>
             <a:off x="756000" y="5078520"/>
-            <a:ext cx="6044400" cy="4807800"/>
+            <a:ext cx="6044040" cy="4807440"/>
           </a:xfrm>
           <a:prstGeom prst="rect">
             <a:avLst/>
@@ -5971,7 +5921,7 @@
         <p:spPr>
           <a:xfrm>
             <a:off x="216360" y="812520"/>
-            <a:ext cx="7123680" cy="4005720"/>
+            <a:ext cx="7123320" cy="4005360"/>
           </a:xfrm>
           <a:prstGeom prst="rect">
             <a:avLst/>
@@ -5994,7 +5944,7 @@
         <p:spPr>
           <a:xfrm>
             <a:off x="756000" y="5078520"/>
-            <a:ext cx="6044400" cy="4807800"/>
+            <a:ext cx="6044040" cy="4807440"/>
           </a:xfrm>
           <a:prstGeom prst="rect">
             <a:avLst/>
@@ -6173,7 +6123,7 @@
         <p:spPr>
           <a:xfrm>
             <a:off x="216360" y="812520"/>
-            <a:ext cx="7123680" cy="4005720"/>
+            <a:ext cx="7123320" cy="4005360"/>
           </a:xfrm>
           <a:prstGeom prst="rect">
             <a:avLst/>
@@ -6196,7 +6146,7 @@
         <p:spPr>
           <a:xfrm>
             <a:off x="756000" y="5078520"/>
-            <a:ext cx="6044400" cy="4807800"/>
+            <a:ext cx="6044040" cy="4807440"/>
           </a:xfrm>
           <a:prstGeom prst="rect">
             <a:avLst/>
@@ -6345,7 +6295,7 @@
         <p:spPr>
           <a:xfrm>
             <a:off x="216360" y="812520"/>
-            <a:ext cx="7123680" cy="4005720"/>
+            <a:ext cx="7123320" cy="4005360"/>
           </a:xfrm>
           <a:prstGeom prst="rect">
             <a:avLst/>
@@ -6368,7 +6318,7 @@
         <p:spPr>
           <a:xfrm>
             <a:off x="756000" y="5078520"/>
-            <a:ext cx="6044400" cy="4807800"/>
+            <a:ext cx="6044040" cy="4807440"/>
           </a:xfrm>
           <a:prstGeom prst="rect">
             <a:avLst/>
@@ -6543,7 +6493,7 @@
         <p:spPr>
           <a:xfrm flipH="1" flipV="1">
             <a:off x="-5760" y="4494240"/>
-            <a:ext cx="10074600" cy="1164600"/>
+            <a:ext cx="10074240" cy="1164240"/>
           </a:xfrm>
           <a:prstGeom prst="flowChartDocument">
             <a:avLst/>
@@ -6935,7 +6885,7 @@
                 <a:srgbClr val="009bdd"/>
               </a:gs>
             </a:gsLst>
-            <a:lin ang="0"/>
+            <a:lin ang="10800000"/>
           </a:gradFill>
           <a:ln w="18000">
             <a:noFill/>
@@ -6987,7 +6937,7 @@
         <p:spPr>
           <a:xfrm>
             <a:off x="0" y="1620000"/>
-            <a:ext cx="8994600" cy="1074600"/>
+            <a:ext cx="8994240" cy="1074240"/>
           </a:xfrm>
           <a:prstGeom prst="rect">
             <a:avLst/>
@@ -7046,7 +6996,7 @@
         <p:spPr>
           <a:xfrm>
             <a:off x="360000" y="2880000"/>
-            <a:ext cx="9354600" cy="1614600"/>
+            <a:ext cx="9354240" cy="1614240"/>
           </a:xfrm>
           <a:prstGeom prst="rect">
             <a:avLst/>
@@ -7320,7 +7270,7 @@
         <p:spPr>
           <a:xfrm>
             <a:off x="360000" y="5220000"/>
-            <a:ext cx="2334600" cy="354600"/>
+            <a:ext cx="2334240" cy="354240"/>
           </a:xfrm>
           <a:prstGeom prst="rect">
             <a:avLst/>
@@ -7398,7 +7348,7 @@
         <p:spPr>
           <a:xfrm>
             <a:off x="3420000" y="5220000"/>
-            <a:ext cx="3234600" cy="354600"/>
+            <a:ext cx="3234240" cy="354240"/>
           </a:xfrm>
           <a:prstGeom prst="rect">
             <a:avLst/>
@@ -7476,7 +7426,7 @@
         <p:spPr>
           <a:xfrm>
             <a:off x="7380000" y="5220000"/>
-            <a:ext cx="2334600" cy="354600"/>
+            <a:ext cx="2334240" cy="354240"/>
           </a:xfrm>
           <a:prstGeom prst="rect">
             <a:avLst/>
@@ -7519,7 +7469,7 @@
                 <a:tab algn="l" pos="0"/>
               </a:tabLst>
             </a:pPr>
-            <a:fld id="{6986B6C9-9FD0-4AA7-BB5D-9FE0973A75F8}" type="slidenum">
+            <a:fld id="{17AE0033-3FD9-4CC4-A458-EEBC0F3A8BCD}" type="slidenum">
               <a:rPr lang="en-AU" sz="1400" b="0" u="none" strike="noStrike">
                 <a:solidFill>
                   <a:srgbClr val="ffffff"/>
@@ -7572,7 +7522,7 @@
         <p:spPr>
           <a:xfrm flipH="1" flipV="1">
             <a:off x="-5760" y="4494240"/>
-            <a:ext cx="10074600" cy="1164600"/>
+            <a:ext cx="10074240" cy="1164240"/>
           </a:xfrm>
           <a:prstGeom prst="flowChartDocument">
             <a:avLst/>
@@ -7964,7 +7914,7 @@
                 <a:srgbClr val="009bdd"/>
               </a:gs>
             </a:gsLst>
-            <a:lin ang="0"/>
+            <a:lin ang="10800000"/>
           </a:gradFill>
           <a:ln w="18000">
             <a:noFill/>
@@ -8016,7 +7966,7 @@
         <p:spPr>
           <a:xfrm>
             <a:off x="0" y="1620000"/>
-            <a:ext cx="8994600" cy="1074600"/>
+            <a:ext cx="8994240" cy="1074240"/>
           </a:xfrm>
           <a:prstGeom prst="rect">
             <a:avLst/>
@@ -8075,7 +8025,7 @@
         <p:spPr>
           <a:xfrm>
             <a:off x="360000" y="2880000"/>
-            <a:ext cx="9354600" cy="1614600"/>
+            <a:ext cx="9354240" cy="1614240"/>
           </a:xfrm>
           <a:prstGeom prst="rect">
             <a:avLst/>
@@ -8349,7 +8299,7 @@
         <p:spPr>
           <a:xfrm>
             <a:off x="360000" y="5220000"/>
-            <a:ext cx="2334600" cy="354600"/>
+            <a:ext cx="2334240" cy="354240"/>
           </a:xfrm>
           <a:prstGeom prst="rect">
             <a:avLst/>
@@ -8427,7 +8377,7 @@
         <p:spPr>
           <a:xfrm>
             <a:off x="3420000" y="5220000"/>
-            <a:ext cx="3234600" cy="354600"/>
+            <a:ext cx="3234240" cy="354240"/>
           </a:xfrm>
           <a:prstGeom prst="rect">
             <a:avLst/>
@@ -8505,7 +8455,7 @@
         <p:spPr>
           <a:xfrm>
             <a:off x="7380000" y="5220000"/>
-            <a:ext cx="2334600" cy="354600"/>
+            <a:ext cx="2334240" cy="354240"/>
           </a:xfrm>
           <a:prstGeom prst="rect">
             <a:avLst/>
@@ -8548,7 +8498,7 @@
                 <a:tab algn="l" pos="0"/>
               </a:tabLst>
             </a:pPr>
-            <a:fld id="{9D24E1D4-CA13-47A9-A480-7523F78576D4}" type="slidenum">
+            <a:fld id="{5AADD3EF-4FDB-4E05-93D5-C219AA6BADD6}" type="slidenum">
               <a:rPr lang="en-AU" sz="1400" b="0" u="none" strike="noStrike">
                 <a:solidFill>
                   <a:srgbClr val="ffffff"/>
@@ -8601,7 +8551,7 @@
         <p:spPr>
           <a:xfrm>
             <a:off x="0" y="0"/>
-            <a:ext cx="10071360" cy="714600"/>
+            <a:ext cx="10071000" cy="714240"/>
           </a:xfrm>
           <a:prstGeom prst="rect">
             <a:avLst/>
@@ -9041,7 +8991,7 @@
         <p:spPr>
           <a:xfrm>
             <a:off x="3240" y="5040000"/>
-            <a:ext cx="10071360" cy="626040"/>
+            <a:ext cx="10071000" cy="625680"/>
           </a:xfrm>
           <a:prstGeom prst="rect">
             <a:avLst/>
@@ -9485,7 +9435,7 @@
         <p:spPr>
           <a:xfrm>
             <a:off x="360000" y="180000"/>
-            <a:ext cx="9354600" cy="472680"/>
+            <a:ext cx="9354240" cy="472320"/>
           </a:xfrm>
           <a:prstGeom prst="rect">
             <a:avLst/>
@@ -9544,7 +9494,7 @@
         <p:spPr>
           <a:xfrm>
             <a:off x="360000" y="1080000"/>
-            <a:ext cx="9354600" cy="3594600"/>
+            <a:ext cx="9354240" cy="3594240"/>
           </a:xfrm>
           <a:prstGeom prst="rect">
             <a:avLst/>
@@ -9818,7 +9768,7 @@
         <p:spPr>
           <a:xfrm>
             <a:off x="360000" y="5220000"/>
-            <a:ext cx="2334600" cy="354600"/>
+            <a:ext cx="2334240" cy="354240"/>
           </a:xfrm>
           <a:prstGeom prst="rect">
             <a:avLst/>
@@ -9896,7 +9846,7 @@
         <p:spPr>
           <a:xfrm>
             <a:off x="3420000" y="5220000"/>
-            <a:ext cx="3234600" cy="354600"/>
+            <a:ext cx="3234240" cy="354240"/>
           </a:xfrm>
           <a:prstGeom prst="rect">
             <a:avLst/>
@@ -9974,7 +9924,7 @@
         <p:spPr>
           <a:xfrm>
             <a:off x="7380000" y="5220000"/>
-            <a:ext cx="2334600" cy="354600"/>
+            <a:ext cx="2334240" cy="354240"/>
           </a:xfrm>
           <a:prstGeom prst="rect">
             <a:avLst/>
@@ -10017,7 +9967,7 @@
                 <a:tab algn="l" pos="0"/>
               </a:tabLst>
             </a:pPr>
-            <a:fld id="{FFB159AE-5A59-4FE9-AFA5-B7E997EBCDA2}" type="slidenum">
+            <a:fld id="{D7B69EAD-4D02-4CF2-9606-DAA9F2DCBA33}" type="slidenum">
               <a:rPr lang="en-AU" sz="1400" b="0" u="none" strike="noStrike">
                 <a:solidFill>
                   <a:srgbClr val="ffffff"/>
@@ -10070,7 +10020,7 @@
         <p:spPr>
           <a:xfrm flipH="1" flipV="1">
             <a:off x="-5040" y="4494960"/>
-            <a:ext cx="10075320" cy="1165320"/>
+            <a:ext cx="10074960" cy="1164960"/>
           </a:xfrm>
           <a:prstGeom prst="flowChartDocument">
             <a:avLst/>
@@ -10462,7 +10412,7 @@
                 <a:srgbClr val="009bdd"/>
               </a:gs>
             </a:gsLst>
-            <a:lin ang="0"/>
+            <a:lin ang="10800000"/>
           </a:gradFill>
           <a:ln w="18000">
             <a:noFill/>
@@ -10514,7 +10464,7 @@
         <p:spPr>
           <a:xfrm>
             <a:off x="0" y="1620000"/>
-            <a:ext cx="8995320" cy="1075320"/>
+            <a:ext cx="8994960" cy="1074960"/>
           </a:xfrm>
           <a:prstGeom prst="rect">
             <a:avLst/>
@@ -10573,7 +10523,7 @@
         <p:spPr>
           <a:xfrm>
             <a:off x="360000" y="2880000"/>
-            <a:ext cx="9355320" cy="1615320"/>
+            <a:ext cx="9354960" cy="1614960"/>
           </a:xfrm>
           <a:prstGeom prst="rect">
             <a:avLst/>
@@ -10847,7 +10797,7 @@
         <p:spPr>
           <a:xfrm>
             <a:off x="360000" y="5220000"/>
-            <a:ext cx="2335320" cy="355320"/>
+            <a:ext cx="2334960" cy="354960"/>
           </a:xfrm>
           <a:prstGeom prst="rect">
             <a:avLst/>
@@ -10925,7 +10875,7 @@
         <p:spPr>
           <a:xfrm>
             <a:off x="3420000" y="5220000"/>
-            <a:ext cx="3235320" cy="355320"/>
+            <a:ext cx="3234960" cy="354960"/>
           </a:xfrm>
           <a:prstGeom prst="rect">
             <a:avLst/>
@@ -11003,7 +10953,7 @@
         <p:spPr>
           <a:xfrm>
             <a:off x="7380000" y="5220000"/>
-            <a:ext cx="2335320" cy="355320"/>
+            <a:ext cx="2334960" cy="354960"/>
           </a:xfrm>
           <a:prstGeom prst="rect">
             <a:avLst/>
@@ -11046,7 +10996,7 @@
                 <a:tab algn="l" pos="0"/>
               </a:tabLst>
             </a:pPr>
-            <a:fld id="{B38132CD-729D-4782-AB3C-9E7AD9ADFD07}" type="slidenum">
+            <a:fld id="{AD47B656-73E5-4768-8D7B-702B0E4FD726}" type="slidenum">
               <a:rPr lang="en-AU" sz="1400" b="0" u="none" strike="noStrike">
                 <a:solidFill>
                   <a:srgbClr val="ffffff"/>
@@ -11099,7 +11049,7 @@
         <p:spPr>
           <a:xfrm>
             <a:off x="0" y="0"/>
-            <a:ext cx="10072080" cy="715320"/>
+            <a:ext cx="10071720" cy="714960"/>
           </a:xfrm>
           <a:prstGeom prst="rect">
             <a:avLst/>
@@ -11539,7 +11489,7 @@
         <p:spPr>
           <a:xfrm>
             <a:off x="3240" y="5040000"/>
-            <a:ext cx="10072080" cy="626760"/>
+            <a:ext cx="10071720" cy="626400"/>
           </a:xfrm>
           <a:prstGeom prst="rect">
             <a:avLst/>
@@ -11983,7 +11933,7 @@
         <p:spPr>
           <a:xfrm>
             <a:off x="360000" y="180000"/>
-            <a:ext cx="9355320" cy="473400"/>
+            <a:ext cx="9354960" cy="473040"/>
           </a:xfrm>
           <a:prstGeom prst="rect">
             <a:avLst/>
@@ -12042,7 +11992,7 @@
         <p:spPr>
           <a:xfrm>
             <a:off x="360000" y="1080000"/>
-            <a:ext cx="9355320" cy="3595320"/>
+            <a:ext cx="9354960" cy="3594960"/>
           </a:xfrm>
           <a:prstGeom prst="rect">
             <a:avLst/>
@@ -12316,7 +12266,7 @@
         <p:spPr>
           <a:xfrm>
             <a:off x="360000" y="5220000"/>
-            <a:ext cx="2335320" cy="355320"/>
+            <a:ext cx="2334960" cy="354960"/>
           </a:xfrm>
           <a:prstGeom prst="rect">
             <a:avLst/>
@@ -12394,7 +12344,7 @@
         <p:spPr>
           <a:xfrm>
             <a:off x="3420000" y="5220000"/>
-            <a:ext cx="3235320" cy="355320"/>
+            <a:ext cx="3234960" cy="354960"/>
           </a:xfrm>
           <a:prstGeom prst="rect">
             <a:avLst/>
@@ -12472,7 +12422,7 @@
         <p:spPr>
           <a:xfrm>
             <a:off x="7380000" y="5220000"/>
-            <a:ext cx="2335320" cy="355320"/>
+            <a:ext cx="2334960" cy="354960"/>
           </a:xfrm>
           <a:prstGeom prst="rect">
             <a:avLst/>
@@ -12515,7 +12465,7 @@
                 <a:tab algn="l" pos="0"/>
               </a:tabLst>
             </a:pPr>
-            <a:fld id="{1F0F2E02-4A4B-4D1A-91A5-3FD8FBBEBFF0}" type="slidenum">
+            <a:fld id="{68433789-1C67-4253-9F97-4C4459794F16}" type="slidenum">
               <a:rPr lang="en-AU" sz="1400" b="0" u="none" strike="noStrike">
                 <a:solidFill>
                   <a:srgbClr val="ffffff"/>
@@ -12626,8 +12576,8 @@
         </p:nvSpPr>
         <p:spPr>
           <a:xfrm>
-            <a:off x="0" y="1614600"/>
-            <a:ext cx="8994600" cy="1085400"/>
+            <a:off x="0" y="1614240"/>
+            <a:ext cx="8994240" cy="1085760"/>
           </a:xfrm>
           <a:prstGeom prst="rect">
             <a:avLst/>
@@ -12715,8 +12665,8 @@
         </p:nvSpPr>
         <p:spPr>
           <a:xfrm>
-            <a:off x="360000" y="162720"/>
-            <a:ext cx="9354600" cy="507240"/>
+            <a:off x="360000" y="162360"/>
+            <a:ext cx="9354240" cy="507600"/>
           </a:xfrm>
           <a:prstGeom prst="rect">
             <a:avLst/>
@@ -12775,7 +12725,7 @@
         <p:spPr>
           <a:xfrm>
             <a:off x="360000" y="1080000"/>
-            <a:ext cx="9354600" cy="3594600"/>
+            <a:ext cx="9354240" cy="3594240"/>
           </a:xfrm>
           <a:prstGeom prst="rect">
             <a:avLst/>
@@ -12967,7 +12917,7 @@
         <p:txBody>
           <a:bodyPr/>
           <a:p>
-            <a:fld id="{55A3C5ED-A489-4816-891A-A832AAAA5022}" type="slidenum">
+            <a:fld id="{80F20A9B-1DFC-411A-B39D-D7F44283CAE4}" type="slidenum">
               <a:t>10</a:t>
             </a:fld>
           </a:p>
@@ -13015,8 +12965,8 @@
         </p:nvSpPr>
         <p:spPr>
           <a:xfrm>
-            <a:off x="360000" y="162720"/>
-            <a:ext cx="9354600" cy="507240"/>
+            <a:off x="360000" y="162360"/>
+            <a:ext cx="9354240" cy="507600"/>
           </a:xfrm>
           <a:prstGeom prst="rect">
             <a:avLst/>
@@ -13075,7 +13025,7 @@
         <p:spPr>
           <a:xfrm>
             <a:off x="360000" y="1080000"/>
-            <a:ext cx="9354600" cy="3594600"/>
+            <a:ext cx="9354240" cy="3594240"/>
           </a:xfrm>
           <a:prstGeom prst="rect">
             <a:avLst/>
@@ -13277,7 +13227,7 @@
         <p:txBody>
           <a:bodyPr/>
           <a:p>
-            <a:fld id="{529C4831-17FA-4BB6-AC21-28476312DA88}" type="slidenum">
+            <a:fld id="{4B232C90-DA55-4A27-A38C-E5CC042A93DF}" type="slidenum">
               <a:t>11</a:t>
             </a:fld>
           </a:p>
@@ -13325,8 +13275,8 @@
         </p:nvSpPr>
         <p:spPr>
           <a:xfrm>
-            <a:off x="0" y="1615320"/>
-            <a:ext cx="8995320" cy="1084680"/>
+            <a:off x="0" y="1614960"/>
+            <a:ext cx="8994960" cy="1085040"/>
           </a:xfrm>
           <a:prstGeom prst="rect">
             <a:avLst/>
@@ -13414,8 +13364,8 @@
         </p:nvSpPr>
         <p:spPr>
           <a:xfrm>
-            <a:off x="360000" y="162720"/>
-            <a:ext cx="9354600" cy="507240"/>
+            <a:off x="360000" y="162360"/>
+            <a:ext cx="9354240" cy="507600"/>
           </a:xfrm>
           <a:prstGeom prst="rect">
             <a:avLst/>
@@ -13480,7 +13430,7 @@
         <p:spPr>
           <a:xfrm>
             <a:off x="360000" y="1080000"/>
-            <a:ext cx="9354600" cy="3594600"/>
+            <a:ext cx="9354240" cy="3594240"/>
           </a:xfrm>
           <a:prstGeom prst="rect">
             <a:avLst/>
@@ -13700,7 +13650,7 @@
         <p:txBody>
           <a:bodyPr/>
           <a:p>
-            <a:fld id="{59851FB4-641D-450F-922F-45FF9FD6EF7A}" type="slidenum">
+            <a:fld id="{BBD6E0F9-2131-448C-98A8-F232618F616A}" type="slidenum">
               <a:t>13</a:t>
             </a:fld>
           </a:p>
@@ -13748,8 +13698,8 @@
         </p:nvSpPr>
         <p:spPr>
           <a:xfrm>
-            <a:off x="360000" y="162720"/>
-            <a:ext cx="9354600" cy="507240"/>
+            <a:off x="360000" y="162360"/>
+            <a:ext cx="9354240" cy="507600"/>
           </a:xfrm>
           <a:prstGeom prst="rect">
             <a:avLst/>
@@ -13814,7 +13764,7 @@
         <p:spPr>
           <a:xfrm>
             <a:off x="360000" y="1080000"/>
-            <a:ext cx="9354600" cy="3594600"/>
+            <a:ext cx="9354240" cy="3594240"/>
           </a:xfrm>
           <a:prstGeom prst="rect">
             <a:avLst/>
@@ -14034,7 +13984,7 @@
         <p:txBody>
           <a:bodyPr/>
           <a:p>
-            <a:fld id="{AA2CA5A1-B1CE-4911-A91D-4A17023E8E01}" type="slidenum">
+            <a:fld id="{8DDFB701-0D07-4BD2-A76F-E3870BD3A336}" type="slidenum">
               <a:t>14</a:t>
             </a:fld>
           </a:p>
@@ -14082,8 +14032,8 @@
         </p:nvSpPr>
         <p:spPr>
           <a:xfrm>
-            <a:off x="360000" y="162720"/>
-            <a:ext cx="9354600" cy="507240"/>
+            <a:off x="360000" y="162360"/>
+            <a:ext cx="9354240" cy="507600"/>
           </a:xfrm>
           <a:prstGeom prst="rect">
             <a:avLst/>
@@ -14148,7 +14098,7 @@
         <p:spPr>
           <a:xfrm>
             <a:off x="360000" y="1080000"/>
-            <a:ext cx="9354600" cy="3594600"/>
+            <a:ext cx="9354240" cy="3594240"/>
           </a:xfrm>
           <a:prstGeom prst="rect">
             <a:avLst/>
@@ -14286,7 +14236,7 @@
         <p:txBody>
           <a:bodyPr/>
           <a:p>
-            <a:fld id="{64B7BCDA-F555-49ED-A0E9-45DEE206486B}" type="slidenum">
+            <a:fld id="{E878B37C-8C20-41C5-8AC1-EC5D6A760BA3}" type="slidenum">
               <a:t>15</a:t>
             </a:fld>
           </a:p>
@@ -14334,8 +14284,8 @@
         </p:nvSpPr>
         <p:spPr>
           <a:xfrm>
-            <a:off x="360000" y="162720"/>
-            <a:ext cx="9354600" cy="507240"/>
+            <a:off x="360000" y="162360"/>
+            <a:ext cx="9354240" cy="507600"/>
           </a:xfrm>
           <a:prstGeom prst="rect">
             <a:avLst/>
@@ -15654,7 +15604,7 @@
         <p:txBody>
           <a:bodyPr/>
           <a:p>
-            <a:fld id="{4602A5D7-B0FD-4CC6-A2F3-8968049111B0}" type="slidenum">
+            <a:fld id="{69365695-044A-49F2-988A-2C1E02648FC5}" type="slidenum">
               <a:t>16</a:t>
             </a:fld>
           </a:p>
@@ -15702,8 +15652,8 @@
         </p:nvSpPr>
         <p:spPr>
           <a:xfrm>
-            <a:off x="0" y="1615320"/>
-            <a:ext cx="8995320" cy="1084680"/>
+            <a:off x="0" y="1614960"/>
+            <a:ext cx="8994960" cy="1085040"/>
           </a:xfrm>
           <a:prstGeom prst="rect">
             <a:avLst/>
@@ -15791,8 +15741,8 @@
         </p:nvSpPr>
         <p:spPr>
           <a:xfrm>
-            <a:off x="360000" y="162720"/>
-            <a:ext cx="9354600" cy="507240"/>
+            <a:off x="360000" y="162360"/>
+            <a:ext cx="9354240" cy="507600"/>
           </a:xfrm>
           <a:prstGeom prst="rect">
             <a:avLst/>
@@ -17333,7 +17283,7 @@
         <p:txBody>
           <a:bodyPr/>
           <a:p>
-            <a:fld id="{AE4FD9B3-00FE-4DF5-ADA6-AB21658FBCD1}" type="slidenum">
+            <a:fld id="{A98EF663-2BD1-4FF6-BB8D-6F8D2DAC5D9B}" type="slidenum">
               <a:t>18</a:t>
             </a:fld>
           </a:p>
@@ -17381,8 +17331,8 @@
         </p:nvSpPr>
         <p:spPr>
           <a:xfrm>
-            <a:off x="0" y="1615320"/>
-            <a:ext cx="8995320" cy="1084680"/>
+            <a:off x="0" y="1614960"/>
+            <a:ext cx="8994960" cy="1085040"/>
           </a:xfrm>
           <a:prstGeom prst="rect">
             <a:avLst/>
@@ -17470,8 +17420,8 @@
         </p:nvSpPr>
         <p:spPr>
           <a:xfrm>
-            <a:off x="360000" y="162720"/>
-            <a:ext cx="9354600" cy="507240"/>
+            <a:off x="360000" y="162360"/>
+            <a:ext cx="9354240" cy="507600"/>
           </a:xfrm>
           <a:prstGeom prst="rect">
             <a:avLst/>
@@ -17530,7 +17480,7 @@
         <p:spPr>
           <a:xfrm>
             <a:off x="360000" y="1080000"/>
-            <a:ext cx="9354600" cy="3594600"/>
+            <a:ext cx="9354240" cy="3594240"/>
           </a:xfrm>
           <a:prstGeom prst="rect">
             <a:avLst/>
@@ -17701,7 +17651,7 @@
         <p:txBody>
           <a:bodyPr/>
           <a:p>
-            <a:fld id="{B968249C-A995-4FC7-80AE-B876843687D6}" type="slidenum">
+            <a:fld id="{409BBDF7-846D-481C-A03D-FCEF726163C1}" type="slidenum">
               <a:t>2</a:t>
             </a:fld>
           </a:p>
@@ -17749,8 +17699,8 @@
         </p:nvSpPr>
         <p:spPr>
           <a:xfrm>
-            <a:off x="360000" y="162720"/>
-            <a:ext cx="9354600" cy="507240"/>
+            <a:off x="360000" y="162360"/>
+            <a:ext cx="9354240" cy="507600"/>
           </a:xfrm>
           <a:prstGeom prst="rect">
             <a:avLst/>
@@ -17810,7 +17760,7 @@
         </p:nvGraphicFramePr>
         <p:xfrm>
           <a:off x="1241280" y="948600"/>
-          <a:ext cx="7558200" cy="3963600"/>
+          <a:ext cx="7558200" cy="4755600"/>
         </p:xfrm>
         <a:graphic>
           <a:graphicData uri="http://schemas.openxmlformats.org/drawingml/2006/table">
@@ -17822,7 +17772,249 @@
                 <a:gridCol w="1889640"/>
                 <a:gridCol w="1889640"/>
               </a:tblGrid>
-              <a:tr h="792360">
+              <a:tr h="374040">
+                <a:tc>
+                  <a:txBody>
+                    <a:bodyPr lIns="36000" rIns="36000" anchor="t">
+                      <a:noAutofit/>
+                    </a:bodyPr>
+                    <a:p>
+                      <a:pPr>
+                        <a:lnSpc>
+                          <a:spcPct val="100000"/>
+                        </a:lnSpc>
+                      </a:pPr>
+                      <a:r>
+                        <a:rPr lang="en-AU" sz="1200" b="0" u="none" strike="noStrike">
+                          <a:solidFill>
+                            <a:srgbClr val="000000"/>
+                          </a:solidFill>
+                          <a:effectLst/>
+                          <a:uFillTx/>
+                          <a:latin typeface="Arial"/>
+                        </a:rPr>
+                        <a:t>Host</a:t>
+                      </a:r>
+                      <a:endParaRPr lang="en-AU" sz="1200" b="0" u="none" strike="noStrike">
+                        <a:solidFill>
+                          <a:srgbClr val="000000"/>
+                        </a:solidFill>
+                        <a:effectLst/>
+                        <a:uFillTx/>
+                        <a:latin typeface="Arial"/>
+                      </a:endParaRPr>
+                    </a:p>
+                  </a:txBody>
+                  <a:tcPr anchor="t" marL="36000" marR="36000" marT="45720" marB="45720">
+                    <a:lnL w="7200">
+                      <a:solidFill>
+                        <a:srgbClr val="000000"/>
+                      </a:solidFill>
+                      <a:prstDash val="solid"/>
+                    </a:lnL>
+                    <a:lnR w="7200">
+                      <a:solidFill>
+                        <a:srgbClr val="000000"/>
+                      </a:solidFill>
+                      <a:prstDash val="solid"/>
+                    </a:lnR>
+                    <a:lnT w="7200">
+                      <a:solidFill>
+                        <a:srgbClr val="000000"/>
+                      </a:solidFill>
+                      <a:prstDash val="solid"/>
+                    </a:lnT>
+                    <a:lnB w="7200">
+                      <a:solidFill>
+                        <a:srgbClr val="000000"/>
+                      </a:solidFill>
+                      <a:prstDash val="solid"/>
+                    </a:lnB>
+                    <a:noFill/>
+                  </a:tcPr>
+                </a:tc>
+                <a:tc>
+                  <a:txBody>
+                    <a:bodyPr lIns="36000" rIns="36000" anchor="t">
+                      <a:noAutofit/>
+                    </a:bodyPr>
+                    <a:p>
+                      <a:pPr>
+                        <a:lnSpc>
+                          <a:spcPct val="100000"/>
+                        </a:lnSpc>
+                      </a:pPr>
+                      <a:r>
+                        <a:rPr lang="en-AU" sz="1200" b="0" u="none" strike="noStrike">
+                          <a:solidFill>
+                            <a:srgbClr val="000000"/>
+                          </a:solidFill>
+                          <a:effectLst/>
+                          <a:uFillTx/>
+                          <a:latin typeface="Arial"/>
+                        </a:rPr>
+                        <a:t>Provider</a:t>
+                      </a:r>
+                      <a:endParaRPr lang="en-AU" sz="1200" b="0" u="none" strike="noStrike">
+                        <a:solidFill>
+                          <a:srgbClr val="000000"/>
+                        </a:solidFill>
+                        <a:effectLst/>
+                        <a:uFillTx/>
+                        <a:latin typeface="Arial"/>
+                      </a:endParaRPr>
+                    </a:p>
+                  </a:txBody>
+                  <a:tcPr anchor="t" marL="36000" marR="36000" marT="45720" marB="45720">
+                    <a:lnL w="7200">
+                      <a:solidFill>
+                        <a:srgbClr val="000000"/>
+                      </a:solidFill>
+                      <a:prstDash val="solid"/>
+                    </a:lnL>
+                    <a:lnR w="7200">
+                      <a:solidFill>
+                        <a:srgbClr val="000000"/>
+                      </a:solidFill>
+                      <a:prstDash val="solid"/>
+                    </a:lnR>
+                    <a:lnT w="7200">
+                      <a:solidFill>
+                        <a:srgbClr val="000000"/>
+                      </a:solidFill>
+                      <a:prstDash val="solid"/>
+                    </a:lnT>
+                    <a:lnB w="7200">
+                      <a:solidFill>
+                        <a:srgbClr val="000000"/>
+                      </a:solidFill>
+                      <a:prstDash val="solid"/>
+                    </a:lnB>
+                    <a:noFill/>
+                  </a:tcPr>
+                </a:tc>
+                <a:tc>
+                  <a:txBody>
+                    <a:bodyPr lIns="36000" rIns="36000" anchor="t">
+                      <a:noAutofit/>
+                    </a:bodyPr>
+                    <a:p>
+                      <a:pPr>
+                        <a:lnSpc>
+                          <a:spcPct val="100000"/>
+                        </a:lnSpc>
+                      </a:pPr>
+                      <a:r>
+                        <a:rPr lang="en-AU" sz="1200" b="0" u="none" strike="noStrike">
+                          <a:solidFill>
+                            <a:srgbClr val="000000"/>
+                          </a:solidFill>
+                          <a:effectLst/>
+                          <a:uFillTx/>
+                          <a:latin typeface="Arial"/>
+                        </a:rPr>
+                        <a:t>Name</a:t>
+                      </a:r>
+                      <a:endParaRPr lang="en-AU" sz="1200" b="0" u="none" strike="noStrike">
+                        <a:solidFill>
+                          <a:srgbClr val="000000"/>
+                        </a:solidFill>
+                        <a:effectLst/>
+                        <a:uFillTx/>
+                        <a:latin typeface="Arial"/>
+                      </a:endParaRPr>
+                    </a:p>
+                  </a:txBody>
+                  <a:tcPr anchor="t" marL="36000" marR="36000" marT="45720" marB="45720">
+                    <a:lnL w="7200">
+                      <a:solidFill>
+                        <a:srgbClr val="000000"/>
+                      </a:solidFill>
+                      <a:prstDash val="solid"/>
+                    </a:lnL>
+                    <a:lnR w="7200">
+                      <a:solidFill>
+                        <a:srgbClr val="000000"/>
+                      </a:solidFill>
+                      <a:prstDash val="solid"/>
+                    </a:lnR>
+                    <a:lnT w="7200">
+                      <a:solidFill>
+                        <a:srgbClr val="000000"/>
+                      </a:solidFill>
+                      <a:prstDash val="solid"/>
+                    </a:lnT>
+                    <a:lnB w="7200">
+                      <a:solidFill>
+                        <a:srgbClr val="000000"/>
+                      </a:solidFill>
+                      <a:prstDash val="solid"/>
+                    </a:lnB>
+                    <a:noFill/>
+                  </a:tcPr>
+                </a:tc>
+                <a:tc>
+                  <a:txBody>
+                    <a:bodyPr lIns="36000" rIns="36000" anchor="t">
+                      <a:noAutofit/>
+                    </a:bodyPr>
+                    <a:p>
+                      <a:pPr>
+                        <a:lnSpc>
+                          <a:spcPct val="100000"/>
+                        </a:lnSpc>
+                      </a:pPr>
+                      <a:r>
+                        <a:rPr lang="en-AU" sz="1200" b="0" u="none" strike="noStrike">
+                          <a:solidFill>
+                            <a:srgbClr val="000000"/>
+                          </a:solidFill>
+                          <a:effectLst/>
+                          <a:uFillTx/>
+                          <a:latin typeface="Arial"/>
+                        </a:rPr>
+                        <a:t>Performance on test data</a:t>
+                      </a:r>
+                      <a:endParaRPr lang="en-AU" sz="1200" b="0" u="none" strike="noStrike">
+                        <a:solidFill>
+                          <a:srgbClr val="000000"/>
+                        </a:solidFill>
+                        <a:effectLst/>
+                        <a:uFillTx/>
+                        <a:latin typeface="Arial"/>
+                      </a:endParaRPr>
+                    </a:p>
+                  </a:txBody>
+                  <a:tcPr anchor="t" marL="36000" marR="36000" marT="45720" marB="45720">
+                    <a:lnL w="7200">
+                      <a:solidFill>
+                        <a:srgbClr val="000000"/>
+                      </a:solidFill>
+                      <a:prstDash val="solid"/>
+                    </a:lnL>
+                    <a:lnR w="7200">
+                      <a:solidFill>
+                        <a:srgbClr val="000000"/>
+                      </a:solidFill>
+                      <a:prstDash val="solid"/>
+                    </a:lnR>
+                    <a:lnT w="7200">
+                      <a:solidFill>
+                        <a:srgbClr val="000000"/>
+                      </a:solidFill>
+                      <a:prstDash val="solid"/>
+                    </a:lnT>
+                    <a:lnB w="7200">
+                      <a:solidFill>
+                        <a:srgbClr val="000000"/>
+                      </a:solidFill>
+                      <a:prstDash val="solid"/>
+                    </a:lnB>
+                    <a:noFill/>
+                  </a:tcPr>
+                </a:tc>
+              </a:tr>
+              <a:tr h="491040">
                 <a:tc>
                   <a:txBody>
                     <a:bodyPr lIns="36000" rIns="36000" anchor="t">
@@ -17842,58 +18034,10 @@
                           <a:effectLst/>
                           <a:uFillTx/>
                           <a:latin typeface="Arial"/>
+                          <a:ea typeface="Microsoft YaHei"/>
                         </a:rPr>
-                        <a:t>Host</a:t>
+                        <a:t>LM Studio l</a:t>
                       </a:r>
-                      <a:endParaRPr lang="en-AU" sz="1800" b="0" u="none" strike="noStrike">
-                        <a:solidFill>
-                          <a:srgbClr val="000000"/>
-                        </a:solidFill>
-                        <a:effectLst/>
-                        <a:uFillTx/>
-                        <a:latin typeface="Arial"/>
-                      </a:endParaRPr>
-                    </a:p>
-                  </a:txBody>
-                  <a:tcPr anchor="t" marL="36000" marR="36000" marT="45720" marB="45720">
-                    <a:lnL w="7200">
-                      <a:solidFill>
-                        <a:srgbClr val="000000"/>
-                      </a:solidFill>
-                      <a:prstDash val="solid"/>
-                    </a:lnL>
-                    <a:lnR w="7200">
-                      <a:solidFill>
-                        <a:srgbClr val="000000"/>
-                      </a:solidFill>
-                      <a:prstDash val="solid"/>
-                    </a:lnR>
-                    <a:lnT w="7200">
-                      <a:solidFill>
-                        <a:srgbClr val="000000"/>
-                      </a:solidFill>
-                      <a:prstDash val="solid"/>
-                    </a:lnT>
-                    <a:lnB w="7200">
-                      <a:solidFill>
-                        <a:srgbClr val="000000"/>
-                      </a:solidFill>
-                      <a:prstDash val="solid"/>
-                    </a:lnB>
-                    <a:noFill/>
-                  </a:tcPr>
-                </a:tc>
-                <a:tc>
-                  <a:txBody>
-                    <a:bodyPr lIns="36000" rIns="36000" anchor="t">
-                      <a:noAutofit/>
-                    </a:bodyPr>
-                    <a:p>
-                      <a:pPr>
-                        <a:lnSpc>
-                          <a:spcPct val="100000"/>
-                        </a:lnSpc>
-                      </a:pPr>
                       <a:r>
                         <a:rPr lang="en-AU" sz="1800" b="0" u="none" strike="noStrike">
                           <a:solidFill>
@@ -17903,189 +18047,7 @@
                           <a:uFillTx/>
                           <a:latin typeface="Arial"/>
                         </a:rPr>
-                        <a:t>Provider</a:t>
-                      </a:r>
-                      <a:endParaRPr lang="en-AU" sz="1800" b="0" u="none" strike="noStrike">
-                        <a:solidFill>
-                          <a:srgbClr val="000000"/>
-                        </a:solidFill>
-                        <a:effectLst/>
-                        <a:uFillTx/>
-                        <a:latin typeface="Arial"/>
-                      </a:endParaRPr>
-                    </a:p>
-                  </a:txBody>
-                  <a:tcPr anchor="t" marL="36000" marR="36000" marT="45720" marB="45720">
-                    <a:lnL w="7200">
-                      <a:solidFill>
-                        <a:srgbClr val="000000"/>
-                      </a:solidFill>
-                      <a:prstDash val="solid"/>
-                    </a:lnL>
-                    <a:lnR w="7200">
-                      <a:solidFill>
-                        <a:srgbClr val="000000"/>
-                      </a:solidFill>
-                      <a:prstDash val="solid"/>
-                    </a:lnR>
-                    <a:lnT w="7200">
-                      <a:solidFill>
-                        <a:srgbClr val="000000"/>
-                      </a:solidFill>
-                      <a:prstDash val="solid"/>
-                    </a:lnT>
-                    <a:lnB w="7200">
-                      <a:solidFill>
-                        <a:srgbClr val="000000"/>
-                      </a:solidFill>
-                      <a:prstDash val="solid"/>
-                    </a:lnB>
-                    <a:noFill/>
-                  </a:tcPr>
-                </a:tc>
-                <a:tc>
-                  <a:txBody>
-                    <a:bodyPr lIns="36000" rIns="36000" anchor="t">
-                      <a:noAutofit/>
-                    </a:bodyPr>
-                    <a:p>
-                      <a:pPr>
-                        <a:lnSpc>
-                          <a:spcPct val="100000"/>
-                        </a:lnSpc>
-                      </a:pPr>
-                      <a:r>
-                        <a:rPr lang="en-AU" sz="1800" b="0" u="none" strike="noStrike">
-                          <a:solidFill>
-                            <a:srgbClr val="000000"/>
-                          </a:solidFill>
-                          <a:effectLst/>
-                          <a:uFillTx/>
-                          <a:latin typeface="Arial"/>
-                        </a:rPr>
-                        <a:t>Name</a:t>
-                      </a:r>
-                      <a:endParaRPr lang="en-AU" sz="1800" b="0" u="none" strike="noStrike">
-                        <a:solidFill>
-                          <a:srgbClr val="000000"/>
-                        </a:solidFill>
-                        <a:effectLst/>
-                        <a:uFillTx/>
-                        <a:latin typeface="Arial"/>
-                      </a:endParaRPr>
-                    </a:p>
-                  </a:txBody>
-                  <a:tcPr anchor="t" marL="36000" marR="36000" marT="45720" marB="45720">
-                    <a:lnL w="7200">
-                      <a:solidFill>
-                        <a:srgbClr val="000000"/>
-                      </a:solidFill>
-                      <a:prstDash val="solid"/>
-                    </a:lnL>
-                    <a:lnR w="7200">
-                      <a:solidFill>
-                        <a:srgbClr val="000000"/>
-                      </a:solidFill>
-                      <a:prstDash val="solid"/>
-                    </a:lnR>
-                    <a:lnT w="7200">
-                      <a:solidFill>
-                        <a:srgbClr val="000000"/>
-                      </a:solidFill>
-                      <a:prstDash val="solid"/>
-                    </a:lnT>
-                    <a:lnB w="7200">
-                      <a:solidFill>
-                        <a:srgbClr val="000000"/>
-                      </a:solidFill>
-                      <a:prstDash val="solid"/>
-                    </a:lnB>
-                    <a:noFill/>
-                  </a:tcPr>
-                </a:tc>
-                <a:tc>
-                  <a:txBody>
-                    <a:bodyPr lIns="36000" rIns="36000" anchor="t">
-                      <a:noAutofit/>
-                    </a:bodyPr>
-                    <a:p>
-                      <a:pPr>
-                        <a:lnSpc>
-                          <a:spcPct val="100000"/>
-                        </a:lnSpc>
-                      </a:pPr>
-                      <a:r>
-                        <a:rPr lang="en-AU" sz="1800" b="0" u="none" strike="noStrike">
-                          <a:solidFill>
-                            <a:srgbClr val="000000"/>
-                          </a:solidFill>
-                          <a:effectLst/>
-                          <a:uFillTx/>
-                          <a:latin typeface="Arial"/>
-                        </a:rPr>
-                        <a:t>Performance on test data</a:t>
-                      </a:r>
-                      <a:endParaRPr lang="en-AU" sz="1800" b="0" u="none" strike="noStrike">
-                        <a:solidFill>
-                          <a:srgbClr val="000000"/>
-                        </a:solidFill>
-                        <a:effectLst/>
-                        <a:uFillTx/>
-                        <a:latin typeface="Arial"/>
-                      </a:endParaRPr>
-                    </a:p>
-                  </a:txBody>
-                  <a:tcPr anchor="t" marL="36000" marR="36000" marT="45720" marB="45720">
-                    <a:lnL w="7200">
-                      <a:solidFill>
-                        <a:srgbClr val="000000"/>
-                      </a:solidFill>
-                      <a:prstDash val="solid"/>
-                    </a:lnL>
-                    <a:lnR w="7200">
-                      <a:solidFill>
-                        <a:srgbClr val="000000"/>
-                      </a:solidFill>
-                      <a:prstDash val="solid"/>
-                    </a:lnR>
-                    <a:lnT w="7200">
-                      <a:solidFill>
-                        <a:srgbClr val="000000"/>
-                      </a:solidFill>
-                      <a:prstDash val="solid"/>
-                    </a:lnT>
-                    <a:lnB w="7200">
-                      <a:solidFill>
-                        <a:srgbClr val="000000"/>
-                      </a:solidFill>
-                      <a:prstDash val="solid"/>
-                    </a:lnB>
-                    <a:noFill/>
-                  </a:tcPr>
-                </a:tc>
-              </a:tr>
-              <a:tr h="792360">
-                <a:tc>
-                  <a:txBody>
-                    <a:bodyPr lIns="36000" rIns="36000" anchor="t">
-                      <a:noAutofit/>
-                    </a:bodyPr>
-                    <a:p>
-                      <a:pPr>
-                        <a:lnSpc>
-                          <a:spcPct val="100000"/>
-                        </a:lnSpc>
-                      </a:pPr>
-                      <a:r>
-                        <a:rPr lang="en-AU" sz="1800" b="0" u="none" strike="noStrike">
-                          <a:solidFill>
-                            <a:srgbClr val="000000"/>
-                          </a:solidFill>
-                          <a:effectLst/>
-                          <a:uFillTx/>
-                          <a:latin typeface="Arial"/>
-                        </a:rPr>
-                        <a:t>Local</a:t>
+                        <a:t>ocal </a:t>
                       </a:r>
                       <a:endParaRPr lang="en-AU" sz="1800" b="0" u="none" strike="noStrike">
                         <a:solidFill>
@@ -18306,7 +18268,7 @@
                   </a:tcPr>
                 </a:tc>
               </a:tr>
-              <a:tr h="792360">
+              <a:tr h="484920">
                 <a:tc>
                   <a:txBody>
                     <a:bodyPr lIns="36000" rIns="36000" anchor="t">
@@ -18326,8 +18288,20 @@
                           <a:effectLst/>
                           <a:uFillTx/>
                           <a:latin typeface="Arial"/>
+                          <a:ea typeface="Microsoft YaHei"/>
                         </a:rPr>
-                        <a:t>Local</a:t>
+                        <a:t>LM Studio l</a:t>
+                      </a:r>
+                      <a:r>
+                        <a:rPr lang="en-AU" sz="1800" b="0" u="none" strike="noStrike">
+                          <a:solidFill>
+                            <a:srgbClr val="000000"/>
+                          </a:solidFill>
+                          <a:effectLst/>
+                          <a:uFillTx/>
+                          <a:latin typeface="Arial"/>
+                        </a:rPr>
+                        <a:t>ocal </a:t>
                       </a:r>
                       <a:endParaRPr lang="en-AU" sz="1800" b="0" u="none" strike="noStrike">
                         <a:solidFill>
@@ -18548,7 +18522,7 @@
                   </a:tcPr>
                 </a:tc>
               </a:tr>
-              <a:tr h="792360">
+              <a:tr h="478440">
                 <a:tc>
                   <a:txBody>
                     <a:bodyPr lIns="36000" rIns="36000" anchor="t">
@@ -18569,7 +18543,7 @@
                           <a:uFillTx/>
                           <a:latin typeface="Arial"/>
                         </a:rPr>
-                        <a:t>Local</a:t>
+                        <a:t>LM Studio local</a:t>
                       </a:r>
                       <a:endParaRPr lang="en-AU" sz="1800" b="0" u="none" strike="noStrike">
                         <a:solidFill>
@@ -18790,7 +18764,79 @@
                   </a:tcPr>
                 </a:tc>
               </a:tr>
-              <a:tr h="794160">
+              <a:tr h="547920">
+                <a:tc>
+                  <a:txBody>
+                    <a:bodyPr lIns="36000" rIns="36000" anchor="t">
+                      <a:noAutofit/>
+                    </a:bodyPr>
+                    <a:p>
+                      <a:pPr>
+                        <a:lnSpc>
+                          <a:spcPct val="100000"/>
+                        </a:lnSpc>
+                      </a:pPr>
+                      <a:r>
+                        <a:rPr lang="en-AU" sz="1800" b="0" u="none" strike="noStrike">
+                          <a:solidFill>
+                            <a:srgbClr val="000000"/>
+                          </a:solidFill>
+                          <a:effectLst/>
+                          <a:uFillTx/>
+                          <a:latin typeface="Arial"/>
+                          <a:ea typeface="Microsoft YaHei"/>
+                        </a:rPr>
+                        <a:t>Ollama c</a:t>
+                      </a:r>
+                      <a:r>
+                        <a:rPr lang="en-AU" sz="1800" b="0" u="none" strike="noStrike">
+                          <a:solidFill>
+                            <a:srgbClr val="000000"/>
+                          </a:solidFill>
+                          <a:effectLst/>
+                          <a:uFillTx/>
+                          <a:latin typeface="Arial"/>
+                        </a:rPr>
+                        <a:t>loud </a:t>
+                      </a:r>
+                      <a:endParaRPr lang="en-AU" sz="1800" b="0" u="none" strike="noStrike">
+                        <a:solidFill>
+                          <a:srgbClr val="000000"/>
+                        </a:solidFill>
+                        <a:effectLst/>
+                        <a:uFillTx/>
+                        <a:latin typeface="Arial"/>
+                      </a:endParaRPr>
+                    </a:p>
+                  </a:txBody>
+                  <a:tcPr anchor="t" marL="36000" marR="36000" marT="45720" marB="45720">
+                    <a:lnL w="7200">
+                      <a:solidFill>
+                        <a:srgbClr val="000000"/>
+                      </a:solidFill>
+                      <a:prstDash val="solid"/>
+                    </a:lnL>
+                    <a:lnR w="7200">
+                      <a:solidFill>
+                        <a:srgbClr val="000000"/>
+                      </a:solidFill>
+                      <a:prstDash val="solid"/>
+                    </a:lnR>
+                    <a:lnT w="7200">
+                      <a:solidFill>
+                        <a:srgbClr val="000000"/>
+                      </a:solidFill>
+                      <a:prstDash val="solid"/>
+                    </a:lnT>
+                    <a:lnB w="7200">
+                      <a:solidFill>
+                        <a:srgbClr val="000000"/>
+                      </a:solidFill>
+                      <a:prstDash val="solid"/>
+                    </a:lnB>
+                    <a:noFill/>
+                  </a:tcPr>
+                </a:tc>
                 <a:tc>
                   <a:txBody>
                     <a:bodyPr lIns="36000" rIns="36000" anchor="t">
@@ -18811,7 +18857,201 @@
                           <a:uFillTx/>
                           <a:latin typeface="Arial"/>
                         </a:rPr>
-                        <a:t>Cloud</a:t>
+                        <a:t>OpenAI</a:t>
+                      </a:r>
+                      <a:endParaRPr lang="en-AU" sz="1800" b="0" u="none" strike="noStrike">
+                        <a:solidFill>
+                          <a:srgbClr val="000000"/>
+                        </a:solidFill>
+                        <a:effectLst/>
+                        <a:uFillTx/>
+                        <a:latin typeface="Times New Roman"/>
+                      </a:endParaRPr>
+                    </a:p>
+                  </a:txBody>
+                  <a:tcPr anchor="t" marL="36000" marR="36000" marT="45720" marB="45720">
+                    <a:lnL w="7200">
+                      <a:solidFill>
+                        <a:srgbClr val="000000"/>
+                      </a:solidFill>
+                      <a:prstDash val="solid"/>
+                    </a:lnL>
+                    <a:lnR w="7200">
+                      <a:solidFill>
+                        <a:srgbClr val="000000"/>
+                      </a:solidFill>
+                      <a:prstDash val="solid"/>
+                    </a:lnR>
+                    <a:lnT w="7200">
+                      <a:solidFill>
+                        <a:srgbClr val="000000"/>
+                      </a:solidFill>
+                      <a:prstDash val="solid"/>
+                    </a:lnT>
+                    <a:lnB w="7200">
+                      <a:solidFill>
+                        <a:srgbClr val="000000"/>
+                      </a:solidFill>
+                      <a:prstDash val="solid"/>
+                    </a:lnB>
+                    <a:noFill/>
+                  </a:tcPr>
+                </a:tc>
+                <a:tc>
+                  <a:txBody>
+                    <a:bodyPr lIns="36000" rIns="36000" anchor="t">
+                      <a:noAutofit/>
+                    </a:bodyPr>
+                    <a:p>
+                      <a:pPr>
+                        <a:lnSpc>
+                          <a:spcPct val="100000"/>
+                        </a:lnSpc>
+                      </a:pPr>
+                      <a:r>
+                        <a:rPr lang="en-AU" sz="1800" b="0" u="none" strike="noStrike">
+                          <a:solidFill>
+                            <a:srgbClr val="000000"/>
+                          </a:solidFill>
+                          <a:effectLst/>
+                          <a:uFillTx/>
+                          <a:latin typeface="Arial"/>
+                        </a:rPr>
+                        <a:t>gpt-oss-120B</a:t>
+                      </a:r>
+                      <a:endParaRPr lang="en-AU" sz="1800" b="0" u="none" strike="noStrike">
+                        <a:solidFill>
+                          <a:srgbClr val="000000"/>
+                        </a:solidFill>
+                        <a:effectLst/>
+                        <a:uFillTx/>
+                        <a:latin typeface="Times New Roman"/>
+                      </a:endParaRPr>
+                    </a:p>
+                  </a:txBody>
+                  <a:tcPr anchor="t" marL="36000" marR="36000" marT="45720" marB="45720">
+                    <a:lnL w="7200">
+                      <a:solidFill>
+                        <a:srgbClr val="000000"/>
+                      </a:solidFill>
+                      <a:prstDash val="solid"/>
+                    </a:lnL>
+                    <a:lnR w="7200">
+                      <a:solidFill>
+                        <a:srgbClr val="000000"/>
+                      </a:solidFill>
+                      <a:prstDash val="solid"/>
+                    </a:lnR>
+                    <a:lnT w="7200">
+                      <a:solidFill>
+                        <a:srgbClr val="000000"/>
+                      </a:solidFill>
+                      <a:prstDash val="solid"/>
+                    </a:lnT>
+                    <a:lnB w="7200">
+                      <a:solidFill>
+                        <a:srgbClr val="000000"/>
+                      </a:solidFill>
+                      <a:prstDash val="solid"/>
+                    </a:lnB>
+                    <a:noFill/>
+                  </a:tcPr>
+                </a:tc>
+                <a:tc>
+                  <a:txBody>
+                    <a:bodyPr lIns="36000" rIns="36000" anchor="t">
+                      <a:noAutofit/>
+                    </a:bodyPr>
+                    <a:p>
+                      <a:pPr>
+                        <a:lnSpc>
+                          <a:spcPct val="100000"/>
+                        </a:lnSpc>
+                      </a:pPr>
+                      <a:r>
+                        <a:rPr lang="en-AU" sz="1800" b="0" u="none" strike="noStrike">
+                          <a:solidFill>
+                            <a:srgbClr val="000000"/>
+                          </a:solidFill>
+                          <a:effectLst/>
+                          <a:uFillTx/>
+                          <a:latin typeface="Arial"/>
+                        </a:rPr>
+                        <a:t>7.7 sec</a:t>
+                      </a:r>
+                      <a:endParaRPr lang="en-AU" sz="1800" b="0" u="none" strike="noStrike">
+                        <a:solidFill>
+                          <a:srgbClr val="000000"/>
+                        </a:solidFill>
+                        <a:effectLst/>
+                        <a:uFillTx/>
+                        <a:latin typeface="Times New Roman"/>
+                      </a:endParaRPr>
+                    </a:p>
+                  </a:txBody>
+                  <a:tcPr anchor="t" marL="36000" marR="36000" marT="45720" marB="45720">
+                    <a:lnL w="7200">
+                      <a:solidFill>
+                        <a:srgbClr val="000000"/>
+                      </a:solidFill>
+                      <a:prstDash val="solid"/>
+                    </a:lnL>
+                    <a:lnR w="7200">
+                      <a:solidFill>
+                        <a:srgbClr val="000000"/>
+                      </a:solidFill>
+                      <a:prstDash val="solid"/>
+                    </a:lnR>
+                    <a:lnT w="7200">
+                      <a:solidFill>
+                        <a:srgbClr val="000000"/>
+                      </a:solidFill>
+                      <a:prstDash val="solid"/>
+                    </a:lnT>
+                    <a:lnB w="7200">
+                      <a:solidFill>
+                        <a:srgbClr val="000000"/>
+                      </a:solidFill>
+                      <a:prstDash val="solid"/>
+                    </a:lnB>
+                    <a:noFill/>
+                  </a:tcPr>
+                </a:tc>
+              </a:tr>
+              <a:tr h="585720">
+                <a:tc>
+                  <a:txBody>
+                    <a:bodyPr lIns="36000" rIns="36000" anchor="t">
+                      <a:noAutofit/>
+                    </a:bodyPr>
+                    <a:p>
+                      <a:pPr>
+                        <a:lnSpc>
+                          <a:spcPct val="100000"/>
+                        </a:lnSpc>
+                      </a:pPr>
+                      <a:r>
+                        <a:rPr lang="en-AU" sz="1800" b="0" u="none" strike="noStrike">
+                          <a:solidFill>
+                            <a:srgbClr val="000000"/>
+                          </a:solidFill>
+                          <a:effectLst/>
+                          <a:uFillTx/>
+                          <a:latin typeface="Arial"/>
+                          <a:ea typeface="Microsoft YaHei"/>
+                        </a:rPr>
+                        <a:t>Ollama c</a:t>
+                      </a:r>
+                      <a:r>
+                        <a:rPr lang="en-AU" sz="1800" b="0" u="none" strike="noStrike">
+                          <a:solidFill>
+                            <a:srgbClr val="000000"/>
+                          </a:solidFill>
+                          <a:effectLst/>
+                          <a:uFillTx/>
+                          <a:latin typeface="Arial"/>
+                        </a:rPr>
+                        <a:t>loud </a:t>
                       </a:r>
                       <a:endParaRPr lang="en-AU" sz="1800" b="0" u="none" strike="noStrike">
                         <a:solidFill>
@@ -18931,6 +19171,255 @@
                           <a:uFillTx/>
                           <a:latin typeface="Arial"/>
                         </a:rPr>
+                        <a:t>Gemini 3 Flash</a:t>
+                      </a:r>
+                      <a:endParaRPr lang="en-AU" sz="1800" b="0" u="none" strike="noStrike">
+                        <a:solidFill>
+                          <a:srgbClr val="000000"/>
+                        </a:solidFill>
+                        <a:effectLst/>
+                        <a:uFillTx/>
+                        <a:latin typeface="Arial"/>
+                      </a:endParaRPr>
+                    </a:p>
+                  </a:txBody>
+                  <a:tcPr anchor="t" marL="36000" marR="36000" marT="45720" marB="45720">
+                    <a:lnL w="7200">
+                      <a:solidFill>
+                        <a:srgbClr val="000000"/>
+                      </a:solidFill>
+                      <a:prstDash val="solid"/>
+                    </a:lnL>
+                    <a:lnR w="7200">
+                      <a:solidFill>
+                        <a:srgbClr val="000000"/>
+                      </a:solidFill>
+                      <a:prstDash val="solid"/>
+                    </a:lnR>
+                    <a:lnT w="7200">
+                      <a:solidFill>
+                        <a:srgbClr val="000000"/>
+                      </a:solidFill>
+                      <a:prstDash val="solid"/>
+                    </a:lnT>
+                    <a:lnB w="7200">
+                      <a:solidFill>
+                        <a:srgbClr val="000000"/>
+                      </a:solidFill>
+                      <a:prstDash val="solid"/>
+                    </a:lnB>
+                    <a:noFill/>
+                  </a:tcPr>
+                </a:tc>
+                <a:tc>
+                  <a:txBody>
+                    <a:bodyPr lIns="36000" rIns="36000" anchor="t">
+                      <a:noAutofit/>
+                    </a:bodyPr>
+                    <a:p>
+                      <a:r>
+                        <a:rPr lang="en-AU" sz="1800" b="0" u="none" strike="noStrike">
+                          <a:solidFill>
+                            <a:srgbClr val="000000"/>
+                          </a:solidFill>
+                          <a:effectLst/>
+                          <a:uFillTx/>
+                          <a:latin typeface="Arial"/>
+                        </a:rPr>
+                        <a:t>22.9 sec</a:t>
+                      </a:r>
+                      <a:endParaRPr lang="en-AU" sz="1800" b="0" u="none" strike="noStrike">
+                        <a:solidFill>
+                          <a:srgbClr val="000000"/>
+                        </a:solidFill>
+                        <a:effectLst/>
+                        <a:uFillTx/>
+                        <a:latin typeface="Arial"/>
+                      </a:endParaRPr>
+                    </a:p>
+                  </a:txBody>
+                  <a:tcPr anchor="t" marL="36000" marR="36000" marT="45720" marB="45720">
+                    <a:lnL w="7200">
+                      <a:solidFill>
+                        <a:srgbClr val="000000"/>
+                      </a:solidFill>
+                      <a:prstDash val="solid"/>
+                    </a:lnL>
+                    <a:lnR w="7200">
+                      <a:solidFill>
+                        <a:srgbClr val="000000"/>
+                      </a:solidFill>
+                      <a:prstDash val="solid"/>
+                    </a:lnR>
+                    <a:lnT w="7200">
+                      <a:solidFill>
+                        <a:srgbClr val="000000"/>
+                      </a:solidFill>
+                      <a:prstDash val="solid"/>
+                    </a:lnT>
+                    <a:lnB w="7200">
+                      <a:solidFill>
+                        <a:srgbClr val="000000"/>
+                      </a:solidFill>
+                      <a:prstDash val="solid"/>
+                    </a:lnB>
+                    <a:noFill/>
+                  </a:tcPr>
+                </a:tc>
+              </a:tr>
+              <a:tr h="610920">
+                <a:tc>
+                  <a:txBody>
+                    <a:bodyPr lIns="36000" rIns="36000" anchor="t">
+                      <a:noAutofit/>
+                    </a:bodyPr>
+                    <a:p>
+                      <a:pPr>
+                        <a:lnSpc>
+                          <a:spcPct val="100000"/>
+                        </a:lnSpc>
+                      </a:pPr>
+                      <a:r>
+                        <a:rPr lang="en-AU" sz="1800" b="0" u="none" strike="noStrike">
+                          <a:solidFill>
+                            <a:srgbClr val="000000"/>
+                          </a:solidFill>
+                          <a:effectLst/>
+                          <a:uFillTx/>
+                          <a:latin typeface="Arial"/>
+                          <a:ea typeface="Microsoft YaHei"/>
+                        </a:rPr>
+                        <a:t>Google c</a:t>
+                      </a:r>
+                      <a:r>
+                        <a:rPr lang="en-AU" sz="1800" b="0" u="none" strike="noStrike">
+                          <a:solidFill>
+                            <a:srgbClr val="000000"/>
+                          </a:solidFill>
+                          <a:effectLst/>
+                          <a:uFillTx/>
+                          <a:latin typeface="Arial"/>
+                        </a:rPr>
+                        <a:t>loud </a:t>
+                      </a:r>
+                      <a:endParaRPr lang="en-AU" sz="1800" b="0" u="none" strike="noStrike">
+                        <a:solidFill>
+                          <a:srgbClr val="000000"/>
+                        </a:solidFill>
+                        <a:effectLst/>
+                        <a:uFillTx/>
+                        <a:latin typeface="Arial"/>
+                      </a:endParaRPr>
+                    </a:p>
+                  </a:txBody>
+                  <a:tcPr anchor="t" marL="36000" marR="36000" marT="45720" marB="45720">
+                    <a:lnL w="7200">
+                      <a:solidFill>
+                        <a:srgbClr val="000000"/>
+                      </a:solidFill>
+                      <a:prstDash val="solid"/>
+                    </a:lnL>
+                    <a:lnR w="7200">
+                      <a:solidFill>
+                        <a:srgbClr val="000000"/>
+                      </a:solidFill>
+                      <a:prstDash val="solid"/>
+                    </a:lnR>
+                    <a:lnT w="7200">
+                      <a:solidFill>
+                        <a:srgbClr val="000000"/>
+                      </a:solidFill>
+                      <a:prstDash val="solid"/>
+                    </a:lnT>
+                    <a:lnB w="7200">
+                      <a:solidFill>
+                        <a:srgbClr val="000000"/>
+                      </a:solidFill>
+                      <a:prstDash val="solid"/>
+                    </a:lnB>
+                    <a:noFill/>
+                  </a:tcPr>
+                </a:tc>
+                <a:tc>
+                  <a:txBody>
+                    <a:bodyPr lIns="36000" rIns="36000" anchor="t">
+                      <a:noAutofit/>
+                    </a:bodyPr>
+                    <a:p>
+                      <a:pPr>
+                        <a:lnSpc>
+                          <a:spcPct val="100000"/>
+                        </a:lnSpc>
+                      </a:pPr>
+                      <a:r>
+                        <a:rPr lang="en-AU" sz="1800" b="0" u="none" strike="noStrike">
+                          <a:solidFill>
+                            <a:srgbClr val="000000"/>
+                          </a:solidFill>
+                          <a:effectLst/>
+                          <a:uFillTx/>
+                          <a:latin typeface="Arial"/>
+                        </a:rPr>
+                        <a:t>Google</a:t>
+                      </a:r>
+                      <a:endParaRPr lang="en-AU" sz="1800" b="0" u="none" strike="noStrike">
+                        <a:solidFill>
+                          <a:srgbClr val="000000"/>
+                        </a:solidFill>
+                        <a:effectLst/>
+                        <a:uFillTx/>
+                        <a:latin typeface="Arial"/>
+                      </a:endParaRPr>
+                    </a:p>
+                  </a:txBody>
+                  <a:tcPr anchor="t" marL="36000" marR="36000" marT="45720" marB="45720">
+                    <a:lnL w="7200">
+                      <a:solidFill>
+                        <a:srgbClr val="000000"/>
+                      </a:solidFill>
+                      <a:prstDash val="solid"/>
+                    </a:lnL>
+                    <a:lnR w="7200">
+                      <a:solidFill>
+                        <a:srgbClr val="000000"/>
+                      </a:solidFill>
+                      <a:prstDash val="solid"/>
+                    </a:lnR>
+                    <a:lnT w="7200">
+                      <a:solidFill>
+                        <a:srgbClr val="000000"/>
+                      </a:solidFill>
+                      <a:prstDash val="solid"/>
+                    </a:lnT>
+                    <a:lnB w="7200">
+                      <a:solidFill>
+                        <a:srgbClr val="000000"/>
+                      </a:solidFill>
+                      <a:prstDash val="solid"/>
+                    </a:lnB>
+                    <a:noFill/>
+                  </a:tcPr>
+                </a:tc>
+                <a:tc>
+                  <a:txBody>
+                    <a:bodyPr lIns="36000" rIns="36000" anchor="t">
+                      <a:noAutofit/>
+                    </a:bodyPr>
+                    <a:p>
+                      <a:pPr>
+                        <a:lnSpc>
+                          <a:spcPct val="100000"/>
+                        </a:lnSpc>
+                      </a:pPr>
+                      <a:r>
+                        <a:rPr lang="en-AU" sz="1800" b="0" u="none" strike="noStrike">
+                          <a:solidFill>
+                            <a:srgbClr val="000000"/>
+                          </a:solidFill>
+                          <a:effectLst/>
+                          <a:uFillTx/>
+                          <a:latin typeface="Arial"/>
+                        </a:rPr>
                         <a:t>Gemini 3.1</a:t>
                       </a:r>
                       <a:endParaRPr lang="en-AU" sz="1800" b="0" u="none" strike="noStrike">
@@ -19050,7 +19539,7 @@
         <p:txBody>
           <a:bodyPr/>
           <a:p>
-            <a:fld id="{EE7E1A66-D7B9-4129-98D9-A289B3D9F325}" type="slidenum">
+            <a:fld id="{7B498ECB-7721-4FB1-8092-43359122039A}" type="slidenum">
               <a:t>20</a:t>
             </a:fld>
           </a:p>
@@ -19098,8 +19587,8 @@
         </p:nvSpPr>
         <p:spPr>
           <a:xfrm>
-            <a:off x="0" y="1615320"/>
-            <a:ext cx="8995320" cy="1084680"/>
+            <a:off x="0" y="1614960"/>
+            <a:ext cx="8994960" cy="1085040"/>
           </a:xfrm>
           <a:prstGeom prst="rect">
             <a:avLst/>
@@ -19187,8 +19676,8 @@
         </p:nvSpPr>
         <p:spPr>
           <a:xfrm>
-            <a:off x="360000" y="163440"/>
-            <a:ext cx="9355320" cy="506520"/>
+            <a:off x="360000" y="163080"/>
+            <a:ext cx="9354960" cy="506880"/>
           </a:xfrm>
           <a:prstGeom prst="rect">
             <a:avLst/>
@@ -19247,7 +19736,7 @@
         <p:spPr>
           <a:xfrm>
             <a:off x="628200" y="973800"/>
-            <a:ext cx="8844840" cy="3729240"/>
+            <a:ext cx="8844480" cy="3728880"/>
           </a:xfrm>
           <a:prstGeom prst="rect">
             <a:avLst/>
@@ -19272,7 +19761,7 @@
         <p:txBody>
           <a:bodyPr/>
           <a:p>
-            <a:fld id="{00FB5E5B-4A33-413D-9CFF-CE71F6D00688}" type="slidenum">
+            <a:fld id="{307B7280-9328-4F4C-98BA-207E63BCA9CC}" type="slidenum">
               <a:t>22</a:t>
             </a:fld>
           </a:p>
@@ -19320,8 +19809,8 @@
         </p:nvSpPr>
         <p:spPr>
           <a:xfrm>
-            <a:off x="360000" y="163440"/>
-            <a:ext cx="9355320" cy="506520"/>
+            <a:off x="360000" y="163080"/>
+            <a:ext cx="9354960" cy="506880"/>
           </a:xfrm>
           <a:prstGeom prst="rect">
             <a:avLst/>
@@ -19380,7 +19869,7 @@
         <p:spPr>
           <a:xfrm>
             <a:off x="39600" y="871920"/>
-            <a:ext cx="10077120" cy="3952440"/>
+            <a:ext cx="10076760" cy="3952080"/>
           </a:xfrm>
           <a:prstGeom prst="rect">
             <a:avLst/>
@@ -19405,7 +19894,7 @@
         <p:txBody>
           <a:bodyPr/>
           <a:p>
-            <a:fld id="{6F5EC07C-615F-460F-8598-DE4D54B33E13}" type="slidenum">
+            <a:fld id="{B36ECF23-598F-43B0-A07B-6C7A37EF77DD}" type="slidenum">
               <a:t>23</a:t>
             </a:fld>
           </a:p>
@@ -19453,8 +19942,8 @@
         </p:nvSpPr>
         <p:spPr>
           <a:xfrm>
-            <a:off x="360000" y="163440"/>
-            <a:ext cx="9355320" cy="506880"/>
+            <a:off x="360000" y="163080"/>
+            <a:ext cx="9354960" cy="507240"/>
           </a:xfrm>
           <a:prstGeom prst="rect">
             <a:avLst/>
@@ -19513,7 +20002,7 @@
         <p:spPr>
           <a:xfrm>
             <a:off x="1186920" y="1283400"/>
-            <a:ext cx="7693200" cy="3092040"/>
+            <a:ext cx="7692840" cy="3091680"/>
           </a:xfrm>
           <a:prstGeom prst="rect">
             <a:avLst/>
@@ -19538,7 +20027,7 @@
         <p:txBody>
           <a:bodyPr/>
           <a:p>
-            <a:fld id="{94F617AA-ED0D-4E40-9E1D-01BB5F695A0E}" type="slidenum">
+            <a:fld id="{D55FE51A-F28C-42E5-97B4-843256ADB6EB}" type="slidenum">
               <a:t>24</a:t>
             </a:fld>
           </a:p>
@@ -19586,8 +20075,8 @@
         </p:nvSpPr>
         <p:spPr>
           <a:xfrm>
-            <a:off x="0" y="1615680"/>
-            <a:ext cx="8995680" cy="1084320"/>
+            <a:off x="0" y="1615320"/>
+            <a:ext cx="8995320" cy="1084680"/>
           </a:xfrm>
           <a:prstGeom prst="rect">
             <a:avLst/>
@@ -19675,8 +20164,8 @@
         </p:nvSpPr>
         <p:spPr>
           <a:xfrm>
-            <a:off x="360000" y="163800"/>
-            <a:ext cx="9355680" cy="506520"/>
+            <a:off x="360000" y="163440"/>
+            <a:ext cx="9355320" cy="506880"/>
           </a:xfrm>
           <a:prstGeom prst="rect">
             <a:avLst/>
@@ -19735,7 +20224,7 @@
         <p:spPr>
           <a:xfrm>
             <a:off x="1653480" y="1407240"/>
-            <a:ext cx="6759720" cy="2844360"/>
+            <a:ext cx="6759360" cy="2844000"/>
           </a:xfrm>
           <a:prstGeom prst="rect">
             <a:avLst/>
@@ -19760,7 +20249,7 @@
         <p:txBody>
           <a:bodyPr/>
           <a:p>
-            <a:fld id="{2184514F-5D90-45D9-A268-318BB4CCE602}" type="slidenum">
+            <a:fld id="{F94334C6-40FD-4448-9398-FBA0E677058D}" type="slidenum">
               <a:t>26</a:t>
             </a:fld>
           </a:p>
@@ -19808,8 +20297,8 @@
         </p:nvSpPr>
         <p:spPr>
           <a:xfrm>
-            <a:off x="360000" y="163800"/>
-            <a:ext cx="9355680" cy="506520"/>
+            <a:off x="360000" y="163440"/>
+            <a:ext cx="9355320" cy="506880"/>
           </a:xfrm>
           <a:prstGeom prst="rect">
             <a:avLst/>
@@ -19868,7 +20357,7 @@
         <p:spPr>
           <a:xfrm>
             <a:off x="39600" y="1434600"/>
-            <a:ext cx="10077120" cy="4524840"/>
+            <a:ext cx="10076760" cy="4524480"/>
           </a:xfrm>
           <a:prstGeom prst="rect">
             <a:avLst/>
@@ -19893,7 +20382,7 @@
         <p:txBody>
           <a:bodyPr/>
           <a:p>
-            <a:fld id="{9BCA44EB-7F0D-4E91-BD5B-2B19BE3FFC65}" type="slidenum">
+            <a:fld id="{A4EE083B-D6D5-4357-9BB0-4A2E8C9D621C}" type="slidenum">
               <a:t>27</a:t>
             </a:fld>
           </a:p>
@@ -19941,8 +20430,8 @@
         </p:nvSpPr>
         <p:spPr>
           <a:xfrm>
-            <a:off x="360000" y="163800"/>
-            <a:ext cx="9355680" cy="506520"/>
+            <a:off x="360000" y="163440"/>
+            <a:ext cx="9355320" cy="506880"/>
           </a:xfrm>
           <a:prstGeom prst="rect">
             <a:avLst/>
@@ -20001,7 +20490,7 @@
         <p:spPr>
           <a:xfrm>
             <a:off x="39600" y="1571760"/>
-            <a:ext cx="10077120" cy="2552400"/>
+            <a:ext cx="10076760" cy="2552040"/>
           </a:xfrm>
           <a:prstGeom prst="rect">
             <a:avLst/>
@@ -20026,7 +20515,7 @@
         <p:txBody>
           <a:bodyPr/>
           <a:p>
-            <a:fld id="{B06F77AE-D42B-4A90-B48B-BE712F8D704B}" type="slidenum">
+            <a:fld id="{6125FC16-846B-42E0-8B00-4C31FA44132B}" type="slidenum">
               <a:t>28</a:t>
             </a:fld>
           </a:p>
@@ -20074,8 +20563,8 @@
         </p:nvSpPr>
         <p:spPr>
           <a:xfrm>
-            <a:off x="360000" y="163800"/>
-            <a:ext cx="9355680" cy="506520"/>
+            <a:off x="360000" y="163440"/>
+            <a:ext cx="9355320" cy="506880"/>
           </a:xfrm>
           <a:prstGeom prst="rect">
             <a:avLst/>
@@ -20134,7 +20623,7 @@
         <p:spPr>
           <a:xfrm>
             <a:off x="39600" y="1403640"/>
-            <a:ext cx="10077120" cy="3743280"/>
+            <a:ext cx="10076760" cy="3742920"/>
           </a:xfrm>
           <a:prstGeom prst="rect">
             <a:avLst/>
@@ -20159,7 +20648,7 @@
         <p:txBody>
           <a:bodyPr/>
           <a:p>
-            <a:fld id="{C5686D45-CE24-4FC3-A348-419E719274A7}" type="slidenum">
+            <a:fld id="{27FF79A4-59C4-435C-8236-7537B36E5B4D}" type="slidenum">
               <a:t>29</a:t>
             </a:fld>
           </a:p>
@@ -20207,8 +20696,8 @@
         </p:nvSpPr>
         <p:spPr>
           <a:xfrm>
-            <a:off x="360000" y="162720"/>
-            <a:ext cx="9354600" cy="507240"/>
+            <a:off x="360000" y="162360"/>
+            <a:ext cx="9354240" cy="507600"/>
           </a:xfrm>
           <a:prstGeom prst="rect">
             <a:avLst/>
@@ -20267,7 +20756,7 @@
         <p:spPr>
           <a:xfrm>
             <a:off x="2311920" y="995400"/>
-            <a:ext cx="5465520" cy="3693600"/>
+            <a:ext cx="5465160" cy="3693240"/>
           </a:xfrm>
           <a:prstGeom prst="rect">
             <a:avLst/>
@@ -20292,7 +20781,7 @@
         <p:txBody>
           <a:bodyPr/>
           <a:p>
-            <a:fld id="{4B6155F3-9123-4E01-BD37-89CCA087BA2D}" type="slidenum">
+            <a:fld id="{7CFE94F8-F004-4074-A97B-E5112C89377B}" type="slidenum">
               <a:t>3</a:t>
             </a:fld>
           </a:p>
@@ -20340,8 +20829,8 @@
         </p:nvSpPr>
         <p:spPr>
           <a:xfrm>
-            <a:off x="360000" y="163800"/>
-            <a:ext cx="9355680" cy="506520"/>
+            <a:off x="360000" y="163440"/>
+            <a:ext cx="9355320" cy="506880"/>
           </a:xfrm>
           <a:prstGeom prst="rect">
             <a:avLst/>
@@ -20396,7 +20885,7 @@
         <p:spPr>
           <a:xfrm>
             <a:off x="315720" y="878040"/>
-            <a:ext cx="9527400" cy="3885120"/>
+            <a:ext cx="9527040" cy="3884760"/>
           </a:xfrm>
           <a:prstGeom prst="rect">
             <a:avLst/>
@@ -20678,7 +21167,7 @@
         <p:txBody>
           <a:bodyPr/>
           <a:p>
-            <a:fld id="{74BB6049-D137-4F7E-AD66-7CD0B0D3BED0}" type="slidenum">
+            <a:fld id="{F15EF80B-7FA2-4BE3-9462-D4BF23C84A0C}" type="slidenum">
               <a:t>30</a:t>
             </a:fld>
           </a:p>
@@ -20726,8 +21215,8 @@
         </p:nvSpPr>
         <p:spPr>
           <a:xfrm>
-            <a:off x="360000" y="162720"/>
-            <a:ext cx="9354600" cy="507240"/>
+            <a:off x="360000" y="162360"/>
+            <a:ext cx="9354240" cy="507600"/>
           </a:xfrm>
           <a:prstGeom prst="rect">
             <a:avLst/>
@@ -20786,7 +21275,7 @@
         <p:spPr>
           <a:xfrm>
             <a:off x="360000" y="1080000"/>
-            <a:ext cx="9354600" cy="3594600"/>
+            <a:ext cx="9354240" cy="3594240"/>
           </a:xfrm>
           <a:prstGeom prst="rect">
             <a:avLst/>
@@ -20923,7 +21412,7 @@
         <p:txBody>
           <a:bodyPr/>
           <a:p>
-            <a:fld id="{203CF68D-5622-4A26-B512-785A169F91D5}" type="slidenum">
+            <a:fld id="{6E13A2EC-A713-49C2-9E67-10F67732F7A0}" type="slidenum">
               <a:t>4</a:t>
             </a:fld>
           </a:p>
@@ -20971,8 +21460,8 @@
         </p:nvSpPr>
         <p:spPr>
           <a:xfrm>
-            <a:off x="360000" y="162720"/>
-            <a:ext cx="9354600" cy="507240"/>
+            <a:off x="360000" y="162360"/>
+            <a:ext cx="9354240" cy="507600"/>
           </a:xfrm>
           <a:prstGeom prst="rect">
             <a:avLst/>
@@ -21031,7 +21520,7 @@
         <p:spPr>
           <a:xfrm>
             <a:off x="360000" y="1080000"/>
-            <a:ext cx="9354600" cy="3594600"/>
+            <a:ext cx="9354240" cy="3594240"/>
           </a:xfrm>
           <a:prstGeom prst="rect">
             <a:avLst/>
@@ -21203,7 +21692,7 @@
         <p:txBody>
           <a:bodyPr/>
           <a:p>
-            <a:fld id="{69E8C1CD-F5FE-48F8-8530-5CFFFC2925E1}" type="slidenum">
+            <a:fld id="{F29DD893-83EF-4F13-8BE9-7146038A9629}" type="slidenum">
               <a:t>5</a:t>
             </a:fld>
           </a:p>
@@ -21251,8 +21740,8 @@
         </p:nvSpPr>
         <p:spPr>
           <a:xfrm>
-            <a:off x="360000" y="162720"/>
-            <a:ext cx="9354600" cy="507240"/>
+            <a:off x="360000" y="162360"/>
+            <a:ext cx="9354240" cy="507600"/>
           </a:xfrm>
           <a:prstGeom prst="rect">
             <a:avLst/>
@@ -21311,7 +21800,7 @@
         <p:spPr>
           <a:xfrm>
             <a:off x="360000" y="1080000"/>
-            <a:ext cx="9354600" cy="3594600"/>
+            <a:ext cx="9354240" cy="3594240"/>
           </a:xfrm>
           <a:prstGeom prst="rect">
             <a:avLst/>
@@ -21586,7 +22075,7 @@
         <p:txBody>
           <a:bodyPr/>
           <a:p>
-            <a:fld id="{22602AF0-B2DC-456A-A34B-BE5BAE949EC7}" type="slidenum">
+            <a:fld id="{8C8A3475-D324-4817-9AB4-12C244AD857A}" type="slidenum">
               <a:t>6</a:t>
             </a:fld>
           </a:p>
@@ -21634,8 +22123,8 @@
         </p:nvSpPr>
         <p:spPr>
           <a:xfrm>
-            <a:off x="360000" y="162720"/>
-            <a:ext cx="9354600" cy="507240"/>
+            <a:off x="360000" y="162360"/>
+            <a:ext cx="9354240" cy="507600"/>
           </a:xfrm>
           <a:prstGeom prst="rect">
             <a:avLst/>
@@ -21694,7 +22183,7 @@
         <p:spPr>
           <a:xfrm>
             <a:off x="360000" y="1080000"/>
-            <a:ext cx="9354600" cy="3594600"/>
+            <a:ext cx="9354240" cy="3594240"/>
           </a:xfrm>
           <a:prstGeom prst="rect">
             <a:avLst/>
@@ -21934,7 +22423,7 @@
         <p:txBody>
           <a:bodyPr/>
           <a:p>
-            <a:fld id="{6748A8E0-B5C1-4DEE-9BE6-E1AF4361D9D3}" type="slidenum">
+            <a:fld id="{3A8E6BA0-7CF5-416C-87E2-F5ADA3EC1366}" type="slidenum">
               <a:t>7</a:t>
             </a:fld>
           </a:p>
@@ -21982,8 +22471,8 @@
         </p:nvSpPr>
         <p:spPr>
           <a:xfrm>
-            <a:off x="360000" y="162720"/>
-            <a:ext cx="9354600" cy="507240"/>
+            <a:off x="360000" y="162360"/>
+            <a:ext cx="9354240" cy="507600"/>
           </a:xfrm>
           <a:prstGeom prst="rect">
             <a:avLst/>
@@ -22042,7 +22531,7 @@
         <p:spPr>
           <a:xfrm>
             <a:off x="360000" y="1080000"/>
-            <a:ext cx="9354600" cy="3594600"/>
+            <a:ext cx="9354240" cy="3594240"/>
           </a:xfrm>
           <a:prstGeom prst="rect">
             <a:avLst/>
@@ -22256,7 +22745,7 @@
         <p:txBody>
           <a:bodyPr/>
           <a:p>
-            <a:fld id="{5679E938-8523-4F38-85EC-EA9F0C452303}" type="slidenum">
+            <a:fld id="{AE941DB7-846C-45C9-A73E-BDA973486803}" type="slidenum">
               <a:t>8</a:t>
             </a:fld>
           </a:p>
@@ -22304,8 +22793,8 @@
         </p:nvSpPr>
         <p:spPr>
           <a:xfrm>
-            <a:off x="360000" y="162720"/>
-            <a:ext cx="9354600" cy="507240"/>
+            <a:off x="360000" y="162360"/>
+            <a:ext cx="9354240" cy="507600"/>
           </a:xfrm>
           <a:prstGeom prst="rect">
             <a:avLst/>
@@ -22364,7 +22853,7 @@
         <p:spPr>
           <a:xfrm>
             <a:off x="360000" y="1080000"/>
-            <a:ext cx="9354600" cy="3594600"/>
+            <a:ext cx="9354240" cy="3594240"/>
           </a:xfrm>
           <a:prstGeom prst="rect">
             <a:avLst/>
@@ -22613,7 +23102,7 @@
         <p:txBody>
           <a:bodyPr/>
           <a:p>
-            <a:fld id="{FBBDBDCE-2827-4607-ADEA-B96708D7F50B}" type="slidenum">
+            <a:fld id="{F9F69592-1777-4CF9-B428-2205924B16D8}" type="slidenum">
               <a:t>9</a:t>
             </a:fld>
           </a:p>
